--- a/docs/content/one_way_anova/one_way_anova_lecture.pptx
+++ b/docs/content/one_way_anova/one_way_anova_lecture.pptx
@@ -6,6 +6,37 @@
   </p:sldMasterIdLst>
   <p:sldIdLst>
     <p:sldId id="256" r:id="rId2"/>
+    <p:sldId id="257" r:id="rId3"/>
+    <p:sldId id="258" r:id="rId4"/>
+    <p:sldId id="259" r:id="rId5"/>
+    <p:sldId id="260" r:id="rId6"/>
+    <p:sldId id="261" r:id="rId7"/>
+    <p:sldId id="262" r:id="rId8"/>
+    <p:sldId id="263" r:id="rId9"/>
+    <p:sldId id="264" r:id="rId10"/>
+    <p:sldId id="265" r:id="rId11"/>
+    <p:sldId id="266" r:id="rId12"/>
+    <p:sldId id="267" r:id="rId13"/>
+    <p:sldId id="268" r:id="rId14"/>
+    <p:sldId id="269" r:id="rId15"/>
+    <p:sldId id="270" r:id="rId16"/>
+    <p:sldId id="271" r:id="rId17"/>
+    <p:sldId id="272" r:id="rId18"/>
+    <p:sldId id="273" r:id="rId19"/>
+    <p:sldId id="274" r:id="rId20"/>
+    <p:sldId id="275" r:id="rId21"/>
+    <p:sldId id="276" r:id="rId22"/>
+    <p:sldId id="277" r:id="rId23"/>
+    <p:sldId id="278" r:id="rId24"/>
+    <p:sldId id="279" r:id="rId25"/>
+    <p:sldId id="280" r:id="rId26"/>
+    <p:sldId id="281" r:id="rId27"/>
+    <p:sldId id="282" r:id="rId28"/>
+    <p:sldId id="283" r:id="rId29"/>
+    <p:sldId id="284" r:id="rId30"/>
+    <p:sldId id="285" r:id="rId31"/>
+    <p:sldId id="286" r:id="rId32"/>
+    <p:sldId id="287" r:id="rId33"/>
   </p:sldIdLst>
   <p:sldSz cx="9144000" cy="5143500" type="screen16x9"/>
   <p:notesSz cx="6858000" cy="9144000"/>
@@ -3279,7 +3310,7 @@
             </a:pPr>
             <a:r>
               <a:rPr/>
-              <a:t>Lecture 11 - Single factor analysis of variance - ANOVA</a:t>
+              <a:t>Lecture 11 — One-Way ANOVA: Comparing Many Groups</a:t>
             </a:r>
           </a:p>
         </p:txBody>
@@ -3309,7 +3340,7891 @@
             </a:pPr>
             <a:r>
               <a:rPr/>
+              <a:t>Partitioning variance, checking assumptions, and post-hoc tests with emmeans</a:t>
+            </a:r>
+            <a:br/>
+            <a:br/>
+            <a:r>
+              <a:rPr/>
               <a:t>Bill Perry</a:t>
+            </a:r>
+          </a:p>
+        </p:txBody>
+      </p:sp>
+      <p:sp>
+        <p:nvSpPr>
+          <p:cNvPr id="4" name="Date Placeholder 3"/>
+          <p:cNvSpPr>
+            <a:spLocks noGrp="1"/>
+          </p:cNvSpPr>
+          <p:nvPr>
+            <p:ph idx="10" sz="half" type="dt"/>
+          </p:nvPr>
+        </p:nvSpPr>
+        <p:spPr/>
+        <p:txBody>
+          <a:bodyPr/>
+          <a:lstStyle/>
+          <a:p>
+            <a:pPr lvl="0" indent="0" marL="0">
+              <a:buNone/>
+            </a:pPr>
+            <a:r>
+              <a:rPr/>
+              <a:t>2026-07-05</a:t>
+            </a:r>
+          </a:p>
+        </p:txBody>
+      </p:sp>
+    </p:spTree>
+  </p:cSld>
+</p:sld>
+</file>
+
+<file path=ppt/slides/slide10.xml><?xml version="1.0" encoding="utf-8"?>
+<p:sld xmlns:a="http://schemas.openxmlformats.org/drawingml/2006/main" xmlns:r="http://schemas.openxmlformats.org/officeDocument/2006/relationships" xmlns:p="http://schemas.openxmlformats.org/presentationml/2006/main">
+  <p:cSld>
+    <p:spTree>
+      <p:nvGrpSpPr>
+        <p:cNvPr id="1" name=""/>
+        <p:cNvGrpSpPr/>
+        <p:nvPr/>
+      </p:nvGrpSpPr>
+      <p:grpSpPr>
+        <a:xfrm>
+          <a:off x="0" y="0"/>
+          <a:ext cx="0" cy="0"/>
+          <a:chOff x="0" y="0"/>
+          <a:chExt cx="0" cy="0"/>
+        </a:xfrm>
+      </p:grpSpPr>
+      <p:sp>
+        <p:nvSpPr>
+          <p:cNvPr id="2" name="Title 1"/>
+          <p:cNvSpPr>
+            <a:spLocks noGrp="1"/>
+          </p:cNvSpPr>
+          <p:nvPr>
+            <p:ph type="title"/>
+          </p:nvPr>
+        </p:nvSpPr>
+        <p:spPr>
+          <a:xfrm>
+            <a:off x="0" y="0"/>
+            <a:ext cx="9144000" cy="582780"/>
+          </a:xfrm>
+        </p:spPr>
+        <p:txBody>
+          <a:bodyPr/>
+          <a:lstStyle/>
+          <a:p>
+            <a:pPr lvl="0" indent="0" marL="0">
+              <a:buNone/>
+            </a:pPr>
+            <a:r>
+              <a:rPr/>
+              <a:t>Explore First — Boxplot by Species</a:t>
+            </a:r>
+          </a:p>
+        </p:txBody>
+      </p:sp>
+      <p:sp>
+        <p:nvSpPr>
+          <p:cNvPr id="3" name="Content Placeholder 2"/>
+          <p:cNvSpPr>
+            <a:spLocks noGrp="1"/>
+          </p:cNvSpPr>
+          <p:nvPr>
+            <p:ph idx="1"/>
+          </p:nvPr>
+        </p:nvSpPr>
+        <p:spPr/>
+        <p:txBody>
+          <a:bodyPr/>
+          <a:lstStyle/>
+          <a:p>
+            <a:pPr lvl="0" indent="0" marL="1270000">
+              <a:buNone/>
+            </a:pPr>
+            <a:r>
+              <a:rPr sz="2000" b="1"/>
+              <a:t>Note</a:t>
+            </a:r>
+          </a:p>
+          <a:p>
+            <a:pPr lvl="0" indent="0" marL="1270000">
+              <a:buNone/>
+            </a:pPr>
+            <a:r>
+              <a:rPr sz="2000" b="1"/>
+              <a:t>🔮 Predict first:</a:t>
+            </a:r>
+            <a:r>
+              <a:rPr sz="2000"/>
+              <a:t> Before the plot renders — do you expect all three species to differ, or just one? Which species do you think is heaviest?</a:t>
+            </a:r>
+          </a:p>
+        </p:txBody>
+      </p:sp>
+    </p:spTree>
+  </p:cSld>
+</p:sld>
+</file>
+
+<file path=ppt/slides/slide11.xml><?xml version="1.0" encoding="utf-8"?>
+<p:sld xmlns:a="http://schemas.openxmlformats.org/drawingml/2006/main" xmlns:r="http://schemas.openxmlformats.org/officeDocument/2006/relationships" xmlns:p="http://schemas.openxmlformats.org/presentationml/2006/main">
+  <p:cSld>
+    <p:spTree>
+      <p:nvGrpSpPr>
+        <p:cNvPr id="1" name=""/>
+        <p:cNvGrpSpPr/>
+        <p:nvPr/>
+      </p:nvGrpSpPr>
+      <p:grpSpPr>
+        <a:xfrm>
+          <a:off x="0" y="0"/>
+          <a:ext cx="0" cy="0"/>
+          <a:chOff x="0" y="0"/>
+          <a:chExt cx="0" cy="0"/>
+        </a:xfrm>
+      </p:grpSpPr>
+      <p:sp>
+        <p:nvSpPr>
+          <p:cNvPr id="3" name="Text Placeholder 2"/>
+          <p:cNvSpPr>
+            <a:spLocks noGrp="1"/>
+          </p:cNvSpPr>
+          <p:nvPr>
+            <p:ph idx="1" type="body"/>
+          </p:nvPr>
+        </p:nvSpPr>
+        <p:spPr/>
+        <p:txBody>
+          <a:bodyPr/>
+          <a:lstStyle/>
+          <a:p>
+            <a:pPr lvl="0" indent="0">
+              <a:buNone/>
+            </a:pPr>
+            <a:r>
+              <a:rPr>
+                <a:solidFill>
+                  <a:srgbClr val="003B4F"/>
+                </a:solidFill>
+                <a:latin typeface="Courier"/>
+              </a:rPr>
+              <a:t>mass_box_plot &lt;- penguins_df </a:t>
+            </a:r>
+            <a:r>
+              <a:rPr>
+                <a:solidFill>
+                  <a:srgbClr val="5E5E5E"/>
+                </a:solidFill>
+                <a:latin typeface="Courier"/>
+              </a:rPr>
+              <a:t>%&gt;%</a:t>
+            </a:r>
+            <a:br/>
+            <a:r>
+              <a:rPr>
+                <a:solidFill>
+                  <a:srgbClr val="003B4F"/>
+                </a:solidFill>
+                <a:latin typeface="Courier"/>
+              </a:rPr>
+              <a:t>  </a:t>
+            </a:r>
+            <a:r>
+              <a:rPr>
+                <a:solidFill>
+                  <a:srgbClr val="4758AB"/>
+                </a:solidFill>
+                <a:latin typeface="Courier"/>
+              </a:rPr>
+              <a:t>ggplot</a:t>
+            </a:r>
+            <a:r>
+              <a:rPr>
+                <a:solidFill>
+                  <a:srgbClr val="003B4F"/>
+                </a:solidFill>
+                <a:latin typeface="Courier"/>
+              </a:rPr>
+              <a:t>(</a:t>
+            </a:r>
+            <a:r>
+              <a:rPr>
+                <a:solidFill>
+                  <a:srgbClr val="4758AB"/>
+                </a:solidFill>
+                <a:latin typeface="Courier"/>
+              </a:rPr>
+              <a:t>aes</a:t>
+            </a:r>
+            <a:r>
+              <a:rPr>
+                <a:solidFill>
+                  <a:srgbClr val="003B4F"/>
+                </a:solidFill>
+                <a:latin typeface="Courier"/>
+              </a:rPr>
+              <a:t>(</a:t>
+            </a:r>
+            <a:r>
+              <a:rPr>
+                <a:solidFill>
+                  <a:srgbClr val="657422"/>
+                </a:solidFill>
+                <a:latin typeface="Courier"/>
+              </a:rPr>
+              <a:t>x =</a:t>
+            </a:r>
+            <a:r>
+              <a:rPr>
+                <a:solidFill>
+                  <a:srgbClr val="003B4F"/>
+                </a:solidFill>
+                <a:latin typeface="Courier"/>
+              </a:rPr>
+              <a:t> species, </a:t>
+            </a:r>
+            <a:r>
+              <a:rPr>
+                <a:solidFill>
+                  <a:srgbClr val="657422"/>
+                </a:solidFill>
+                <a:latin typeface="Courier"/>
+              </a:rPr>
+              <a:t>y =</a:t>
+            </a:r>
+            <a:r>
+              <a:rPr>
+                <a:solidFill>
+                  <a:srgbClr val="003B4F"/>
+                </a:solidFill>
+                <a:latin typeface="Courier"/>
+              </a:rPr>
+              <a:t> body_mass_g, </a:t>
+            </a:r>
+            <a:r>
+              <a:rPr>
+                <a:solidFill>
+                  <a:srgbClr val="657422"/>
+                </a:solidFill>
+                <a:latin typeface="Courier"/>
+              </a:rPr>
+              <a:t>fill =</a:t>
+            </a:r>
+            <a:r>
+              <a:rPr>
+                <a:solidFill>
+                  <a:srgbClr val="003B4F"/>
+                </a:solidFill>
+                <a:latin typeface="Courier"/>
+              </a:rPr>
+              <a:t> species)) </a:t>
+            </a:r>
+            <a:r>
+              <a:rPr>
+                <a:solidFill>
+                  <a:srgbClr val="5E5E5E"/>
+                </a:solidFill>
+                <a:latin typeface="Courier"/>
+              </a:rPr>
+              <a:t>+</a:t>
+            </a:r>
+            <a:br/>
+            <a:r>
+              <a:rPr>
+                <a:solidFill>
+                  <a:srgbClr val="003B4F"/>
+                </a:solidFill>
+                <a:latin typeface="Courier"/>
+              </a:rPr>
+              <a:t>  </a:t>
+            </a:r>
+            <a:r>
+              <a:rPr>
+                <a:solidFill>
+                  <a:srgbClr val="4758AB"/>
+                </a:solidFill>
+                <a:latin typeface="Courier"/>
+              </a:rPr>
+              <a:t>geom_boxplot</a:t>
+            </a:r>
+            <a:r>
+              <a:rPr>
+                <a:solidFill>
+                  <a:srgbClr val="003B4F"/>
+                </a:solidFill>
+                <a:latin typeface="Courier"/>
+              </a:rPr>
+              <a:t>(</a:t>
+            </a:r>
+            <a:r>
+              <a:rPr>
+                <a:solidFill>
+                  <a:srgbClr val="657422"/>
+                </a:solidFill>
+                <a:latin typeface="Courier"/>
+              </a:rPr>
+              <a:t>alpha =</a:t>
+            </a:r>
+            <a:r>
+              <a:rPr>
+                <a:solidFill>
+                  <a:srgbClr val="003B4F"/>
+                </a:solidFill>
+                <a:latin typeface="Courier"/>
+              </a:rPr>
+              <a:t> </a:t>
+            </a:r>
+            <a:r>
+              <a:rPr>
+                <a:solidFill>
+                  <a:srgbClr val="AD0000"/>
+                </a:solidFill>
+                <a:latin typeface="Courier"/>
+              </a:rPr>
+              <a:t>0.5</a:t>
+            </a:r>
+            <a:r>
+              <a:rPr>
+                <a:solidFill>
+                  <a:srgbClr val="003B4F"/>
+                </a:solidFill>
+                <a:latin typeface="Courier"/>
+              </a:rPr>
+              <a:t>, </a:t>
+            </a:r>
+            <a:r>
+              <a:rPr>
+                <a:solidFill>
+                  <a:srgbClr val="657422"/>
+                </a:solidFill>
+                <a:latin typeface="Courier"/>
+              </a:rPr>
+              <a:t>outlier.shape =</a:t>
+            </a:r>
+            <a:r>
+              <a:rPr>
+                <a:solidFill>
+                  <a:srgbClr val="003B4F"/>
+                </a:solidFill>
+                <a:latin typeface="Courier"/>
+              </a:rPr>
+              <a:t> </a:t>
+            </a:r>
+            <a:r>
+              <a:rPr>
+                <a:solidFill>
+                  <a:srgbClr val="8F5902"/>
+                </a:solidFill>
+                <a:latin typeface="Courier"/>
+              </a:rPr>
+              <a:t>NA</a:t>
+            </a:r>
+            <a:r>
+              <a:rPr>
+                <a:solidFill>
+                  <a:srgbClr val="003B4F"/>
+                </a:solidFill>
+                <a:latin typeface="Courier"/>
+              </a:rPr>
+              <a:t>) </a:t>
+            </a:r>
+            <a:r>
+              <a:rPr>
+                <a:solidFill>
+                  <a:srgbClr val="5E5E5E"/>
+                </a:solidFill>
+                <a:latin typeface="Courier"/>
+              </a:rPr>
+              <a:t>+</a:t>
+            </a:r>
+            <a:br/>
+            <a:r>
+              <a:rPr>
+                <a:solidFill>
+                  <a:srgbClr val="003B4F"/>
+                </a:solidFill>
+                <a:latin typeface="Courier"/>
+              </a:rPr>
+              <a:t>  </a:t>
+            </a:r>
+            <a:r>
+              <a:rPr>
+                <a:solidFill>
+                  <a:srgbClr val="4758AB"/>
+                </a:solidFill>
+                <a:latin typeface="Courier"/>
+              </a:rPr>
+              <a:t>geom_point</a:t>
+            </a:r>
+            <a:r>
+              <a:rPr>
+                <a:solidFill>
+                  <a:srgbClr val="003B4F"/>
+                </a:solidFill>
+                <a:latin typeface="Courier"/>
+              </a:rPr>
+              <a:t>(</a:t>
+            </a:r>
+            <a:br/>
+            <a:r>
+              <a:rPr>
+                <a:solidFill>
+                  <a:srgbClr val="003B4F"/>
+                </a:solidFill>
+                <a:latin typeface="Courier"/>
+              </a:rPr>
+              <a:t>    </a:t>
+            </a:r>
+            <a:r>
+              <a:rPr>
+                <a:solidFill>
+                  <a:srgbClr val="657422"/>
+                </a:solidFill>
+                <a:latin typeface="Courier"/>
+              </a:rPr>
+              <a:t>position =</a:t>
+            </a:r>
+            <a:r>
+              <a:rPr>
+                <a:solidFill>
+                  <a:srgbClr val="003B4F"/>
+                </a:solidFill>
+                <a:latin typeface="Courier"/>
+              </a:rPr>
+              <a:t> </a:t>
+            </a:r>
+            <a:r>
+              <a:rPr>
+                <a:solidFill>
+                  <a:srgbClr val="4758AB"/>
+                </a:solidFill>
+                <a:latin typeface="Courier"/>
+              </a:rPr>
+              <a:t>position_jitter</a:t>
+            </a:r>
+            <a:r>
+              <a:rPr>
+                <a:solidFill>
+                  <a:srgbClr val="003B4F"/>
+                </a:solidFill>
+                <a:latin typeface="Courier"/>
+              </a:rPr>
+              <a:t>(</a:t>
+            </a:r>
+            <a:r>
+              <a:rPr>
+                <a:solidFill>
+                  <a:srgbClr val="657422"/>
+                </a:solidFill>
+                <a:latin typeface="Courier"/>
+              </a:rPr>
+              <a:t>width =</a:t>
+            </a:r>
+            <a:r>
+              <a:rPr>
+                <a:solidFill>
+                  <a:srgbClr val="003B4F"/>
+                </a:solidFill>
+                <a:latin typeface="Courier"/>
+              </a:rPr>
+              <a:t> </a:t>
+            </a:r>
+            <a:r>
+              <a:rPr>
+                <a:solidFill>
+                  <a:srgbClr val="AD0000"/>
+                </a:solidFill>
+                <a:latin typeface="Courier"/>
+              </a:rPr>
+              <a:t>0.15</a:t>
+            </a:r>
+            <a:r>
+              <a:rPr>
+                <a:solidFill>
+                  <a:srgbClr val="003B4F"/>
+                </a:solidFill>
+                <a:latin typeface="Courier"/>
+              </a:rPr>
+              <a:t>, </a:t>
+            </a:r>
+            <a:r>
+              <a:rPr>
+                <a:solidFill>
+                  <a:srgbClr val="657422"/>
+                </a:solidFill>
+                <a:latin typeface="Courier"/>
+              </a:rPr>
+              <a:t>seed =</a:t>
+            </a:r>
+            <a:r>
+              <a:rPr>
+                <a:solidFill>
+                  <a:srgbClr val="003B4F"/>
+                </a:solidFill>
+                <a:latin typeface="Courier"/>
+              </a:rPr>
+              <a:t> </a:t>
+            </a:r>
+            <a:r>
+              <a:rPr>
+                <a:solidFill>
+                  <a:srgbClr val="AD0000"/>
+                </a:solidFill>
+                <a:latin typeface="Courier"/>
+              </a:rPr>
+              <a:t>42</a:t>
+            </a:r>
+            <a:r>
+              <a:rPr>
+                <a:solidFill>
+                  <a:srgbClr val="003B4F"/>
+                </a:solidFill>
+                <a:latin typeface="Courier"/>
+              </a:rPr>
+              <a:t>),</a:t>
+            </a:r>
+            <a:br/>
+            <a:r>
+              <a:rPr>
+                <a:solidFill>
+                  <a:srgbClr val="003B4F"/>
+                </a:solidFill>
+                <a:latin typeface="Courier"/>
+              </a:rPr>
+              <a:t>    </a:t>
+            </a:r>
+            <a:r>
+              <a:rPr>
+                <a:solidFill>
+                  <a:srgbClr val="657422"/>
+                </a:solidFill>
+                <a:latin typeface="Courier"/>
+              </a:rPr>
+              <a:t>alpha =</a:t>
+            </a:r>
+            <a:r>
+              <a:rPr>
+                <a:solidFill>
+                  <a:srgbClr val="003B4F"/>
+                </a:solidFill>
+                <a:latin typeface="Courier"/>
+              </a:rPr>
+              <a:t> </a:t>
+            </a:r>
+            <a:r>
+              <a:rPr>
+                <a:solidFill>
+                  <a:srgbClr val="AD0000"/>
+                </a:solidFill>
+                <a:latin typeface="Courier"/>
+              </a:rPr>
+              <a:t>0.3</a:t>
+            </a:r>
+            <a:r>
+              <a:rPr>
+                <a:solidFill>
+                  <a:srgbClr val="003B4F"/>
+                </a:solidFill>
+                <a:latin typeface="Courier"/>
+              </a:rPr>
+              <a:t>, </a:t>
+            </a:r>
+            <a:r>
+              <a:rPr>
+                <a:solidFill>
+                  <a:srgbClr val="657422"/>
+                </a:solidFill>
+                <a:latin typeface="Courier"/>
+              </a:rPr>
+              <a:t>size =</a:t>
+            </a:r>
+            <a:r>
+              <a:rPr>
+                <a:solidFill>
+                  <a:srgbClr val="003B4F"/>
+                </a:solidFill>
+                <a:latin typeface="Courier"/>
+              </a:rPr>
+              <a:t> </a:t>
+            </a:r>
+            <a:r>
+              <a:rPr>
+                <a:solidFill>
+                  <a:srgbClr val="AD0000"/>
+                </a:solidFill>
+                <a:latin typeface="Courier"/>
+              </a:rPr>
+              <a:t>1.5</a:t>
+            </a:r>
+            <a:br/>
+            <a:r>
+              <a:rPr>
+                <a:solidFill>
+                  <a:srgbClr val="003B4F"/>
+                </a:solidFill>
+                <a:latin typeface="Courier"/>
+              </a:rPr>
+              <a:t>  ) </a:t>
+            </a:r>
+            <a:r>
+              <a:rPr>
+                <a:solidFill>
+                  <a:srgbClr val="5E5E5E"/>
+                </a:solidFill>
+                <a:latin typeface="Courier"/>
+              </a:rPr>
+              <a:t>+</a:t>
+            </a:r>
+            <a:br/>
+            <a:r>
+              <a:rPr>
+                <a:solidFill>
+                  <a:srgbClr val="003B4F"/>
+                </a:solidFill>
+                <a:latin typeface="Courier"/>
+              </a:rPr>
+              <a:t>  </a:t>
+            </a:r>
+            <a:r>
+              <a:rPr>
+                <a:solidFill>
+                  <a:srgbClr val="4758AB"/>
+                </a:solidFill>
+                <a:latin typeface="Courier"/>
+              </a:rPr>
+              <a:t>labs</a:t>
+            </a:r>
+            <a:r>
+              <a:rPr>
+                <a:solidFill>
+                  <a:srgbClr val="003B4F"/>
+                </a:solidFill>
+                <a:latin typeface="Courier"/>
+              </a:rPr>
+              <a:t>(</a:t>
+            </a:r>
+            <a:r>
+              <a:rPr>
+                <a:solidFill>
+                  <a:srgbClr val="657422"/>
+                </a:solidFill>
+                <a:latin typeface="Courier"/>
+              </a:rPr>
+              <a:t>x =</a:t>
+            </a:r>
+            <a:r>
+              <a:rPr>
+                <a:solidFill>
+                  <a:srgbClr val="003B4F"/>
+                </a:solidFill>
+                <a:latin typeface="Courier"/>
+              </a:rPr>
+              <a:t> </a:t>
+            </a:r>
+            <a:r>
+              <a:rPr>
+                <a:solidFill>
+                  <a:srgbClr val="20794D"/>
+                </a:solidFill>
+                <a:latin typeface="Courier"/>
+              </a:rPr>
+              <a:t>"Species"</a:t>
+            </a:r>
+            <a:r>
+              <a:rPr>
+                <a:solidFill>
+                  <a:srgbClr val="003B4F"/>
+                </a:solidFill>
+                <a:latin typeface="Courier"/>
+              </a:rPr>
+              <a:t>, </a:t>
+            </a:r>
+            <a:r>
+              <a:rPr>
+                <a:solidFill>
+                  <a:srgbClr val="657422"/>
+                </a:solidFill>
+                <a:latin typeface="Courier"/>
+              </a:rPr>
+              <a:t>y =</a:t>
+            </a:r>
+            <a:r>
+              <a:rPr>
+                <a:solidFill>
+                  <a:srgbClr val="003B4F"/>
+                </a:solidFill>
+                <a:latin typeface="Courier"/>
+              </a:rPr>
+              <a:t> </a:t>
+            </a:r>
+            <a:r>
+              <a:rPr>
+                <a:solidFill>
+                  <a:srgbClr val="20794D"/>
+                </a:solidFill>
+                <a:latin typeface="Courier"/>
+              </a:rPr>
+              <a:t>"Body Mass (g)"</a:t>
+            </a:r>
+            <a:r>
+              <a:rPr>
+                <a:solidFill>
+                  <a:srgbClr val="003B4F"/>
+                </a:solidFill>
+                <a:latin typeface="Courier"/>
+              </a:rPr>
+              <a:t>) </a:t>
+            </a:r>
+            <a:r>
+              <a:rPr>
+                <a:solidFill>
+                  <a:srgbClr val="5E5E5E"/>
+                </a:solidFill>
+                <a:latin typeface="Courier"/>
+              </a:rPr>
+              <a:t>+</a:t>
+            </a:r>
+            <a:br/>
+            <a:r>
+              <a:rPr>
+                <a:solidFill>
+                  <a:srgbClr val="003B4F"/>
+                </a:solidFill>
+                <a:latin typeface="Courier"/>
+              </a:rPr>
+              <a:t>  </a:t>
+            </a:r>
+            <a:r>
+              <a:rPr>
+                <a:solidFill>
+                  <a:srgbClr val="4758AB"/>
+                </a:solidFill>
+                <a:latin typeface="Courier"/>
+              </a:rPr>
+              <a:t>theme_minimal</a:t>
+            </a:r>
+            <a:r>
+              <a:rPr>
+                <a:solidFill>
+                  <a:srgbClr val="003B4F"/>
+                </a:solidFill>
+                <a:latin typeface="Courier"/>
+              </a:rPr>
+              <a:t>() </a:t>
+            </a:r>
+            <a:r>
+              <a:rPr>
+                <a:solidFill>
+                  <a:srgbClr val="5E5E5E"/>
+                </a:solidFill>
+                <a:latin typeface="Courier"/>
+              </a:rPr>
+              <a:t>+</a:t>
+            </a:r>
+            <a:br/>
+            <a:r>
+              <a:rPr>
+                <a:solidFill>
+                  <a:srgbClr val="003B4F"/>
+                </a:solidFill>
+                <a:latin typeface="Courier"/>
+              </a:rPr>
+              <a:t>  </a:t>
+            </a:r>
+            <a:r>
+              <a:rPr>
+                <a:solidFill>
+                  <a:srgbClr val="4758AB"/>
+                </a:solidFill>
+                <a:latin typeface="Courier"/>
+              </a:rPr>
+              <a:t>theme</a:t>
+            </a:r>
+            <a:r>
+              <a:rPr>
+                <a:solidFill>
+                  <a:srgbClr val="003B4F"/>
+                </a:solidFill>
+                <a:latin typeface="Courier"/>
+              </a:rPr>
+              <a:t>(</a:t>
+            </a:r>
+            <a:r>
+              <a:rPr>
+                <a:solidFill>
+                  <a:srgbClr val="657422"/>
+                </a:solidFill>
+                <a:latin typeface="Courier"/>
+              </a:rPr>
+              <a:t>legend.position =</a:t>
+            </a:r>
+            <a:r>
+              <a:rPr>
+                <a:solidFill>
+                  <a:srgbClr val="003B4F"/>
+                </a:solidFill>
+                <a:latin typeface="Courier"/>
+              </a:rPr>
+              <a:t> </a:t>
+            </a:r>
+            <a:r>
+              <a:rPr>
+                <a:solidFill>
+                  <a:srgbClr val="20794D"/>
+                </a:solidFill>
+                <a:latin typeface="Courier"/>
+              </a:rPr>
+              <a:t>"none"</a:t>
+            </a:r>
+            <a:r>
+              <a:rPr>
+                <a:solidFill>
+                  <a:srgbClr val="003B4F"/>
+                </a:solidFill>
+                <a:latin typeface="Courier"/>
+              </a:rPr>
+              <a:t>)</a:t>
+            </a:r>
+            <a:br/>
+            <a:br/>
+            <a:r>
+              <a:rPr>
+                <a:solidFill>
+                  <a:srgbClr val="003B4F"/>
+                </a:solidFill>
+                <a:latin typeface="Courier"/>
+              </a:rPr>
+              <a:t>mass_box_plot</a:t>
+            </a:r>
+          </a:p>
+        </p:txBody>
+      </p:sp>
+      <p:pic>
+        <p:nvPicPr>
+          <p:cNvPr descr="one_way_anova_lecture_files/figure-pptx/boxplot-10-1.png" id="0" name="Picture 1"/>
+          <p:cNvPicPr>
+            <a:picLocks noGrp="1" noChangeAspect="1"/>
+          </p:cNvPicPr>
+          <p:nvPr/>
+        </p:nvPicPr>
+        <p:blipFill>
+          <a:blip r:embed="rId2"/>
+          <a:stretch>
+            <a:fillRect/>
+          </a:stretch>
+        </p:blipFill>
+        <p:spPr bwMode="auto">
+          <a:xfrm>
+            <a:off x="127000" y="1562100"/>
+            <a:ext cx="4432300" cy="2730500"/>
+          </a:xfrm>
+          <a:prstGeom prst="rect">
+            <a:avLst/>
+          </a:prstGeom>
+          <a:noFill/>
+          <a:ln w="9525">
+            <a:noFill/>
+            <a:headEnd/>
+            <a:tailEnd/>
+          </a:ln>
+        </p:spPr>
+      </p:pic>
+      <p:sp>
+        <p:nvSpPr>
+          <p:cNvPr id="5" name="Text Placeholder 4"/>
+          <p:cNvSpPr>
+            <a:spLocks noGrp="1"/>
+          </p:cNvSpPr>
+          <p:nvPr>
+            <p:ph idx="3" sz="quarter" type="body"/>
+          </p:nvPr>
+        </p:nvSpPr>
+        <p:spPr/>
+        <p:txBody>
+          <a:bodyPr/>
+          <a:lstStyle/>
+          <a:p>
+            <a:pPr lvl="0" indent="0" marL="0">
+              <a:buNone/>
+            </a:pPr>
+            <a:r>
+              <a:rPr b="1"/>
+              <a:t>Always plot before you test.</a:t>
+            </a:r>
+          </a:p>
+          <a:p>
+            <a:pPr lvl="0"/>
+            <a:r>
+              <a:rPr/>
+              <a:t>The picture usually tells the story before the </a:t>
+            </a:r>
+            <a:r>
+              <a:rPr i="1"/>
+              <a:t>p</a:t>
+            </a:r>
+            <a:r>
+              <a:rPr/>
+              <a:t>-value confirms it</a:t>
+            </a:r>
+          </a:p>
+          <a:p>
+            <a:pPr lvl="0"/>
+            <a:r>
+              <a:rPr/>
+              <a:t>Look for separation between boxes and roughly similar spread</a:t>
+            </a:r>
+          </a:p>
+          <a:p>
+            <a:pPr lvl="0" indent="0" marL="0">
+              <a:buNone/>
+            </a:pPr>
+            <a:r>
+              <a:rPr/>
+              <a:t>📖 R4DS §9 — Layers</a:t>
+            </a:r>
+          </a:p>
+        </p:txBody>
+      </p:sp>
+    </p:spTree>
+  </p:cSld>
+</p:sld>
+</file>
+
+<file path=ppt/slides/slide12.xml><?xml version="1.0" encoding="utf-8"?>
+<p:sld xmlns:a="http://schemas.openxmlformats.org/drawingml/2006/main" xmlns:r="http://schemas.openxmlformats.org/officeDocument/2006/relationships" xmlns:p="http://schemas.openxmlformats.org/presentationml/2006/main">
+  <p:cSld>
+    <p:spTree>
+      <p:nvGrpSpPr>
+        <p:cNvPr id="1" name=""/>
+        <p:cNvGrpSpPr/>
+        <p:nvPr/>
+      </p:nvGrpSpPr>
+      <p:grpSpPr>
+        <a:xfrm>
+          <a:off x="0" y="0"/>
+          <a:ext cx="0" cy="0"/>
+          <a:chOff x="0" y="0"/>
+          <a:chExt cx="0" cy="0"/>
+        </a:xfrm>
+      </p:grpSpPr>
+      <p:sp>
+        <p:nvSpPr>
+          <p:cNvPr id="2" name="Title 1"/>
+          <p:cNvSpPr>
+            <a:spLocks noGrp="1"/>
+          </p:cNvSpPr>
+          <p:nvPr>
+            <p:ph type="title"/>
+          </p:nvPr>
+        </p:nvSpPr>
+        <p:spPr>
+          <a:xfrm>
+            <a:off x="0" y="0"/>
+            <a:ext cx="9144000" cy="582780"/>
+          </a:xfrm>
+        </p:spPr>
+        <p:txBody>
+          <a:bodyPr/>
+          <a:lstStyle/>
+          <a:p>
+            <a:pPr lvl="0" indent="0" marL="0">
+              <a:buNone/>
+            </a:pPr>
+            <a:r>
+              <a:rPr/>
+              <a:t>🛑 Pause — Do Activity Parts 1–3 Now</a:t>
+            </a:r>
+          </a:p>
+        </p:txBody>
+      </p:sp>
+      <p:sp>
+        <p:nvSpPr>
+          <p:cNvPr id="3" name="Content Placeholder 2"/>
+          <p:cNvSpPr>
+            <a:spLocks noGrp="1"/>
+          </p:cNvSpPr>
+          <p:nvPr>
+            <p:ph idx="1"/>
+          </p:nvPr>
+        </p:nvSpPr>
+        <p:spPr/>
+        <p:txBody>
+          <a:bodyPr/>
+          <a:lstStyle/>
+          <a:p>
+            <a:pPr lvl="0" indent="0" marL="0">
+              <a:buNone/>
+            </a:pPr>
+            <a:r>
+              <a:rPr/>
+              <a:t>Load the penguins, plot body mass by species, and write your hypotheses. Predict which species differ before you run anything.</a:t>
+            </a:r>
+          </a:p>
+        </p:txBody>
+      </p:sp>
+    </p:spTree>
+  </p:cSld>
+</p:sld>
+</file>
+
+<file path=ppt/slides/slide13.xml><?xml version="1.0" encoding="utf-8"?>
+<p:sld xmlns:a="http://schemas.openxmlformats.org/drawingml/2006/main" xmlns:r="http://schemas.openxmlformats.org/officeDocument/2006/relationships" xmlns:p="http://schemas.openxmlformats.org/presentationml/2006/main">
+  <p:cSld>
+    <p:spTree>
+      <p:nvGrpSpPr>
+        <p:cNvPr id="1" name=""/>
+        <p:cNvGrpSpPr/>
+        <p:nvPr/>
+      </p:nvGrpSpPr>
+      <p:grpSpPr>
+        <a:xfrm>
+          <a:off x="0" y="0"/>
+          <a:ext cx="0" cy="0"/>
+          <a:chOff x="0" y="0"/>
+          <a:chExt cx="0" cy="0"/>
+        </a:xfrm>
+      </p:grpSpPr>
+      <p:sp>
+        <p:nvSpPr>
+          <p:cNvPr id="2" name="Title 1"/>
+          <p:cNvSpPr>
+            <a:spLocks noGrp="1"/>
+          </p:cNvSpPr>
+          <p:nvPr>
+            <p:ph type="title"/>
+          </p:nvPr>
+        </p:nvSpPr>
+        <p:spPr>
+          <a:xfrm>
+            <a:off x="0" y="0"/>
+            <a:ext cx="9144000" cy="582780"/>
+          </a:xfrm>
+        </p:spPr>
+        <p:txBody>
+          <a:bodyPr/>
+          <a:lstStyle/>
+          <a:p>
+            <a:pPr lvl="0" indent="0" marL="0">
+              <a:buNone/>
+            </a:pPr>
+            <a:r>
+              <a:rPr/>
+              <a:t>🧩 Chunk 2 of 4 · Fit the Model &amp; Check Assumptions</a:t>
+            </a:r>
+          </a:p>
+        </p:txBody>
+      </p:sp>
+      <p:sp>
+        <p:nvSpPr>
+          <p:cNvPr id="3" name="Content Placeholder 2"/>
+          <p:cNvSpPr>
+            <a:spLocks noGrp="1"/>
+          </p:cNvSpPr>
+          <p:nvPr>
+            <p:ph idx="1"/>
+          </p:nvPr>
+        </p:nvSpPr>
+        <p:spPr/>
+        <p:txBody>
+          <a:bodyPr/>
+          <a:lstStyle/>
+          <a:p>
+            <a:pPr lvl="0" indent="0" marL="0">
+              <a:buNone/>
+            </a:pPr>
+            <a:r>
+              <a:rPr b="1"/>
+              <a:t>We will cover:</a:t>
+            </a:r>
+            <a:r>
+              <a:rPr/>
+              <a:t> fitting the model, then checking normality of the residuals and equal variance across groups.</a:t>
+            </a:r>
+          </a:p>
+          <a:p>
+            <a:pPr lvl="0" indent="0" marL="1270000">
+              <a:buNone/>
+            </a:pPr>
+            <a:r>
+              <a:rPr sz="2000" b="1"/>
+              <a:t>Tip</a:t>
+            </a:r>
+          </a:p>
+          <a:p>
+            <a:pPr lvl="0" indent="0" marL="1270000">
+              <a:buNone/>
+            </a:pPr>
+            <a:r>
+              <a:rPr sz="2000" b="1"/>
+              <a:t>🖐 After this chunk: Activity Parts 4–6</a:t>
+            </a:r>
+            <a:r>
+              <a:rPr sz="2000"/>
+              <a:t> (fit, QQ + Shapiro on residuals, Levene’s test).</a:t>
+            </a:r>
+          </a:p>
+        </p:txBody>
+      </p:sp>
+    </p:spTree>
+  </p:cSld>
+</p:sld>
+</file>
+
+<file path=ppt/slides/slide14.xml><?xml version="1.0" encoding="utf-8"?>
+<p:sld xmlns:a="http://schemas.openxmlformats.org/drawingml/2006/main" xmlns:r="http://schemas.openxmlformats.org/officeDocument/2006/relationships" xmlns:p="http://schemas.openxmlformats.org/presentationml/2006/main">
+  <p:cSld>
+    <p:spTree>
+      <p:nvGrpSpPr>
+        <p:cNvPr id="1" name=""/>
+        <p:cNvGrpSpPr/>
+        <p:nvPr/>
+      </p:nvGrpSpPr>
+      <p:grpSpPr>
+        <a:xfrm>
+          <a:off x="0" y="0"/>
+          <a:ext cx="0" cy="0"/>
+          <a:chOff x="0" y="0"/>
+          <a:chExt cx="0" cy="0"/>
+        </a:xfrm>
+      </p:grpSpPr>
+      <p:sp>
+        <p:nvSpPr>
+          <p:cNvPr id="2" name="Title 1"/>
+          <p:cNvSpPr>
+            <a:spLocks noGrp="1"/>
+          </p:cNvSpPr>
+          <p:nvPr>
+            <p:ph type="title"/>
+          </p:nvPr>
+        </p:nvSpPr>
+        <p:spPr>
+          <a:xfrm>
+            <a:off x="0" y="0"/>
+            <a:ext cx="9144000" cy="602780"/>
+          </a:xfrm>
+          <a:solidFill>
+            <a:srgbClr val="1A1A2E"/>
+          </a:solidFill>
+        </p:spPr>
+        <p:txBody>
+          <a:bodyPr/>
+          <a:lstStyle/>
+          <a:p>
+            <a:pPr lvl="0" indent="0" marL="0">
+              <a:buNone/>
+            </a:pPr>
+            <a:r>
+              <a:rPr/>
+              <a:t>Fit the Model</a:t>
+            </a:r>
+          </a:p>
+        </p:txBody>
+      </p:sp>
+      <p:sp>
+        <p:nvSpPr>
+          <p:cNvPr id="3" name="Content Placeholder 2"/>
+          <p:cNvSpPr>
+            <a:spLocks noGrp="1"/>
+          </p:cNvSpPr>
+          <p:nvPr>
+            <p:ph idx="1" sz="half"/>
+          </p:nvPr>
+        </p:nvSpPr>
+        <p:spPr/>
+        <p:txBody>
+          <a:bodyPr/>
+          <a:lstStyle/>
+          <a:p>
+            <a:pPr lvl="0" indent="0">
+              <a:buNone/>
+            </a:pPr>
+            <a:r>
+              <a:rPr>
+                <a:solidFill>
+                  <a:srgbClr val="5E5E5E"/>
+                </a:solidFill>
+                <a:latin typeface="Courier"/>
+              </a:rPr>
+              <a:t># ANOVA is a linear model with a categorical X ---------</a:t>
+            </a:r>
+            <a:br/>
+            <a:r>
+              <a:rPr>
+                <a:solidFill>
+                  <a:srgbClr val="003B4F"/>
+                </a:solidFill>
+                <a:latin typeface="Courier"/>
+              </a:rPr>
+              <a:t>mass_model &lt;- </a:t>
+            </a:r>
+            <a:r>
+              <a:rPr>
+                <a:solidFill>
+                  <a:srgbClr val="4758AB"/>
+                </a:solidFill>
+                <a:latin typeface="Courier"/>
+              </a:rPr>
+              <a:t>lm</a:t>
+            </a:r>
+            <a:r>
+              <a:rPr>
+                <a:solidFill>
+                  <a:srgbClr val="003B4F"/>
+                </a:solidFill>
+                <a:latin typeface="Courier"/>
+              </a:rPr>
+              <a:t>(body_mass_g </a:t>
+            </a:r>
+            <a:r>
+              <a:rPr>
+                <a:solidFill>
+                  <a:srgbClr val="5E5E5E"/>
+                </a:solidFill>
+                <a:latin typeface="Courier"/>
+              </a:rPr>
+              <a:t>~</a:t>
+            </a:r>
+            <a:r>
+              <a:rPr>
+                <a:solidFill>
+                  <a:srgbClr val="003B4F"/>
+                </a:solidFill>
+                <a:latin typeface="Courier"/>
+              </a:rPr>
+              <a:t> species, </a:t>
+            </a:r>
+            <a:r>
+              <a:rPr>
+                <a:solidFill>
+                  <a:srgbClr val="657422"/>
+                </a:solidFill>
+                <a:latin typeface="Courier"/>
+              </a:rPr>
+              <a:t>data =</a:t>
+            </a:r>
+            <a:r>
+              <a:rPr>
+                <a:solidFill>
+                  <a:srgbClr val="003B4F"/>
+                </a:solidFill>
+                <a:latin typeface="Courier"/>
+              </a:rPr>
+              <a:t> penguins_df)</a:t>
+            </a:r>
+          </a:p>
+          <a:p>
+            <a:pPr lvl="0"/>
+            <a:r>
+              <a:rPr>
+                <a:latin typeface="Courier"/>
+              </a:rPr>
+              <a:t>lm(Y ~ X)</a:t>
+            </a:r>
+            <a:r>
+              <a:rPr/>
+              <a:t> — the </a:t>
+            </a:r>
+            <a:r>
+              <a:rPr i="1"/>
+              <a:t>same</a:t>
+            </a:r>
+            <a:r>
+              <a:rPr/>
+              <a:t> syntax as regression (Lecture 06)</a:t>
+            </a:r>
+          </a:p>
+          <a:p>
+            <a:pPr lvl="0"/>
+            <a:r>
+              <a:rPr/>
+              <a:t>When </a:t>
+            </a:r>
+            <a:r>
+              <a:rPr>
+                <a:latin typeface="Courier"/>
+              </a:rPr>
+              <a:t>X</a:t>
+            </a:r>
+            <a:r>
+              <a:rPr/>
+              <a:t> is </a:t>
+            </a:r>
+            <a:r>
+              <a:rPr b="1"/>
+              <a:t>categorical</a:t>
+            </a:r>
+            <a:r>
+              <a:rPr/>
+              <a:t>, that linear model </a:t>
+            </a:r>
+            <a:r>
+              <a:rPr i="1"/>
+              <a:t>is</a:t>
+            </a:r>
+            <a:r>
+              <a:rPr/>
+              <a:t> a one-way ANOVA</a:t>
+            </a:r>
+          </a:p>
+          <a:p>
+            <a:pPr lvl="0"/>
+            <a:r>
+              <a:rPr/>
+              <a:t>We check assumptions on this model </a:t>
+            </a:r>
+            <a:r>
+              <a:rPr b="1"/>
+              <a:t>before</a:t>
+            </a:r>
+            <a:r>
+              <a:rPr/>
+              <a:t> reading any </a:t>
+            </a:r>
+            <a:r>
+              <a:rPr i="1"/>
+              <a:t>p</a:t>
+            </a:r>
+            <a:r>
+              <a:rPr/>
+              <a:t>-value</a:t>
+            </a:r>
+          </a:p>
+        </p:txBody>
+      </p:sp>
+      <p:sp>
+        <p:nvSpPr>
+          <p:cNvPr id="4" name="Content Placeholder 3"/>
+          <p:cNvSpPr>
+            <a:spLocks noGrp="1"/>
+          </p:cNvSpPr>
+          <p:nvPr>
+            <p:ph idx="2" sz="half"/>
+          </p:nvPr>
+        </p:nvSpPr>
+        <p:spPr/>
+        <p:txBody>
+          <a:bodyPr/>
+          <a:lstStyle/>
+          <a:p>
+            <a:pPr lvl="0" indent="0" marL="1270000">
+              <a:buNone/>
+            </a:pPr>
+            <a:r>
+              <a:rPr sz="2000" b="1"/>
+              <a:t>Note</a:t>
+            </a:r>
+          </a:p>
+          <a:p>
+            <a:pPr lvl="0" indent="0" marL="1270000">
+              <a:buNone/>
+            </a:pPr>
+            <a:r>
+              <a:rPr sz="2000" b="1"/>
+              <a:t>✅ Key idea</a:t>
+            </a:r>
+          </a:p>
+          <a:p>
+            <a:pPr lvl="0" indent="0" marL="1270000">
+              <a:buNone/>
+            </a:pPr>
+            <a:r>
+              <a:rPr sz="2000"/>
+              <a:t>ANOVA and regression are the </a:t>
+            </a:r>
+            <a:r>
+              <a:rPr sz="2000" b="1"/>
+              <a:t>same machinery</a:t>
+            </a:r>
+            <a:r>
+              <a:rPr sz="2000"/>
+              <a:t> (</a:t>
+            </a:r>
+            <a:r>
+              <a:rPr sz="2000">
+                <a:latin typeface="Courier"/>
+              </a:rPr>
+              <a:t>lm</a:t>
+            </a:r>
+            <a:r>
+              <a:rPr sz="2000"/>
+              <a:t>). ANOVA just has a grouping variable instead of a numeric one.</a:t>
+            </a:r>
+          </a:p>
+          <a:p>
+            <a:pPr lvl="0" indent="0" marL="0">
+              <a:buNone/>
+            </a:pPr>
+            <a:r>
+              <a:rPr/>
+              <a:t>📖 W&amp;S §15.2</a:t>
+            </a:r>
+          </a:p>
+        </p:txBody>
+      </p:sp>
+    </p:spTree>
+  </p:cSld>
+</p:sld>
+</file>
+
+<file path=ppt/slides/slide15.xml><?xml version="1.0" encoding="utf-8"?>
+<p:sld xmlns:a="http://schemas.openxmlformats.org/drawingml/2006/main" xmlns:r="http://schemas.openxmlformats.org/officeDocument/2006/relationships" xmlns:p="http://schemas.openxmlformats.org/presentationml/2006/main">
+  <p:cSld>
+    <p:spTree>
+      <p:nvGrpSpPr>
+        <p:cNvPr id="1" name=""/>
+        <p:cNvGrpSpPr/>
+        <p:nvPr/>
+      </p:nvGrpSpPr>
+      <p:grpSpPr>
+        <a:xfrm>
+          <a:off x="0" y="0"/>
+          <a:ext cx="0" cy="0"/>
+          <a:chOff x="0" y="0"/>
+          <a:chExt cx="0" cy="0"/>
+        </a:xfrm>
+      </p:grpSpPr>
+      <p:sp>
+        <p:nvSpPr>
+          <p:cNvPr id="2" name="Title 1"/>
+          <p:cNvSpPr>
+            <a:spLocks noGrp="1"/>
+          </p:cNvSpPr>
+          <p:nvPr>
+            <p:ph type="title"/>
+          </p:nvPr>
+        </p:nvSpPr>
+        <p:spPr>
+          <a:xfrm>
+            <a:off x="139485" y="78119"/>
+            <a:ext cx="8229600" cy="607682"/>
+          </a:xfrm>
+        </p:spPr>
+        <p:txBody>
+          <a:bodyPr/>
+          <a:lstStyle/>
+          <a:p>
+            <a:pPr lvl="0" indent="0" marL="0">
+              <a:buNone/>
+            </a:pPr>
+            <a:r>
+              <a:rPr/>
+              <a:t>Assumption 1 — Normality of the Residuals</a:t>
+            </a:r>
+          </a:p>
+        </p:txBody>
+      </p:sp>
+      <p:sp>
+        <p:nvSpPr>
+          <p:cNvPr id="3" name="Text Placeholder 2"/>
+          <p:cNvSpPr>
+            <a:spLocks noGrp="1"/>
+          </p:cNvSpPr>
+          <p:nvPr>
+            <p:ph idx="1" type="body"/>
+          </p:nvPr>
+        </p:nvSpPr>
+        <p:spPr/>
+        <p:txBody>
+          <a:bodyPr/>
+          <a:lstStyle/>
+          <a:p>
+            <a:pPr lvl="0" indent="0">
+              <a:buNone/>
+            </a:pPr>
+            <a:r>
+              <a:rPr>
+                <a:solidFill>
+                  <a:srgbClr val="5E5E5E"/>
+                </a:solidFill>
+                <a:latin typeface="Courier"/>
+              </a:rPr>
+              <a:t># QQ plot of residuals — points should track the line -</a:t>
+            </a:r>
+            <a:br/>
+            <a:r>
+              <a:rPr>
+                <a:solidFill>
+                  <a:srgbClr val="003B4F"/>
+                </a:solidFill>
+                <a:latin typeface="Courier"/>
+              </a:rPr>
+              <a:t>qq_mass_plot &lt;- penguins_df </a:t>
+            </a:r>
+            <a:r>
+              <a:rPr>
+                <a:solidFill>
+                  <a:srgbClr val="5E5E5E"/>
+                </a:solidFill>
+                <a:latin typeface="Courier"/>
+              </a:rPr>
+              <a:t>%&gt;%</a:t>
+            </a:r>
+            <a:br/>
+            <a:r>
+              <a:rPr>
+                <a:solidFill>
+                  <a:srgbClr val="003B4F"/>
+                </a:solidFill>
+                <a:latin typeface="Courier"/>
+              </a:rPr>
+              <a:t>  </a:t>
+            </a:r>
+            <a:r>
+              <a:rPr>
+                <a:solidFill>
+                  <a:srgbClr val="4758AB"/>
+                </a:solidFill>
+                <a:latin typeface="Courier"/>
+              </a:rPr>
+              <a:t>mutate</a:t>
+            </a:r>
+            <a:r>
+              <a:rPr>
+                <a:solidFill>
+                  <a:srgbClr val="003B4F"/>
+                </a:solidFill>
+                <a:latin typeface="Courier"/>
+              </a:rPr>
+              <a:t>(</a:t>
+            </a:r>
+            <a:r>
+              <a:rPr>
+                <a:solidFill>
+                  <a:srgbClr val="657422"/>
+                </a:solidFill>
+                <a:latin typeface="Courier"/>
+              </a:rPr>
+              <a:t>resid =</a:t>
+            </a:r>
+            <a:r>
+              <a:rPr>
+                <a:solidFill>
+                  <a:srgbClr val="003B4F"/>
+                </a:solidFill>
+                <a:latin typeface="Courier"/>
+              </a:rPr>
+              <a:t> </a:t>
+            </a:r>
+            <a:r>
+              <a:rPr>
+                <a:solidFill>
+                  <a:srgbClr val="4758AB"/>
+                </a:solidFill>
+                <a:latin typeface="Courier"/>
+              </a:rPr>
+              <a:t>residuals</a:t>
+            </a:r>
+            <a:r>
+              <a:rPr>
+                <a:solidFill>
+                  <a:srgbClr val="003B4F"/>
+                </a:solidFill>
+                <a:latin typeface="Courier"/>
+              </a:rPr>
+              <a:t>(mass_model)) </a:t>
+            </a:r>
+            <a:r>
+              <a:rPr>
+                <a:solidFill>
+                  <a:srgbClr val="5E5E5E"/>
+                </a:solidFill>
+                <a:latin typeface="Courier"/>
+              </a:rPr>
+              <a:t>%&gt;%</a:t>
+            </a:r>
+            <a:br/>
+            <a:r>
+              <a:rPr>
+                <a:solidFill>
+                  <a:srgbClr val="003B4F"/>
+                </a:solidFill>
+                <a:latin typeface="Courier"/>
+              </a:rPr>
+              <a:t>  </a:t>
+            </a:r>
+            <a:r>
+              <a:rPr>
+                <a:solidFill>
+                  <a:srgbClr val="4758AB"/>
+                </a:solidFill>
+                <a:latin typeface="Courier"/>
+              </a:rPr>
+              <a:t>ggplot</a:t>
+            </a:r>
+            <a:r>
+              <a:rPr>
+                <a:solidFill>
+                  <a:srgbClr val="003B4F"/>
+                </a:solidFill>
+                <a:latin typeface="Courier"/>
+              </a:rPr>
+              <a:t>(</a:t>
+            </a:r>
+            <a:r>
+              <a:rPr>
+                <a:solidFill>
+                  <a:srgbClr val="4758AB"/>
+                </a:solidFill>
+                <a:latin typeface="Courier"/>
+              </a:rPr>
+              <a:t>aes</a:t>
+            </a:r>
+            <a:r>
+              <a:rPr>
+                <a:solidFill>
+                  <a:srgbClr val="003B4F"/>
+                </a:solidFill>
+                <a:latin typeface="Courier"/>
+              </a:rPr>
+              <a:t>(</a:t>
+            </a:r>
+            <a:r>
+              <a:rPr>
+                <a:solidFill>
+                  <a:srgbClr val="657422"/>
+                </a:solidFill>
+                <a:latin typeface="Courier"/>
+              </a:rPr>
+              <a:t>sample =</a:t>
+            </a:r>
+            <a:r>
+              <a:rPr>
+                <a:solidFill>
+                  <a:srgbClr val="003B4F"/>
+                </a:solidFill>
+                <a:latin typeface="Courier"/>
+              </a:rPr>
+              <a:t> resid)) </a:t>
+            </a:r>
+            <a:r>
+              <a:rPr>
+                <a:solidFill>
+                  <a:srgbClr val="5E5E5E"/>
+                </a:solidFill>
+                <a:latin typeface="Courier"/>
+              </a:rPr>
+              <a:t>+</a:t>
+            </a:r>
+            <a:br/>
+            <a:r>
+              <a:rPr>
+                <a:solidFill>
+                  <a:srgbClr val="003B4F"/>
+                </a:solidFill>
+                <a:latin typeface="Courier"/>
+              </a:rPr>
+              <a:t>  </a:t>
+            </a:r>
+            <a:r>
+              <a:rPr>
+                <a:solidFill>
+                  <a:srgbClr val="4758AB"/>
+                </a:solidFill>
+                <a:latin typeface="Courier"/>
+              </a:rPr>
+              <a:t>stat_qq</a:t>
+            </a:r>
+            <a:r>
+              <a:rPr>
+                <a:solidFill>
+                  <a:srgbClr val="003B4F"/>
+                </a:solidFill>
+                <a:latin typeface="Courier"/>
+              </a:rPr>
+              <a:t>() </a:t>
+            </a:r>
+            <a:r>
+              <a:rPr>
+                <a:solidFill>
+                  <a:srgbClr val="5E5E5E"/>
+                </a:solidFill>
+                <a:latin typeface="Courier"/>
+              </a:rPr>
+              <a:t>+</a:t>
+            </a:r>
+            <a:br/>
+            <a:r>
+              <a:rPr>
+                <a:solidFill>
+                  <a:srgbClr val="003B4F"/>
+                </a:solidFill>
+                <a:latin typeface="Courier"/>
+              </a:rPr>
+              <a:t>  </a:t>
+            </a:r>
+            <a:r>
+              <a:rPr>
+                <a:solidFill>
+                  <a:srgbClr val="4758AB"/>
+                </a:solidFill>
+                <a:latin typeface="Courier"/>
+              </a:rPr>
+              <a:t>stat_qq_line</a:t>
+            </a:r>
+            <a:r>
+              <a:rPr>
+                <a:solidFill>
+                  <a:srgbClr val="003B4F"/>
+                </a:solidFill>
+                <a:latin typeface="Courier"/>
+              </a:rPr>
+              <a:t>(</a:t>
+            </a:r>
+            <a:r>
+              <a:rPr>
+                <a:solidFill>
+                  <a:srgbClr val="657422"/>
+                </a:solidFill>
+                <a:latin typeface="Courier"/>
+              </a:rPr>
+              <a:t>color =</a:t>
+            </a:r>
+            <a:r>
+              <a:rPr>
+                <a:solidFill>
+                  <a:srgbClr val="003B4F"/>
+                </a:solidFill>
+                <a:latin typeface="Courier"/>
+              </a:rPr>
+              <a:t> </a:t>
+            </a:r>
+            <a:r>
+              <a:rPr>
+                <a:solidFill>
+                  <a:srgbClr val="20794D"/>
+                </a:solidFill>
+                <a:latin typeface="Courier"/>
+              </a:rPr>
+              <a:t>"red"</a:t>
+            </a:r>
+            <a:r>
+              <a:rPr>
+                <a:solidFill>
+                  <a:srgbClr val="003B4F"/>
+                </a:solidFill>
+                <a:latin typeface="Courier"/>
+              </a:rPr>
+              <a:t>, </a:t>
+            </a:r>
+            <a:r>
+              <a:rPr>
+                <a:solidFill>
+                  <a:srgbClr val="657422"/>
+                </a:solidFill>
+                <a:latin typeface="Courier"/>
+              </a:rPr>
+              <a:t>linewidth =</a:t>
+            </a:r>
+            <a:r>
+              <a:rPr>
+                <a:solidFill>
+                  <a:srgbClr val="003B4F"/>
+                </a:solidFill>
+                <a:latin typeface="Courier"/>
+              </a:rPr>
+              <a:t> </a:t>
+            </a:r>
+            <a:r>
+              <a:rPr>
+                <a:solidFill>
+                  <a:srgbClr val="AD0000"/>
+                </a:solidFill>
+                <a:latin typeface="Courier"/>
+              </a:rPr>
+              <a:t>0.8</a:t>
+            </a:r>
+            <a:r>
+              <a:rPr>
+                <a:solidFill>
+                  <a:srgbClr val="003B4F"/>
+                </a:solidFill>
+                <a:latin typeface="Courier"/>
+              </a:rPr>
+              <a:t>) </a:t>
+            </a:r>
+            <a:r>
+              <a:rPr>
+                <a:solidFill>
+                  <a:srgbClr val="5E5E5E"/>
+                </a:solidFill>
+                <a:latin typeface="Courier"/>
+              </a:rPr>
+              <a:t>+</a:t>
+            </a:r>
+            <a:br/>
+            <a:r>
+              <a:rPr>
+                <a:solidFill>
+                  <a:srgbClr val="003B4F"/>
+                </a:solidFill>
+                <a:latin typeface="Courier"/>
+              </a:rPr>
+              <a:t>  </a:t>
+            </a:r>
+            <a:r>
+              <a:rPr>
+                <a:solidFill>
+                  <a:srgbClr val="4758AB"/>
+                </a:solidFill>
+                <a:latin typeface="Courier"/>
+              </a:rPr>
+              <a:t>labs</a:t>
+            </a:r>
+            <a:r>
+              <a:rPr>
+                <a:solidFill>
+                  <a:srgbClr val="003B4F"/>
+                </a:solidFill>
+                <a:latin typeface="Courier"/>
+              </a:rPr>
+              <a:t>(</a:t>
+            </a:r>
+            <a:r>
+              <a:rPr>
+                <a:solidFill>
+                  <a:srgbClr val="657422"/>
+                </a:solidFill>
+                <a:latin typeface="Courier"/>
+              </a:rPr>
+              <a:t>x =</a:t>
+            </a:r>
+            <a:r>
+              <a:rPr>
+                <a:solidFill>
+                  <a:srgbClr val="003B4F"/>
+                </a:solidFill>
+                <a:latin typeface="Courier"/>
+              </a:rPr>
+              <a:t> </a:t>
+            </a:r>
+            <a:r>
+              <a:rPr>
+                <a:solidFill>
+                  <a:srgbClr val="20794D"/>
+                </a:solidFill>
+                <a:latin typeface="Courier"/>
+              </a:rPr>
+              <a:t>"Theoretical"</a:t>
+            </a:r>
+            <a:r>
+              <a:rPr>
+                <a:solidFill>
+                  <a:srgbClr val="003B4F"/>
+                </a:solidFill>
+                <a:latin typeface="Courier"/>
+              </a:rPr>
+              <a:t>, </a:t>
+            </a:r>
+            <a:r>
+              <a:rPr>
+                <a:solidFill>
+                  <a:srgbClr val="657422"/>
+                </a:solidFill>
+                <a:latin typeface="Courier"/>
+              </a:rPr>
+              <a:t>y =</a:t>
+            </a:r>
+            <a:r>
+              <a:rPr>
+                <a:solidFill>
+                  <a:srgbClr val="003B4F"/>
+                </a:solidFill>
+                <a:latin typeface="Courier"/>
+              </a:rPr>
+              <a:t> </a:t>
+            </a:r>
+            <a:r>
+              <a:rPr>
+                <a:solidFill>
+                  <a:srgbClr val="20794D"/>
+                </a:solidFill>
+                <a:latin typeface="Courier"/>
+              </a:rPr>
+              <a:t>"Sample residuals"</a:t>
+            </a:r>
+            <a:r>
+              <a:rPr>
+                <a:solidFill>
+                  <a:srgbClr val="003B4F"/>
+                </a:solidFill>
+                <a:latin typeface="Courier"/>
+              </a:rPr>
+              <a:t>) </a:t>
+            </a:r>
+            <a:r>
+              <a:rPr>
+                <a:solidFill>
+                  <a:srgbClr val="5E5E5E"/>
+                </a:solidFill>
+                <a:latin typeface="Courier"/>
+              </a:rPr>
+              <a:t>+</a:t>
+            </a:r>
+            <a:br/>
+            <a:r>
+              <a:rPr>
+                <a:solidFill>
+                  <a:srgbClr val="003B4F"/>
+                </a:solidFill>
+                <a:latin typeface="Courier"/>
+              </a:rPr>
+              <a:t>  </a:t>
+            </a:r>
+            <a:r>
+              <a:rPr>
+                <a:solidFill>
+                  <a:srgbClr val="4758AB"/>
+                </a:solidFill>
+                <a:latin typeface="Courier"/>
+              </a:rPr>
+              <a:t>theme_minimal</a:t>
+            </a:r>
+            <a:r>
+              <a:rPr>
+                <a:solidFill>
+                  <a:srgbClr val="003B4F"/>
+                </a:solidFill>
+                <a:latin typeface="Courier"/>
+              </a:rPr>
+              <a:t>()</a:t>
+            </a:r>
+            <a:br/>
+            <a:br/>
+            <a:r>
+              <a:rPr>
+                <a:solidFill>
+                  <a:srgbClr val="003B4F"/>
+                </a:solidFill>
+                <a:latin typeface="Courier"/>
+              </a:rPr>
+              <a:t>qq_mass_plot</a:t>
+            </a:r>
+          </a:p>
+        </p:txBody>
+      </p:sp>
+      <p:pic>
+        <p:nvPicPr>
+          <p:cNvPr descr="one_way_anova_lecture_files/figure-pptx/qq-10-1.png" id="0" name="Picture 1"/>
+          <p:cNvPicPr>
+            <a:picLocks noGrp="1" noChangeAspect="1"/>
+          </p:cNvPicPr>
+          <p:nvPr/>
+        </p:nvPicPr>
+        <p:blipFill>
+          <a:blip r:embed="rId2"/>
+          <a:stretch>
+            <a:fillRect/>
+          </a:stretch>
+        </p:blipFill>
+        <p:spPr bwMode="auto">
+          <a:xfrm>
+            <a:off x="127000" y="1562100"/>
+            <a:ext cx="4432300" cy="2730500"/>
+          </a:xfrm>
+          <a:prstGeom prst="rect">
+            <a:avLst/>
+          </a:prstGeom>
+          <a:noFill/>
+          <a:ln w="9525">
+            <a:noFill/>
+            <a:headEnd/>
+            <a:tailEnd/>
+          </a:ln>
+        </p:spPr>
+      </p:pic>
+      <p:sp>
+        <p:nvSpPr>
+          <p:cNvPr id="4" name="Content Placeholder 3"/>
+          <p:cNvSpPr>
+            <a:spLocks noGrp="1"/>
+          </p:cNvSpPr>
+          <p:nvPr>
+            <p:ph idx="2" sz="half"/>
+          </p:nvPr>
+        </p:nvSpPr>
+        <p:spPr/>
+        <p:txBody>
+          <a:bodyPr/>
+          <a:lstStyle/>
+          <a:p>
+            <a:pPr lvl="0" indent="0">
+              <a:buNone/>
+            </a:pPr>
+            <a:r>
+              <a:rPr>
+                <a:solidFill>
+                  <a:srgbClr val="4758AB"/>
+                </a:solidFill>
+                <a:latin typeface="Courier"/>
+              </a:rPr>
+              <a:t>shapiro.test</a:t>
+            </a:r>
+            <a:r>
+              <a:rPr>
+                <a:solidFill>
+                  <a:srgbClr val="003B4F"/>
+                </a:solidFill>
+                <a:latin typeface="Courier"/>
+              </a:rPr>
+              <a:t>(</a:t>
+            </a:r>
+            <a:r>
+              <a:rPr>
+                <a:solidFill>
+                  <a:srgbClr val="4758AB"/>
+                </a:solidFill>
+                <a:latin typeface="Courier"/>
+              </a:rPr>
+              <a:t>residuals</a:t>
+            </a:r>
+            <a:r>
+              <a:rPr>
+                <a:solidFill>
+                  <a:srgbClr val="003B4F"/>
+                </a:solidFill>
+                <a:latin typeface="Courier"/>
+              </a:rPr>
+              <a:t>(mass_model))</a:t>
+            </a:r>
+          </a:p>
+          <a:p>
+            <a:pPr lvl="0" indent="0">
+              <a:buNone/>
+            </a:pPr>
+            <a:r>
+              <a:rPr>
+                <a:latin typeface="Courier"/>
+              </a:rPr>
+              <a:t>
+    Shapiro-Wilk normality test
+data:  residuals(mass_model)
+W = 0.99166, p-value = 0.05118</a:t>
+            </a:r>
+          </a:p>
+        </p:txBody>
+      </p:sp>
+      <p:sp>
+        <p:nvSpPr>
+          <p:cNvPr id="5" name="Text Placeholder 4"/>
+          <p:cNvSpPr>
+            <a:spLocks noGrp="1"/>
+          </p:cNvSpPr>
+          <p:nvPr>
+            <p:ph idx="3" sz="quarter" type="body"/>
+          </p:nvPr>
+        </p:nvSpPr>
+        <p:spPr/>
+        <p:txBody>
+          <a:bodyPr/>
+          <a:lstStyle/>
+          <a:p>
+            <a:pPr lvl="0"/>
+            <a:r>
+              <a:rPr/>
+              <a:t>Check normality of the </a:t>
+            </a:r>
+            <a:r>
+              <a:rPr b="1"/>
+              <a:t>residuals</a:t>
+            </a:r>
+            <a:r>
+              <a:rPr/>
+              <a:t>, not the raw masses</a:t>
+            </a:r>
+          </a:p>
+          <a:p>
+            <a:pPr lvl="0"/>
+            <a:r>
+              <a:rPr/>
+              <a:t>The QQ plot is the main tool; Shapiro-Wilk is a formal check</a:t>
+            </a:r>
+          </a:p>
+          <a:p>
+            <a:pPr lvl="0" indent="0" marL="1270000">
+              <a:buNone/>
+            </a:pPr>
+            <a:r>
+              <a:rPr sz="2000" b="1"/>
+              <a:t>Important</a:t>
+            </a:r>
+          </a:p>
+          <a:p>
+            <a:pPr lvl="0" indent="0" marL="1270000">
+              <a:buNone/>
+            </a:pPr>
+            <a:r>
+              <a:rPr sz="2000" b="1"/>
+              <a:t>Large-sample caution:</a:t>
+            </a:r>
+            <a:r>
+              <a:rPr sz="2000"/>
+              <a:t> with ~340 birds, Shapiro-Wilk flags </a:t>
+            </a:r>
+            <a:r>
+              <a:rPr sz="2000" i="1"/>
+              <a:t>tiny</a:t>
+            </a:r>
+            <a:r>
+              <a:rPr sz="2000"/>
+              <a:t> departures as “significant.” Trust the </a:t>
+            </a:r>
+            <a:r>
+              <a:rPr sz="2000" b="1"/>
+              <a:t>QQ plot</a:t>
+            </a:r>
+            <a:r>
+              <a:rPr sz="2000"/>
+              <a:t> — if points track the line, you’re fine.</a:t>
+            </a:r>
+          </a:p>
+        </p:txBody>
+      </p:sp>
+    </p:spTree>
+  </p:cSld>
+</p:sld>
+</file>
+
+<file path=ppt/slides/slide16.xml><?xml version="1.0" encoding="utf-8"?>
+<p:sld xmlns:a="http://schemas.openxmlformats.org/drawingml/2006/main" xmlns:r="http://schemas.openxmlformats.org/officeDocument/2006/relationships" xmlns:p="http://schemas.openxmlformats.org/presentationml/2006/main">
+  <p:cSld>
+    <p:spTree>
+      <p:nvGrpSpPr>
+        <p:cNvPr id="1" name=""/>
+        <p:cNvGrpSpPr/>
+        <p:nvPr/>
+      </p:nvGrpSpPr>
+      <p:grpSpPr>
+        <a:xfrm>
+          <a:off x="0" y="0"/>
+          <a:ext cx="0" cy="0"/>
+          <a:chOff x="0" y="0"/>
+          <a:chExt cx="0" cy="0"/>
+        </a:xfrm>
+      </p:grpSpPr>
+      <p:sp>
+        <p:nvSpPr>
+          <p:cNvPr id="2" name="Title 1"/>
+          <p:cNvSpPr>
+            <a:spLocks noGrp="1"/>
+          </p:cNvSpPr>
+          <p:nvPr>
+            <p:ph type="title"/>
+          </p:nvPr>
+        </p:nvSpPr>
+        <p:spPr>
+          <a:xfrm>
+            <a:off x="0" y="0"/>
+            <a:ext cx="9144000" cy="582780"/>
+          </a:xfrm>
+        </p:spPr>
+        <p:txBody>
+          <a:bodyPr/>
+          <a:lstStyle/>
+          <a:p>
+            <a:pPr lvl="0" indent="0" marL="0">
+              <a:buNone/>
+            </a:pPr>
+            <a:r>
+              <a:rPr/>
+              <a:t>Assumption 2 — Equal Variance (Levene’s Test)</a:t>
+            </a:r>
+          </a:p>
+        </p:txBody>
+      </p:sp>
+      <p:sp>
+        <p:nvSpPr>
+          <p:cNvPr id="3" name="Content Placeholder 2"/>
+          <p:cNvSpPr>
+            <a:spLocks noGrp="1"/>
+          </p:cNvSpPr>
+          <p:nvPr>
+            <p:ph idx="1"/>
+          </p:nvPr>
+        </p:nvSpPr>
+        <p:spPr/>
+        <p:txBody>
+          <a:bodyPr/>
+          <a:lstStyle/>
+          <a:p>
+            <a:pPr lvl="0" indent="0" marL="1270000">
+              <a:buNone/>
+            </a:pPr>
+            <a:r>
+              <a:rPr sz="2000" b="1"/>
+              <a:t>Note</a:t>
+            </a:r>
+          </a:p>
+          <a:p>
+            <a:pPr lvl="0" indent="0" marL="1270000">
+              <a:buNone/>
+            </a:pPr>
+            <a:r>
+              <a:rPr sz="2000" b="1"/>
+              <a:t>🔮 Predict first:</a:t>
+            </a:r>
+            <a:r>
+              <a:rPr sz="2000"/>
+              <a:t> Look back at the boxplot spreads. Predict — will Levene’s test call the variances </a:t>
+            </a:r>
+            <a:r>
+              <a:rPr sz="2000" b="1"/>
+              <a:t>equal</a:t>
+            </a:r>
+            <a:r>
+              <a:rPr sz="2000"/>
+              <a:t> (</a:t>
+            </a:r>
+            <a:r>
+              <a:rPr sz="2000" i="1"/>
+              <a:t>p</a:t>
+            </a:r>
+            <a:r>
+              <a:rPr sz="2000"/>
+              <a:t> &gt; 0.05) or </a:t>
+            </a:r>
+            <a:r>
+              <a:rPr sz="2000" b="1"/>
+              <a:t>unequal</a:t>
+            </a:r>
+            <a:r>
+              <a:rPr sz="2000"/>
+              <a:t>?</a:t>
+            </a:r>
+          </a:p>
+        </p:txBody>
+      </p:sp>
+    </p:spTree>
+  </p:cSld>
+</p:sld>
+</file>
+
+<file path=ppt/slides/slide17.xml><?xml version="1.0" encoding="utf-8"?>
+<p:sld xmlns:a="http://schemas.openxmlformats.org/drawingml/2006/main" xmlns:r="http://schemas.openxmlformats.org/officeDocument/2006/relationships" xmlns:p="http://schemas.openxmlformats.org/presentationml/2006/main">
+  <p:cSld>
+    <p:spTree>
+      <p:nvGrpSpPr>
+        <p:cNvPr id="1" name=""/>
+        <p:cNvGrpSpPr/>
+        <p:nvPr/>
+      </p:nvGrpSpPr>
+      <p:grpSpPr>
+        <a:xfrm>
+          <a:off x="0" y="0"/>
+          <a:ext cx="0" cy="0"/>
+          <a:chOff x="0" y="0"/>
+          <a:chExt cx="0" cy="0"/>
+        </a:xfrm>
+      </p:grpSpPr>
+      <p:sp>
+        <p:nvSpPr>
+          <p:cNvPr id="3" name="Content Placeholder 2"/>
+          <p:cNvSpPr>
+            <a:spLocks noGrp="1"/>
+          </p:cNvSpPr>
+          <p:nvPr>
+            <p:ph idx="1" sz="half"/>
+          </p:nvPr>
+        </p:nvSpPr>
+        <p:spPr/>
+        <p:txBody>
+          <a:bodyPr/>
+          <a:lstStyle/>
+          <a:p>
+            <a:pPr lvl="0" indent="0">
+              <a:buNone/>
+            </a:pPr>
+            <a:r>
+              <a:rPr>
+                <a:solidFill>
+                  <a:srgbClr val="5E5E5E"/>
+                </a:solidFill>
+                <a:latin typeface="Courier"/>
+              </a:rPr>
+              <a:t># Levene's test — H0: all groups have equal variance --</a:t>
+            </a:r>
+            <a:br/>
+            <a:r>
+              <a:rPr>
+                <a:solidFill>
+                  <a:srgbClr val="4758AB"/>
+                </a:solidFill>
+                <a:latin typeface="Courier"/>
+              </a:rPr>
+              <a:t>leveneTest</a:t>
+            </a:r>
+            <a:r>
+              <a:rPr>
+                <a:solidFill>
+                  <a:srgbClr val="003B4F"/>
+                </a:solidFill>
+                <a:latin typeface="Courier"/>
+              </a:rPr>
+              <a:t>(body_mass_g </a:t>
+            </a:r>
+            <a:r>
+              <a:rPr>
+                <a:solidFill>
+                  <a:srgbClr val="5E5E5E"/>
+                </a:solidFill>
+                <a:latin typeface="Courier"/>
+              </a:rPr>
+              <a:t>~</a:t>
+            </a:r>
+            <a:r>
+              <a:rPr>
+                <a:solidFill>
+                  <a:srgbClr val="003B4F"/>
+                </a:solidFill>
+                <a:latin typeface="Courier"/>
+              </a:rPr>
+              <a:t> species, </a:t>
+            </a:r>
+            <a:r>
+              <a:rPr>
+                <a:solidFill>
+                  <a:srgbClr val="657422"/>
+                </a:solidFill>
+                <a:latin typeface="Courier"/>
+              </a:rPr>
+              <a:t>data =</a:t>
+            </a:r>
+            <a:r>
+              <a:rPr>
+                <a:solidFill>
+                  <a:srgbClr val="003B4F"/>
+                </a:solidFill>
+                <a:latin typeface="Courier"/>
+              </a:rPr>
+              <a:t> penguins_df)</a:t>
+            </a:r>
+          </a:p>
+          <a:p>
+            <a:pPr lvl="0" indent="0">
+              <a:buNone/>
+            </a:pPr>
+            <a:r>
+              <a:rPr>
+                <a:latin typeface="Courier"/>
+              </a:rPr>
+              <a:t>Levene's Test for Homogeneity of Variance (center = median)
+       Df F value   Pr(&gt;F)   
+group   2  5.1203 0.006445 **
+      339                    
+---
+Signif. codes:  0 '***' 0.001 '**' 0.01 '*' 0.05 '.' 0.1 ' ' 1</a:t>
+            </a:r>
+          </a:p>
+        </p:txBody>
+      </p:sp>
+      <p:sp>
+        <p:nvSpPr>
+          <p:cNvPr id="4" name="Content Placeholder 3"/>
+          <p:cNvSpPr>
+            <a:spLocks noGrp="1"/>
+          </p:cNvSpPr>
+          <p:nvPr>
+            <p:ph idx="2" sz="half"/>
+          </p:nvPr>
+        </p:nvSpPr>
+        <p:spPr/>
+        <p:txBody>
+          <a:bodyPr/>
+          <a:lstStyle/>
+          <a:p>
+            <a:pPr lvl="0"/>
+            <a:r>
+              <a:rPr i="1"/>
+              <a:t>p</a:t>
+            </a:r>
+            <a:r>
+              <a:rPr/>
+              <a:t> &gt; 0.05 → variances similar → classic ANOVA is fine</a:t>
+            </a:r>
+          </a:p>
+          <a:p>
+            <a:pPr lvl="0"/>
+            <a:r>
+              <a:rPr i="1"/>
+              <a:t>p</a:t>
+            </a:r>
+            <a:r>
+              <a:rPr/>
+              <a:t> &lt; 0.05 → variances differ → use </a:t>
+            </a:r>
+            <a:r>
+              <a:rPr b="1"/>
+              <a:t>Welch’s ANOVA</a:t>
+            </a:r>
+            <a:r>
+              <a:rPr/>
+              <a:t>:</a:t>
+            </a:r>
+          </a:p>
+          <a:p>
+            <a:pPr lvl="0" indent="0">
+              <a:buNone/>
+            </a:pPr>
+            <a:r>
+              <a:rPr>
+                <a:solidFill>
+                  <a:srgbClr val="4758AB"/>
+                </a:solidFill>
+                <a:latin typeface="Courier"/>
+              </a:rPr>
+              <a:t>oneway.test</a:t>
+            </a:r>
+            <a:r>
+              <a:rPr>
+                <a:solidFill>
+                  <a:srgbClr val="003B4F"/>
+                </a:solidFill>
+                <a:latin typeface="Courier"/>
+              </a:rPr>
+              <a:t>(body_mass_g </a:t>
+            </a:r>
+            <a:r>
+              <a:rPr>
+                <a:solidFill>
+                  <a:srgbClr val="5E5E5E"/>
+                </a:solidFill>
+                <a:latin typeface="Courier"/>
+              </a:rPr>
+              <a:t>~</a:t>
+            </a:r>
+            <a:r>
+              <a:rPr>
+                <a:solidFill>
+                  <a:srgbClr val="003B4F"/>
+                </a:solidFill>
+                <a:latin typeface="Courier"/>
+              </a:rPr>
+              <a:t> species,</a:t>
+            </a:r>
+            <a:br/>
+            <a:r>
+              <a:rPr>
+                <a:solidFill>
+                  <a:srgbClr val="003B4F"/>
+                </a:solidFill>
+                <a:latin typeface="Courier"/>
+              </a:rPr>
+              <a:t>            </a:t>
+            </a:r>
+            <a:r>
+              <a:rPr>
+                <a:solidFill>
+                  <a:srgbClr val="657422"/>
+                </a:solidFill>
+                <a:latin typeface="Courier"/>
+              </a:rPr>
+              <a:t>data =</a:t>
+            </a:r>
+            <a:r>
+              <a:rPr>
+                <a:solidFill>
+                  <a:srgbClr val="003B4F"/>
+                </a:solidFill>
+                <a:latin typeface="Courier"/>
+              </a:rPr>
+              <a:t> penguins_df,</a:t>
+            </a:r>
+            <a:br/>
+            <a:r>
+              <a:rPr>
+                <a:solidFill>
+                  <a:srgbClr val="003B4F"/>
+                </a:solidFill>
+                <a:latin typeface="Courier"/>
+              </a:rPr>
+              <a:t>            </a:t>
+            </a:r>
+            <a:r>
+              <a:rPr>
+                <a:solidFill>
+                  <a:srgbClr val="657422"/>
+                </a:solidFill>
+                <a:latin typeface="Courier"/>
+              </a:rPr>
+              <a:t>var.equal =</a:t>
+            </a:r>
+            <a:r>
+              <a:rPr>
+                <a:solidFill>
+                  <a:srgbClr val="003B4F"/>
+                </a:solidFill>
+                <a:latin typeface="Courier"/>
+              </a:rPr>
+              <a:t> </a:t>
+            </a:r>
+            <a:r>
+              <a:rPr>
+                <a:solidFill>
+                  <a:srgbClr val="8F5902"/>
+                </a:solidFill>
+                <a:latin typeface="Courier"/>
+              </a:rPr>
+              <a:t>FALSE</a:t>
+            </a:r>
+            <a:r>
+              <a:rPr>
+                <a:solidFill>
+                  <a:srgbClr val="003B4F"/>
+                </a:solidFill>
+                <a:latin typeface="Courier"/>
+              </a:rPr>
+              <a:t>)</a:t>
+            </a:r>
+          </a:p>
+          <a:p>
+            <a:pPr lvl="0" indent="0" marL="0">
+              <a:buNone/>
+            </a:pPr>
+            <a:r>
+              <a:rPr/>
+              <a:t>Same spirit as Welch’s </a:t>
+            </a:r>
+            <a:r>
+              <a:rPr b="1"/>
+              <a:t>t</a:t>
+            </a:r>
+            <a:r>
+              <a:rPr/>
+              <a:t>-test — robust when spreads differ.</a:t>
+            </a:r>
+          </a:p>
+        </p:txBody>
+      </p:sp>
+    </p:spTree>
+  </p:cSld>
+</p:sld>
+</file>
+
+<file path=ppt/slides/slide18.xml><?xml version="1.0" encoding="utf-8"?>
+<p:sld xmlns:a="http://schemas.openxmlformats.org/drawingml/2006/main" xmlns:r="http://schemas.openxmlformats.org/officeDocument/2006/relationships" xmlns:p="http://schemas.openxmlformats.org/presentationml/2006/main">
+  <p:cSld>
+    <p:spTree>
+      <p:nvGrpSpPr>
+        <p:cNvPr id="1" name=""/>
+        <p:cNvGrpSpPr/>
+        <p:nvPr/>
+      </p:nvGrpSpPr>
+      <p:grpSpPr>
+        <a:xfrm>
+          <a:off x="0" y="0"/>
+          <a:ext cx="0" cy="0"/>
+          <a:chOff x="0" y="0"/>
+          <a:chExt cx="0" cy="0"/>
+        </a:xfrm>
+      </p:grpSpPr>
+      <p:sp>
+        <p:nvSpPr>
+          <p:cNvPr id="2" name="Title 1"/>
+          <p:cNvSpPr>
+            <a:spLocks noGrp="1"/>
+          </p:cNvSpPr>
+          <p:nvPr>
+            <p:ph type="title"/>
+          </p:nvPr>
+        </p:nvSpPr>
+        <p:spPr>
+          <a:xfrm>
+            <a:off x="0" y="0"/>
+            <a:ext cx="9144000" cy="582780"/>
+          </a:xfrm>
+        </p:spPr>
+        <p:txBody>
+          <a:bodyPr/>
+          <a:lstStyle/>
+          <a:p>
+            <a:pPr lvl="0" indent="0" marL="0">
+              <a:buNone/>
+            </a:pPr>
+            <a:r>
+              <a:rPr/>
+              <a:t>🛑 Pause — Do Activity Parts 4–6 Now</a:t>
+            </a:r>
+          </a:p>
+        </p:txBody>
+      </p:sp>
+      <p:sp>
+        <p:nvSpPr>
+          <p:cNvPr id="3" name="Content Placeholder 2"/>
+          <p:cNvSpPr>
+            <a:spLocks noGrp="1"/>
+          </p:cNvSpPr>
+          <p:nvPr>
+            <p:ph idx="1"/>
+          </p:nvPr>
+        </p:nvSpPr>
+        <p:spPr/>
+        <p:txBody>
+          <a:bodyPr/>
+          <a:lstStyle/>
+          <a:p>
+            <a:pPr lvl="0" indent="0" marL="0">
+              <a:buNone/>
+            </a:pPr>
+            <a:r>
+              <a:rPr/>
+              <a:t>Fit </a:t>
+            </a:r>
+            <a:r>
+              <a:rPr>
+                <a:latin typeface="Courier"/>
+              </a:rPr>
+              <a:t>lm(body_mass_g ~ species)</a:t>
+            </a:r>
+            <a:r>
+              <a:rPr/>
+              <a:t>, check the residual QQ plot + Shapiro, and run Levene’s test. Predict each result before you run it.</a:t>
+            </a:r>
+          </a:p>
+        </p:txBody>
+      </p:sp>
+    </p:spTree>
+  </p:cSld>
+</p:sld>
+</file>
+
+<file path=ppt/slides/slide19.xml><?xml version="1.0" encoding="utf-8"?>
+<p:sld xmlns:a="http://schemas.openxmlformats.org/drawingml/2006/main" xmlns:r="http://schemas.openxmlformats.org/officeDocument/2006/relationships" xmlns:p="http://schemas.openxmlformats.org/presentationml/2006/main">
+  <p:cSld>
+    <p:spTree>
+      <p:nvGrpSpPr>
+        <p:cNvPr id="1" name=""/>
+        <p:cNvGrpSpPr/>
+        <p:nvPr/>
+      </p:nvGrpSpPr>
+      <p:grpSpPr>
+        <a:xfrm>
+          <a:off x="0" y="0"/>
+          <a:ext cx="0" cy="0"/>
+          <a:chOff x="0" y="0"/>
+          <a:chExt cx="0" cy="0"/>
+        </a:xfrm>
+      </p:grpSpPr>
+      <p:sp>
+        <p:nvSpPr>
+          <p:cNvPr id="2" name="Title 1"/>
+          <p:cNvSpPr>
+            <a:spLocks noGrp="1"/>
+          </p:cNvSpPr>
+          <p:nvPr>
+            <p:ph type="title"/>
+          </p:nvPr>
+        </p:nvSpPr>
+        <p:spPr>
+          <a:xfrm>
+            <a:off x="0" y="0"/>
+            <a:ext cx="9144000" cy="582780"/>
+          </a:xfrm>
+        </p:spPr>
+        <p:txBody>
+          <a:bodyPr/>
+          <a:lstStyle/>
+          <a:p>
+            <a:pPr lvl="0" indent="0" marL="0">
+              <a:buNone/>
+            </a:pPr>
+            <a:r>
+              <a:rPr/>
+              <a:t>🧩 Chunk 3 of 4 · Run the ANOVA &amp; Read the F Table</a:t>
+            </a:r>
+          </a:p>
+        </p:txBody>
+      </p:sp>
+      <p:sp>
+        <p:nvSpPr>
+          <p:cNvPr id="3" name="Content Placeholder 2"/>
+          <p:cNvSpPr>
+            <a:spLocks noGrp="1"/>
+          </p:cNvSpPr>
+          <p:nvPr>
+            <p:ph idx="1"/>
+          </p:nvPr>
+        </p:nvSpPr>
+        <p:spPr/>
+        <p:txBody>
+          <a:bodyPr/>
+          <a:lstStyle/>
+          <a:p>
+            <a:pPr lvl="0" indent="0" marL="0">
+              <a:buNone/>
+            </a:pPr>
+            <a:r>
+              <a:rPr b="1"/>
+              <a:t>We will cover:</a:t>
+            </a:r>
+            <a:r>
+              <a:rPr/>
+              <a:t> the ANOVA table two ways — base </a:t>
+            </a:r>
+            <a:r>
+              <a:rPr>
+                <a:latin typeface="Courier"/>
+              </a:rPr>
+              <a:t>aov()</a:t>
+            </a:r>
+            <a:r>
+              <a:rPr/>
+              <a:t> and </a:t>
+            </a:r>
+            <a:r>
+              <a:rPr>
+                <a:latin typeface="Courier"/>
+              </a:rPr>
+              <a:t>car::Anova()</a:t>
+            </a:r>
+            <a:r>
+              <a:rPr/>
+              <a:t> — and why the difference matters for unbalanced data.</a:t>
+            </a:r>
+          </a:p>
+          <a:p>
+            <a:pPr lvl="0" indent="0" marL="1270000">
+              <a:buNone/>
+            </a:pPr>
+            <a:r>
+              <a:rPr sz="2000" b="1"/>
+              <a:t>Tip</a:t>
+            </a:r>
+          </a:p>
+          <a:p>
+            <a:pPr lvl="0" indent="0" marL="1270000">
+              <a:buNone/>
+            </a:pPr>
+            <a:r>
+              <a:rPr sz="2000" b="1"/>
+              <a:t>🖐 After this chunk: Activity Parts 7–8</a:t>
+            </a:r>
+            <a:r>
+              <a:rPr sz="2000"/>
+              <a:t> (run both, read F / df / p).</a:t>
+            </a:r>
+          </a:p>
+        </p:txBody>
+      </p:sp>
+    </p:spTree>
+  </p:cSld>
+</p:sld>
+</file>
+
+<file path=ppt/slides/slide2.xml><?xml version="1.0" encoding="utf-8"?>
+<p:sld xmlns:a="http://schemas.openxmlformats.org/drawingml/2006/main" xmlns:r="http://schemas.openxmlformats.org/officeDocument/2006/relationships" xmlns:p="http://schemas.openxmlformats.org/presentationml/2006/main">
+  <p:cSld>
+    <p:spTree>
+      <p:nvGrpSpPr>
+        <p:cNvPr id="1" name=""/>
+        <p:cNvGrpSpPr/>
+        <p:nvPr/>
+      </p:nvGrpSpPr>
+      <p:grpSpPr>
+        <a:xfrm>
+          <a:off x="0" y="0"/>
+          <a:ext cx="0" cy="0"/>
+          <a:chOff x="0" y="0"/>
+          <a:chExt cx="0" cy="0"/>
+        </a:xfrm>
+      </p:grpSpPr>
+      <p:sp>
+        <p:nvSpPr>
+          <p:cNvPr id="2" name="Title 1"/>
+          <p:cNvSpPr>
+            <a:spLocks noGrp="1"/>
+          </p:cNvSpPr>
+          <p:nvPr>
+            <p:ph type="title"/>
+          </p:nvPr>
+        </p:nvSpPr>
+        <p:spPr>
+          <a:xfrm>
+            <a:off x="0" y="0"/>
+            <a:ext cx="9144000" cy="582780"/>
+          </a:xfrm>
+        </p:spPr>
+        <p:txBody>
+          <a:bodyPr/>
+          <a:lstStyle/>
+          <a:p>
+            <a:pPr lvl="0" indent="0" marL="0">
+              <a:buNone/>
+            </a:pPr>
+            <a:r>
+              <a:rPr/>
+              <a:t>Where we left off (Lecture 10)</a:t>
+            </a:r>
+          </a:p>
+        </p:txBody>
+      </p:sp>
+      <p:sp>
+        <p:nvSpPr>
+          <p:cNvPr id="3" name="Content Placeholder 2"/>
+          <p:cNvSpPr>
+            <a:spLocks noGrp="1"/>
+          </p:cNvSpPr>
+          <p:nvPr>
+            <p:ph idx="1"/>
+          </p:nvPr>
+        </p:nvSpPr>
+        <p:spPr/>
+        <p:txBody>
+          <a:bodyPr/>
+          <a:lstStyle/>
+          <a:p>
+            <a:pPr lvl="0"/>
+            <a:r>
+              <a:rPr b="1"/>
+              <a:t>Factors</a:t>
+            </a:r>
+            <a:r>
+              <a:rPr/>
+              <a:t> — categorical variables with an ordered set of levels</a:t>
+            </a:r>
+          </a:p>
+          <a:p>
+            <a:pPr lvl="0"/>
+            <a:r>
+              <a:rPr b="1">
+                <a:latin typeface="Courier"/>
+              </a:rPr>
+              <a:t>fct_reorder()</a:t>
+            </a:r>
+            <a:r>
+              <a:rPr b="1"/>
+              <a:t> / </a:t>
+            </a:r>
+            <a:r>
+              <a:rPr b="1">
+                <a:latin typeface="Courier"/>
+              </a:rPr>
+              <a:t>fct_relevel()</a:t>
+            </a:r>
+            <a:r>
+              <a:rPr/>
+              <a:t> — set the order and the reference group</a:t>
+            </a:r>
+          </a:p>
+          <a:p>
+            <a:pPr lvl="0"/>
+            <a:r>
+              <a:rPr/>
+              <a:t>Cleaner, better-ordered plots for grouped data</a:t>
+            </a:r>
+          </a:p>
+          <a:p>
+            <a:pPr lvl="0" indent="0" marL="1270000">
+              <a:buNone/>
+            </a:pPr>
+            <a:r>
+              <a:rPr sz="2000" b="1"/>
+              <a:t>Note</a:t>
+            </a:r>
+          </a:p>
+          <a:p>
+            <a:pPr lvl="0" indent="0" marL="1270000">
+              <a:buNone/>
+            </a:pPr>
+            <a:r>
+              <a:rPr sz="2000" b="1"/>
+              <a:t>✅ Transition</a:t>
+            </a:r>
+          </a:p>
+          <a:p>
+            <a:pPr lvl="0" indent="0" marL="1270000">
+              <a:buNone/>
+            </a:pPr>
+            <a:r>
+              <a:rPr sz="2000"/>
+              <a:t>The t-test (Lecture 04) compared </a:t>
+            </a:r>
+            <a:r>
+              <a:rPr sz="2000" b="1"/>
+              <a:t>two</a:t>
+            </a:r>
+            <a:r>
+              <a:rPr sz="2000"/>
+              <a:t> groups. But biology is full of </a:t>
+            </a:r>
+            <a:r>
+              <a:rPr sz="2000" b="1"/>
+              <a:t>three-or-more</a:t>
+            </a:r>
+            <a:r>
+              <a:rPr sz="2000"/>
+              <a:t> group questions — three species, four sites, five treatments. Now that you can control factor levels, today we learn the test for many groups: </a:t>
+            </a:r>
+            <a:r>
+              <a:rPr sz="2000" b="1"/>
+              <a:t>one-way ANOVA.</a:t>
+            </a:r>
+          </a:p>
+        </p:txBody>
+      </p:sp>
+    </p:spTree>
+  </p:cSld>
+</p:sld>
+</file>
+
+<file path=ppt/slides/slide20.xml><?xml version="1.0" encoding="utf-8"?>
+<p:sld xmlns:a="http://schemas.openxmlformats.org/drawingml/2006/main" xmlns:r="http://schemas.openxmlformats.org/officeDocument/2006/relationships" xmlns:p="http://schemas.openxmlformats.org/presentationml/2006/main">
+  <p:cSld>
+    <p:spTree>
+      <p:nvGrpSpPr>
+        <p:cNvPr id="1" name=""/>
+        <p:cNvGrpSpPr/>
+        <p:nvPr/>
+      </p:nvGrpSpPr>
+      <p:grpSpPr>
+        <a:xfrm>
+          <a:off x="0" y="0"/>
+          <a:ext cx="0" cy="0"/>
+          <a:chOff x="0" y="0"/>
+          <a:chExt cx="0" cy="0"/>
+        </a:xfrm>
+      </p:grpSpPr>
+      <p:sp>
+        <p:nvSpPr>
+          <p:cNvPr id="2" name="Title 1"/>
+          <p:cNvSpPr>
+            <a:spLocks noGrp="1"/>
+          </p:cNvSpPr>
+          <p:nvPr>
+            <p:ph type="title"/>
+          </p:nvPr>
+        </p:nvSpPr>
+        <p:spPr>
+          <a:xfrm>
+            <a:off x="0" y="0"/>
+            <a:ext cx="9144000" cy="582780"/>
+          </a:xfrm>
+        </p:spPr>
+        <p:txBody>
+          <a:bodyPr/>
+          <a:lstStyle/>
+          <a:p>
+            <a:pPr lvl="0" indent="0" marL="0">
+              <a:buNone/>
+            </a:pPr>
+            <a:r>
+              <a:rPr/>
+              <a:t>Run the ANOVA — </a:t>
+            </a:r>
+            <a:r>
+              <a:rPr>
+                <a:latin typeface="Courier"/>
+              </a:rPr>
+              <a:t>aov()</a:t>
+            </a:r>
+            <a:r>
+              <a:rPr/>
+              <a:t> and </a:t>
+            </a:r>
+            <a:r>
+              <a:rPr>
+                <a:latin typeface="Courier"/>
+              </a:rPr>
+              <a:t>summary()</a:t>
+            </a:r>
+          </a:p>
+        </p:txBody>
+      </p:sp>
+      <p:sp>
+        <p:nvSpPr>
+          <p:cNvPr id="3" name="Content Placeholder 2"/>
+          <p:cNvSpPr>
+            <a:spLocks noGrp="1"/>
+          </p:cNvSpPr>
+          <p:nvPr>
+            <p:ph idx="1"/>
+          </p:nvPr>
+        </p:nvSpPr>
+        <p:spPr/>
+        <p:txBody>
+          <a:bodyPr/>
+          <a:lstStyle/>
+          <a:p>
+            <a:pPr lvl="0" indent="0" marL="1270000">
+              <a:buNone/>
+            </a:pPr>
+            <a:r>
+              <a:rPr sz="2000" b="1"/>
+              <a:t>Note</a:t>
+            </a:r>
+          </a:p>
+          <a:p>
+            <a:pPr lvl="0" indent="0" marL="1270000">
+              <a:buNone/>
+            </a:pPr>
+            <a:r>
+              <a:rPr sz="2000" b="1"/>
+              <a:t>🔮 Predict first:</a:t>
+            </a:r>
+            <a:r>
+              <a:rPr sz="2000"/>
+              <a:t> The boxplot looked very separated. Predict the </a:t>
+            </a:r>
+            <a:r>
+              <a:rPr sz="2000" i="1"/>
+              <a:t>p</a:t>
+            </a:r>
+            <a:r>
+              <a:rPr sz="2000"/>
+              <a:t>-value — closer to 0.5, 0.05, or far below 0.001?</a:t>
+            </a:r>
+          </a:p>
+        </p:txBody>
+      </p:sp>
+    </p:spTree>
+  </p:cSld>
+</p:sld>
+</file>
+
+<file path=ppt/slides/slide21.xml><?xml version="1.0" encoding="utf-8"?>
+<p:sld xmlns:a="http://schemas.openxmlformats.org/drawingml/2006/main" xmlns:r="http://schemas.openxmlformats.org/officeDocument/2006/relationships" xmlns:p="http://schemas.openxmlformats.org/presentationml/2006/main">
+  <p:cSld>
+    <p:spTree>
+      <p:nvGrpSpPr>
+        <p:cNvPr id="1" name=""/>
+        <p:cNvGrpSpPr/>
+        <p:nvPr/>
+      </p:nvGrpSpPr>
+      <p:grpSpPr>
+        <a:xfrm>
+          <a:off x="0" y="0"/>
+          <a:ext cx="0" cy="0"/>
+          <a:chOff x="0" y="0"/>
+          <a:chExt cx="0" cy="0"/>
+        </a:xfrm>
+      </p:grpSpPr>
+      <p:sp>
+        <p:nvSpPr>
+          <p:cNvPr id="3" name="Text Placeholder 2"/>
+          <p:cNvSpPr>
+            <a:spLocks noGrp="1"/>
+          </p:cNvSpPr>
+          <p:nvPr>
+            <p:ph idx="1" type="body"/>
+          </p:nvPr>
+        </p:nvSpPr>
+        <p:spPr/>
+        <p:txBody>
+          <a:bodyPr/>
+          <a:lstStyle/>
+          <a:p>
+            <a:pPr lvl="0" indent="0">
+              <a:buNone/>
+            </a:pPr>
+            <a:r>
+              <a:rPr>
+                <a:solidFill>
+                  <a:srgbClr val="5E5E5E"/>
+                </a:solidFill>
+                <a:latin typeface="Courier"/>
+              </a:rPr>
+              <a:t># Classic ANOVA table (Type I sums of squares) --------</a:t>
+            </a:r>
+            <a:br/>
+            <a:r>
+              <a:rPr>
+                <a:solidFill>
+                  <a:srgbClr val="003B4F"/>
+                </a:solidFill>
+                <a:latin typeface="Courier"/>
+              </a:rPr>
+              <a:t>mass_aov &lt;- </a:t>
+            </a:r>
+            <a:r>
+              <a:rPr>
+                <a:solidFill>
+                  <a:srgbClr val="4758AB"/>
+                </a:solidFill>
+                <a:latin typeface="Courier"/>
+              </a:rPr>
+              <a:t>aov</a:t>
+            </a:r>
+            <a:r>
+              <a:rPr>
+                <a:solidFill>
+                  <a:srgbClr val="003B4F"/>
+                </a:solidFill>
+                <a:latin typeface="Courier"/>
+              </a:rPr>
+              <a:t>(body_mass_g </a:t>
+            </a:r>
+            <a:r>
+              <a:rPr>
+                <a:solidFill>
+                  <a:srgbClr val="5E5E5E"/>
+                </a:solidFill>
+                <a:latin typeface="Courier"/>
+              </a:rPr>
+              <a:t>~</a:t>
+            </a:r>
+            <a:r>
+              <a:rPr>
+                <a:solidFill>
+                  <a:srgbClr val="003B4F"/>
+                </a:solidFill>
+                <a:latin typeface="Courier"/>
+              </a:rPr>
+              <a:t> species, </a:t>
+            </a:r>
+            <a:r>
+              <a:rPr>
+                <a:solidFill>
+                  <a:srgbClr val="657422"/>
+                </a:solidFill>
+                <a:latin typeface="Courier"/>
+              </a:rPr>
+              <a:t>data =</a:t>
+            </a:r>
+            <a:r>
+              <a:rPr>
+                <a:solidFill>
+                  <a:srgbClr val="003B4F"/>
+                </a:solidFill>
+                <a:latin typeface="Courier"/>
+              </a:rPr>
+              <a:t> penguins_df)</a:t>
+            </a:r>
+            <a:br/>
+            <a:r>
+              <a:rPr>
+                <a:solidFill>
+                  <a:srgbClr val="4758AB"/>
+                </a:solidFill>
+                <a:latin typeface="Courier"/>
+              </a:rPr>
+              <a:t>summary</a:t>
+            </a:r>
+            <a:r>
+              <a:rPr>
+                <a:solidFill>
+                  <a:srgbClr val="003B4F"/>
+                </a:solidFill>
+                <a:latin typeface="Courier"/>
+              </a:rPr>
+              <a:t>(mass_aov)</a:t>
+            </a:r>
+          </a:p>
+          <a:p>
+            <a:pPr lvl="0" indent="0">
+              <a:buNone/>
+            </a:pPr>
+            <a:r>
+              <a:rPr>
+                <a:latin typeface="Courier"/>
+              </a:rPr>
+              <a:t>             Df    Sum Sq  Mean Sq F value Pr(&gt;F)    
+species       2 146864214 73432107   343.6 &lt;2e-16 ***
+Residuals   339  72443483   213698                   
+---
+Signif. codes:  0 '***' 0.001 '**' 0.01 '*' 0.05 '.' 0.1 ' ' 1</a:t>
+            </a:r>
+          </a:p>
+        </p:txBody>
+      </p:sp>
+      <p:sp>
+        <p:nvSpPr>
+          <p:cNvPr id="5" name="Text Placeholder 4"/>
+          <p:cNvSpPr>
+            <a:spLocks noGrp="1"/>
+          </p:cNvSpPr>
+          <p:nvPr>
+            <p:ph idx="3" sz="quarter" type="body"/>
+          </p:nvPr>
+        </p:nvSpPr>
+        <p:spPr/>
+        <p:txBody>
+          <a:bodyPr/>
+          <a:lstStyle/>
+          <a:p>
+            <a:pPr lvl="0" indent="0" marL="0">
+              <a:buNone/>
+            </a:pPr>
+            <a:r>
+              <a:rPr b="1"/>
+              <a:t>Reading the table:</a:t>
+            </a:r>
+          </a:p>
+        </p:txBody>
+      </p:sp>
+      <p:graphicFrame>
+        <p:nvGraphicFramePr>
+          <p:cNvPr id="6" name="Content Placeholder 5"/>
+          <p:cNvGraphicFramePr>
+            <a:graphicFrameLocks noGrp="1"/>
+          </p:cNvGraphicFramePr>
+          <p:nvPr>
+            <p:ph idx="1"/>
+          </p:nvPr>
+        </p:nvGraphicFramePr>
+        <p:xfrm>
+          <a:off x="4749800" y="1295400"/>
+          <a:ext cx="4038600" cy="3276600"/>
+        </p:xfrm>
+        <a:graphic>
+          <a:graphicData uri="http://schemas.openxmlformats.org/drawingml/2006/table">
+            <a:tbl>
+              <a:tblPr firstRow="1" bandRow="1">
+                <a:tableStyleId>{5C22544A-7EE6-4342-B048-85BDC9FD1C3A}</a:tableStyleId>
+              </a:tblPr>
+              <a:tblGrid>
+                <a:gridCol w="2019300"/>
+                <a:gridCol w="2019300"/>
+              </a:tblGrid>
+              <a:tr h="0">
+                <a:tc>
+                  <a:txBody>
+                    <a:bodyPr/>
+                    <a:lstStyle/>
+                    <a:p>
+                      <a:pPr lvl="0" indent="0" marL="0">
+                        <a:buNone/>
+                      </a:pPr>
+                      <a:r>
+                        <a:rPr/>
+                        <a:t>Column</a:t>
+                      </a:r>
+                    </a:p>
+                  </a:txBody>
+                  <a:tcPr/>
+                </a:tc>
+                <a:tc>
+                  <a:txBody>
+                    <a:bodyPr/>
+                    <a:lstStyle/>
+                    <a:p>
+                      <a:pPr lvl="0" indent="0" marL="0">
+                        <a:buNone/>
+                      </a:pPr>
+                      <a:r>
+                        <a:rPr/>
+                        <a:t>Meaning</a:t>
+                      </a:r>
+                    </a:p>
+                  </a:txBody>
+                  <a:tcPr/>
+                </a:tc>
+              </a:tr>
+              <a:tr h="0">
+                <a:tc>
+                  <a:txBody>
+                    <a:bodyPr/>
+                    <a:lstStyle/>
+                    <a:p>
+                      <a:pPr lvl="0" indent="0" marL="0">
+                        <a:buNone/>
+                      </a:pPr>
+                      <a:r>
+                        <a:rPr>
+                          <a:latin typeface="Courier"/>
+                        </a:rPr>
+                        <a:t>Df</a:t>
+                      </a:r>
+                    </a:p>
+                  </a:txBody>
+                </a:tc>
+                <a:tc>
+                  <a:txBody>
+                    <a:bodyPr/>
+                    <a:lstStyle/>
+                    <a:p>
+                      <a:pPr lvl="0" indent="0" marL="0">
+                        <a:buNone/>
+                      </a:pPr>
+                      <a:r>
+                        <a:rPr/>
+                        <a:t>groups − 1, and residual df</a:t>
+                      </a:r>
+                    </a:p>
+                  </a:txBody>
+                </a:tc>
+              </a:tr>
+              <a:tr h="0">
+                <a:tc>
+                  <a:txBody>
+                    <a:bodyPr/>
+                    <a:lstStyle/>
+                    <a:p>
+                      <a:pPr lvl="0" indent="0" marL="0">
+                        <a:buNone/>
+                      </a:pPr>
+                      <a:r>
+                        <a:rPr>
+                          <a:latin typeface="Courier"/>
+                        </a:rPr>
+                        <a:t>F value</a:t>
+                      </a:r>
+                    </a:p>
+                  </a:txBody>
+                </a:tc>
+                <a:tc>
+                  <a:txBody>
+                    <a:bodyPr/>
+                    <a:lstStyle/>
+                    <a:p>
+                      <a:pPr lvl="0" indent="0" marL="0">
+                        <a:buNone/>
+                      </a:pPr>
+                      <a:r>
+                        <a:rPr/>
+                        <a:t>between ÷ within variance</a:t>
+                      </a:r>
+                    </a:p>
+                  </a:txBody>
+                </a:tc>
+              </a:tr>
+              <a:tr h="0">
+                <a:tc>
+                  <a:txBody>
+                    <a:bodyPr/>
+                    <a:lstStyle/>
+                    <a:p>
+                      <a:pPr lvl="0" indent="0" marL="0">
+                        <a:buNone/>
+                      </a:pPr>
+                      <a:r>
+                        <a:rPr>
+                          <a:latin typeface="Courier"/>
+                        </a:rPr>
+                        <a:t>Pr(&gt;F)</a:t>
+                      </a:r>
+                    </a:p>
+                  </a:txBody>
+                </a:tc>
+                <a:tc>
+                  <a:txBody>
+                    <a:bodyPr/>
+                    <a:lstStyle/>
+                    <a:p>
+                      <a:pPr lvl="0" indent="0" marL="0">
+                        <a:buNone/>
+                      </a:pPr>
+                      <a:r>
+                        <a:rPr/>
+                        <a:t>the </a:t>
+                      </a:r>
+                      <a:r>
+                        <a:rPr i="1"/>
+                        <a:t>p</a:t>
+                      </a:r>
+                      <a:r>
+                        <a:rPr/>
+                        <a:t>-value for H₀</a:t>
+                      </a:r>
+                    </a:p>
+                  </a:txBody>
+                </a:tc>
+              </a:tr>
+            </a:tbl>
+          </a:graphicData>
+        </a:graphic>
+      </p:graphicFrame>
+      <p:sp>
+        <p:nvSpPr>
+          <p:cNvPr id="6" name="Content Placeholder 5"/>
+          <p:cNvSpPr>
+            <a:spLocks noGrp="1"/>
+          </p:cNvSpPr>
+          <p:nvPr>
+            <p:ph idx="4" sz="quarter"/>
+          </p:nvPr>
+        </p:nvSpPr>
+        <p:spPr/>
+        <p:txBody>
+          <a:bodyPr/>
+          <a:lstStyle/>
+          <a:p>
+            <a:pPr lvl="0" indent="0" marL="0">
+              <a:buNone/>
+            </a:pPr>
+            <a:r>
+              <a:rPr i="1"/>
+              <a:t>p</a:t>
+            </a:r>
+            <a:r>
+              <a:rPr/>
+              <a:t> &lt; 0.05 → </a:t>
+            </a:r>
+            <a:r>
+              <a:rPr b="1"/>
+              <a:t>reject H₀</a:t>
+            </a:r>
+            <a:r>
+              <a:rPr/>
+              <a:t> → at least one species differs. But </a:t>
+            </a:r>
+            <a:r>
+              <a:rPr b="1"/>
+              <a:t>which</a:t>
+            </a:r>
+            <a:r>
+              <a:rPr/>
+              <a:t>? Chunk 4.</a:t>
+            </a:r>
+          </a:p>
+        </p:txBody>
+      </p:sp>
+    </p:spTree>
+  </p:cSld>
+</p:sld>
+</file>
+
+<file path=ppt/slides/slide22.xml><?xml version="1.0" encoding="utf-8"?>
+<p:sld xmlns:a="http://schemas.openxmlformats.org/drawingml/2006/main" xmlns:r="http://schemas.openxmlformats.org/officeDocument/2006/relationships" xmlns:p="http://schemas.openxmlformats.org/presentationml/2006/main">
+  <p:cSld>
+    <p:spTree>
+      <p:nvGrpSpPr>
+        <p:cNvPr id="1" name=""/>
+        <p:cNvGrpSpPr/>
+        <p:nvPr/>
+      </p:nvGrpSpPr>
+      <p:grpSpPr>
+        <a:xfrm>
+          <a:off x="0" y="0"/>
+          <a:ext cx="0" cy="0"/>
+          <a:chOff x="0" y="0"/>
+          <a:chExt cx="0" cy="0"/>
+        </a:xfrm>
+      </p:grpSpPr>
+      <p:sp>
+        <p:nvSpPr>
+          <p:cNvPr id="2" name="Title 1"/>
+          <p:cNvSpPr>
+            <a:spLocks noGrp="1"/>
+          </p:cNvSpPr>
+          <p:nvPr>
+            <p:ph type="title"/>
+          </p:nvPr>
+        </p:nvSpPr>
+        <p:spPr>
+          <a:xfrm>
+            <a:off x="0" y="0"/>
+            <a:ext cx="9144000" cy="602780"/>
+          </a:xfrm>
+          <a:solidFill>
+            <a:srgbClr val="1A1A2E"/>
+          </a:solidFill>
+        </p:spPr>
+        <p:txBody>
+          <a:bodyPr/>
+          <a:lstStyle/>
+          <a:p>
+            <a:pPr lvl="0" indent="0" marL="0">
+              <a:buNone/>
+            </a:pPr>
+            <a:r>
+              <a:rPr/>
+              <a:t>Live Demo — Watch It Break (on purpose)</a:t>
+            </a:r>
+          </a:p>
+        </p:txBody>
+      </p:sp>
+      <p:sp>
+        <p:nvSpPr>
+          <p:cNvPr id="3" name="Content Placeholder 2"/>
+          <p:cNvSpPr>
+            <a:spLocks noGrp="1"/>
+          </p:cNvSpPr>
+          <p:nvPr>
+            <p:ph idx="1" sz="half"/>
+          </p:nvPr>
+        </p:nvSpPr>
+        <p:spPr/>
+        <p:txBody>
+          <a:bodyPr/>
+          <a:lstStyle/>
+          <a:p>
+            <a:pPr lvl="0" indent="0" marL="0">
+              <a:buNone/>
+            </a:pPr>
+            <a:r>
+              <a:rPr/>
+              <a:t>For </a:t>
+            </a:r>
+            <a:r>
+              <a:rPr b="1"/>
+              <a:t>unbalanced</a:t>
+            </a:r>
+            <a:r>
+              <a:rPr/>
+              <a:t> data we prefer </a:t>
+            </a:r>
+            <a:r>
+              <a:rPr>
+                <a:latin typeface="Courier"/>
+              </a:rPr>
+              <a:t>car::Anova()</a:t>
+            </a:r>
+            <a:r>
+              <a:rPr/>
+              <a:t>. I’ll reach for it but type lowercase, and forget the package:</a:t>
+            </a:r>
+          </a:p>
+          <a:p>
+            <a:pPr lvl="0" indent="0">
+              <a:buNone/>
+            </a:pPr>
+            <a:r>
+              <a:rPr>
+                <a:solidFill>
+                  <a:srgbClr val="4758AB"/>
+                </a:solidFill>
+                <a:latin typeface="Courier"/>
+              </a:rPr>
+              <a:t>anova</a:t>
+            </a:r>
+            <a:r>
+              <a:rPr>
+                <a:solidFill>
+                  <a:srgbClr val="003B4F"/>
+                </a:solidFill>
+                <a:latin typeface="Courier"/>
+              </a:rPr>
+              <a:t>(mass_model)        </a:t>
+            </a:r>
+            <a:r>
+              <a:rPr>
+                <a:solidFill>
+                  <a:srgbClr val="5E5E5E"/>
+                </a:solidFill>
+                <a:latin typeface="Courier"/>
+              </a:rPr>
+              <a:t># base R — Type I, one model at a time</a:t>
+            </a:r>
+            <a:br/>
+            <a:r>
+              <a:rPr>
+                <a:solidFill>
+                  <a:srgbClr val="4758AB"/>
+                </a:solidFill>
+                <a:latin typeface="Courier"/>
+              </a:rPr>
+              <a:t>Anova</a:t>
+            </a:r>
+            <a:r>
+              <a:rPr>
+                <a:solidFill>
+                  <a:srgbClr val="003B4F"/>
+                </a:solidFill>
+                <a:latin typeface="Courier"/>
+              </a:rPr>
+              <a:t>(mass_model)        </a:t>
+            </a:r>
+            <a:r>
+              <a:rPr>
+                <a:solidFill>
+                  <a:srgbClr val="5E5E5E"/>
+                </a:solidFill>
+                <a:latin typeface="Courier"/>
+              </a:rPr>
+              <a:t># capital A — but car isn't loaded!</a:t>
+            </a:r>
+          </a:p>
+          <a:p>
+            <a:pPr lvl="0" indent="0" marL="0">
+              <a:buNone/>
+            </a:pPr>
+            <a:r>
+              <a:rPr/>
+              <a:t>R stops:</a:t>
+            </a:r>
+          </a:p>
+          <a:p>
+            <a:pPr lvl="0" indent="0">
+              <a:buNone/>
+            </a:pPr>
+            <a:r>
+              <a:rPr>
+                <a:latin typeface="Courier"/>
+              </a:rPr>
+              <a:t>Error in Anova(mass_model) :
+  could not find function "Anova"</a:t>
+            </a:r>
+          </a:p>
+          <a:p>
+            <a:pPr lvl="0" indent="0" marL="0">
+              <a:buNone/>
+            </a:pPr>
+            <a:r>
+              <a:rPr/>
+              <a:t>The fix — load </a:t>
+            </a:r>
+            <a:r>
+              <a:rPr>
+                <a:latin typeface="Courier"/>
+              </a:rPr>
+              <a:t>car</a:t>
+            </a:r>
+            <a:r>
+              <a:rPr/>
+              <a:t>, and mind the capital </a:t>
+            </a:r>
+            <a:r>
+              <a:rPr b="1"/>
+              <a:t>A</a:t>
+            </a:r>
+            <a:r>
+              <a:rPr/>
+              <a:t>:</a:t>
+            </a:r>
+          </a:p>
+          <a:p>
+            <a:pPr lvl="0" indent="0">
+              <a:buNone/>
+            </a:pPr>
+            <a:r>
+              <a:rPr>
+                <a:solidFill>
+                  <a:srgbClr val="4758AB"/>
+                </a:solidFill>
+                <a:latin typeface="Courier"/>
+              </a:rPr>
+              <a:t>library</a:t>
+            </a:r>
+            <a:r>
+              <a:rPr>
+                <a:solidFill>
+                  <a:srgbClr val="003B4F"/>
+                </a:solidFill>
+                <a:latin typeface="Courier"/>
+              </a:rPr>
+              <a:t>(car)</a:t>
+            </a:r>
+            <a:br/>
+            <a:r>
+              <a:rPr>
+                <a:solidFill>
+                  <a:srgbClr val="4758AB"/>
+                </a:solidFill>
+                <a:latin typeface="Courier"/>
+              </a:rPr>
+              <a:t>Anova</a:t>
+            </a:r>
+            <a:r>
+              <a:rPr>
+                <a:solidFill>
+                  <a:srgbClr val="003B4F"/>
+                </a:solidFill>
+                <a:latin typeface="Courier"/>
+              </a:rPr>
+              <a:t>(mass_model, </a:t>
+            </a:r>
+            <a:r>
+              <a:rPr>
+                <a:solidFill>
+                  <a:srgbClr val="657422"/>
+                </a:solidFill>
+                <a:latin typeface="Courier"/>
+              </a:rPr>
+              <a:t>type =</a:t>
+            </a:r>
+            <a:r>
+              <a:rPr>
+                <a:solidFill>
+                  <a:srgbClr val="003B4F"/>
+                </a:solidFill>
+                <a:latin typeface="Courier"/>
+              </a:rPr>
+              <a:t> </a:t>
+            </a:r>
+            <a:r>
+              <a:rPr>
+                <a:solidFill>
+                  <a:srgbClr val="20794D"/>
+                </a:solidFill>
+                <a:latin typeface="Courier"/>
+              </a:rPr>
+              <a:t>"II"</a:t>
+            </a:r>
+            <a:r>
+              <a:rPr>
+                <a:solidFill>
+                  <a:srgbClr val="003B4F"/>
+                </a:solidFill>
+                <a:latin typeface="Courier"/>
+              </a:rPr>
+              <a:t>)</a:t>
+            </a:r>
+          </a:p>
+        </p:txBody>
+      </p:sp>
+      <p:sp>
+        <p:nvSpPr>
+          <p:cNvPr id="4" name="Content Placeholder 3"/>
+          <p:cNvSpPr>
+            <a:spLocks noGrp="1"/>
+          </p:cNvSpPr>
+          <p:nvPr>
+            <p:ph idx="2" sz="half"/>
+          </p:nvPr>
+        </p:nvSpPr>
+        <p:spPr/>
+        <p:txBody>
+          <a:bodyPr/>
+          <a:lstStyle/>
+          <a:p>
+            <a:pPr lvl="0" indent="0" marL="1270000">
+              <a:buNone/>
+            </a:pPr>
+            <a:r>
+              <a:rPr sz="2000" b="1"/>
+              <a:t>Tip</a:t>
+            </a:r>
+          </a:p>
+          <a:p>
+            <a:pPr lvl="0" indent="0" marL="1270000">
+              <a:buNone/>
+            </a:pPr>
+            <a:r>
+              <a:rPr sz="2000" b="1"/>
+              <a:t>✅ Why show a broken run?</a:t>
+            </a:r>
+          </a:p>
+          <a:p>
+            <a:pPr lvl="0" indent="0" marL="1270000">
+              <a:buNone/>
+            </a:pPr>
+            <a:r>
+              <a:rPr sz="2000">
+                <a:latin typeface="Courier"/>
+              </a:rPr>
+              <a:t>anova()</a:t>
+            </a:r>
+            <a:r>
+              <a:rPr sz="2000"/>
+              <a:t> (base) and </a:t>
+            </a:r>
+            <a:r>
+              <a:rPr sz="2000">
+                <a:latin typeface="Courier"/>
+              </a:rPr>
+              <a:t>Anova()</a:t>
+            </a:r>
+            <a:r>
+              <a:rPr sz="2000"/>
+              <a:t> (car) are </a:t>
+            </a:r>
+            <a:r>
+              <a:rPr sz="2000" b="1"/>
+              <a:t>different functions</a:t>
+            </a:r>
+            <a:r>
+              <a:rPr sz="2000"/>
+              <a:t> — lowercase compares models with Type I sums of squares; capital-A gives the Type II/III table you want. “could not find function” almost always means a missing </a:t>
+            </a:r>
+            <a:r>
+              <a:rPr sz="2000">
+                <a:latin typeface="Courier"/>
+              </a:rPr>
+              <a:t>library()</a:t>
+            </a:r>
+            <a:r>
+              <a:rPr sz="2000"/>
+              <a:t>.</a:t>
+            </a:r>
+          </a:p>
+        </p:txBody>
+      </p:sp>
+    </p:spTree>
+  </p:cSld>
+</p:sld>
+</file>
+
+<file path=ppt/slides/slide23.xml><?xml version="1.0" encoding="utf-8"?>
+<p:sld xmlns:a="http://schemas.openxmlformats.org/drawingml/2006/main" xmlns:r="http://schemas.openxmlformats.org/officeDocument/2006/relationships" xmlns:p="http://schemas.openxmlformats.org/presentationml/2006/main">
+  <p:cSld>
+    <p:spTree>
+      <p:nvGrpSpPr>
+        <p:cNvPr id="1" name=""/>
+        <p:cNvGrpSpPr/>
+        <p:nvPr/>
+      </p:nvGrpSpPr>
+      <p:grpSpPr>
+        <a:xfrm>
+          <a:off x="0" y="0"/>
+          <a:ext cx="0" cy="0"/>
+          <a:chOff x="0" y="0"/>
+          <a:chExt cx="0" cy="0"/>
+        </a:xfrm>
+      </p:grpSpPr>
+      <p:sp>
+        <p:nvSpPr>
+          <p:cNvPr id="2" name="Title 1"/>
+          <p:cNvSpPr>
+            <a:spLocks noGrp="1"/>
+          </p:cNvSpPr>
+          <p:nvPr>
+            <p:ph type="title"/>
+          </p:nvPr>
+        </p:nvSpPr>
+        <p:spPr>
+          <a:xfrm>
+            <a:off x="0" y="0"/>
+            <a:ext cx="9144000" cy="602780"/>
+          </a:xfrm>
+          <a:solidFill>
+            <a:srgbClr val="1A1A2E"/>
+          </a:solidFill>
+        </p:spPr>
+        <p:txBody>
+          <a:bodyPr/>
+          <a:lstStyle/>
+          <a:p>
+            <a:pPr lvl="0" indent="0" marL="0">
+              <a:buNone/>
+            </a:pPr>
+            <a:r>
+              <a:rPr>
+                <a:latin typeface="Courier"/>
+              </a:rPr>
+              <a:t>car::Anova()</a:t>
+            </a:r>
+            <a:r>
+              <a:rPr/>
+              <a:t> — Type II for Unbalanced Data</a:t>
+            </a:r>
+          </a:p>
+        </p:txBody>
+      </p:sp>
+      <p:sp>
+        <p:nvSpPr>
+          <p:cNvPr id="3" name="Content Placeholder 2"/>
+          <p:cNvSpPr>
+            <a:spLocks noGrp="1"/>
+          </p:cNvSpPr>
+          <p:nvPr>
+            <p:ph idx="1" sz="half"/>
+          </p:nvPr>
+        </p:nvSpPr>
+        <p:spPr/>
+        <p:txBody>
+          <a:bodyPr/>
+          <a:lstStyle/>
+          <a:p>
+            <a:pPr lvl="0" indent="0">
+              <a:buNone/>
+            </a:pPr>
+            <a:r>
+              <a:rPr>
+                <a:solidFill>
+                  <a:srgbClr val="5E5E5E"/>
+                </a:solidFill>
+                <a:latin typeface="Courier"/>
+              </a:rPr>
+              <a:t># Type II sums of squares — the right call here -------</a:t>
+            </a:r>
+            <a:br/>
+            <a:r>
+              <a:rPr>
+                <a:solidFill>
+                  <a:srgbClr val="4758AB"/>
+                </a:solidFill>
+                <a:latin typeface="Courier"/>
+              </a:rPr>
+              <a:t>Anova</a:t>
+            </a:r>
+            <a:r>
+              <a:rPr>
+                <a:solidFill>
+                  <a:srgbClr val="003B4F"/>
+                </a:solidFill>
+                <a:latin typeface="Courier"/>
+              </a:rPr>
+              <a:t>(mass_model, </a:t>
+            </a:r>
+            <a:r>
+              <a:rPr>
+                <a:solidFill>
+                  <a:srgbClr val="657422"/>
+                </a:solidFill>
+                <a:latin typeface="Courier"/>
+              </a:rPr>
+              <a:t>type =</a:t>
+            </a:r>
+            <a:r>
+              <a:rPr>
+                <a:solidFill>
+                  <a:srgbClr val="003B4F"/>
+                </a:solidFill>
+                <a:latin typeface="Courier"/>
+              </a:rPr>
+              <a:t> </a:t>
+            </a:r>
+            <a:r>
+              <a:rPr>
+                <a:solidFill>
+                  <a:srgbClr val="20794D"/>
+                </a:solidFill>
+                <a:latin typeface="Courier"/>
+              </a:rPr>
+              <a:t>"II"</a:t>
+            </a:r>
+            <a:r>
+              <a:rPr>
+                <a:solidFill>
+                  <a:srgbClr val="003B4F"/>
+                </a:solidFill>
+                <a:latin typeface="Courier"/>
+              </a:rPr>
+              <a:t>)</a:t>
+            </a:r>
+          </a:p>
+          <a:p>
+            <a:pPr lvl="0" indent="0">
+              <a:buNone/>
+            </a:pPr>
+            <a:r>
+              <a:rPr>
+                <a:latin typeface="Courier"/>
+              </a:rPr>
+              <a:t>Anova Table (Type II tests)
+Response: body_mass_g
+             Sum Sq  Df F value    Pr(&gt;F)    
+species   146864214   2  343.63 &lt; 2.2e-16 ***
+Residuals  72443483 339                      
+---
+Signif. codes:  0 '***' 0.001 '**' 0.01 '*' 0.05 '.' 0.1 ' ' 1</a:t>
+            </a:r>
+          </a:p>
+        </p:txBody>
+      </p:sp>
+      <p:sp>
+        <p:nvSpPr>
+          <p:cNvPr id="4" name="Content Placeholder 3"/>
+          <p:cNvSpPr>
+            <a:spLocks noGrp="1"/>
+          </p:cNvSpPr>
+          <p:nvPr>
+            <p:ph idx="2" sz="half"/>
+          </p:nvPr>
+        </p:nvSpPr>
+        <p:spPr/>
+        <p:txBody>
+          <a:bodyPr/>
+          <a:lstStyle/>
+          <a:p>
+            <a:pPr lvl="0" indent="0" marL="0">
+              <a:buNone/>
+            </a:pPr>
+            <a:r>
+              <a:rPr b="1"/>
+              <a:t>Why Type II?</a:t>
+            </a:r>
+          </a:p>
+          <a:p>
+            <a:pPr lvl="0"/>
+            <a:r>
+              <a:rPr/>
+              <a:t>Our groups have </a:t>
+            </a:r>
+            <a:r>
+              <a:rPr b="1"/>
+              <a:t>different n</a:t>
+            </a:r>
+            <a:r>
+              <a:rPr/>
+              <a:t> (unbalanced)</a:t>
+            </a:r>
+          </a:p>
+          <a:p>
+            <a:pPr lvl="0"/>
+            <a:r>
+              <a:rPr/>
+              <a:t>With one predictor the F is the same, but Type II is the </a:t>
+            </a:r>
+            <a:r>
+              <a:rPr b="1"/>
+              <a:t>habit</a:t>
+            </a:r>
+            <a:r>
+              <a:rPr/>
+              <a:t> you want before you meet two-way ANOVA, where the type genuinely changes the answer</a:t>
+            </a:r>
+          </a:p>
+          <a:p>
+            <a:pPr lvl="0" indent="0" marL="1270000">
+              <a:buNone/>
+            </a:pPr>
+            <a:r>
+              <a:rPr sz="2000" b="1"/>
+              <a:t>Note</a:t>
+            </a:r>
+          </a:p>
+          <a:p>
+            <a:pPr lvl="0" indent="0" marL="1270000">
+              <a:buNone/>
+            </a:pPr>
+            <a:r>
+              <a:rPr sz="2000">
+                <a:latin typeface="Courier"/>
+              </a:rPr>
+              <a:t>anova()</a:t>
+            </a:r>
+            <a:r>
+              <a:rPr sz="2000"/>
+              <a:t> = Type I (order-dependent). </a:t>
+            </a:r>
+            <a:r>
+              <a:rPr sz="2000">
+                <a:latin typeface="Courier"/>
+              </a:rPr>
+              <a:t>Anova(type = "II")</a:t>
+            </a:r>
+            <a:r>
+              <a:rPr sz="2000"/>
+              <a:t> = order-independent.</a:t>
+            </a:r>
+          </a:p>
+        </p:txBody>
+      </p:sp>
+    </p:spTree>
+  </p:cSld>
+</p:sld>
+</file>
+
+<file path=ppt/slides/slide24.xml><?xml version="1.0" encoding="utf-8"?>
+<p:sld xmlns:a="http://schemas.openxmlformats.org/drawingml/2006/main" xmlns:r="http://schemas.openxmlformats.org/officeDocument/2006/relationships" xmlns:p="http://schemas.openxmlformats.org/presentationml/2006/main">
+  <p:cSld>
+    <p:spTree>
+      <p:nvGrpSpPr>
+        <p:cNvPr id="1" name=""/>
+        <p:cNvGrpSpPr/>
+        <p:nvPr/>
+      </p:nvGrpSpPr>
+      <p:grpSpPr>
+        <a:xfrm>
+          <a:off x="0" y="0"/>
+          <a:ext cx="0" cy="0"/>
+          <a:chOff x="0" y="0"/>
+          <a:chExt cx="0" cy="0"/>
+        </a:xfrm>
+      </p:grpSpPr>
+      <p:sp>
+        <p:nvSpPr>
+          <p:cNvPr id="2" name="Title 1"/>
+          <p:cNvSpPr>
+            <a:spLocks noGrp="1"/>
+          </p:cNvSpPr>
+          <p:nvPr>
+            <p:ph type="title"/>
+          </p:nvPr>
+        </p:nvSpPr>
+        <p:spPr>
+          <a:xfrm>
+            <a:off x="0" y="0"/>
+            <a:ext cx="9144000" cy="582780"/>
+          </a:xfrm>
+        </p:spPr>
+        <p:txBody>
+          <a:bodyPr/>
+          <a:lstStyle/>
+          <a:p>
+            <a:pPr lvl="0" indent="0" marL="0">
+              <a:buNone/>
+            </a:pPr>
+            <a:r>
+              <a:rPr/>
+              <a:t>🛑 Pause — Do Activity Parts 7–8 Now</a:t>
+            </a:r>
+          </a:p>
+        </p:txBody>
+      </p:sp>
+      <p:sp>
+        <p:nvSpPr>
+          <p:cNvPr id="3" name="Content Placeholder 2"/>
+          <p:cNvSpPr>
+            <a:spLocks noGrp="1"/>
+          </p:cNvSpPr>
+          <p:nvPr>
+            <p:ph idx="1"/>
+          </p:nvPr>
+        </p:nvSpPr>
+        <p:spPr/>
+        <p:txBody>
+          <a:bodyPr/>
+          <a:lstStyle/>
+          <a:p>
+            <a:pPr lvl="0" indent="0" marL="0">
+              <a:buNone/>
+            </a:pPr>
+            <a:r>
+              <a:rPr/>
+              <a:t>Run </a:t>
+            </a:r>
+            <a:r>
+              <a:rPr>
+                <a:latin typeface="Courier"/>
+              </a:rPr>
+              <a:t>aov()</a:t>
+            </a:r>
+            <a:r>
+              <a:rPr/>
+              <a:t> + </a:t>
+            </a:r>
+            <a:r>
+              <a:rPr>
+                <a:latin typeface="Courier"/>
+              </a:rPr>
+              <a:t>summary()</a:t>
+            </a:r>
+            <a:r>
+              <a:rPr/>
+              <a:t>, then </a:t>
+            </a:r>
+            <a:r>
+              <a:rPr>
+                <a:latin typeface="Courier"/>
+              </a:rPr>
+              <a:t>car::Anova(type = "II")</a:t>
+            </a:r>
+            <a:r>
+              <a:rPr/>
+              <a:t>. Predict the F and </a:t>
+            </a:r>
+            <a:r>
+              <a:rPr i="1"/>
+              <a:t>p</a:t>
+            </a:r>
+            <a:r>
+              <a:rPr/>
+              <a:t> before you read them, and confirm both tables agree.</a:t>
+            </a:r>
+          </a:p>
+        </p:txBody>
+      </p:sp>
+    </p:spTree>
+  </p:cSld>
+</p:sld>
+</file>
+
+<file path=ppt/slides/slide25.xml><?xml version="1.0" encoding="utf-8"?>
+<p:sld xmlns:a="http://schemas.openxmlformats.org/drawingml/2006/main" xmlns:r="http://schemas.openxmlformats.org/officeDocument/2006/relationships" xmlns:p="http://schemas.openxmlformats.org/presentationml/2006/main">
+  <p:cSld>
+    <p:spTree>
+      <p:nvGrpSpPr>
+        <p:cNvPr id="1" name=""/>
+        <p:cNvGrpSpPr/>
+        <p:nvPr/>
+      </p:nvGrpSpPr>
+      <p:grpSpPr>
+        <a:xfrm>
+          <a:off x="0" y="0"/>
+          <a:ext cx="0" cy="0"/>
+          <a:chOff x="0" y="0"/>
+          <a:chExt cx="0" cy="0"/>
+        </a:xfrm>
+      </p:grpSpPr>
+      <p:sp>
+        <p:nvSpPr>
+          <p:cNvPr id="2" name="Title 1"/>
+          <p:cNvSpPr>
+            <a:spLocks noGrp="1"/>
+          </p:cNvSpPr>
+          <p:nvPr>
+            <p:ph type="title"/>
+          </p:nvPr>
+        </p:nvSpPr>
+        <p:spPr>
+          <a:xfrm>
+            <a:off x="0" y="0"/>
+            <a:ext cx="9144000" cy="582780"/>
+          </a:xfrm>
+        </p:spPr>
+        <p:txBody>
+          <a:bodyPr/>
+          <a:lstStyle/>
+          <a:p>
+            <a:pPr lvl="0" indent="0" marL="0">
+              <a:buNone/>
+            </a:pPr>
+            <a:r>
+              <a:rPr/>
+              <a:t>🧩 Chunk 4 of 4 · Which Groups Differ? Post-Hoc with emmeans</a:t>
+            </a:r>
+          </a:p>
+        </p:txBody>
+      </p:sp>
+      <p:sp>
+        <p:nvSpPr>
+          <p:cNvPr id="3" name="Content Placeholder 2"/>
+          <p:cNvSpPr>
+            <a:spLocks noGrp="1"/>
+          </p:cNvSpPr>
+          <p:nvPr>
+            <p:ph idx="1"/>
+          </p:nvPr>
+        </p:nvSpPr>
+        <p:spPr/>
+        <p:txBody>
+          <a:bodyPr/>
+          <a:lstStyle/>
+          <a:p>
+            <a:pPr lvl="0" indent="0" marL="0">
+              <a:buNone/>
+            </a:pPr>
+            <a:r>
+              <a:rPr b="1"/>
+              <a:t>We will cover:</a:t>
+            </a:r>
+            <a:r>
+              <a:rPr/>
+              <a:t> ANOVA says “some differ” — </a:t>
+            </a:r>
+            <a:r>
+              <a:rPr>
+                <a:latin typeface="Courier"/>
+              </a:rPr>
+              <a:t>emmeans</a:t>
+            </a:r>
+            <a:r>
+              <a:rPr/>
+              <a:t> says </a:t>
+            </a:r>
+            <a:r>
+              <a:rPr i="1"/>
+              <a:t>which</a:t>
+            </a:r>
+            <a:r>
+              <a:rPr/>
+              <a:t>, with the comparisons properly adjusted.</a:t>
+            </a:r>
+          </a:p>
+          <a:p>
+            <a:pPr lvl="0" indent="0" marL="1270000">
+              <a:buNone/>
+            </a:pPr>
+            <a:r>
+              <a:rPr sz="2000" b="1"/>
+              <a:t>Tip</a:t>
+            </a:r>
+          </a:p>
+          <a:p>
+            <a:pPr lvl="0" indent="0" marL="1270000">
+              <a:buNone/>
+            </a:pPr>
+            <a:r>
+              <a:rPr sz="2000" b="1"/>
+              <a:t>🖐 After this chunk: Activity Parts 9–11</a:t>
+            </a:r>
+            <a:r>
+              <a:rPr sz="2000"/>
+              <a:t> (pairwise tests, letters, plot, report).</a:t>
+            </a:r>
+          </a:p>
+        </p:txBody>
+      </p:sp>
+    </p:spTree>
+  </p:cSld>
+</p:sld>
+</file>
+
+<file path=ppt/slides/slide26.xml><?xml version="1.0" encoding="utf-8"?>
+<p:sld xmlns:a="http://schemas.openxmlformats.org/drawingml/2006/main" xmlns:r="http://schemas.openxmlformats.org/officeDocument/2006/relationships" xmlns:p="http://schemas.openxmlformats.org/presentationml/2006/main">
+  <p:cSld>
+    <p:spTree>
+      <p:nvGrpSpPr>
+        <p:cNvPr id="1" name=""/>
+        <p:cNvGrpSpPr/>
+        <p:nvPr/>
+      </p:nvGrpSpPr>
+      <p:grpSpPr>
+        <a:xfrm>
+          <a:off x="0" y="0"/>
+          <a:ext cx="0" cy="0"/>
+          <a:chOff x="0" y="0"/>
+          <a:chExt cx="0" cy="0"/>
+        </a:xfrm>
+      </p:grpSpPr>
+      <p:sp>
+        <p:nvSpPr>
+          <p:cNvPr id="2" name="Title 1"/>
+          <p:cNvSpPr>
+            <a:spLocks noGrp="1"/>
+          </p:cNvSpPr>
+          <p:nvPr>
+            <p:ph type="title"/>
+          </p:nvPr>
+        </p:nvSpPr>
+        <p:spPr>
+          <a:xfrm>
+            <a:off x="0" y="0"/>
+            <a:ext cx="9144000" cy="582780"/>
+          </a:xfrm>
+        </p:spPr>
+        <p:txBody>
+          <a:bodyPr/>
+          <a:lstStyle/>
+          <a:p>
+            <a:pPr lvl="0" indent="0" marL="0">
+              <a:buNone/>
+            </a:pPr>
+            <a:r>
+              <a:rPr/>
+              <a:t>Post-Hoc — Pairwise Comparisons with emmeans</a:t>
+            </a:r>
+          </a:p>
+        </p:txBody>
+      </p:sp>
+      <p:sp>
+        <p:nvSpPr>
+          <p:cNvPr id="3" name="Content Placeholder 2"/>
+          <p:cNvSpPr>
+            <a:spLocks noGrp="1"/>
+          </p:cNvSpPr>
+          <p:nvPr>
+            <p:ph idx="1"/>
+          </p:nvPr>
+        </p:nvSpPr>
+        <p:spPr/>
+        <p:txBody>
+          <a:bodyPr/>
+          <a:lstStyle/>
+          <a:p>
+            <a:pPr lvl="0" indent="0" marL="1270000">
+              <a:buNone/>
+            </a:pPr>
+            <a:r>
+              <a:rPr sz="2000" b="1"/>
+              <a:t>Note</a:t>
+            </a:r>
+          </a:p>
+          <a:p>
+            <a:pPr lvl="0" indent="0" marL="1270000">
+              <a:buNone/>
+            </a:pPr>
+            <a:r>
+              <a:rPr sz="2000" b="1"/>
+              <a:t>🔮 Predict first:</a:t>
+            </a:r>
+            <a:r>
+              <a:rPr sz="2000"/>
+              <a:t> From the boxplot, predict — will </a:t>
+            </a:r>
+            <a:r>
+              <a:rPr sz="2000" b="1"/>
+              <a:t>all three</a:t>
+            </a:r>
+            <a:r>
+              <a:rPr sz="2000"/>
+              <a:t> species differ from each other, or will two be statistically tied?</a:t>
+            </a:r>
+          </a:p>
+        </p:txBody>
+      </p:sp>
+    </p:spTree>
+  </p:cSld>
+</p:sld>
+</file>
+
+<file path=ppt/slides/slide27.xml><?xml version="1.0" encoding="utf-8"?>
+<p:sld xmlns:a="http://schemas.openxmlformats.org/drawingml/2006/main" xmlns:r="http://schemas.openxmlformats.org/officeDocument/2006/relationships" xmlns:p="http://schemas.openxmlformats.org/presentationml/2006/main">
+  <p:cSld>
+    <p:spTree>
+      <p:nvGrpSpPr>
+        <p:cNvPr id="1" name=""/>
+        <p:cNvGrpSpPr/>
+        <p:nvPr/>
+      </p:nvGrpSpPr>
+      <p:grpSpPr>
+        <a:xfrm>
+          <a:off x="0" y="0"/>
+          <a:ext cx="0" cy="0"/>
+          <a:chOff x="0" y="0"/>
+          <a:chExt cx="0" cy="0"/>
+        </a:xfrm>
+      </p:grpSpPr>
+      <p:sp>
+        <p:nvSpPr>
+          <p:cNvPr id="3" name="Content Placeholder 2"/>
+          <p:cNvSpPr>
+            <a:spLocks noGrp="1"/>
+          </p:cNvSpPr>
+          <p:nvPr>
+            <p:ph idx="1" sz="half"/>
+          </p:nvPr>
+        </p:nvSpPr>
+        <p:spPr/>
+        <p:txBody>
+          <a:bodyPr/>
+          <a:lstStyle/>
+          <a:p>
+            <a:pPr lvl="0" indent="0">
+              <a:buNone/>
+            </a:pPr>
+            <a:r>
+              <a:rPr>
+                <a:solidFill>
+                  <a:srgbClr val="5E5E5E"/>
+                </a:solidFill>
+                <a:latin typeface="Courier"/>
+              </a:rPr>
+              <a:t># Estimated marginal means + Tukey-adjusted pairs -----</a:t>
+            </a:r>
+            <a:br/>
+            <a:r>
+              <a:rPr>
+                <a:solidFill>
+                  <a:srgbClr val="003B4F"/>
+                </a:solidFill>
+                <a:latin typeface="Courier"/>
+              </a:rPr>
+              <a:t>mass_emm &lt;- </a:t>
+            </a:r>
+            <a:r>
+              <a:rPr>
+                <a:solidFill>
+                  <a:srgbClr val="4758AB"/>
+                </a:solidFill>
+                <a:latin typeface="Courier"/>
+              </a:rPr>
+              <a:t>emmeans</a:t>
+            </a:r>
+            <a:r>
+              <a:rPr>
+                <a:solidFill>
+                  <a:srgbClr val="003B4F"/>
+                </a:solidFill>
+                <a:latin typeface="Courier"/>
+              </a:rPr>
+              <a:t>(mass_model, pairwise </a:t>
+            </a:r>
+            <a:r>
+              <a:rPr>
+                <a:solidFill>
+                  <a:srgbClr val="5E5E5E"/>
+                </a:solidFill>
+                <a:latin typeface="Courier"/>
+              </a:rPr>
+              <a:t>~</a:t>
+            </a:r>
+            <a:r>
+              <a:rPr>
+                <a:solidFill>
+                  <a:srgbClr val="003B4F"/>
+                </a:solidFill>
+                <a:latin typeface="Courier"/>
+              </a:rPr>
+              <a:t> species)</a:t>
+            </a:r>
+            <a:br/>
+            <a:br/>
+            <a:r>
+              <a:rPr>
+                <a:solidFill>
+                  <a:srgbClr val="003B4F"/>
+                </a:solidFill>
+                <a:latin typeface="Courier"/>
+              </a:rPr>
+              <a:t>mass_emm</a:t>
+            </a:r>
+            <a:r>
+              <a:rPr>
+                <a:solidFill>
+                  <a:srgbClr val="5E5E5E"/>
+                </a:solidFill>
+                <a:latin typeface="Courier"/>
+              </a:rPr>
+              <a:t>$</a:t>
+            </a:r>
+            <a:r>
+              <a:rPr>
+                <a:solidFill>
+                  <a:srgbClr val="003B4F"/>
+                </a:solidFill>
+                <a:latin typeface="Courier"/>
+              </a:rPr>
+              <a:t>contrasts</a:t>
+            </a:r>
+          </a:p>
+          <a:p>
+            <a:pPr lvl="0" indent="0">
+              <a:buNone/>
+            </a:pPr>
+            <a:r>
+              <a:rPr>
+                <a:latin typeface="Courier"/>
+              </a:rPr>
+              <a:t> contrast           estimate   SE  df t.ratio p.value
+ Adelie - Chinstrap    -32.4 67.5 339  -0.480  0.8807
+ Adelie - Gentoo     -1375.4 56.1 339 -24.495 &lt;0.0001
+ Chinstrap - Gentoo  -1342.9 69.9 339 -19.224 &lt;0.0001
+P value adjustment: tukey method for comparing a family of 3 estimates </a:t>
+            </a:r>
+          </a:p>
+        </p:txBody>
+      </p:sp>
+      <p:sp>
+        <p:nvSpPr>
+          <p:cNvPr id="4" name="Content Placeholder 3"/>
+          <p:cNvSpPr>
+            <a:spLocks noGrp="1"/>
+          </p:cNvSpPr>
+          <p:nvPr>
+            <p:ph idx="2" sz="half"/>
+          </p:nvPr>
+        </p:nvSpPr>
+        <p:spPr/>
+        <p:txBody>
+          <a:bodyPr/>
+          <a:lstStyle/>
+          <a:p>
+            <a:pPr lvl="0" indent="0" marL="0">
+              <a:buNone/>
+            </a:pPr>
+            <a:r>
+              <a:rPr b="1"/>
+              <a:t>Reading it:</a:t>
+            </a:r>
+          </a:p>
+          <a:p>
+            <a:pPr lvl="0"/>
+            <a:r>
+              <a:rPr>
+                <a:latin typeface="Courier"/>
+              </a:rPr>
+              <a:t>emmeans(..., pairwise ~ species)</a:t>
+            </a:r>
+            <a:r>
+              <a:rPr/>
+              <a:t> gives each group’s mean </a:t>
+            </a:r>
+            <a:r>
+              <a:rPr b="1"/>
+              <a:t>and</a:t>
+            </a:r>
+            <a:r>
+              <a:rPr/>
+              <a:t> every pairwise comparison</a:t>
+            </a:r>
+          </a:p>
+          <a:p>
+            <a:pPr lvl="0"/>
+            <a:r>
+              <a:rPr/>
+              <a:t>The </a:t>
+            </a:r>
+            <a:r>
+              <a:rPr i="1"/>
+              <a:t>p</a:t>
+            </a:r>
+            <a:r>
+              <a:rPr/>
+              <a:t>-values are </a:t>
+            </a:r>
+            <a:r>
+              <a:rPr b="1"/>
+              <a:t>Tukey-adjusted</a:t>
+            </a:r>
+            <a:r>
+              <a:rPr/>
+              <a:t> — they already correct for multiple comparisons, so the family-wise error stays at 0.05</a:t>
+            </a:r>
+          </a:p>
+          <a:p>
+            <a:pPr lvl="0" indent="0" marL="0">
+              <a:buNone/>
+            </a:pPr>
+            <a:r>
+              <a:rPr/>
+              <a:t>📖 W&amp;S §15.4 — planned vs. unplanned comparisons</a:t>
+            </a:r>
+          </a:p>
+        </p:txBody>
+      </p:sp>
+    </p:spTree>
+  </p:cSld>
+</p:sld>
+</file>
+
+<file path=ppt/slides/slide28.xml><?xml version="1.0" encoding="utf-8"?>
+<p:sld xmlns:a="http://schemas.openxmlformats.org/drawingml/2006/main" xmlns:r="http://schemas.openxmlformats.org/officeDocument/2006/relationships" xmlns:p="http://schemas.openxmlformats.org/presentationml/2006/main">
+  <p:cSld>
+    <p:spTree>
+      <p:nvGrpSpPr>
+        <p:cNvPr id="1" name=""/>
+        <p:cNvGrpSpPr/>
+        <p:nvPr/>
+      </p:nvGrpSpPr>
+      <p:grpSpPr>
+        <a:xfrm>
+          <a:off x="0" y="0"/>
+          <a:ext cx="0" cy="0"/>
+          <a:chOff x="0" y="0"/>
+          <a:chExt cx="0" cy="0"/>
+        </a:xfrm>
+      </p:grpSpPr>
+      <p:sp>
+        <p:nvSpPr>
+          <p:cNvPr id="2" name="Title 1"/>
+          <p:cNvSpPr>
+            <a:spLocks noGrp="1"/>
+          </p:cNvSpPr>
+          <p:nvPr>
+            <p:ph type="title"/>
+          </p:nvPr>
+        </p:nvSpPr>
+        <p:spPr>
+          <a:xfrm>
+            <a:off x="0" y="0"/>
+            <a:ext cx="9144000" cy="602780"/>
+          </a:xfrm>
+          <a:solidFill>
+            <a:srgbClr val="1A1A2E"/>
+          </a:solidFill>
+        </p:spPr>
+        <p:txBody>
+          <a:bodyPr/>
+          <a:lstStyle/>
+          <a:p>
+            <a:pPr lvl="0" indent="0" marL="0">
+              <a:buNone/>
+            </a:pPr>
+            <a:r>
+              <a:rPr/>
+              <a:t>Compact Letter Display — Who Shares a Letter?</a:t>
+            </a:r>
+          </a:p>
+        </p:txBody>
+      </p:sp>
+      <p:sp>
+        <p:nvSpPr>
+          <p:cNvPr id="3" name="Content Placeholder 2"/>
+          <p:cNvSpPr>
+            <a:spLocks noGrp="1"/>
+          </p:cNvSpPr>
+          <p:nvPr>
+            <p:ph idx="1" sz="half"/>
+          </p:nvPr>
+        </p:nvSpPr>
+        <p:spPr/>
+        <p:txBody>
+          <a:bodyPr/>
+          <a:lstStyle/>
+          <a:p>
+            <a:pPr lvl="0" indent="0">
+              <a:buNone/>
+            </a:pPr>
+            <a:r>
+              <a:rPr>
+                <a:solidFill>
+                  <a:srgbClr val="5E5E5E"/>
+                </a:solidFill>
+                <a:latin typeface="Courier"/>
+              </a:rPr>
+              <a:t># Groups that SHARE a letter are NOT different --------</a:t>
+            </a:r>
+            <a:br/>
+            <a:r>
+              <a:rPr>
+                <a:solidFill>
+                  <a:srgbClr val="003B4F"/>
+                </a:solidFill>
+                <a:latin typeface="Courier"/>
+              </a:rPr>
+              <a:t>multcomp</a:t>
+            </a:r>
+            <a:r>
+              <a:rPr>
+                <a:solidFill>
+                  <a:srgbClr val="5E5E5E"/>
+                </a:solidFill>
+                <a:latin typeface="Courier"/>
+              </a:rPr>
+              <a:t>::</a:t>
+            </a:r>
+            <a:r>
+              <a:rPr>
+                <a:solidFill>
+                  <a:srgbClr val="4758AB"/>
+                </a:solidFill>
+                <a:latin typeface="Courier"/>
+              </a:rPr>
+              <a:t>cld</a:t>
+            </a:r>
+            <a:r>
+              <a:rPr>
+                <a:solidFill>
+                  <a:srgbClr val="003B4F"/>
+                </a:solidFill>
+                <a:latin typeface="Courier"/>
+              </a:rPr>
+              <a:t>(mass_emm</a:t>
+            </a:r>
+            <a:r>
+              <a:rPr>
+                <a:solidFill>
+                  <a:srgbClr val="5E5E5E"/>
+                </a:solidFill>
+                <a:latin typeface="Courier"/>
+              </a:rPr>
+              <a:t>$</a:t>
+            </a:r>
+            <a:r>
+              <a:rPr>
+                <a:solidFill>
+                  <a:srgbClr val="003B4F"/>
+                </a:solidFill>
+                <a:latin typeface="Courier"/>
+              </a:rPr>
+              <a:t>emmeans, </a:t>
+            </a:r>
+            <a:r>
+              <a:rPr>
+                <a:solidFill>
+                  <a:srgbClr val="657422"/>
+                </a:solidFill>
+                <a:latin typeface="Courier"/>
+              </a:rPr>
+              <a:t>Letters =</a:t>
+            </a:r>
+            <a:r>
+              <a:rPr>
+                <a:solidFill>
+                  <a:srgbClr val="003B4F"/>
+                </a:solidFill>
+                <a:latin typeface="Courier"/>
+              </a:rPr>
+              <a:t> letters)</a:t>
+            </a:r>
+          </a:p>
+          <a:p>
+            <a:pPr lvl="0" indent="0">
+              <a:buNone/>
+            </a:pPr>
+            <a:r>
+              <a:rPr>
+                <a:latin typeface="Courier"/>
+              </a:rPr>
+              <a:t> species   emmean   SE  df lower.CL upper.CL .group
+ Adelie      3701 37.6 339     3627     3775  a    
+ Chinstrap   3733 56.1 339     3623     3843  a    
+ Gentoo      5076 41.7 339     4994     5158   b   
+Confidence level used: 0.95 
+P value adjustment: tukey method for comparing a family of 3 estimates 
+significance level used: alpha = 0.05 
+NOTE: If two or more means share the same grouping symbol,
+      then we cannot show them to be different.
+      But we also did not show them to be the same. </a:t>
+            </a:r>
+          </a:p>
+        </p:txBody>
+      </p:sp>
+      <p:sp>
+        <p:nvSpPr>
+          <p:cNvPr id="4" name="Content Placeholder 3"/>
+          <p:cNvSpPr>
+            <a:spLocks noGrp="1"/>
+          </p:cNvSpPr>
+          <p:nvPr>
+            <p:ph idx="2" sz="half"/>
+          </p:nvPr>
+        </p:nvSpPr>
+        <p:spPr/>
+        <p:txBody>
+          <a:bodyPr/>
+          <a:lstStyle/>
+          <a:p>
+            <a:pPr lvl="0" indent="0" marL="0">
+              <a:buNone/>
+            </a:pPr>
+            <a:r>
+              <a:rPr b="1"/>
+              <a:t>How to read letters:</a:t>
+            </a:r>
+          </a:p>
+          <a:p>
+            <a:pPr lvl="0"/>
+            <a:r>
+              <a:rPr/>
+              <a:t>Same letter → </a:t>
+            </a:r>
+            <a:r>
+              <a:rPr b="1"/>
+              <a:t>not</a:t>
+            </a:r>
+            <a:r>
+              <a:rPr/>
+              <a:t> significantly different</a:t>
+            </a:r>
+          </a:p>
+          <a:p>
+            <a:pPr lvl="0"/>
+            <a:r>
+              <a:rPr/>
+              <a:t>Different letters → significantly different</a:t>
+            </a:r>
+          </a:p>
+          <a:p>
+            <a:pPr lvl="0" indent="0" marL="0">
+              <a:buNone/>
+            </a:pPr>
+            <a:r>
+              <a:rPr/>
+              <a:t>This is the compact summary you see in published figures — one letter above each bar.</a:t>
+            </a:r>
+          </a:p>
+          <a:p>
+            <a:pPr lvl="0" indent="0" marL="1270000">
+              <a:buNone/>
+            </a:pPr>
+            <a:r>
+              <a:rPr sz="2000" b="1"/>
+              <a:t>Tip</a:t>
+            </a:r>
+          </a:p>
+          <a:p>
+            <a:pPr lvl="0" indent="0" marL="1270000">
+              <a:buNone/>
+            </a:pPr>
+            <a:r>
+              <a:rPr sz="2000"/>
+              <a:t>Install once: </a:t>
+            </a:r>
+            <a:r>
+              <a:rPr sz="2000">
+                <a:latin typeface="Courier"/>
+              </a:rPr>
+              <a:t>install.packages("multcomp")</a:t>
+            </a:r>
+          </a:p>
+        </p:txBody>
+      </p:sp>
+    </p:spTree>
+  </p:cSld>
+</p:sld>
+</file>
+
+<file path=ppt/slides/slide29.xml><?xml version="1.0" encoding="utf-8"?>
+<p:sld xmlns:a="http://schemas.openxmlformats.org/drawingml/2006/main" xmlns:r="http://schemas.openxmlformats.org/officeDocument/2006/relationships" xmlns:p="http://schemas.openxmlformats.org/presentationml/2006/main">
+  <p:cSld>
+    <p:spTree>
+      <p:nvGrpSpPr>
+        <p:cNvPr id="1" name=""/>
+        <p:cNvGrpSpPr/>
+        <p:nvPr/>
+      </p:nvGrpSpPr>
+      <p:grpSpPr>
+        <a:xfrm>
+          <a:off x="0" y="0"/>
+          <a:ext cx="0" cy="0"/>
+          <a:chOff x="0" y="0"/>
+          <a:chExt cx="0" cy="0"/>
+        </a:xfrm>
+      </p:grpSpPr>
+      <p:sp>
+        <p:nvSpPr>
+          <p:cNvPr id="2" name="Title 1"/>
+          <p:cNvSpPr>
+            <a:spLocks noGrp="1"/>
+          </p:cNvSpPr>
+          <p:nvPr>
+            <p:ph type="title"/>
+          </p:nvPr>
+        </p:nvSpPr>
+        <p:spPr>
+          <a:xfrm>
+            <a:off x="139485" y="78119"/>
+            <a:ext cx="8229600" cy="607682"/>
+          </a:xfrm>
+        </p:spPr>
+        <p:txBody>
+          <a:bodyPr/>
+          <a:lstStyle/>
+          <a:p>
+            <a:pPr lvl="0" indent="0" marL="0">
+              <a:buNone/>
+            </a:pPr>
+            <a:r>
+              <a:rPr/>
+              <a:t>Plot the Result — Means ± CI</a:t>
+            </a:r>
+          </a:p>
+        </p:txBody>
+      </p:sp>
+      <p:sp>
+        <p:nvSpPr>
+          <p:cNvPr id="3" name="Text Placeholder 2"/>
+          <p:cNvSpPr>
+            <a:spLocks noGrp="1"/>
+          </p:cNvSpPr>
+          <p:nvPr>
+            <p:ph idx="1" type="body"/>
+          </p:nvPr>
+        </p:nvSpPr>
+        <p:spPr/>
+        <p:txBody>
+          <a:bodyPr/>
+          <a:lstStyle/>
+          <a:p>
+            <a:pPr lvl="0" indent="0">
+              <a:buNone/>
+            </a:pPr>
+            <a:r>
+              <a:rPr>
+                <a:solidFill>
+                  <a:srgbClr val="003B4F"/>
+                </a:solidFill>
+                <a:latin typeface="Courier"/>
+              </a:rPr>
+              <a:t>mass_emm_plot &lt;- </a:t>
+            </a:r>
+            <a:r>
+              <a:rPr>
+                <a:solidFill>
+                  <a:srgbClr val="4758AB"/>
+                </a:solidFill>
+                <a:latin typeface="Courier"/>
+              </a:rPr>
+              <a:t>as.data.frame</a:t>
+            </a:r>
+            <a:r>
+              <a:rPr>
+                <a:solidFill>
+                  <a:srgbClr val="003B4F"/>
+                </a:solidFill>
+                <a:latin typeface="Courier"/>
+              </a:rPr>
+              <a:t>(mass_emm</a:t>
+            </a:r>
+            <a:r>
+              <a:rPr>
+                <a:solidFill>
+                  <a:srgbClr val="5E5E5E"/>
+                </a:solidFill>
+                <a:latin typeface="Courier"/>
+              </a:rPr>
+              <a:t>$</a:t>
+            </a:r>
+            <a:r>
+              <a:rPr>
+                <a:solidFill>
+                  <a:srgbClr val="003B4F"/>
+                </a:solidFill>
+                <a:latin typeface="Courier"/>
+              </a:rPr>
+              <a:t>emmeans) </a:t>
+            </a:r>
+            <a:r>
+              <a:rPr>
+                <a:solidFill>
+                  <a:srgbClr val="5E5E5E"/>
+                </a:solidFill>
+                <a:latin typeface="Courier"/>
+              </a:rPr>
+              <a:t>%&gt;%</a:t>
+            </a:r>
+            <a:br/>
+            <a:r>
+              <a:rPr>
+                <a:solidFill>
+                  <a:srgbClr val="003B4F"/>
+                </a:solidFill>
+                <a:latin typeface="Courier"/>
+              </a:rPr>
+              <a:t>  </a:t>
+            </a:r>
+            <a:r>
+              <a:rPr>
+                <a:solidFill>
+                  <a:srgbClr val="4758AB"/>
+                </a:solidFill>
+                <a:latin typeface="Courier"/>
+              </a:rPr>
+              <a:t>ggplot</a:t>
+            </a:r>
+            <a:r>
+              <a:rPr>
+                <a:solidFill>
+                  <a:srgbClr val="003B4F"/>
+                </a:solidFill>
+                <a:latin typeface="Courier"/>
+              </a:rPr>
+              <a:t>(</a:t>
+            </a:r>
+            <a:r>
+              <a:rPr>
+                <a:solidFill>
+                  <a:srgbClr val="4758AB"/>
+                </a:solidFill>
+                <a:latin typeface="Courier"/>
+              </a:rPr>
+              <a:t>aes</a:t>
+            </a:r>
+            <a:r>
+              <a:rPr>
+                <a:solidFill>
+                  <a:srgbClr val="003B4F"/>
+                </a:solidFill>
+                <a:latin typeface="Courier"/>
+              </a:rPr>
+              <a:t>(</a:t>
+            </a:r>
+            <a:r>
+              <a:rPr>
+                <a:solidFill>
+                  <a:srgbClr val="657422"/>
+                </a:solidFill>
+                <a:latin typeface="Courier"/>
+              </a:rPr>
+              <a:t>x =</a:t>
+            </a:r>
+            <a:r>
+              <a:rPr>
+                <a:solidFill>
+                  <a:srgbClr val="003B4F"/>
+                </a:solidFill>
+                <a:latin typeface="Courier"/>
+              </a:rPr>
+              <a:t> species, </a:t>
+            </a:r>
+            <a:r>
+              <a:rPr>
+                <a:solidFill>
+                  <a:srgbClr val="657422"/>
+                </a:solidFill>
+                <a:latin typeface="Courier"/>
+              </a:rPr>
+              <a:t>y =</a:t>
+            </a:r>
+            <a:r>
+              <a:rPr>
+                <a:solidFill>
+                  <a:srgbClr val="003B4F"/>
+                </a:solidFill>
+                <a:latin typeface="Courier"/>
+              </a:rPr>
+              <a:t> emmean, </a:t>
+            </a:r>
+            <a:r>
+              <a:rPr>
+                <a:solidFill>
+                  <a:srgbClr val="657422"/>
+                </a:solidFill>
+                <a:latin typeface="Courier"/>
+              </a:rPr>
+              <a:t>color =</a:t>
+            </a:r>
+            <a:r>
+              <a:rPr>
+                <a:solidFill>
+                  <a:srgbClr val="003B4F"/>
+                </a:solidFill>
+                <a:latin typeface="Courier"/>
+              </a:rPr>
+              <a:t> species)) </a:t>
+            </a:r>
+            <a:r>
+              <a:rPr>
+                <a:solidFill>
+                  <a:srgbClr val="5E5E5E"/>
+                </a:solidFill>
+                <a:latin typeface="Courier"/>
+              </a:rPr>
+              <a:t>+</a:t>
+            </a:r>
+            <a:br/>
+            <a:r>
+              <a:rPr>
+                <a:solidFill>
+                  <a:srgbClr val="003B4F"/>
+                </a:solidFill>
+                <a:latin typeface="Courier"/>
+              </a:rPr>
+              <a:t>  </a:t>
+            </a:r>
+            <a:r>
+              <a:rPr>
+                <a:solidFill>
+                  <a:srgbClr val="4758AB"/>
+                </a:solidFill>
+                <a:latin typeface="Courier"/>
+              </a:rPr>
+              <a:t>geom_point</a:t>
+            </a:r>
+            <a:r>
+              <a:rPr>
+                <a:solidFill>
+                  <a:srgbClr val="003B4F"/>
+                </a:solidFill>
+                <a:latin typeface="Courier"/>
+              </a:rPr>
+              <a:t>(</a:t>
+            </a:r>
+            <a:r>
+              <a:rPr>
+                <a:solidFill>
+                  <a:srgbClr val="657422"/>
+                </a:solidFill>
+                <a:latin typeface="Courier"/>
+              </a:rPr>
+              <a:t>size =</a:t>
+            </a:r>
+            <a:r>
+              <a:rPr>
+                <a:solidFill>
+                  <a:srgbClr val="003B4F"/>
+                </a:solidFill>
+                <a:latin typeface="Courier"/>
+              </a:rPr>
+              <a:t> </a:t>
+            </a:r>
+            <a:r>
+              <a:rPr>
+                <a:solidFill>
+                  <a:srgbClr val="AD0000"/>
+                </a:solidFill>
+                <a:latin typeface="Courier"/>
+              </a:rPr>
+              <a:t>3</a:t>
+            </a:r>
+            <a:r>
+              <a:rPr>
+                <a:solidFill>
+                  <a:srgbClr val="003B4F"/>
+                </a:solidFill>
+                <a:latin typeface="Courier"/>
+              </a:rPr>
+              <a:t>) </a:t>
+            </a:r>
+            <a:r>
+              <a:rPr>
+                <a:solidFill>
+                  <a:srgbClr val="5E5E5E"/>
+                </a:solidFill>
+                <a:latin typeface="Courier"/>
+              </a:rPr>
+              <a:t>+</a:t>
+            </a:r>
+            <a:br/>
+            <a:r>
+              <a:rPr>
+                <a:solidFill>
+                  <a:srgbClr val="003B4F"/>
+                </a:solidFill>
+                <a:latin typeface="Courier"/>
+              </a:rPr>
+              <a:t>  </a:t>
+            </a:r>
+            <a:r>
+              <a:rPr>
+                <a:solidFill>
+                  <a:srgbClr val="4758AB"/>
+                </a:solidFill>
+                <a:latin typeface="Courier"/>
+              </a:rPr>
+              <a:t>geom_errorbar</a:t>
+            </a:r>
+            <a:r>
+              <a:rPr>
+                <a:solidFill>
+                  <a:srgbClr val="003B4F"/>
+                </a:solidFill>
+                <a:latin typeface="Courier"/>
+              </a:rPr>
+              <a:t>(</a:t>
+            </a:r>
+            <a:br/>
+            <a:r>
+              <a:rPr>
+                <a:solidFill>
+                  <a:srgbClr val="003B4F"/>
+                </a:solidFill>
+                <a:latin typeface="Courier"/>
+              </a:rPr>
+              <a:t>    </a:t>
+            </a:r>
+            <a:r>
+              <a:rPr>
+                <a:solidFill>
+                  <a:srgbClr val="4758AB"/>
+                </a:solidFill>
+                <a:latin typeface="Courier"/>
+              </a:rPr>
+              <a:t>aes</a:t>
+            </a:r>
+            <a:r>
+              <a:rPr>
+                <a:solidFill>
+                  <a:srgbClr val="003B4F"/>
+                </a:solidFill>
+                <a:latin typeface="Courier"/>
+              </a:rPr>
+              <a:t>(</a:t>
+            </a:r>
+            <a:r>
+              <a:rPr>
+                <a:solidFill>
+                  <a:srgbClr val="657422"/>
+                </a:solidFill>
+                <a:latin typeface="Courier"/>
+              </a:rPr>
+              <a:t>ymin =</a:t>
+            </a:r>
+            <a:r>
+              <a:rPr>
+                <a:solidFill>
+                  <a:srgbClr val="003B4F"/>
+                </a:solidFill>
+                <a:latin typeface="Courier"/>
+              </a:rPr>
+              <a:t> lower.CL, </a:t>
+            </a:r>
+            <a:r>
+              <a:rPr>
+                <a:solidFill>
+                  <a:srgbClr val="657422"/>
+                </a:solidFill>
+                <a:latin typeface="Courier"/>
+              </a:rPr>
+              <a:t>ymax =</a:t>
+            </a:r>
+            <a:r>
+              <a:rPr>
+                <a:solidFill>
+                  <a:srgbClr val="003B4F"/>
+                </a:solidFill>
+                <a:latin typeface="Courier"/>
+              </a:rPr>
+              <a:t> upper.CL),</a:t>
+            </a:r>
+            <a:br/>
+            <a:r>
+              <a:rPr>
+                <a:solidFill>
+                  <a:srgbClr val="003B4F"/>
+                </a:solidFill>
+                <a:latin typeface="Courier"/>
+              </a:rPr>
+              <a:t>    </a:t>
+            </a:r>
+            <a:r>
+              <a:rPr>
+                <a:solidFill>
+                  <a:srgbClr val="657422"/>
+                </a:solidFill>
+                <a:latin typeface="Courier"/>
+              </a:rPr>
+              <a:t>width =</a:t>
+            </a:r>
+            <a:r>
+              <a:rPr>
+                <a:solidFill>
+                  <a:srgbClr val="003B4F"/>
+                </a:solidFill>
+                <a:latin typeface="Courier"/>
+              </a:rPr>
+              <a:t> </a:t>
+            </a:r>
+            <a:r>
+              <a:rPr>
+                <a:solidFill>
+                  <a:srgbClr val="AD0000"/>
+                </a:solidFill>
+                <a:latin typeface="Courier"/>
+              </a:rPr>
+              <a:t>0.15</a:t>
+            </a:r>
+            <a:r>
+              <a:rPr>
+                <a:solidFill>
+                  <a:srgbClr val="003B4F"/>
+                </a:solidFill>
+                <a:latin typeface="Courier"/>
+              </a:rPr>
+              <a:t>, </a:t>
+            </a:r>
+            <a:r>
+              <a:rPr>
+                <a:solidFill>
+                  <a:srgbClr val="657422"/>
+                </a:solidFill>
+                <a:latin typeface="Courier"/>
+              </a:rPr>
+              <a:t>linewidth =</a:t>
+            </a:r>
+            <a:r>
+              <a:rPr>
+                <a:solidFill>
+                  <a:srgbClr val="003B4F"/>
+                </a:solidFill>
+                <a:latin typeface="Courier"/>
+              </a:rPr>
+              <a:t> </a:t>
+            </a:r>
+            <a:r>
+              <a:rPr>
+                <a:solidFill>
+                  <a:srgbClr val="AD0000"/>
+                </a:solidFill>
+                <a:latin typeface="Courier"/>
+              </a:rPr>
+              <a:t>0.9</a:t>
+            </a:r>
+            <a:br/>
+            <a:r>
+              <a:rPr>
+                <a:solidFill>
+                  <a:srgbClr val="003B4F"/>
+                </a:solidFill>
+                <a:latin typeface="Courier"/>
+              </a:rPr>
+              <a:t>  ) </a:t>
+            </a:r>
+            <a:r>
+              <a:rPr>
+                <a:solidFill>
+                  <a:srgbClr val="5E5E5E"/>
+                </a:solidFill>
+                <a:latin typeface="Courier"/>
+              </a:rPr>
+              <a:t>+</a:t>
+            </a:r>
+            <a:br/>
+            <a:r>
+              <a:rPr>
+                <a:solidFill>
+                  <a:srgbClr val="003B4F"/>
+                </a:solidFill>
+                <a:latin typeface="Courier"/>
+              </a:rPr>
+              <a:t>  </a:t>
+            </a:r>
+            <a:r>
+              <a:rPr>
+                <a:solidFill>
+                  <a:srgbClr val="4758AB"/>
+                </a:solidFill>
+                <a:latin typeface="Courier"/>
+              </a:rPr>
+              <a:t>labs</a:t>
+            </a:r>
+            <a:r>
+              <a:rPr>
+                <a:solidFill>
+                  <a:srgbClr val="003B4F"/>
+                </a:solidFill>
+                <a:latin typeface="Courier"/>
+              </a:rPr>
+              <a:t>(</a:t>
+            </a:r>
+            <a:r>
+              <a:rPr>
+                <a:solidFill>
+                  <a:srgbClr val="657422"/>
+                </a:solidFill>
+                <a:latin typeface="Courier"/>
+              </a:rPr>
+              <a:t>x =</a:t>
+            </a:r>
+            <a:r>
+              <a:rPr>
+                <a:solidFill>
+                  <a:srgbClr val="003B4F"/>
+                </a:solidFill>
+                <a:latin typeface="Courier"/>
+              </a:rPr>
+              <a:t> </a:t>
+            </a:r>
+            <a:r>
+              <a:rPr>
+                <a:solidFill>
+                  <a:srgbClr val="20794D"/>
+                </a:solidFill>
+                <a:latin typeface="Courier"/>
+              </a:rPr>
+              <a:t>"Species"</a:t>
+            </a:r>
+            <a:r>
+              <a:rPr>
+                <a:solidFill>
+                  <a:srgbClr val="003B4F"/>
+                </a:solidFill>
+                <a:latin typeface="Courier"/>
+              </a:rPr>
+              <a:t>, </a:t>
+            </a:r>
+            <a:r>
+              <a:rPr>
+                <a:solidFill>
+                  <a:srgbClr val="657422"/>
+                </a:solidFill>
+                <a:latin typeface="Courier"/>
+              </a:rPr>
+              <a:t>y =</a:t>
+            </a:r>
+            <a:r>
+              <a:rPr>
+                <a:solidFill>
+                  <a:srgbClr val="003B4F"/>
+                </a:solidFill>
+                <a:latin typeface="Courier"/>
+              </a:rPr>
+              <a:t> </a:t>
+            </a:r>
+            <a:r>
+              <a:rPr>
+                <a:solidFill>
+                  <a:srgbClr val="20794D"/>
+                </a:solidFill>
+                <a:latin typeface="Courier"/>
+              </a:rPr>
+              <a:t>"Estimated mean mass (g)"</a:t>
+            </a:r>
+            <a:r>
+              <a:rPr>
+                <a:solidFill>
+                  <a:srgbClr val="003B4F"/>
+                </a:solidFill>
+                <a:latin typeface="Courier"/>
+              </a:rPr>
+              <a:t>) </a:t>
+            </a:r>
+            <a:r>
+              <a:rPr>
+                <a:solidFill>
+                  <a:srgbClr val="5E5E5E"/>
+                </a:solidFill>
+                <a:latin typeface="Courier"/>
+              </a:rPr>
+              <a:t>+</a:t>
+            </a:r>
+            <a:br/>
+            <a:r>
+              <a:rPr>
+                <a:solidFill>
+                  <a:srgbClr val="003B4F"/>
+                </a:solidFill>
+                <a:latin typeface="Courier"/>
+              </a:rPr>
+              <a:t>  </a:t>
+            </a:r>
+            <a:r>
+              <a:rPr>
+                <a:solidFill>
+                  <a:srgbClr val="4758AB"/>
+                </a:solidFill>
+                <a:latin typeface="Courier"/>
+              </a:rPr>
+              <a:t>theme_minimal</a:t>
+            </a:r>
+            <a:r>
+              <a:rPr>
+                <a:solidFill>
+                  <a:srgbClr val="003B4F"/>
+                </a:solidFill>
+                <a:latin typeface="Courier"/>
+              </a:rPr>
+              <a:t>() </a:t>
+            </a:r>
+            <a:r>
+              <a:rPr>
+                <a:solidFill>
+                  <a:srgbClr val="5E5E5E"/>
+                </a:solidFill>
+                <a:latin typeface="Courier"/>
+              </a:rPr>
+              <a:t>+</a:t>
+            </a:r>
+            <a:br/>
+            <a:r>
+              <a:rPr>
+                <a:solidFill>
+                  <a:srgbClr val="003B4F"/>
+                </a:solidFill>
+                <a:latin typeface="Courier"/>
+              </a:rPr>
+              <a:t>  </a:t>
+            </a:r>
+            <a:r>
+              <a:rPr>
+                <a:solidFill>
+                  <a:srgbClr val="4758AB"/>
+                </a:solidFill>
+                <a:latin typeface="Courier"/>
+              </a:rPr>
+              <a:t>theme</a:t>
+            </a:r>
+            <a:r>
+              <a:rPr>
+                <a:solidFill>
+                  <a:srgbClr val="003B4F"/>
+                </a:solidFill>
+                <a:latin typeface="Courier"/>
+              </a:rPr>
+              <a:t>(</a:t>
+            </a:r>
+            <a:r>
+              <a:rPr>
+                <a:solidFill>
+                  <a:srgbClr val="657422"/>
+                </a:solidFill>
+                <a:latin typeface="Courier"/>
+              </a:rPr>
+              <a:t>legend.position =</a:t>
+            </a:r>
+            <a:r>
+              <a:rPr>
+                <a:solidFill>
+                  <a:srgbClr val="003B4F"/>
+                </a:solidFill>
+                <a:latin typeface="Courier"/>
+              </a:rPr>
+              <a:t> </a:t>
+            </a:r>
+            <a:r>
+              <a:rPr>
+                <a:solidFill>
+                  <a:srgbClr val="20794D"/>
+                </a:solidFill>
+                <a:latin typeface="Courier"/>
+              </a:rPr>
+              <a:t>"none"</a:t>
+            </a:r>
+            <a:r>
+              <a:rPr>
+                <a:solidFill>
+                  <a:srgbClr val="003B4F"/>
+                </a:solidFill>
+                <a:latin typeface="Courier"/>
+              </a:rPr>
+              <a:t>)</a:t>
+            </a:r>
+            <a:br/>
+            <a:br/>
+            <a:r>
+              <a:rPr>
+                <a:solidFill>
+                  <a:srgbClr val="003B4F"/>
+                </a:solidFill>
+                <a:latin typeface="Courier"/>
+              </a:rPr>
+              <a:t>mass_emm_plot</a:t>
+            </a:r>
+          </a:p>
+        </p:txBody>
+      </p:sp>
+      <p:pic>
+        <p:nvPicPr>
+          <p:cNvPr descr="one_way_anova_lecture_files/figure-pptx/emmeans-plot-10-1.png" id="0" name="Picture 1"/>
+          <p:cNvPicPr>
+            <a:picLocks noGrp="1" noChangeAspect="1"/>
+          </p:cNvPicPr>
+          <p:nvPr/>
+        </p:nvPicPr>
+        <p:blipFill>
+          <a:blip r:embed="rId2"/>
+          <a:stretch>
+            <a:fillRect/>
+          </a:stretch>
+        </p:blipFill>
+        <p:spPr bwMode="auto">
+          <a:xfrm>
+            <a:off x="127000" y="1562100"/>
+            <a:ext cx="4432300" cy="2730500"/>
+          </a:xfrm>
+          <a:prstGeom prst="rect">
+            <a:avLst/>
+          </a:prstGeom>
+          <a:noFill/>
+          <a:ln w="9525">
+            <a:noFill/>
+            <a:headEnd/>
+            <a:tailEnd/>
+          </a:ln>
+        </p:spPr>
+      </p:pic>
+      <p:sp>
+        <p:nvSpPr>
+          <p:cNvPr id="5" name="Text Placeholder 4"/>
+          <p:cNvSpPr>
+            <a:spLocks noGrp="1"/>
+          </p:cNvSpPr>
+          <p:nvPr>
+            <p:ph idx="3" sz="quarter" type="body"/>
+          </p:nvPr>
+        </p:nvSpPr>
+        <p:spPr/>
+        <p:txBody>
+          <a:bodyPr/>
+          <a:lstStyle/>
+          <a:p>
+            <a:pPr lvl="0" indent="0" marL="0">
+              <a:buNone/>
+            </a:pPr>
+            <a:r>
+              <a:rPr b="1"/>
+              <a:t>Estimated marginal means</a:t>
+            </a:r>
+            <a:r>
+              <a:rPr/>
+              <a:t> with 95% confidence intervals.</a:t>
+            </a:r>
+          </a:p>
+          <a:p>
+            <a:pPr lvl="0"/>
+            <a:r>
+              <a:rPr/>
+              <a:t>Non-overlapping intervals hint at real differences</a:t>
+            </a:r>
+          </a:p>
+          <a:p>
+            <a:pPr lvl="0"/>
+            <a:r>
+              <a:rPr/>
+              <a:t>Pair this plot with the letters for a publication-ready figure</a:t>
+            </a:r>
+          </a:p>
+          <a:p>
+            <a:pPr lvl="0" indent="0" marL="0">
+              <a:buNone/>
+            </a:pPr>
+            <a:r>
+              <a:rPr/>
+              <a:t>The emmeans plot is the ANOVA cousin of Lecture 03’s mean ± SE plot.</a:t>
+            </a:r>
+          </a:p>
+        </p:txBody>
+      </p:sp>
+    </p:spTree>
+  </p:cSld>
+</p:sld>
+</file>
+
+<file path=ppt/slides/slide3.xml><?xml version="1.0" encoding="utf-8"?>
+<p:sld xmlns:a="http://schemas.openxmlformats.org/drawingml/2006/main" xmlns:r="http://schemas.openxmlformats.org/officeDocument/2006/relationships" xmlns:p="http://schemas.openxmlformats.org/presentationml/2006/main">
+  <p:cSld>
+    <p:spTree>
+      <p:nvGrpSpPr>
+        <p:cNvPr id="1" name=""/>
+        <p:cNvGrpSpPr/>
+        <p:nvPr/>
+      </p:nvGrpSpPr>
+      <p:grpSpPr>
+        <a:xfrm>
+          <a:off x="0" y="0"/>
+          <a:ext cx="0" cy="0"/>
+          <a:chOff x="0" y="0"/>
+          <a:chExt cx="0" cy="0"/>
+        </a:xfrm>
+      </p:grpSpPr>
+      <p:sp>
+        <p:nvSpPr>
+          <p:cNvPr id="2" name="Title 1"/>
+          <p:cNvSpPr>
+            <a:spLocks noGrp="1"/>
+          </p:cNvSpPr>
+          <p:nvPr>
+            <p:ph type="title"/>
+          </p:nvPr>
+        </p:nvSpPr>
+        <p:spPr>
+          <a:xfrm>
+            <a:off x="0" y="0"/>
+            <a:ext cx="9144000" cy="602780"/>
+          </a:xfrm>
+          <a:solidFill>
+            <a:srgbClr val="1A1A2E"/>
+          </a:solidFill>
+        </p:spPr>
+        <p:txBody>
+          <a:bodyPr/>
+          <a:lstStyle/>
+          <a:p>
+            <a:pPr lvl="0" indent="0" marL="0">
+              <a:buNone/>
+            </a:pPr>
+            <a:r>
+              <a:rPr/>
+              <a:t>Goals for today</a:t>
+            </a:r>
+          </a:p>
+        </p:txBody>
+      </p:sp>
+      <p:sp>
+        <p:nvSpPr>
+          <p:cNvPr id="3" name="Content Placeholder 2"/>
+          <p:cNvSpPr>
+            <a:spLocks noGrp="1"/>
+          </p:cNvSpPr>
+          <p:nvPr>
+            <p:ph idx="1" sz="half"/>
+          </p:nvPr>
+        </p:nvSpPr>
+        <p:spPr/>
+        <p:txBody>
+          <a:bodyPr/>
+          <a:lstStyle/>
+          <a:p>
+            <a:pPr lvl="0"/>
+            <a:r>
+              <a:rPr/>
+              <a:t>Understand </a:t>
+            </a:r>
+            <a:r>
+              <a:rPr b="1"/>
+              <a:t>why</a:t>
+            </a:r>
+            <a:r>
+              <a:rPr/>
+              <a:t> we don’t just run many t-tests</a:t>
+            </a:r>
+          </a:p>
+          <a:p>
+            <a:pPr lvl="0"/>
+            <a:r>
+              <a:rPr/>
+              <a:t>See how the </a:t>
+            </a:r>
+            <a:r>
+              <a:rPr b="1"/>
+              <a:t>F-statistic</a:t>
+            </a:r>
+            <a:r>
+              <a:rPr/>
+              <a:t> compares </a:t>
+            </a:r>
+            <a:r>
+              <a:rPr i="1"/>
+              <a:t>between-</a:t>
+            </a:r>
+            <a:r>
+              <a:rPr/>
+              <a:t> vs </a:t>
+            </a:r>
+            <a:r>
+              <a:rPr i="1"/>
+              <a:t>within-</a:t>
+            </a:r>
+            <a:r>
+              <a:rPr/>
+              <a:t>group variance</a:t>
+            </a:r>
+          </a:p>
+          <a:p>
+            <a:pPr lvl="0"/>
+            <a:r>
+              <a:rPr/>
+              <a:t>State ANOVA </a:t>
+            </a:r>
+            <a:r>
+              <a:rPr b="1"/>
+              <a:t>hypotheses</a:t>
+            </a:r>
+            <a:r>
+              <a:rPr/>
+              <a:t> (H₀: all means equal)</a:t>
+            </a:r>
+          </a:p>
+          <a:p>
+            <a:pPr lvl="0"/>
+            <a:r>
+              <a:rPr b="1"/>
+              <a:t>Check assumptions</a:t>
+            </a:r>
+            <a:r>
+              <a:rPr/>
+              <a:t> — normality of residuals, equal variance</a:t>
+            </a:r>
+          </a:p>
+          <a:p>
+            <a:pPr lvl="0"/>
+            <a:r>
+              <a:rPr/>
+              <a:t>Run it two ways: </a:t>
+            </a:r>
+            <a:r>
+              <a:rPr>
+                <a:latin typeface="Courier"/>
+              </a:rPr>
+              <a:t>aov()</a:t>
+            </a:r>
+            <a:r>
+              <a:rPr/>
+              <a:t> and </a:t>
+            </a:r>
+            <a:r>
+              <a:rPr b="1">
+                <a:latin typeface="Courier"/>
+              </a:rPr>
+              <a:t>car::Anova()</a:t>
+            </a:r>
+          </a:p>
+          <a:p>
+            <a:pPr lvl="0"/>
+            <a:r>
+              <a:rPr/>
+              <a:t>Find </a:t>
+            </a:r>
+            <a:r>
+              <a:rPr b="1"/>
+              <a:t>which</a:t>
+            </a:r>
+            <a:r>
+              <a:rPr/>
+              <a:t> groups differ with </a:t>
+            </a:r>
+            <a:r>
+              <a:rPr b="1">
+                <a:latin typeface="Courier"/>
+              </a:rPr>
+              <a:t>emmeans</a:t>
+            </a:r>
+            <a:r>
+              <a:rPr/>
+              <a:t> post-hoc tests</a:t>
+            </a:r>
+          </a:p>
+        </p:txBody>
+      </p:sp>
+      <p:sp>
+        <p:nvSpPr>
+          <p:cNvPr id="4" name="Content Placeholder 3"/>
+          <p:cNvSpPr>
+            <a:spLocks noGrp="1"/>
+          </p:cNvSpPr>
+          <p:nvPr>
+            <p:ph idx="2" sz="half"/>
+          </p:nvPr>
+        </p:nvSpPr>
+        <p:spPr/>
+        <p:txBody>
+          <a:bodyPr/>
+          <a:lstStyle/>
+          <a:p>
+            <a:pPr lvl="0" indent="0" marL="0">
+              <a:buNone/>
+            </a:pPr>
+            <a:r>
+              <a:rPr b="1"/>
+              <a:t>Tools today:</a:t>
+            </a:r>
+          </a:p>
+          <a:p>
+            <a:pPr lvl="0"/>
+            <a:r>
+              <a:rPr>
+                <a:latin typeface="Courier"/>
+              </a:rPr>
+              <a:t>palmerpenguins</a:t>
+            </a:r>
+            <a:r>
+              <a:rPr/>
+              <a:t>, </a:t>
+            </a:r>
+            <a:r>
+              <a:rPr>
+                <a:latin typeface="Courier"/>
+              </a:rPr>
+              <a:t>tidyverse</a:t>
+            </a:r>
+          </a:p>
+          <a:p>
+            <a:pPr lvl="0"/>
+            <a:r>
+              <a:rPr>
+                <a:latin typeface="Courier"/>
+              </a:rPr>
+              <a:t>car</a:t>
+            </a:r>
+            <a:r>
+              <a:rPr/>
+              <a:t> — Levene’s test, </a:t>
+            </a:r>
+            <a:r>
+              <a:rPr>
+                <a:latin typeface="Courier"/>
+              </a:rPr>
+              <a:t>Anova()</a:t>
+            </a:r>
+          </a:p>
+          <a:p>
+            <a:pPr lvl="0"/>
+            <a:r>
+              <a:rPr>
+                <a:latin typeface="Courier"/>
+              </a:rPr>
+              <a:t>emmeans</a:t>
+            </a:r>
+            <a:r>
+              <a:rPr/>
+              <a:t>, </a:t>
+            </a:r>
+            <a:r>
+              <a:rPr>
+                <a:latin typeface="Courier"/>
+              </a:rPr>
+              <a:t>multcomp</a:t>
+            </a:r>
+            <a:r>
+              <a:rPr/>
+              <a:t> — post-hoc</a:t>
+            </a:r>
+          </a:p>
+          <a:p>
+            <a:pPr lvl="0" indent="0" marL="0">
+              <a:buNone/>
+            </a:pPr>
+            <a:r>
+              <a:rPr b="1"/>
+              <a:t>Textbook:</a:t>
+            </a:r>
+          </a:p>
+          <a:p>
+            <a:pPr lvl="0"/>
+            <a:r>
+              <a:rPr/>
+              <a:t>📖 Whitlock &amp; Schluter, </a:t>
+            </a:r>
+            <a:r>
+              <a:rPr b="1"/>
+              <a:t>Ch. 15 — ANOVA</a:t>
+            </a:r>
+          </a:p>
+          <a:p>
+            <a:pPr lvl="0"/>
+            <a:r>
+              <a:rPr/>
+              <a:t>📖 </a:t>
+            </a:r>
+            <a:r>
+              <a:rPr>
+                <a:hlinkClick r:id="rId2"/>
+              </a:rPr>
+              <a:t>R4DS Ch. 16 — Factors</a:t>
+            </a:r>
+          </a:p>
+          <a:p>
+            <a:pPr lvl="0"/>
+            <a:r>
+              <a:rPr/>
+              <a:t>📖 </a:t>
+            </a:r>
+            <a:r>
+              <a:rPr>
+                <a:hlinkClick r:id="rId3"/>
+              </a:rPr>
+              <a:t>R4DS Ch. 9 — Layers</a:t>
+            </a:r>
+          </a:p>
+          <a:p>
+            <a:pPr lvl="0" indent="0" marL="0">
+              <a:buNone/>
+            </a:pPr>
+            <a:r>
+              <a:rPr b="1"/>
+              <a:t>Naming:</a:t>
+            </a:r>
+            <a:r>
+              <a:rPr/>
+              <a:t> models → </a:t>
+            </a:r>
+            <a:r>
+              <a:rPr>
+                <a:latin typeface="Courier"/>
+              </a:rPr>
+              <a:t>_model</a:t>
+            </a:r>
+            <a:r>
+              <a:rPr/>
+              <a:t>, plots → </a:t>
+            </a:r>
+            <a:r>
+              <a:rPr>
+                <a:latin typeface="Courier"/>
+              </a:rPr>
+              <a:t>_plot</a:t>
+            </a:r>
+          </a:p>
+        </p:txBody>
+      </p:sp>
+    </p:spTree>
+  </p:cSld>
+</p:sld>
+</file>
+
+<file path=ppt/slides/slide30.xml><?xml version="1.0" encoding="utf-8"?>
+<p:sld xmlns:a="http://schemas.openxmlformats.org/drawingml/2006/main" xmlns:r="http://schemas.openxmlformats.org/officeDocument/2006/relationships" xmlns:p="http://schemas.openxmlformats.org/presentationml/2006/main">
+  <p:cSld>
+    <p:spTree>
+      <p:nvGrpSpPr>
+        <p:cNvPr id="1" name=""/>
+        <p:cNvGrpSpPr/>
+        <p:nvPr/>
+      </p:nvGrpSpPr>
+      <p:grpSpPr>
+        <a:xfrm>
+          <a:off x="0" y="0"/>
+          <a:ext cx="0" cy="0"/>
+          <a:chOff x="0" y="0"/>
+          <a:chExt cx="0" cy="0"/>
+        </a:xfrm>
+      </p:grpSpPr>
+      <p:sp>
+        <p:nvSpPr>
+          <p:cNvPr id="2" name="Title 1"/>
+          <p:cNvSpPr>
+            <a:spLocks noGrp="1"/>
+          </p:cNvSpPr>
+          <p:nvPr>
+            <p:ph type="title"/>
+          </p:nvPr>
+        </p:nvSpPr>
+        <p:spPr>
+          <a:xfrm>
+            <a:off x="0" y="0"/>
+            <a:ext cx="9144000" cy="602780"/>
+          </a:xfrm>
+          <a:solidFill>
+            <a:srgbClr val="1A1A2E"/>
+          </a:solidFill>
+        </p:spPr>
+        <p:txBody>
+          <a:bodyPr/>
+          <a:lstStyle/>
+          <a:p>
+            <a:pPr lvl="0" indent="0" marL="0">
+              <a:buNone/>
+            </a:pPr>
+            <a:r>
+              <a:rPr/>
+              <a:t>How to Report an ANOVA</a:t>
+            </a:r>
+          </a:p>
+        </p:txBody>
+      </p:sp>
+      <p:sp>
+        <p:nvSpPr>
+          <p:cNvPr id="3" name="Content Placeholder 2"/>
+          <p:cNvSpPr>
+            <a:spLocks noGrp="1"/>
+          </p:cNvSpPr>
+          <p:nvPr>
+            <p:ph idx="1" sz="half"/>
+          </p:nvPr>
+        </p:nvSpPr>
+        <p:spPr/>
+        <p:txBody>
+          <a:bodyPr/>
+          <a:lstStyle/>
+          <a:p>
+            <a:pPr lvl="0" indent="0">
+              <a:buNone/>
+            </a:pPr>
+            <a:r>
+              <a:rPr>
+                <a:solidFill>
+                  <a:srgbClr val="5E5E5E"/>
+                </a:solidFill>
+                <a:latin typeface="Courier"/>
+              </a:rPr>
+              <a:t># Pull the F table values for reporting ---------------</a:t>
+            </a:r>
+            <a:br/>
+            <a:r>
+              <a:rPr>
+                <a:solidFill>
+                  <a:srgbClr val="003B4F"/>
+                </a:solidFill>
+                <a:latin typeface="Courier"/>
+              </a:rPr>
+              <a:t>mass_tab &lt;- </a:t>
+            </a:r>
+            <a:r>
+              <a:rPr>
+                <a:solidFill>
+                  <a:srgbClr val="4758AB"/>
+                </a:solidFill>
+                <a:latin typeface="Courier"/>
+              </a:rPr>
+              <a:t>Anova</a:t>
+            </a:r>
+            <a:r>
+              <a:rPr>
+                <a:solidFill>
+                  <a:srgbClr val="003B4F"/>
+                </a:solidFill>
+                <a:latin typeface="Courier"/>
+              </a:rPr>
+              <a:t>(mass_model, </a:t>
+            </a:r>
+            <a:r>
+              <a:rPr>
+                <a:solidFill>
+                  <a:srgbClr val="657422"/>
+                </a:solidFill>
+                <a:latin typeface="Courier"/>
+              </a:rPr>
+              <a:t>type =</a:t>
+            </a:r>
+            <a:r>
+              <a:rPr>
+                <a:solidFill>
+                  <a:srgbClr val="003B4F"/>
+                </a:solidFill>
+                <a:latin typeface="Courier"/>
+              </a:rPr>
+              <a:t> </a:t>
+            </a:r>
+            <a:r>
+              <a:rPr>
+                <a:solidFill>
+                  <a:srgbClr val="20794D"/>
+                </a:solidFill>
+                <a:latin typeface="Courier"/>
+              </a:rPr>
+              <a:t>"II"</a:t>
+            </a:r>
+            <a:r>
+              <a:rPr>
+                <a:solidFill>
+                  <a:srgbClr val="003B4F"/>
+                </a:solidFill>
+                <a:latin typeface="Courier"/>
+              </a:rPr>
+              <a:t>)</a:t>
+            </a:r>
+            <a:br/>
+            <a:r>
+              <a:rPr>
+                <a:solidFill>
+                  <a:srgbClr val="003B4F"/>
+                </a:solidFill>
+                <a:latin typeface="Courier"/>
+              </a:rPr>
+              <a:t>mass_tab</a:t>
+            </a:r>
+          </a:p>
+          <a:p>
+            <a:pPr lvl="0" indent="0">
+              <a:buNone/>
+            </a:pPr>
+            <a:r>
+              <a:rPr>
+                <a:latin typeface="Courier"/>
+              </a:rPr>
+              <a:t>Anova Table (Type II tests)
+Response: body_mass_g
+             Sum Sq  Df F value    Pr(&gt;F)    
+species   146864214   2  343.63 &lt; 2.2e-16 ***
+Residuals  72443483 339                      
+---
+Signif. codes:  0 '***' 0.001 '**' 0.01 '*' 0.05 '.' 0.1 ' ' 1</a:t>
+            </a:r>
+          </a:p>
+          <a:p>
+            <a:pPr lvl="0" indent="0" marL="1270000">
+              <a:buNone/>
+            </a:pPr>
+            <a:r>
+              <a:rPr sz="2000" i="1"/>
+              <a:t>“Body mass differed significantly among the three penguin species (one-way ANOVA: F(2, 339) = 343.6, p &lt; 0.001). Tukey-adjusted comparisons showed all three species differed, with Gentoo heaviest and Adelie lightest.”</a:t>
+            </a:r>
+          </a:p>
+        </p:txBody>
+      </p:sp>
+      <p:sp>
+        <p:nvSpPr>
+          <p:cNvPr id="4" name="Content Placeholder 3"/>
+          <p:cNvSpPr>
+            <a:spLocks noGrp="1"/>
+          </p:cNvSpPr>
+          <p:nvPr>
+            <p:ph idx="2" sz="half"/>
+          </p:nvPr>
+        </p:nvSpPr>
+        <p:spPr/>
+        <p:txBody>
+          <a:bodyPr/>
+          <a:lstStyle/>
+          <a:p>
+            <a:pPr lvl="0" indent="0" marL="0">
+              <a:buNone/>
+            </a:pPr>
+            <a:r>
+              <a:rPr b="1"/>
+              <a:t>Always include:</a:t>
+            </a:r>
+          </a:p>
+          <a:p>
+            <a:pPr lvl="0"/>
+            <a:r>
+              <a:rPr/>
+              <a:t>Test type (one-way ANOVA)</a:t>
+            </a:r>
+          </a:p>
+          <a:p>
+            <a:pPr lvl="0"/>
+            <a:r>
+              <a:rPr b="1"/>
+              <a:t>F</a:t>
+            </a:r>
+            <a:r>
+              <a:rPr/>
+              <a:t>, both </a:t>
+            </a:r>
+            <a:r>
+              <a:rPr b="1"/>
+              <a:t>df</a:t>
+            </a:r>
+            <a:r>
+              <a:rPr/>
+              <a:t>, and the </a:t>
+            </a:r>
+            <a:r>
+              <a:rPr b="1"/>
+              <a:t>p-value</a:t>
+            </a:r>
+          </a:p>
+          <a:p>
+            <a:pPr lvl="0"/>
+            <a:r>
+              <a:rPr/>
+              <a:t>The post-hoc result (which groups differ)</a:t>
+            </a:r>
+          </a:p>
+          <a:p>
+            <a:pPr lvl="0"/>
+            <a:r>
+              <a:rPr/>
+              <a:t>Group means ± SE or CI</a:t>
+            </a:r>
+          </a:p>
+          <a:p>
+            <a:pPr lvl="0" indent="0" marL="0">
+              <a:buNone/>
+            </a:pPr>
+            <a:r>
+              <a:rPr b="1"/>
+              <a:t>Never</a:t>
+            </a:r>
+            <a:r>
+              <a:rPr/>
+              <a:t> write “p = 0.000” — use “p &lt; 0.001”.</a:t>
+            </a:r>
+          </a:p>
+        </p:txBody>
+      </p:sp>
+    </p:spTree>
+  </p:cSld>
+</p:sld>
+</file>
+
+<file path=ppt/slides/slide31.xml><?xml version="1.0" encoding="utf-8"?>
+<p:sld xmlns:a="http://schemas.openxmlformats.org/drawingml/2006/main" xmlns:r="http://schemas.openxmlformats.org/officeDocument/2006/relationships" xmlns:p="http://schemas.openxmlformats.org/presentationml/2006/main">
+  <p:cSld>
+    <p:spTree>
+      <p:nvGrpSpPr>
+        <p:cNvPr id="1" name=""/>
+        <p:cNvGrpSpPr/>
+        <p:nvPr/>
+      </p:nvGrpSpPr>
+      <p:grpSpPr>
+        <a:xfrm>
+          <a:off x="0" y="0"/>
+          <a:ext cx="0" cy="0"/>
+          <a:chOff x="0" y="0"/>
+          <a:chExt cx="0" cy="0"/>
+        </a:xfrm>
+      </p:grpSpPr>
+      <p:sp>
+        <p:nvSpPr>
+          <p:cNvPr id="2" name="Title 1"/>
+          <p:cNvSpPr>
+            <a:spLocks noGrp="1"/>
+          </p:cNvSpPr>
+          <p:nvPr>
+            <p:ph type="title"/>
+          </p:nvPr>
+        </p:nvSpPr>
+        <p:spPr>
+          <a:xfrm>
+            <a:off x="0" y="0"/>
+            <a:ext cx="9144000" cy="582780"/>
+          </a:xfrm>
+        </p:spPr>
+        <p:txBody>
+          <a:bodyPr/>
+          <a:lstStyle/>
+          <a:p>
+            <a:pPr lvl="0" indent="0" marL="0">
+              <a:buNone/>
+            </a:pPr>
+            <a:r>
+              <a:rPr/>
+              <a:t>🛑 Pause — Do Activity Parts 9–11 Now</a:t>
+            </a:r>
+          </a:p>
+        </p:txBody>
+      </p:sp>
+      <p:sp>
+        <p:nvSpPr>
+          <p:cNvPr id="3" name="Content Placeholder 2"/>
+          <p:cNvSpPr>
+            <a:spLocks noGrp="1"/>
+          </p:cNvSpPr>
+          <p:nvPr>
+            <p:ph idx="1"/>
+          </p:nvPr>
+        </p:nvSpPr>
+        <p:spPr/>
+        <p:txBody>
+          <a:bodyPr/>
+          <a:lstStyle/>
+          <a:p>
+            <a:pPr lvl="0" indent="0" marL="0">
+              <a:buNone/>
+            </a:pPr>
+            <a:r>
+              <a:rPr/>
+              <a:t>Run the emmeans pairwise test, get the letters, plot the means ± CI, and write your results sentence. Predict which species differ before you run the comparisons.</a:t>
+            </a:r>
+          </a:p>
+        </p:txBody>
+      </p:sp>
+    </p:spTree>
+  </p:cSld>
+</p:sld>
+</file>
+
+<file path=ppt/slides/slide32.xml><?xml version="1.0" encoding="utf-8"?>
+<p:sld xmlns:a="http://schemas.openxmlformats.org/drawingml/2006/main" xmlns:r="http://schemas.openxmlformats.org/officeDocument/2006/relationships" xmlns:p="http://schemas.openxmlformats.org/presentationml/2006/main">
+  <p:cSld>
+    <p:spTree>
+      <p:nvGrpSpPr>
+        <p:cNvPr id="1" name=""/>
+        <p:cNvGrpSpPr/>
+        <p:nvPr/>
+      </p:nvGrpSpPr>
+      <p:grpSpPr>
+        <a:xfrm>
+          <a:off x="0" y="0"/>
+          <a:ext cx="0" cy="0"/>
+          <a:chOff x="0" y="0"/>
+          <a:chExt cx="0" cy="0"/>
+        </a:xfrm>
+      </p:grpSpPr>
+      <p:sp>
+        <p:nvSpPr>
+          <p:cNvPr id="2" name="Title 1"/>
+          <p:cNvSpPr>
+            <a:spLocks noGrp="1"/>
+          </p:cNvSpPr>
+          <p:nvPr>
+            <p:ph type="title"/>
+          </p:nvPr>
+        </p:nvSpPr>
+        <p:spPr>
+          <a:xfrm>
+            <a:off x="0" y="0"/>
+            <a:ext cx="9144000" cy="602780"/>
+          </a:xfrm>
+          <a:solidFill>
+            <a:srgbClr val="1A1A2E"/>
+          </a:solidFill>
+        </p:spPr>
+        <p:txBody>
+          <a:bodyPr/>
+          <a:lstStyle/>
+          <a:p>
+            <a:pPr lvl="0" indent="0" marL="0">
+              <a:buNone/>
+            </a:pPr>
+            <a:r>
+              <a:rPr/>
+              <a:t>What We Learned Today</a:t>
+            </a:r>
+          </a:p>
+        </p:txBody>
+      </p:sp>
+      <p:sp>
+        <p:nvSpPr>
+          <p:cNvPr id="3" name="Content Placeholder 2"/>
+          <p:cNvSpPr>
+            <a:spLocks noGrp="1"/>
+          </p:cNvSpPr>
+          <p:nvPr>
+            <p:ph idx="1" sz="half"/>
+          </p:nvPr>
+        </p:nvSpPr>
+        <p:spPr/>
+        <p:txBody>
+          <a:bodyPr/>
+          <a:lstStyle/>
+          <a:p>
+            <a:pPr lvl="0" indent="0" marL="0">
+              <a:buNone/>
+            </a:pPr>
+            <a:r>
+              <a:rPr b="1"/>
+              <a:t>Concepts:</a:t>
+            </a:r>
+          </a:p>
+          <a:p>
+            <a:pPr lvl="0"/>
+            <a:r>
+              <a:rPr/>
+              <a:t>Many t-tests inflate the false-positive rate — </a:t>
+            </a:r>
+            <a:r>
+              <a:rPr b="1"/>
+              <a:t>ANOVA asks once</a:t>
+            </a:r>
+          </a:p>
+          <a:p>
+            <a:pPr lvl="0"/>
+            <a:r>
+              <a:rPr b="1"/>
+              <a:t>F</a:t>
+            </a:r>
+            <a:r>
+              <a:rPr/>
+              <a:t> = between-group ÷ within-group variance (signal ÷ noise)</a:t>
+            </a:r>
+          </a:p>
+          <a:p>
+            <a:pPr lvl="0"/>
+            <a:r>
+              <a:rPr/>
+              <a:t>Assumptions: </a:t>
+            </a:r>
+            <a:r>
+              <a:rPr b="1"/>
+              <a:t>normal residuals</a:t>
+            </a:r>
+            <a:r>
+              <a:rPr/>
+              <a:t>, </a:t>
+            </a:r>
+            <a:r>
+              <a:rPr b="1"/>
+              <a:t>equal variance</a:t>
+            </a:r>
+            <a:r>
+              <a:rPr/>
+              <a:t> (Levene)</a:t>
+            </a:r>
+          </a:p>
+          <a:p>
+            <a:pPr lvl="0"/>
+            <a:r>
+              <a:rPr/>
+              <a:t>ANOVA rejects H₀ for the </a:t>
+            </a:r>
+            <a:r>
+              <a:rPr i="1"/>
+              <a:t>group</a:t>
+            </a:r>
+            <a:r>
+              <a:rPr/>
+              <a:t>, but </a:t>
+            </a:r>
+            <a:r>
+              <a:rPr b="1"/>
+              <a:t>post-hoc</a:t>
+            </a:r>
+            <a:r>
+              <a:rPr/>
+              <a:t> finds </a:t>
+            </a:r>
+            <a:r>
+              <a:rPr i="1"/>
+              <a:t>which</a:t>
+            </a:r>
+            <a:r>
+              <a:rPr/>
+              <a:t> pairs differ</a:t>
+            </a:r>
+          </a:p>
+          <a:p>
+            <a:pPr lvl="0"/>
+            <a:r>
+              <a:rPr b="1"/>
+              <a:t>Tukey adjustment</a:t>
+            </a:r>
+            <a:r>
+              <a:rPr/>
+              <a:t> keeps the family-wise error at 0.05</a:t>
+            </a:r>
+          </a:p>
+          <a:p>
+            <a:pPr lvl="0" indent="0" marL="0">
+              <a:buNone/>
+            </a:pPr>
+            <a:r>
+              <a:rPr b="1"/>
+              <a:t>R skills:</a:t>
+            </a:r>
+          </a:p>
+          <a:p>
+            <a:pPr lvl="0"/>
+            <a:r>
+              <a:rPr>
+                <a:latin typeface="Courier"/>
+              </a:rPr>
+              <a:t>lm(Y ~ group)</a:t>
+            </a:r>
+            <a:r>
+              <a:rPr/>
+              <a:t> and </a:t>
+            </a:r>
+            <a:r>
+              <a:rPr>
+                <a:latin typeface="Courier"/>
+              </a:rPr>
+              <a:t>aov()</a:t>
+            </a:r>
+            <a:r>
+              <a:rPr/>
+              <a:t> + </a:t>
+            </a:r>
+            <a:r>
+              <a:rPr>
+                <a:latin typeface="Courier"/>
+              </a:rPr>
+              <a:t>summary()</a:t>
+            </a:r>
+          </a:p>
+          <a:p>
+            <a:pPr lvl="0"/>
+            <a:r>
+              <a:rPr>
+                <a:latin typeface="Courier"/>
+              </a:rPr>
+              <a:t>car::Anova(model, type = "II")</a:t>
+            </a:r>
+          </a:p>
+          <a:p>
+            <a:pPr lvl="0"/>
+            <a:r>
+              <a:rPr>
+                <a:latin typeface="Courier"/>
+              </a:rPr>
+              <a:t>leveneTest()</a:t>
+            </a:r>
+            <a:r>
+              <a:rPr/>
+              <a:t>, </a:t>
+            </a:r>
+            <a:r>
+              <a:rPr>
+                <a:latin typeface="Courier"/>
+              </a:rPr>
+              <a:t>shapiro.test(residuals())</a:t>
+            </a:r>
+          </a:p>
+          <a:p>
+            <a:pPr lvl="0"/>
+            <a:r>
+              <a:rPr>
+                <a:latin typeface="Courier"/>
+              </a:rPr>
+              <a:t>emmeans(model, pairwise ~ group)</a:t>
+            </a:r>
+            <a:r>
+              <a:rPr/>
+              <a:t> + </a:t>
+            </a:r>
+            <a:r>
+              <a:rPr>
+                <a:latin typeface="Courier"/>
+              </a:rPr>
+              <a:t>multcomp::cld()</a:t>
+            </a:r>
+          </a:p>
+        </p:txBody>
+      </p:sp>
+      <p:sp>
+        <p:nvSpPr>
+          <p:cNvPr id="4" name="Content Placeholder 3"/>
+          <p:cNvSpPr>
+            <a:spLocks noGrp="1"/>
+          </p:cNvSpPr>
+          <p:nvPr>
+            <p:ph idx="2" sz="half"/>
+          </p:nvPr>
+        </p:nvSpPr>
+        <p:spPr/>
+        <p:txBody>
+          <a:bodyPr/>
+          <a:lstStyle/>
+          <a:p>
+            <a:pPr lvl="0" indent="0" marL="0">
+              <a:buNone/>
+            </a:pPr>
+            <a:r>
+              <a:rPr b="1"/>
+              <a:t>References:</a:t>
+            </a:r>
+          </a:p>
+          <a:p>
+            <a:pPr lvl="0"/>
+            <a:r>
+              <a:rPr/>
+              <a:t>📖 W&amp;S Ch. 15 — ANOVA</a:t>
+            </a:r>
+          </a:p>
+          <a:p>
+            <a:pPr lvl="0"/>
+            <a:r>
+              <a:rPr/>
+              <a:t>📖 </a:t>
+            </a:r>
+            <a:r>
+              <a:rPr>
+                <a:hlinkClick r:id="rId2"/>
+              </a:rPr>
+              <a:t>R4DS Ch. 16 — Factors</a:t>
+            </a:r>
+          </a:p>
+          <a:p>
+            <a:pPr lvl="0"/>
+            <a:r>
+              <a:rPr/>
+              <a:t>📖 </a:t>
+            </a:r>
+            <a:r>
+              <a:rPr>
+                <a:hlinkClick r:id="rId3"/>
+              </a:rPr>
+              <a:t>emmeans vignettes</a:t>
+            </a:r>
+          </a:p>
+          <a:p>
+            <a:pPr lvl="0" indent="0" marL="0">
+              <a:buNone/>
+            </a:pPr>
+            <a:r>
+              <a:rPr b="1"/>
+              <a:t>Up next — Lecture 12:</a:t>
+            </a:r>
+          </a:p>
+          <a:p>
+            <a:pPr lvl="0"/>
+            <a:r>
+              <a:rPr b="1"/>
+              <a:t>Joins</a:t>
+            </a:r>
+            <a:r>
+              <a:rPr/>
+              <a:t> — combine two tables on a shared key</a:t>
+            </a:r>
+          </a:p>
+          <a:p>
+            <a:pPr lvl="0"/>
+            <a:r>
+              <a:rPr/>
+              <a:t>The prerequisite for bigger datasets — and for maps</a:t>
+            </a:r>
+          </a:p>
+        </p:txBody>
+      </p:sp>
+    </p:spTree>
+  </p:cSld>
+</p:sld>
+</file>
+
+<file path=ppt/slides/slide4.xml><?xml version="1.0" encoding="utf-8"?>
+<p:sld xmlns:a="http://schemas.openxmlformats.org/drawingml/2006/main" xmlns:r="http://schemas.openxmlformats.org/officeDocument/2006/relationships" xmlns:p="http://schemas.openxmlformats.org/presentationml/2006/main">
+  <p:cSld>
+    <p:spTree>
+      <p:nvGrpSpPr>
+        <p:cNvPr id="1" name=""/>
+        <p:cNvGrpSpPr/>
+        <p:nvPr/>
+      </p:nvGrpSpPr>
+      <p:grpSpPr>
+        <a:xfrm>
+          <a:off x="0" y="0"/>
+          <a:ext cx="0" cy="0"/>
+          <a:chOff x="0" y="0"/>
+          <a:chExt cx="0" cy="0"/>
+        </a:xfrm>
+      </p:grpSpPr>
+      <p:sp>
+        <p:nvSpPr>
+          <p:cNvPr id="2" name="Title 1"/>
+          <p:cNvSpPr>
+            <a:spLocks noGrp="1"/>
+          </p:cNvSpPr>
+          <p:nvPr>
+            <p:ph type="title"/>
+          </p:nvPr>
+        </p:nvSpPr>
+        <p:spPr>
+          <a:xfrm>
+            <a:off x="0" y="0"/>
+            <a:ext cx="9144000" cy="602780"/>
+          </a:xfrm>
+          <a:solidFill>
+            <a:srgbClr val="1A1A2E"/>
+          </a:solidFill>
+        </p:spPr>
+        <p:txBody>
+          <a:bodyPr/>
+          <a:lstStyle/>
+          <a:p>
+            <a:pPr lvl="0" indent="0" marL="0">
+              <a:buNone/>
+            </a:pPr>
+            <a:r>
+              <a:rPr/>
+              <a:t>How to Use These Slides — Predict · Type · Run</a:t>
+            </a:r>
+          </a:p>
+        </p:txBody>
+      </p:sp>
+      <p:sp>
+        <p:nvSpPr>
+          <p:cNvPr id="3" name="Content Placeholder 2"/>
+          <p:cNvSpPr>
+            <a:spLocks noGrp="1"/>
+          </p:cNvSpPr>
+          <p:nvPr>
+            <p:ph idx="1" sz="half"/>
+          </p:nvPr>
+        </p:nvSpPr>
+        <p:spPr/>
+        <p:txBody>
+          <a:bodyPr/>
+          <a:lstStyle/>
+          <a:p>
+            <a:pPr lvl="0" indent="0" marL="0">
+              <a:buNone/>
+            </a:pPr>
+            <a:r>
+              <a:rPr/>
+              <a:t>This lecture runs in </a:t>
+            </a:r>
+            <a:r>
+              <a:rPr b="1"/>
+              <a:t>four short chunks</a:t>
+            </a:r>
+            <a:r>
+              <a:rPr/>
+              <a:t>. After each chunk you switch to the </a:t>
+            </a:r>
+            <a:r>
+              <a:rPr b="1"/>
+              <a:t>activity</a:t>
+            </a:r>
+            <a:r>
+              <a:rPr/>
+              <a:t> and type the code yourself.</a:t>
+            </a:r>
+          </a:p>
+          <a:p>
+            <a:pPr lvl="0" indent="0" marL="0">
+              <a:buNone/>
+            </a:pPr>
+            <a:r>
+              <a:rPr b="1"/>
+              <a:t>For every code block, do three things:</a:t>
+            </a:r>
+          </a:p>
+          <a:p>
+            <a:pPr lvl="0" indent="-342900" marL="342900">
+              <a:buAutoNum type="arabicPeriod"/>
+            </a:pPr>
+            <a:r>
+              <a:rPr b="1"/>
+              <a:t>Predict</a:t>
+            </a:r>
+            <a:r>
+              <a:rPr/>
+              <a:t> — before it runs, say what you think the output will be</a:t>
+            </a:r>
+          </a:p>
+          <a:p>
+            <a:pPr lvl="0" indent="-342900" marL="342900">
+              <a:buAutoNum type="arabicPeriod"/>
+            </a:pPr>
+            <a:r>
+              <a:rPr b="1"/>
+              <a:t>Type</a:t>
+            </a:r>
+            <a:r>
+              <a:rPr/>
+              <a:t> it out by hand — do not copy-paste</a:t>
+            </a:r>
+          </a:p>
+          <a:p>
+            <a:pPr lvl="0" indent="-342900" marL="342900">
+              <a:buAutoNum type="arabicPeriod"/>
+            </a:pPr>
+            <a:r>
+              <a:rPr b="1"/>
+              <a:t>Run</a:t>
+            </a:r>
+            <a:r>
+              <a:rPr/>
+              <a:t> it and compare to your prediction</a:t>
+            </a:r>
+          </a:p>
+        </p:txBody>
+      </p:sp>
+      <p:sp>
+        <p:nvSpPr>
+          <p:cNvPr id="4" name="Content Placeholder 3"/>
+          <p:cNvSpPr>
+            <a:spLocks noGrp="1"/>
+          </p:cNvSpPr>
+          <p:nvPr>
+            <p:ph idx="2" sz="half"/>
+          </p:nvPr>
+        </p:nvSpPr>
+        <p:spPr/>
+        <p:txBody>
+          <a:bodyPr/>
+          <a:lstStyle/>
+          <a:p>
+            <a:pPr lvl="0" indent="0" marL="1270000">
+              <a:buNone/>
+            </a:pPr>
+            <a:r>
+              <a:rPr sz="2000" b="1"/>
+              <a:t>Note</a:t>
+            </a:r>
+          </a:p>
+          <a:p>
+            <a:pPr lvl="0" indent="0" marL="1270000">
+              <a:buNone/>
+            </a:pPr>
+            <a:r>
+              <a:rPr sz="2000" b="1"/>
+              <a:t>✅ Why bother? (the evidence)</a:t>
+            </a:r>
+          </a:p>
+          <a:p>
+            <a:pPr lvl="0"/>
+            <a:r>
+              <a:rPr sz="2000" b="1"/>
+              <a:t>Predicting first</a:t>
+            </a:r>
+            <a:r>
+              <a:rPr sz="2000"/>
+              <a:t> forces you to </a:t>
+            </a:r>
+            <a:r>
+              <a:rPr sz="2000" i="1"/>
+              <a:t>retrieve</a:t>
+            </a:r>
+            <a:r>
+              <a:rPr sz="2000"/>
+              <a:t> what you know — the gap between guess and answer is what makes it stick.</a:t>
+            </a:r>
+          </a:p>
+          <a:p>
+            <a:pPr lvl="0"/>
+            <a:r>
+              <a:rPr sz="2000" b="1"/>
+              <a:t>Typing by hand</a:t>
+            </a:r>
+            <a:r>
+              <a:rPr sz="2000"/>
+              <a:t> builds the finger-memory and error-spotting that copy-paste skips.</a:t>
+            </a:r>
+          </a:p>
+          <a:p>
+            <a:pPr lvl="0"/>
+            <a:r>
+              <a:rPr sz="2000" b="1"/>
+              <a:t>Chunk → immediate practice</a:t>
+            </a:r>
+            <a:r>
+              <a:rPr sz="2000"/>
+              <a:t> keeps each idea in working memory long enough to form a lasting schema.</a:t>
+            </a:r>
+          </a:p>
+        </p:txBody>
+      </p:sp>
+    </p:spTree>
+  </p:cSld>
+</p:sld>
+</file>
+
+<file path=ppt/slides/slide5.xml><?xml version="1.0" encoding="utf-8"?>
+<p:sld xmlns:a="http://schemas.openxmlformats.org/drawingml/2006/main" xmlns:r="http://schemas.openxmlformats.org/officeDocument/2006/relationships" xmlns:p="http://schemas.openxmlformats.org/presentationml/2006/main">
+  <p:cSld>
+    <p:spTree>
+      <p:nvGrpSpPr>
+        <p:cNvPr id="1" name=""/>
+        <p:cNvGrpSpPr/>
+        <p:nvPr/>
+      </p:nvGrpSpPr>
+      <p:grpSpPr>
+        <a:xfrm>
+          <a:off x="0" y="0"/>
+          <a:ext cx="0" cy="0"/>
+          <a:chOff x="0" y="0"/>
+          <a:chExt cx="0" cy="0"/>
+        </a:xfrm>
+      </p:grpSpPr>
+      <p:sp>
+        <p:nvSpPr>
+          <p:cNvPr id="2" name="Title 1"/>
+          <p:cNvSpPr>
+            <a:spLocks noGrp="1"/>
+          </p:cNvSpPr>
+          <p:nvPr>
+            <p:ph type="title"/>
+          </p:nvPr>
+        </p:nvSpPr>
+        <p:spPr>
+          <a:xfrm>
+            <a:off x="0" y="0"/>
+            <a:ext cx="9144000" cy="582780"/>
+          </a:xfrm>
+        </p:spPr>
+        <p:txBody>
+          <a:bodyPr/>
+          <a:lstStyle/>
+          <a:p>
+            <a:pPr lvl="0" indent="0" marL="0">
+              <a:buNone/>
+            </a:pPr>
+            <a:r>
+              <a:rPr/>
+              <a:t>🧩 Chunk 1 of 4 · Why ANOVA &amp; the F-Statistic</a:t>
+            </a:r>
+          </a:p>
+        </p:txBody>
+      </p:sp>
+      <p:sp>
+        <p:nvSpPr>
+          <p:cNvPr id="3" name="Content Placeholder 2"/>
+          <p:cNvSpPr>
+            <a:spLocks noGrp="1"/>
+          </p:cNvSpPr>
+          <p:nvPr>
+            <p:ph idx="1"/>
+          </p:nvPr>
+        </p:nvSpPr>
+        <p:spPr/>
+        <p:txBody>
+          <a:bodyPr/>
+          <a:lstStyle/>
+          <a:p>
+            <a:pPr lvl="0" indent="0" marL="0">
+              <a:buNone/>
+            </a:pPr>
+            <a:r>
+              <a:rPr b="1"/>
+              <a:t>We will cover:</a:t>
+            </a:r>
+            <a:r>
+              <a:rPr/>
+              <a:t> why not many t-tests, what ANOVA asks, how F partitions variance, and a first look at the penguin data.</a:t>
+            </a:r>
+          </a:p>
+          <a:p>
+            <a:pPr lvl="0" indent="0" marL="1270000">
+              <a:buNone/>
+            </a:pPr>
+            <a:r>
+              <a:rPr sz="2000" b="1"/>
+              <a:t>Tip</a:t>
+            </a:r>
+          </a:p>
+          <a:p>
+            <a:pPr lvl="0" indent="0" marL="1270000">
+              <a:buNone/>
+            </a:pPr>
+            <a:r>
+              <a:rPr sz="2000" b="1"/>
+              <a:t>🖐 After this chunk: Activity Parts 1–3</a:t>
+            </a:r>
+            <a:r>
+              <a:rPr sz="2000"/>
+              <a:t> (load the penguins, explore, state hypotheses).</a:t>
+            </a:r>
+          </a:p>
+        </p:txBody>
+      </p:sp>
+    </p:spTree>
+  </p:cSld>
+</p:sld>
+</file>
+
+<file path=ppt/slides/slide6.xml><?xml version="1.0" encoding="utf-8"?>
+<p:sld xmlns:a="http://schemas.openxmlformats.org/drawingml/2006/main" xmlns:r="http://schemas.openxmlformats.org/officeDocument/2006/relationships" xmlns:p="http://schemas.openxmlformats.org/presentationml/2006/main">
+  <p:cSld>
+    <p:spTree>
+      <p:nvGrpSpPr>
+        <p:cNvPr id="1" name=""/>
+        <p:cNvGrpSpPr/>
+        <p:nvPr/>
+      </p:nvGrpSpPr>
+      <p:grpSpPr>
+        <a:xfrm>
+          <a:off x="0" y="0"/>
+          <a:ext cx="0" cy="0"/>
+          <a:chOff x="0" y="0"/>
+          <a:chExt cx="0" cy="0"/>
+        </a:xfrm>
+      </p:grpSpPr>
+      <p:sp>
+        <p:nvSpPr>
+          <p:cNvPr id="2" name="Title 1"/>
+          <p:cNvSpPr>
+            <a:spLocks noGrp="1"/>
+          </p:cNvSpPr>
+          <p:nvPr>
+            <p:ph type="title"/>
+          </p:nvPr>
+        </p:nvSpPr>
+        <p:spPr>
+          <a:xfrm>
+            <a:off x="0" y="0"/>
+            <a:ext cx="9144000" cy="602780"/>
+          </a:xfrm>
+          <a:solidFill>
+            <a:srgbClr val="1A1A2E"/>
+          </a:solidFill>
+        </p:spPr>
+        <p:txBody>
+          <a:bodyPr/>
+          <a:lstStyle/>
+          <a:p>
+            <a:pPr lvl="0" indent="0" marL="0">
+              <a:buNone/>
+            </a:pPr>
+            <a:r>
+              <a:rPr/>
+              <a:t>Why Not Just Run Many t-Tests?</a:t>
+            </a:r>
+          </a:p>
+        </p:txBody>
+      </p:sp>
+      <p:sp>
+        <p:nvSpPr>
+          <p:cNvPr id="3" name="Content Placeholder 2"/>
+          <p:cNvSpPr>
+            <a:spLocks noGrp="1"/>
+          </p:cNvSpPr>
+          <p:nvPr>
+            <p:ph idx="1" sz="half"/>
+          </p:nvPr>
+        </p:nvSpPr>
+        <p:spPr/>
+        <p:txBody>
+          <a:bodyPr/>
+          <a:lstStyle/>
+          <a:p>
+            <a:pPr lvl="0" indent="0" marL="0">
+              <a:buNone/>
+            </a:pPr>
+            <a:r>
+              <a:rPr/>
+              <a:t>With </a:t>
+            </a:r>
+            <a:r>
+              <a:rPr b="1"/>
+              <a:t>3 groups</a:t>
+            </a:r>
+            <a:r>
+              <a:rPr/>
+              <a:t> you’d need </a:t>
+            </a:r>
+            <a:r>
+              <a:rPr b="1"/>
+              <a:t>3</a:t>
+            </a:r>
+            <a:r>
+              <a:rPr/>
+              <a:t> t-tests (A–B, A–C, B–C). With 4 groups, </a:t>
+            </a:r>
+            <a:r>
+              <a:rPr b="1"/>
+              <a:t>6</a:t>
+            </a:r>
+            <a:r>
+              <a:rPr/>
+              <a:t> tests.</a:t>
+            </a:r>
+          </a:p>
+          <a:p>
+            <a:pPr lvl="0" indent="0" marL="0">
+              <a:buNone/>
+            </a:pPr>
+            <a:r>
+              <a:rPr/>
+              <a:t>Every test at α = 0.05 has a </a:t>
+            </a:r>
+            <a:r>
+              <a:rPr b="1"/>
+              <a:t>5% chance of a false positive</a:t>
+            </a:r>
+            <a:r>
+              <a:rPr/>
+              <a:t>. Run several and those risks </a:t>
+            </a:r>
+            <a:r>
+              <a:rPr b="1"/>
+              <a:t>stack up</a:t>
+            </a:r>
+            <a:r>
+              <a:rPr/>
+              <a:t>:</a:t>
+            </a:r>
+          </a:p>
+          <a:p>
+            <a:pPr lvl="0"/>
+            <a:r>
+              <a:rPr/>
+              <a:t>3 tests → ~</a:t>
+            </a:r>
+            <a:r>
+              <a:rPr b="1"/>
+              <a:t>14%</a:t>
+            </a:r>
+            <a:r>
+              <a:rPr/>
+              <a:t> chance of at least one false positive</a:t>
+            </a:r>
+          </a:p>
+          <a:p>
+            <a:pPr lvl="0"/>
+            <a:r>
+              <a:rPr/>
+              <a:t>6 tests → ~</a:t>
+            </a:r>
+            <a:r>
+              <a:rPr b="1"/>
+              <a:t>26%</a:t>
+            </a:r>
+          </a:p>
+          <a:p>
+            <a:pPr lvl="0" indent="0" marL="0">
+              <a:buNone/>
+            </a:pPr>
+            <a:r>
+              <a:rPr/>
+              <a:t>ANOVA asks the question </a:t>
+            </a:r>
+            <a:r>
+              <a:rPr b="1"/>
+              <a:t>once</a:t>
+            </a:r>
+            <a:r>
+              <a:rPr/>
+              <a:t>, holding the overall error rate at 0.05.</a:t>
+            </a:r>
+          </a:p>
+        </p:txBody>
+      </p:sp>
+      <p:sp>
+        <p:nvSpPr>
+          <p:cNvPr id="4" name="Content Placeholder 3"/>
+          <p:cNvSpPr>
+            <a:spLocks noGrp="1"/>
+          </p:cNvSpPr>
+          <p:nvPr>
+            <p:ph idx="2" sz="half"/>
+          </p:nvPr>
+        </p:nvSpPr>
+        <p:spPr/>
+        <p:txBody>
+          <a:bodyPr/>
+          <a:lstStyle/>
+          <a:p>
+            <a:pPr lvl="0" indent="0" marL="1270000">
+              <a:buNone/>
+            </a:pPr>
+            <a:r>
+              <a:rPr sz="2000" b="1"/>
+              <a:t>Important</a:t>
+            </a:r>
+          </a:p>
+          <a:p>
+            <a:pPr lvl="0" indent="0" marL="1270000">
+              <a:buNone/>
+            </a:pPr>
+            <a:r>
+              <a:rPr sz="2000" b="1"/>
+              <a:t>The multiple-comparisons problem</a:t>
+            </a:r>
+          </a:p>
+          <a:p>
+            <a:pPr lvl="0" indent="0" marL="1270000">
+              <a:buNone/>
+            </a:pPr>
+            <a:r>
+              <a:rPr sz="2000"/>
+              <a:t>More tests = more chances to be fooled by noise. ANOVA is the single, honest test for “do </a:t>
+            </a:r>
+            <a:r>
+              <a:rPr sz="2000" i="1"/>
+              <a:t>any</a:t>
+            </a:r>
+            <a:r>
+              <a:rPr sz="2000"/>
+              <a:t> of these groups differ?”</a:t>
+            </a:r>
+          </a:p>
+          <a:p>
+            <a:pPr lvl="0" indent="0" marL="0">
+              <a:buNone/>
+            </a:pPr>
+            <a:r>
+              <a:rPr/>
+              <a:t>📖 W&amp;S §15.1 — why a single test</a:t>
+            </a:r>
+          </a:p>
+        </p:txBody>
+      </p:sp>
+    </p:spTree>
+  </p:cSld>
+</p:sld>
+</file>
+
+<file path=ppt/slides/slide7.xml><?xml version="1.0" encoding="UTF-8"?><p:sld xmlns:a="http://schemas.openxmlformats.org/drawingml/2006/main" xmlns:r="http://schemas.openxmlformats.org/officeDocument/2006/relationships" xmlns:p="http://schemas.openxmlformats.org/presentationml/2006/main"><p:cSld><p:spTree><p:nvGrpSpPr><p:cNvPr id="1" name="" /><p:cNvGrpSpPr /><p:nvPr /></p:nvGrpSpPr><p:grpSpPr><a:xfrm><a:off x="0" y="0" /><a:ext cx="0" cy="0" /><a:chOff x="0" y="0" /><a:chExt cx="0" cy="0" /></a:xfrm></p:grpSpPr><p:sp><p:nvSpPr><p:cNvPr id="2" name="Title 1" /><p:cNvSpPr><a:spLocks noGrp="1" /></p:cNvSpPr><p:nvPr><p:ph type="title" /></p:nvPr></p:nvSpPr><p:spPr><a:xfrm><a:off x="139485" y="78119" /><a:ext cx="8229600" cy="607682" /></a:xfrm></p:spPr><p:txBody><a:bodyPr /><a:lstStyle /><a:p><a:pPr lvl="0" indent="0" marL="0"><a:buNone /></a:pPr><a:r><a:rPr /><a:t>What One-Way ANOVA Asks</a:t></a:r></a:p></p:txBody></p:sp><p:sp><p:nvSpPr><p:cNvPr id="3" name="Text Placeholder 2" /><p:cNvSpPr><a:spLocks noGrp="1" /></p:cNvSpPr><p:nvPr><p:ph idx="1" type="body" /></p:nvPr></p:nvSpPr><p:spPr /><p:txBody><a:bodyPr /><a:lstStyle /><a:p><a:pPr lvl="0" indent="0" marL="0"><a:buNone /></a:pPr><a:r><a:rPr /><a:t>One </a:t></a:r><a:r><a:rPr b="1" /><a:t>numeric response (Y)</a:t></a:r><a:r><a:rPr /><a:t> across the levels of one </a:t></a:r><a:r><a:rPr b="1" /><a:t>categorical predictor (X)</a:t></a:r><a:r><a:rPr /><a:t>.</a:t></a:r></a:p></p:txBody></p:sp><p:graphicFrame><p:nvGraphicFramePr><p:cNvPr id="6" name="Content Placeholder 5" /><p:cNvGraphicFramePr><a:graphicFrameLocks noGrp="1" /></p:cNvGraphicFramePr><p:nvPr><p:ph idx="1" /></p:nvPr></p:nvGraphicFramePr><p:xfrm><a:off x="127000" y="1270000" /><a:ext cx="4432300" cy="3302000" /></p:xfrm><a:graphic><a:graphicData uri="http://schemas.openxmlformats.org/drawingml/2006/table"><a:tbl><a:tblPr firstRow="1" bandRow="1"><a:tableStyleId>{5C22544A-7EE6-4342-B048-85BDC9FD1C3A}</a:tableStyleId></a:tblPr><a:tblGrid><a:gridCol w="2209800" /><a:gridCol w="2209800" /></a:tblGrid><a:tr h="0"><a:tc><a:txBody><a:bodyPr /><a:lstStyle /><a:p><a:endParaRPr /></a:p></a:txBody><a:tcPr /></a:tc><a:tc><a:txBody><a:bodyPr /><a:lstStyle /><a:p><a:pPr lvl="0" indent="0" marL="0"><a:buNone /></a:pPr><a:r><a:rPr /><a:t>Hypothesis</a:t></a:r></a:p></a:txBody><a:tcPr /></a:tc></a:tr><a:tr h="0"><a:tc><a:txBody><a:bodyPr /><a:lstStyle /><a:p><a:pPr lvl="0" indent="0" marL="0"><a:buNone /></a:pPr><a:r><a:rPr b="1" /><a:t>H₀ — null</a:t></a:r></a:p></a:txBody></a:tc><a:tc><a:txBody><a:bodyPr /><a:lstStyle /><a:p><a:pPr lvl="0" indent="0" marL="0"><a:buNone /></a:pPr><a:r><a:rPr /><a:t>all group means are equal (</a:t></a:r><a14:m><m:oMath xmlns:m="http://schemas.openxmlformats.org/officeDocument/2006/math"><m:sSub><m:e><m:r><m:t>μ</m:t></m:r></m:e><m:sub><m:r><m:t>1</m:t></m:r></m:sub></m:sSub><m:r><m:rPr><m:sty m:val="p" /></m:rPr><m:t>=</m:t></m:r><m:sSub><m:e><m:r><m:t>μ</m:t></m:r></m:e><m:sub><m:r><m:t>2</m:t></m:r></m:sub></m:sSub><m:r><m:rPr><m:sty m:val="p" /></m:rPr><m:t>=</m:t></m:r><m:sSub><m:e><m:r><m:t>μ</m:t></m:r></m:e><m:sub><m:r><m:t>3</m:t></m:r></m:sub></m:sSub></m:oMath></a14:m><a:r><a:rPr /><a:t>)</a:t></a:r></a:p></a:txBody></a:tc></a:tr><a:tr h="0"><a:tc><a:txBody><a:bodyPr /><a:lstStyle /><a:p><a:pPr lvl="0" indent="0" marL="0"><a:buNone /></a:pPr><a:r><a:rPr b="1" /><a:t>Hₐ — alternate</a:t></a:r></a:p></a:txBody></a:tc><a:tc><a:txBody><a:bodyPr /><a:lstStyle /><a:p><a:pPr lvl="0" indent="0" marL="0"><a:buNone /></a:pPr><a:r><a:rPr b="1" /><a:t>at least one</a:t></a:r><a:r><a:rPr /><a:t> group mean differs</a:t></a:r></a:p></a:txBody></a:tc></a:tr></a:tbl></a:graphicData></a:graphic></p:graphicFrame><p:sp><p:nvSpPr><p:cNvPr id="4" name="Content Placeholder 3" /><p:cNvSpPr><a:spLocks noGrp="1" /></p:cNvSpPr><p:nvPr><p:ph idx="2" sz="half" /></p:nvPr></p:nvSpPr><p:spPr /><p:txBody><a:bodyPr /><a:lstStyle /><a:p><a:pPr lvl="0" indent="0" marL="0"><a:buNone /></a:pPr><a:r><a:rPr /><a:t>Note what Hₐ does </a:t></a:r><a:r><a:rPr i="1" /><a:t>not</a:t></a:r><a:r><a:rPr /><a:t> say: it does </a:t></a:r><a:r><a:rPr b="1" /><a:t>not</a:t></a:r><a:r><a:rPr /><a:t> tell you </a:t></a:r><a:r><a:rPr i="1" /><a:t>which</a:t></a:r><a:r><a:rPr /><a:t> group differs — that comes later, from the post-hoc test.</a:t></a:r></a:p></p:txBody></p:sp><p:sp><p:nvSpPr><p:cNvPr id="5" name="Text Placeholder 4" /><p:cNvSpPr><a:spLocks noGrp="1" /></p:cNvSpPr><p:nvPr><p:ph idx="3" sz="quarter" type="body" /></p:nvPr></p:nvSpPr><p:spPr /><p:txBody><a:bodyPr /><a:lstStyle /><a:p><a:pPr lvl="0" indent="0" marL="0"><a:buNone /></a:pPr><a:r><a:rPr b="1" /><a:t>Our question today:</a:t></a:r></a:p><a:p><a:pPr lvl="0" indent="0" marL="0"><a:buNone /></a:pPr><a:r><a:rPr /><a:t>Do the three penguin </a:t></a:r><a:r><a:rPr b="1" /><a:t>species</a:t></a:r><a:r><a:rPr /><a:t> differ in </a:t></a:r><a:r><a:rPr b="1" /><a:t>body mass</a:t></a:r><a:r><a:rPr /><a:t>?</a:t></a:r></a:p><a:p><a:pPr lvl="0" /><a:r><a:rPr /><a:t>Y = </a:t></a:r><a:r><a:rPr><a:latin typeface="Courier" /></a:rPr><a:t>body_mass_g</a:t></a:r></a:p><a:p><a:pPr lvl="0" /><a:r><a:rPr /><a:t>X = </a:t></a:r><a:r><a:rPr><a:latin typeface="Courier" /></a:rPr><a:t>species</a:t></a:r><a:r><a:rPr /><a:t> (Adelie, Chinstrap, Gentoo)</a:t></a:r></a:p></p:txBody></p:sp></p:spTree></p:cSld></p:sld>
+</file>
+
+<file path=ppt/slides/slide8.xml><?xml version="1.0" encoding="utf-8"?>
+<p:sld xmlns:a="http://schemas.openxmlformats.org/drawingml/2006/main" xmlns:r="http://schemas.openxmlformats.org/officeDocument/2006/relationships" xmlns:p="http://schemas.openxmlformats.org/presentationml/2006/main">
+  <p:cSld>
+    <p:spTree>
+      <p:nvGrpSpPr>
+        <p:cNvPr id="1" name=""/>
+        <p:cNvGrpSpPr/>
+        <p:nvPr/>
+      </p:nvGrpSpPr>
+      <p:grpSpPr>
+        <a:xfrm>
+          <a:off x="0" y="0"/>
+          <a:ext cx="0" cy="0"/>
+          <a:chOff x="0" y="0"/>
+          <a:chExt cx="0" cy="0"/>
+        </a:xfrm>
+      </p:grpSpPr>
+      <p:sp>
+        <p:nvSpPr>
+          <p:cNvPr id="2" name="Title 1"/>
+          <p:cNvSpPr>
+            <a:spLocks noGrp="1"/>
+          </p:cNvSpPr>
+          <p:nvPr>
+            <p:ph type="title"/>
+          </p:nvPr>
+        </p:nvSpPr>
+        <p:spPr>
+          <a:xfrm>
+            <a:off x="0" y="0"/>
+            <a:ext cx="9144000" cy="602780"/>
+          </a:xfrm>
+          <a:solidFill>
+            <a:srgbClr val="1A1A2E"/>
+          </a:solidFill>
+        </p:spPr>
+        <p:txBody>
+          <a:bodyPr/>
+          <a:lstStyle/>
+          <a:p>
+            <a:pPr lvl="0" indent="0" marL="0">
+              <a:buNone/>
+            </a:pPr>
+            <a:r>
+              <a:rPr/>
+              <a:t>The F-Statistic — Between vs. Within</a:t>
+            </a:r>
+          </a:p>
+        </p:txBody>
+      </p:sp>
+      <mc:AlternateContent xmlns:mc="http://schemas.openxmlformats.org/markup-compatibility/2006">
+        <mc:Choice xmlns:a14="http://schemas.microsoft.com/office/drawing/2010/main" Requires="a14">
+          <p:sp>
+            <p:nvSpPr>
+              <p:cNvPr id="3" name="Content Placeholder 2"/>
+              <p:cNvSpPr>
+                <a:spLocks noGrp="1"/>
+              </p:cNvSpPr>
+              <p:nvPr>
+                <p:ph idx="1" sz="half"/>
+              </p:nvPr>
+            </p:nvSpPr>
+            <p:spPr/>
+            <p:txBody>
+              <a:bodyPr/>
+              <a:lstStyle/>
+              <a:p>
+                <a:pPr lvl="0" indent="0" marL="0">
+                  <a:buNone/>
+                </a:pPr>
+                <a14:m>
+                  <m:oMathPara xmlns:m="http://schemas.openxmlformats.org/officeDocument/2006/math">
+                    <m:oMathParaPr>
+                      <m:jc m:val="center"/>
+                    </m:oMathParaPr>
+                    <m:oMath>
+                      <m:r>
+                        <m:t>F</m:t>
+                      </m:r>
+                      <m:r>
+                        <m:rPr>
+                          <m:sty m:val="p"/>
+                        </m:rPr>
+                        <m:t>=</m:t>
+                      </m:r>
+                      <m:f>
+                        <m:fPr>
+                          <m:type m:val="bar"/>
+                        </m:fPr>
+                        <m:num>
+                          <m:r>
+                            <m:rPr>
+                              <m:nor/>
+                              <m:sty m:val="p"/>
+                            </m:rPr>
+                            <m:t>variance BETWEEN groups</m:t>
+                          </m:r>
+                        </m:num>
+                        <m:den>
+                          <m:r>
+                            <m:rPr>
+                              <m:nor/>
+                              <m:sty m:val="p"/>
+                            </m:rPr>
+                            <m:t>variance WITHIN groups</m:t>
+                          </m:r>
+                        </m:den>
+                      </m:f>
+                    </m:oMath>
+                  </m:oMathPara>
+                </a14:m>
+              </a:p>
+              <a:p>
+                <a:pPr lvl="0"/>
+                <a:r>
+                  <a:rPr b="1"/>
+                  <a:t>Between</a:t>
+                </a:r>
+                <a:r>
+                  <a:rPr/>
+                  <a:t> — how far apart the group means are</a:t>
+                </a:r>
+              </a:p>
+              <a:p>
+                <a:pPr lvl="0"/>
+                <a:r>
+                  <a:rPr b="1"/>
+                  <a:t>Within</a:t>
+                </a:r>
+                <a:r>
+                  <a:rPr/>
+                  <a:t> — how much the individuals scatter inside each group</a:t>
+                </a:r>
+              </a:p>
+              <a:p>
+                <a:pPr lvl="0" indent="0" marL="0">
+                  <a:buNone/>
+                </a:pPr>
+                <a:r>
+                  <a:rPr b="1"/>
+                  <a:t>Big F</a:t>
+                </a:r>
+                <a:r>
+                  <a:rPr/>
+                  <a:t> → the groups are far apart </a:t>
+                </a:r>
+                <a:r>
+                  <a:rPr i="1"/>
+                  <a:t>relative to</a:t>
+                </a:r>
+                <a:r>
+                  <a:rPr/>
+                  <a:t> their internal noise → small </a:t>
+                </a:r>
+                <a:r>
+                  <a:rPr i="1"/>
+                  <a:t>p</a:t>
+                </a:r>
+                <a:r>
+                  <a:rPr/>
+                  <a:t>-value.</a:t>
+                </a:r>
+              </a:p>
+              <a:p>
+                <a:pPr lvl="0" indent="0" marL="0">
+                  <a:buNone/>
+                </a:pPr>
+                <a:r>
+                  <a:rPr b="1"/>
+                  <a:t>F ≈ 1</a:t>
+                </a:r>
+                <a:r>
+                  <a:rPr/>
+                  <a:t> → the spread between groups is no bigger than the spread within them → no real difference.</a:t>
+                </a:r>
+              </a:p>
+            </p:txBody>
+          </p:sp>
+        </mc:Choice>
+      </mc:AlternateContent>
+      <p:sp>
+        <p:nvSpPr>
+          <p:cNvPr id="4" name="Content Placeholder 3"/>
+          <p:cNvSpPr>
+            <a:spLocks noGrp="1"/>
+          </p:cNvSpPr>
+          <p:nvPr>
+            <p:ph idx="2" sz="half"/>
+          </p:nvPr>
+        </p:nvSpPr>
+        <p:spPr/>
+        <p:txBody>
+          <a:bodyPr/>
+          <a:lstStyle/>
+          <a:p>
+            <a:pPr lvl="0" indent="0" marL="1270000">
+              <a:buNone/>
+            </a:pPr>
+            <a:r>
+              <a:rPr sz="2000" b="1"/>
+              <a:t>Note</a:t>
+            </a:r>
+          </a:p>
+          <a:p>
+            <a:pPr lvl="0" indent="0" marL="1270000">
+              <a:buNone/>
+            </a:pPr>
+            <a:r>
+              <a:rPr sz="2000" b="1"/>
+              <a:t>✅ Key idea</a:t>
+            </a:r>
+          </a:p>
+          <a:p>
+            <a:pPr lvl="0" indent="0" marL="1270000">
+              <a:buNone/>
+            </a:pPr>
+            <a:r>
+              <a:rPr sz="2000"/>
+              <a:t>ANOVA is a </a:t>
+            </a:r>
+            <a:r>
+              <a:rPr sz="2000" b="1"/>
+              <a:t>signal-to-noise ratio</a:t>
+            </a:r>
+            <a:r>
+              <a:rPr sz="2000"/>
+              <a:t>. The “signal” is the gap between group means; the “noise” is the within-group scatter.</a:t>
+            </a:r>
+          </a:p>
+          <a:p>
+            <a:pPr lvl="0" indent="0" marL="0">
+              <a:buNone/>
+            </a:pPr>
+            <a:r>
+              <a:rPr/>
+              <a:t>📖 W&amp;S §15.1–15.2</a:t>
+            </a:r>
+          </a:p>
+        </p:txBody>
+      </p:sp>
+    </p:spTree>
+  </p:cSld>
+</p:sld>
+</file>
+
+<file path=ppt/slides/slide9.xml><?xml version="1.0" encoding="utf-8"?>
+<p:sld xmlns:a="http://schemas.openxmlformats.org/drawingml/2006/main" xmlns:r="http://schemas.openxmlformats.org/officeDocument/2006/relationships" xmlns:p="http://schemas.openxmlformats.org/presentationml/2006/main">
+  <p:cSld>
+    <p:spTree>
+      <p:nvGrpSpPr>
+        <p:cNvPr id="1" name=""/>
+        <p:cNvGrpSpPr/>
+        <p:nvPr/>
+      </p:nvGrpSpPr>
+      <p:grpSpPr>
+        <a:xfrm>
+          <a:off x="0" y="0"/>
+          <a:ext cx="0" cy="0"/>
+          <a:chOff x="0" y="0"/>
+          <a:chExt cx="0" cy="0"/>
+        </a:xfrm>
+      </p:grpSpPr>
+      <p:sp>
+        <p:nvSpPr>
+          <p:cNvPr id="2" name="Title 1"/>
+          <p:cNvSpPr>
+            <a:spLocks noGrp="1"/>
+          </p:cNvSpPr>
+          <p:nvPr>
+            <p:ph type="title"/>
+          </p:nvPr>
+        </p:nvSpPr>
+        <p:spPr>
+          <a:xfrm>
+            <a:off x="0" y="0"/>
+            <a:ext cx="9144000" cy="602780"/>
+          </a:xfrm>
+          <a:solidFill>
+            <a:srgbClr val="1A1A2E"/>
+          </a:solidFill>
+        </p:spPr>
+        <p:txBody>
+          <a:bodyPr/>
+          <a:lstStyle/>
+          <a:p>
+            <a:pPr lvl="0" indent="0" marL="0">
+              <a:buNone/>
+            </a:pPr>
+            <a:r>
+              <a:rPr/>
+              <a:t>Meet the Data — Palmer Penguins</a:t>
+            </a:r>
+          </a:p>
+        </p:txBody>
+      </p:sp>
+      <p:sp>
+        <p:nvSpPr>
+          <p:cNvPr id="3" name="Content Placeholder 2"/>
+          <p:cNvSpPr>
+            <a:spLocks noGrp="1"/>
+          </p:cNvSpPr>
+          <p:nvPr>
+            <p:ph idx="1" sz="half"/>
+          </p:nvPr>
+        </p:nvSpPr>
+        <p:spPr/>
+        <p:txBody>
+          <a:bodyPr/>
+          <a:lstStyle/>
+          <a:p>
+            <a:pPr lvl="0" indent="0">
+              <a:buNone/>
+            </a:pPr>
+            <a:r>
+              <a:rPr>
+                <a:solidFill>
+                  <a:srgbClr val="5E5E5E"/>
+                </a:solidFill>
+                <a:latin typeface="Courier"/>
+              </a:rPr>
+              <a:t># Load packages at the top — always -------------------</a:t>
+            </a:r>
+            <a:br/>
+            <a:r>
+              <a:rPr>
+                <a:solidFill>
+                  <a:srgbClr val="4758AB"/>
+                </a:solidFill>
+                <a:latin typeface="Courier"/>
+              </a:rPr>
+              <a:t>library</a:t>
+            </a:r>
+            <a:r>
+              <a:rPr>
+                <a:solidFill>
+                  <a:srgbClr val="003B4F"/>
+                </a:solidFill>
+                <a:latin typeface="Courier"/>
+              </a:rPr>
+              <a:t>(tidyverse)      </a:t>
+            </a:r>
+            <a:r>
+              <a:rPr>
+                <a:solidFill>
+                  <a:srgbClr val="5E5E5E"/>
+                </a:solidFill>
+                <a:latin typeface="Courier"/>
+              </a:rPr>
+              <a:t># wrangling + ggplot2</a:t>
+            </a:r>
+            <a:br/>
+            <a:r>
+              <a:rPr>
+                <a:solidFill>
+                  <a:srgbClr val="4758AB"/>
+                </a:solidFill>
+                <a:latin typeface="Courier"/>
+              </a:rPr>
+              <a:t>library</a:t>
+            </a:r>
+            <a:r>
+              <a:rPr>
+                <a:solidFill>
+                  <a:srgbClr val="003B4F"/>
+                </a:solidFill>
+                <a:latin typeface="Courier"/>
+              </a:rPr>
+              <a:t>(palmerpenguins) </a:t>
+            </a:r>
+            <a:r>
+              <a:rPr>
+                <a:solidFill>
+                  <a:srgbClr val="5E5E5E"/>
+                </a:solidFill>
+                <a:latin typeface="Courier"/>
+              </a:rPr>
+              <a:t># the penguins data</a:t>
+            </a:r>
+            <a:br/>
+            <a:r>
+              <a:rPr>
+                <a:solidFill>
+                  <a:srgbClr val="4758AB"/>
+                </a:solidFill>
+                <a:latin typeface="Courier"/>
+              </a:rPr>
+              <a:t>library</a:t>
+            </a:r>
+            <a:r>
+              <a:rPr>
+                <a:solidFill>
+                  <a:srgbClr val="003B4F"/>
+                </a:solidFill>
+                <a:latin typeface="Courier"/>
+              </a:rPr>
+              <a:t>(car)            </a:t>
+            </a:r>
+            <a:r>
+              <a:rPr>
+                <a:solidFill>
+                  <a:srgbClr val="5E5E5E"/>
+                </a:solidFill>
+                <a:latin typeface="Courier"/>
+              </a:rPr>
+              <a:t># Levene's test, Anova()</a:t>
+            </a:r>
+            <a:br/>
+            <a:r>
+              <a:rPr>
+                <a:solidFill>
+                  <a:srgbClr val="4758AB"/>
+                </a:solidFill>
+                <a:latin typeface="Courier"/>
+              </a:rPr>
+              <a:t>library</a:t>
+            </a:r>
+            <a:r>
+              <a:rPr>
+                <a:solidFill>
+                  <a:srgbClr val="003B4F"/>
+                </a:solidFill>
+                <a:latin typeface="Courier"/>
+              </a:rPr>
+              <a:t>(emmeans)        </a:t>
+            </a:r>
+            <a:r>
+              <a:rPr>
+                <a:solidFill>
+                  <a:srgbClr val="5E5E5E"/>
+                </a:solidFill>
+                <a:latin typeface="Courier"/>
+              </a:rPr>
+              <a:t># post-hoc pairwise tests</a:t>
+            </a:r>
+          </a:p>
+          <a:p>
+            <a:pPr lvl="0" indent="0">
+              <a:buNone/>
+            </a:pPr>
+            <a:r>
+              <a:rPr>
+                <a:solidFill>
+                  <a:srgbClr val="5E5E5E"/>
+                </a:solidFill>
+                <a:latin typeface="Courier"/>
+              </a:rPr>
+              <a:t># Drop rows missing mass or species -------------------</a:t>
+            </a:r>
+            <a:br/>
+            <a:r>
+              <a:rPr>
+                <a:solidFill>
+                  <a:srgbClr val="003B4F"/>
+                </a:solidFill>
+                <a:latin typeface="Courier"/>
+              </a:rPr>
+              <a:t>penguins_df &lt;- penguins </a:t>
+            </a:r>
+            <a:r>
+              <a:rPr>
+                <a:solidFill>
+                  <a:srgbClr val="5E5E5E"/>
+                </a:solidFill>
+                <a:latin typeface="Courier"/>
+              </a:rPr>
+              <a:t>%&gt;%</a:t>
+            </a:r>
+            <a:br/>
+            <a:r>
+              <a:rPr>
+                <a:solidFill>
+                  <a:srgbClr val="003B4F"/>
+                </a:solidFill>
+                <a:latin typeface="Courier"/>
+              </a:rPr>
+              <a:t>  </a:t>
+            </a:r>
+            <a:r>
+              <a:rPr>
+                <a:solidFill>
+                  <a:srgbClr val="4758AB"/>
+                </a:solidFill>
+                <a:latin typeface="Courier"/>
+              </a:rPr>
+              <a:t>drop_na</a:t>
+            </a:r>
+            <a:r>
+              <a:rPr>
+                <a:solidFill>
+                  <a:srgbClr val="003B4F"/>
+                </a:solidFill>
+                <a:latin typeface="Courier"/>
+              </a:rPr>
+              <a:t>(body_mass_g, species)</a:t>
+            </a:r>
+            <a:br/>
+            <a:br/>
+            <a:r>
+              <a:rPr>
+                <a:solidFill>
+                  <a:srgbClr val="003B4F"/>
+                </a:solidFill>
+                <a:latin typeface="Courier"/>
+              </a:rPr>
+              <a:t>penguins_df </a:t>
+            </a:r>
+            <a:r>
+              <a:rPr>
+                <a:solidFill>
+                  <a:srgbClr val="5E5E5E"/>
+                </a:solidFill>
+                <a:latin typeface="Courier"/>
+              </a:rPr>
+              <a:t>%&gt;%</a:t>
+            </a:r>
+            <a:r>
+              <a:rPr>
+                <a:solidFill>
+                  <a:srgbClr val="003B4F"/>
+                </a:solidFill>
+                <a:latin typeface="Courier"/>
+              </a:rPr>
+              <a:t> </a:t>
+            </a:r>
+            <a:r>
+              <a:rPr>
+                <a:solidFill>
+                  <a:srgbClr val="4758AB"/>
+                </a:solidFill>
+                <a:latin typeface="Courier"/>
+              </a:rPr>
+              <a:t>count</a:t>
+            </a:r>
+            <a:r>
+              <a:rPr>
+                <a:solidFill>
+                  <a:srgbClr val="003B4F"/>
+                </a:solidFill>
+                <a:latin typeface="Courier"/>
+              </a:rPr>
+              <a:t>(species)</a:t>
+            </a:r>
+          </a:p>
+          <a:p>
+            <a:pPr lvl="0" indent="0">
+              <a:buNone/>
+            </a:pPr>
+            <a:r>
+              <a:rPr>
+                <a:latin typeface="Courier"/>
+              </a:rPr>
+              <a:t># A tibble: 3 × 2
+  species       n
+  &lt;fct&gt;     &lt;int&gt;
+1 Adelie      151
+2 Chinstrap    68
+3 Gentoo      123</a:t>
+            </a:r>
+          </a:p>
+        </p:txBody>
+      </p:sp>
+      <p:sp>
+        <p:nvSpPr>
+          <p:cNvPr id="4" name="Content Placeholder 3"/>
+          <p:cNvSpPr>
+            <a:spLocks noGrp="1"/>
+          </p:cNvSpPr>
+          <p:nvPr>
+            <p:ph idx="2" sz="half"/>
+          </p:nvPr>
+        </p:nvSpPr>
+        <p:spPr/>
+        <p:txBody>
+          <a:bodyPr/>
+          <a:lstStyle/>
+          <a:p>
+            <a:pPr lvl="0" indent="0" marL="0">
+              <a:buNone/>
+            </a:pPr>
+            <a:r>
+              <a:rPr b="1"/>
+              <a:t>Three species, one lab:</a:t>
+            </a:r>
+            <a:r>
+              <a:rPr/>
+              <a:t> body mass (g) of penguins at Palmer Station, Antarctica.</a:t>
+            </a:r>
+          </a:p>
+          <a:p>
+            <a:pPr lvl="0"/>
+            <a:r>
+              <a:rPr>
+                <a:latin typeface="Courier"/>
+              </a:rPr>
+              <a:t>drop_na()</a:t>
+            </a:r>
+            <a:r>
+              <a:rPr/>
+              <a:t> removes rows with missing mass</a:t>
+            </a:r>
+          </a:p>
+          <a:p>
+            <a:pPr lvl="0"/>
+            <a:r>
+              <a:rPr>
+                <a:latin typeface="Courier"/>
+              </a:rPr>
+              <a:t>count(species)</a:t>
+            </a:r>
+            <a:r>
+              <a:rPr/>
+              <a:t> shows the sample size per group</a:t>
+            </a:r>
+          </a:p>
+          <a:p>
+            <a:pPr lvl="0" indent="0" marL="1270000">
+              <a:buNone/>
+            </a:pPr>
+            <a:r>
+              <a:rPr sz="2000" b="1"/>
+              <a:t>Important</a:t>
+            </a:r>
+          </a:p>
+          <a:p>
+            <a:pPr lvl="0" indent="0" marL="1270000">
+              <a:buNone/>
+            </a:pPr>
+            <a:r>
+              <a:rPr sz="2000"/>
+              <a:t>The groups are </a:t>
+            </a:r>
+            <a:r>
+              <a:rPr sz="2000" b="1"/>
+              <a:t>unbalanced</a:t>
+            </a:r>
+            <a:r>
+              <a:rPr sz="2000"/>
+              <a:t> (different n per species) — that matters when we pick our ANOVA type later.</a:t>
             </a:r>
           </a:p>
         </p:txBody>

--- a/docs/content/one_way_anova/one_way_anova_lecture.pptx
+++ b/docs/content/one_way_anova/one_way_anova_lecture.pptx
@@ -25,18 +25,6 @@
     <p:sldId id="273" r:id="rId19"/>
     <p:sldId id="274" r:id="rId20"/>
     <p:sldId id="275" r:id="rId21"/>
-    <p:sldId id="276" r:id="rId22"/>
-    <p:sldId id="277" r:id="rId23"/>
-    <p:sldId id="278" r:id="rId24"/>
-    <p:sldId id="279" r:id="rId25"/>
-    <p:sldId id="280" r:id="rId26"/>
-    <p:sldId id="281" r:id="rId27"/>
-    <p:sldId id="282" r:id="rId28"/>
-    <p:sldId id="283" r:id="rId29"/>
-    <p:sldId id="284" r:id="rId30"/>
-    <p:sldId id="285" r:id="rId31"/>
-    <p:sldId id="286" r:id="rId32"/>
-    <p:sldId id="287" r:id="rId33"/>
   </p:sldIdLst>
   <p:sldSz cx="9144000" cy="5143500" type="screen16x9"/>
   <p:notesSz cx="6858000" cy="9144000"/>
@@ -3310,7 +3298,7 @@
             </a:pPr>
             <a:r>
               <a:rPr/>
-              <a:t>Lecture 11 — One-Way ANOVA: Comparing Many Groups</a:t>
+              <a:t>Lecture 13 — One-Way ANOVA I: Setting Up the Test</a:t>
             </a:r>
           </a:p>
         </p:txBody>
@@ -3340,7 +3328,7 @@
             </a:pPr>
             <a:r>
               <a:rPr/>
-              <a:t>Partitioning variance, checking assumptions, and post-hoc tests with emmeans</a:t>
+              <a:t>Why not many t-tests, the F-statistic, fitting the model, and checking assumptions</a:t>
             </a:r>
             <a:br/>
             <a:br/>
@@ -3371,7 +3359,7 @@
             </a:pPr>
             <a:r>
               <a:rPr/>
-              <a:t>2026-07-05</a:t>
+              <a:t>2026-08-27</a:t>
             </a:r>
           </a:p>
         </p:txBody>
@@ -4414,7 +4402,7 @@
             </a:pPr>
             <a:r>
               <a:rPr/>
-              <a:t>🧩 Chunk 2 of 4 · Fit the Model &amp; Check Assumptions</a:t>
+              <a:t>🧩 Chunk 2 of 2 · Fit the Model &amp; Check Assumptions</a:t>
             </a:r>
           </a:p>
         </p:txBody>
@@ -4635,7 +4623,7 @@
             </a:r>
             <a:r>
               <a:rPr/>
-              <a:t> syntax as regression (Lecture 06)</a:t>
+              <a:t> syntax as regression (Lecture 11)</a:t>
             </a:r>
           </a:p>
           <a:p>
@@ -4733,26 +4721,24 @@
               <a:buNone/>
             </a:pPr>
             <a:r>
+              <a:rPr sz="2000">
+                <a:latin typeface="Courier"/>
+              </a:rPr>
+              <a:t>lm(body_mass_g ~ species)</a:t>
+            </a:r>
+            <a:r>
               <a:rPr sz="2000"/>
-              <a:t>ANOVA and regression are the </a:t>
-            </a:r>
-            <a:r>
-              <a:rPr sz="2000" b="1"/>
-              <a:t>same machinery</a:t>
+              <a:t> is the exact same function call you used for a numeric predictor in Lecture 11 — only </a:t>
+            </a:r>
+            <a:r>
+              <a:rPr sz="2000">
+                <a:latin typeface="Courier"/>
+              </a:rPr>
+              <a:t>species</a:t>
             </a:r>
             <a:r>
               <a:rPr sz="2000"/>
-              <a:t> (</a:t>
-            </a:r>
-            <a:r>
-              <a:rPr sz="2000">
-                <a:latin typeface="Courier"/>
-              </a:rPr>
-              <a:t>lm</a:t>
-            </a:r>
-            <a:r>
-              <a:rPr sz="2000"/>
-              <a:t>). ANOVA just has a grouping variable instead of a numeric one.</a:t>
+              <a:t> is categorical this time. R handles the encoding automatically; you don’t write anything differently to get an ANOVA instead of a regression.</a:t>
             </a:r>
           </a:p>
           <a:p>
@@ -4800,8 +4786,8 @@
         </p:nvSpPr>
         <p:spPr>
           <a:xfrm>
-            <a:off x="139485" y="78119"/>
-            <a:ext cx="8229600" cy="607682"/>
+            <a:off x="0" y="0"/>
+            <a:ext cx="9144000" cy="582780"/>
           </a:xfrm>
         </p:spPr>
         <p:txBody>
@@ -4820,12 +4806,12 @@
       </p:sp>
       <p:sp>
         <p:nvSpPr>
-          <p:cNvPr id="3" name="Text Placeholder 2"/>
-          <p:cNvSpPr>
-            <a:spLocks noGrp="1"/>
-          </p:cNvSpPr>
-          <p:nvPr>
-            <p:ph idx="1" type="body"/>
+          <p:cNvPr id="3" name="Content Placeholder 2"/>
+          <p:cNvSpPr>
+            <a:spLocks noGrp="1"/>
+          </p:cNvSpPr>
+          <p:nvPr>
+            <p:ph idx="1"/>
           </p:nvPr>
         </p:nvSpPr>
         <p:spPr/>
@@ -4833,653 +4819,35 @@
           <a:bodyPr/>
           <a:lstStyle/>
           <a:p>
-            <a:pPr lvl="0" indent="0">
-              <a:buNone/>
-            </a:pPr>
-            <a:r>
-              <a:rPr>
-                <a:solidFill>
-                  <a:srgbClr val="5E5E5E"/>
-                </a:solidFill>
-                <a:latin typeface="Courier"/>
-              </a:rPr>
-              <a:t># QQ plot of residuals — points should track the line -</a:t>
-            </a:r>
-            <a:br/>
-            <a:r>
-              <a:rPr>
-                <a:solidFill>
-                  <a:srgbClr val="003B4F"/>
-                </a:solidFill>
-                <a:latin typeface="Courier"/>
-              </a:rPr>
-              <a:t>qq_mass_plot &lt;- penguins_df </a:t>
-            </a:r>
-            <a:r>
-              <a:rPr>
-                <a:solidFill>
-                  <a:srgbClr val="5E5E5E"/>
-                </a:solidFill>
-                <a:latin typeface="Courier"/>
-              </a:rPr>
-              <a:t>%&gt;%</a:t>
-            </a:r>
-            <a:br/>
-            <a:r>
-              <a:rPr>
-                <a:solidFill>
-                  <a:srgbClr val="003B4F"/>
-                </a:solidFill>
-                <a:latin typeface="Courier"/>
-              </a:rPr>
-              <a:t>  </a:t>
-            </a:r>
-            <a:r>
-              <a:rPr>
-                <a:solidFill>
-                  <a:srgbClr val="4758AB"/>
-                </a:solidFill>
-                <a:latin typeface="Courier"/>
-              </a:rPr>
-              <a:t>mutate</a:t>
-            </a:r>
-            <a:r>
-              <a:rPr>
-                <a:solidFill>
-                  <a:srgbClr val="003B4F"/>
-                </a:solidFill>
-                <a:latin typeface="Courier"/>
-              </a:rPr>
-              <a:t>(</a:t>
-            </a:r>
-            <a:r>
-              <a:rPr>
-                <a:solidFill>
-                  <a:srgbClr val="657422"/>
-                </a:solidFill>
-                <a:latin typeface="Courier"/>
-              </a:rPr>
-              <a:t>resid =</a:t>
-            </a:r>
-            <a:r>
-              <a:rPr>
-                <a:solidFill>
-                  <a:srgbClr val="003B4F"/>
-                </a:solidFill>
-                <a:latin typeface="Courier"/>
-              </a:rPr>
+            <a:pPr lvl="0" indent="0" marL="1270000">
+              <a:buNone/>
+            </a:pPr>
+            <a:r>
+              <a:rPr sz="2000" b="1"/>
+              <a:t>Note</a:t>
+            </a:r>
+          </a:p>
+          <a:p>
+            <a:pPr lvl="0" indent="0" marL="1270000">
+              <a:buNone/>
+            </a:pPr>
+            <a:r>
+              <a:rPr sz="2000" b="1"/>
+              <a:t>🔮 Predict first:</a:t>
+            </a:r>
+            <a:r>
+              <a:rPr sz="2000"/>
               <a:t> </a:t>
             </a:r>
             <a:r>
-              <a:rPr>
-                <a:solidFill>
-                  <a:srgbClr val="4758AB"/>
-                </a:solidFill>
-                <a:latin typeface="Courier"/>
-              </a:rPr>
-              <a:t>residuals</a:t>
-            </a:r>
-            <a:r>
-              <a:rPr>
-                <a:solidFill>
-                  <a:srgbClr val="003B4F"/>
-                </a:solidFill>
-                <a:latin typeface="Courier"/>
-              </a:rPr>
-              <a:t>(mass_model)) </a:t>
-            </a:r>
-            <a:r>
-              <a:rPr>
-                <a:solidFill>
-                  <a:srgbClr val="5E5E5E"/>
-                </a:solidFill>
-                <a:latin typeface="Courier"/>
-              </a:rPr>
-              <a:t>%&gt;%</a:t>
-            </a:r>
-            <a:br/>
-            <a:r>
-              <a:rPr>
-                <a:solidFill>
-                  <a:srgbClr val="003B4F"/>
-                </a:solidFill>
-                <a:latin typeface="Courier"/>
-              </a:rPr>
-              <a:t>  </a:t>
-            </a:r>
-            <a:r>
-              <a:rPr>
-                <a:solidFill>
-                  <a:srgbClr val="4758AB"/>
-                </a:solidFill>
-                <a:latin typeface="Courier"/>
-              </a:rPr>
-              <a:t>ggplot</a:t>
-            </a:r>
-            <a:r>
-              <a:rPr>
-                <a:solidFill>
-                  <a:srgbClr val="003B4F"/>
-                </a:solidFill>
-                <a:latin typeface="Courier"/>
-              </a:rPr>
-              <a:t>(</a:t>
-            </a:r>
-            <a:r>
-              <a:rPr>
-                <a:solidFill>
-                  <a:srgbClr val="4758AB"/>
-                </a:solidFill>
-                <a:latin typeface="Courier"/>
-              </a:rPr>
-              <a:t>aes</a:t>
-            </a:r>
-            <a:r>
-              <a:rPr>
-                <a:solidFill>
-                  <a:srgbClr val="003B4F"/>
-                </a:solidFill>
-                <a:latin typeface="Courier"/>
-              </a:rPr>
-              <a:t>(</a:t>
-            </a:r>
-            <a:r>
-              <a:rPr>
-                <a:solidFill>
-                  <a:srgbClr val="657422"/>
-                </a:solidFill>
-                <a:latin typeface="Courier"/>
-              </a:rPr>
-              <a:t>sample =</a:t>
-            </a:r>
-            <a:r>
-              <a:rPr>
-                <a:solidFill>
-                  <a:srgbClr val="003B4F"/>
-                </a:solidFill>
-                <a:latin typeface="Courier"/>
-              </a:rPr>
-              <a:t> resid)) </a:t>
-            </a:r>
-            <a:r>
-              <a:rPr>
-                <a:solidFill>
-                  <a:srgbClr val="5E5E5E"/>
-                </a:solidFill>
-                <a:latin typeface="Courier"/>
-              </a:rPr>
-              <a:t>+</a:t>
-            </a:r>
-            <a:br/>
-            <a:r>
-              <a:rPr>
-                <a:solidFill>
-                  <a:srgbClr val="003B4F"/>
-                </a:solidFill>
-                <a:latin typeface="Courier"/>
-              </a:rPr>
-              <a:t>  </a:t>
-            </a:r>
-            <a:r>
-              <a:rPr>
-                <a:solidFill>
-                  <a:srgbClr val="4758AB"/>
-                </a:solidFill>
-                <a:latin typeface="Courier"/>
-              </a:rPr>
-              <a:t>stat_qq</a:t>
-            </a:r>
-            <a:r>
-              <a:rPr>
-                <a:solidFill>
-                  <a:srgbClr val="003B4F"/>
-                </a:solidFill>
-                <a:latin typeface="Courier"/>
-              </a:rPr>
-              <a:t>() </a:t>
-            </a:r>
-            <a:r>
-              <a:rPr>
-                <a:solidFill>
-                  <a:srgbClr val="5E5E5E"/>
-                </a:solidFill>
-                <a:latin typeface="Courier"/>
-              </a:rPr>
-              <a:t>+</a:t>
-            </a:r>
-            <a:br/>
-            <a:r>
-              <a:rPr>
-                <a:solidFill>
-                  <a:srgbClr val="003B4F"/>
-                </a:solidFill>
-                <a:latin typeface="Courier"/>
-              </a:rPr>
-              <a:t>  </a:t>
-            </a:r>
-            <a:r>
-              <a:rPr>
-                <a:solidFill>
-                  <a:srgbClr val="4758AB"/>
-                </a:solidFill>
-                <a:latin typeface="Courier"/>
-              </a:rPr>
-              <a:t>stat_qq_line</a:t>
-            </a:r>
-            <a:r>
-              <a:rPr>
-                <a:solidFill>
-                  <a:srgbClr val="003B4F"/>
-                </a:solidFill>
-                <a:latin typeface="Courier"/>
-              </a:rPr>
-              <a:t>(</a:t>
-            </a:r>
-            <a:r>
-              <a:rPr>
-                <a:solidFill>
-                  <a:srgbClr val="657422"/>
-                </a:solidFill>
-                <a:latin typeface="Courier"/>
-              </a:rPr>
-              <a:t>color =</a:t>
-            </a:r>
-            <a:r>
-              <a:rPr>
-                <a:solidFill>
-                  <a:srgbClr val="003B4F"/>
-                </a:solidFill>
-                <a:latin typeface="Courier"/>
-              </a:rPr>
-              <a:t> </a:t>
-            </a:r>
-            <a:r>
-              <a:rPr>
-                <a:solidFill>
-                  <a:srgbClr val="20794D"/>
-                </a:solidFill>
-                <a:latin typeface="Courier"/>
-              </a:rPr>
-              <a:t>"red"</a:t>
-            </a:r>
-            <a:r>
-              <a:rPr>
-                <a:solidFill>
-                  <a:srgbClr val="003B4F"/>
-                </a:solidFill>
-                <a:latin typeface="Courier"/>
-              </a:rPr>
-              <a:t>, </a:t>
-            </a:r>
-            <a:r>
-              <a:rPr>
-                <a:solidFill>
-                  <a:srgbClr val="657422"/>
-                </a:solidFill>
-                <a:latin typeface="Courier"/>
-              </a:rPr>
-              <a:t>linewidth =</a:t>
-            </a:r>
-            <a:r>
-              <a:rPr>
-                <a:solidFill>
-                  <a:srgbClr val="003B4F"/>
-                </a:solidFill>
-                <a:latin typeface="Courier"/>
-              </a:rPr>
-              <a:t> </a:t>
-            </a:r>
-            <a:r>
-              <a:rPr>
-                <a:solidFill>
-                  <a:srgbClr val="AD0000"/>
-                </a:solidFill>
-                <a:latin typeface="Courier"/>
-              </a:rPr>
-              <a:t>0.8</a:t>
-            </a:r>
-            <a:r>
-              <a:rPr>
-                <a:solidFill>
-                  <a:srgbClr val="003B4F"/>
-                </a:solidFill>
-                <a:latin typeface="Courier"/>
-              </a:rPr>
-              <a:t>) </a:t>
-            </a:r>
-            <a:r>
-              <a:rPr>
-                <a:solidFill>
-                  <a:srgbClr val="5E5E5E"/>
-                </a:solidFill>
-                <a:latin typeface="Courier"/>
-              </a:rPr>
-              <a:t>+</a:t>
-            </a:r>
-            <a:br/>
-            <a:r>
-              <a:rPr>
-                <a:solidFill>
-                  <a:srgbClr val="003B4F"/>
-                </a:solidFill>
-                <a:latin typeface="Courier"/>
-              </a:rPr>
-              <a:t>  </a:t>
-            </a:r>
-            <a:r>
-              <a:rPr>
-                <a:solidFill>
-                  <a:srgbClr val="4758AB"/>
-                </a:solidFill>
-                <a:latin typeface="Courier"/>
-              </a:rPr>
-              <a:t>labs</a:t>
-            </a:r>
-            <a:r>
-              <a:rPr>
-                <a:solidFill>
-                  <a:srgbClr val="003B4F"/>
-                </a:solidFill>
-                <a:latin typeface="Courier"/>
-              </a:rPr>
-              <a:t>(</a:t>
-            </a:r>
-            <a:r>
-              <a:rPr>
-                <a:solidFill>
-                  <a:srgbClr val="657422"/>
-                </a:solidFill>
-                <a:latin typeface="Courier"/>
-              </a:rPr>
-              <a:t>x =</a:t>
-            </a:r>
-            <a:r>
-              <a:rPr>
-                <a:solidFill>
-                  <a:srgbClr val="003B4F"/>
-                </a:solidFill>
-                <a:latin typeface="Courier"/>
-              </a:rPr>
-              <a:t> </a:t>
-            </a:r>
-            <a:r>
-              <a:rPr>
-                <a:solidFill>
-                  <a:srgbClr val="20794D"/>
-                </a:solidFill>
-                <a:latin typeface="Courier"/>
-              </a:rPr>
-              <a:t>"Theoretical"</a:t>
-            </a:r>
-            <a:r>
-              <a:rPr>
-                <a:solidFill>
-                  <a:srgbClr val="003B4F"/>
-                </a:solidFill>
-                <a:latin typeface="Courier"/>
-              </a:rPr>
-              <a:t>, </a:t>
-            </a:r>
-            <a:r>
-              <a:rPr>
-                <a:solidFill>
-                  <a:srgbClr val="657422"/>
-                </a:solidFill>
-                <a:latin typeface="Courier"/>
-              </a:rPr>
-              <a:t>y =</a:t>
-            </a:r>
-            <a:r>
-              <a:rPr>
-                <a:solidFill>
-                  <a:srgbClr val="003B4F"/>
-                </a:solidFill>
-                <a:latin typeface="Courier"/>
-              </a:rPr>
-              <a:t> </a:t>
-            </a:r>
-            <a:r>
-              <a:rPr>
-                <a:solidFill>
-                  <a:srgbClr val="20794D"/>
-                </a:solidFill>
-                <a:latin typeface="Courier"/>
-              </a:rPr>
-              <a:t>"Sample residuals"</a:t>
-            </a:r>
-            <a:r>
-              <a:rPr>
-                <a:solidFill>
-                  <a:srgbClr val="003B4F"/>
-                </a:solidFill>
-                <a:latin typeface="Courier"/>
-              </a:rPr>
-              <a:t>) </a:t>
-            </a:r>
-            <a:r>
-              <a:rPr>
-                <a:solidFill>
-                  <a:srgbClr val="5E5E5E"/>
-                </a:solidFill>
-                <a:latin typeface="Courier"/>
-              </a:rPr>
-              <a:t>+</a:t>
-            </a:r>
-            <a:br/>
-            <a:r>
-              <a:rPr>
-                <a:solidFill>
-                  <a:srgbClr val="003B4F"/>
-                </a:solidFill>
-                <a:latin typeface="Courier"/>
-              </a:rPr>
-              <a:t>  </a:t>
-            </a:r>
-            <a:r>
-              <a:rPr>
-                <a:solidFill>
-                  <a:srgbClr val="4758AB"/>
-                </a:solidFill>
-                <a:latin typeface="Courier"/>
-              </a:rPr>
-              <a:t>theme_minimal</a:t>
-            </a:r>
-            <a:r>
-              <a:rPr>
-                <a:solidFill>
-                  <a:srgbClr val="003B4F"/>
-                </a:solidFill>
-                <a:latin typeface="Courier"/>
-              </a:rPr>
-              <a:t>()</a:t>
-            </a:r>
-            <a:br/>
-            <a:br/>
-            <a:r>
-              <a:rPr>
-                <a:solidFill>
-                  <a:srgbClr val="003B4F"/>
-                </a:solidFill>
-                <a:latin typeface="Courier"/>
-              </a:rPr>
-              <a:t>qq_mass_plot</a:t>
-            </a:r>
-          </a:p>
-        </p:txBody>
-      </p:sp>
-      <p:pic>
-        <p:nvPicPr>
-          <p:cNvPr descr="one_way_anova_lecture_files/figure-pptx/qq-10-1.png" id="0" name="Picture 1"/>
-          <p:cNvPicPr>
-            <a:picLocks noGrp="1" noChangeAspect="1"/>
-          </p:cNvPicPr>
-          <p:nvPr/>
-        </p:nvPicPr>
-        <p:blipFill>
-          <a:blip r:embed="rId2"/>
-          <a:stretch>
-            <a:fillRect/>
-          </a:stretch>
-        </p:blipFill>
-        <p:spPr bwMode="auto">
-          <a:xfrm>
-            <a:off x="127000" y="1562100"/>
-            <a:ext cx="4432300" cy="2730500"/>
-          </a:xfrm>
-          <a:prstGeom prst="rect">
-            <a:avLst/>
-          </a:prstGeom>
-          <a:noFill/>
-          <a:ln w="9525">
-            <a:noFill/>
-            <a:headEnd/>
-            <a:tailEnd/>
-          </a:ln>
-        </p:spPr>
-      </p:pic>
-      <p:sp>
-        <p:nvSpPr>
-          <p:cNvPr id="4" name="Content Placeholder 3"/>
-          <p:cNvSpPr>
-            <a:spLocks noGrp="1"/>
-          </p:cNvSpPr>
-          <p:nvPr>
-            <p:ph idx="2" sz="half"/>
-          </p:nvPr>
-        </p:nvSpPr>
-        <p:spPr/>
-        <p:txBody>
-          <a:bodyPr/>
-          <a:lstStyle/>
-          <a:p>
-            <a:pPr lvl="0" indent="0">
-              <a:buNone/>
-            </a:pPr>
-            <a:r>
-              <a:rPr>
-                <a:solidFill>
-                  <a:srgbClr val="4758AB"/>
-                </a:solidFill>
-                <a:latin typeface="Courier"/>
-              </a:rPr>
-              <a:t>shapiro.test</a:t>
-            </a:r>
-            <a:r>
-              <a:rPr>
-                <a:solidFill>
-                  <a:srgbClr val="003B4F"/>
-                </a:solidFill>
-                <a:latin typeface="Courier"/>
-              </a:rPr>
-              <a:t>(</a:t>
-            </a:r>
-            <a:r>
-              <a:rPr>
-                <a:solidFill>
-                  <a:srgbClr val="4758AB"/>
-                </a:solidFill>
-                <a:latin typeface="Courier"/>
-              </a:rPr>
-              <a:t>residuals</a:t>
-            </a:r>
-            <a:r>
-              <a:rPr>
-                <a:solidFill>
-                  <a:srgbClr val="003B4F"/>
-                </a:solidFill>
-                <a:latin typeface="Courier"/>
-              </a:rPr>
-              <a:t>(mass_model))</a:t>
-            </a:r>
-          </a:p>
-          <a:p>
-            <a:pPr lvl="0" indent="0">
-              <a:buNone/>
-            </a:pPr>
-            <a:r>
-              <a:rPr>
-                <a:latin typeface="Courier"/>
-              </a:rPr>
-              <a:t>
-    Shapiro-Wilk normality test
-data:  residuals(mass_model)
-W = 0.99166, p-value = 0.05118</a:t>
-            </a:r>
-          </a:p>
-        </p:txBody>
-      </p:sp>
-      <p:sp>
-        <p:nvSpPr>
-          <p:cNvPr id="5" name="Text Placeholder 4"/>
-          <p:cNvSpPr>
-            <a:spLocks noGrp="1"/>
-          </p:cNvSpPr>
-          <p:nvPr>
-            <p:ph idx="3" sz="quarter" type="body"/>
-          </p:nvPr>
-        </p:nvSpPr>
-        <p:spPr/>
-        <p:txBody>
-          <a:bodyPr/>
-          <a:lstStyle/>
-          <a:p>
-            <a:pPr lvl="0"/>
-            <a:r>
-              <a:rPr/>
-              <a:t>Check normality of the </a:t>
-            </a:r>
-            <a:r>
-              <a:rPr b="1"/>
-              <a:t>residuals</a:t>
-            </a:r>
-            <a:r>
-              <a:rPr/>
-              <a:t>, not the raw masses</a:t>
-            </a:r>
-          </a:p>
-          <a:p>
-            <a:pPr lvl="0"/>
-            <a:r>
-              <a:rPr/>
-              <a:t>The QQ plot is the main tool; Shapiro-Wilk is a formal check</a:t>
-            </a:r>
-          </a:p>
-          <a:p>
-            <a:pPr lvl="0" indent="0" marL="1270000">
-              <a:buNone/>
-            </a:pPr>
-            <a:r>
-              <a:rPr sz="2000" b="1"/>
-              <a:t>Important</a:t>
-            </a:r>
-          </a:p>
-          <a:p>
-            <a:pPr lvl="0" indent="0" marL="1270000">
-              <a:buNone/>
-            </a:pPr>
-            <a:r>
-              <a:rPr sz="2000" b="1"/>
-              <a:t>Large-sample caution:</a:t>
+              <a:rPr sz="2000">
+                <a:latin typeface="Courier"/>
+              </a:rPr>
+              <a:t>plot(mass_model)</a:t>
             </a:r>
             <a:r>
               <a:rPr sz="2000"/>
-              <a:t> with ~340 birds, Shapiro-Wilk flags </a:t>
-            </a:r>
-            <a:r>
-              <a:rPr sz="2000" i="1"/>
-              <a:t>tiny</a:t>
-            </a:r>
-            <a:r>
-              <a:rPr sz="2000"/>
-              <a:t> departures as “significant.” Trust the </a:t>
-            </a:r>
-            <a:r>
-              <a:rPr sz="2000" b="1"/>
-              <a:t>QQ plot</a:t>
-            </a:r>
-            <a:r>
-              <a:rPr sz="2000"/>
-              <a:t> — if points track the line, you’re fine.</a:t>
+              <a:t> gives the same four panels you saw in the regression lecture. With ~340 penguins instead of 118 near-perfect paper squares, do you expect the Normal Q-Q panel to track the line as tightly?</a:t>
             </a:r>
           </a:p>
         </p:txBody>
@@ -5508,42 +4876,182 @@
       </p:grpSpPr>
       <p:sp>
         <p:nvSpPr>
-          <p:cNvPr id="2" name="Title 1"/>
-          <p:cNvSpPr>
-            <a:spLocks noGrp="1"/>
-          </p:cNvSpPr>
-          <p:nvPr>
-            <p:ph type="title"/>
-          </p:nvPr>
-        </p:nvSpPr>
-        <p:spPr>
+          <p:cNvPr id="3" name="Text Placeholder 2"/>
+          <p:cNvSpPr>
+            <a:spLocks noGrp="1"/>
+          </p:cNvSpPr>
+          <p:nvPr>
+            <p:ph idx="1" type="body"/>
+          </p:nvPr>
+        </p:nvSpPr>
+        <p:spPr/>
+        <p:txBody>
+          <a:bodyPr/>
+          <a:lstStyle/>
+          <a:p>
+            <a:pPr lvl="0" indent="0">
+              <a:buNone/>
+            </a:pPr>
+            <a:r>
+              <a:rPr>
+                <a:solidFill>
+                  <a:srgbClr val="5E5E5E"/>
+                </a:solidFill>
+                <a:latin typeface="Courier"/>
+              </a:rPr>
+              <a:t># Same plot(model) diagnostics as Lecture 11's regression</a:t>
+            </a:r>
+            <a:br/>
+            <a:r>
+              <a:rPr>
+                <a:solidFill>
+                  <a:srgbClr val="4758AB"/>
+                </a:solidFill>
+                <a:latin typeface="Courier"/>
+              </a:rPr>
+              <a:t>par</a:t>
+            </a:r>
+            <a:r>
+              <a:rPr>
+                <a:solidFill>
+                  <a:srgbClr val="003B4F"/>
+                </a:solidFill>
+                <a:latin typeface="Courier"/>
+              </a:rPr>
+              <a:t>(</a:t>
+            </a:r>
+            <a:r>
+              <a:rPr>
+                <a:solidFill>
+                  <a:srgbClr val="657422"/>
+                </a:solidFill>
+                <a:latin typeface="Courier"/>
+              </a:rPr>
+              <a:t>mfrow =</a:t>
+            </a:r>
+            <a:r>
+              <a:rPr>
+                <a:solidFill>
+                  <a:srgbClr val="003B4F"/>
+                </a:solidFill>
+                <a:latin typeface="Courier"/>
+              </a:rPr>
+              <a:t> </a:t>
+            </a:r>
+            <a:r>
+              <a:rPr>
+                <a:solidFill>
+                  <a:srgbClr val="4758AB"/>
+                </a:solidFill>
+                <a:latin typeface="Courier"/>
+              </a:rPr>
+              <a:t>c</a:t>
+            </a:r>
+            <a:r>
+              <a:rPr>
+                <a:solidFill>
+                  <a:srgbClr val="003B4F"/>
+                </a:solidFill>
+                <a:latin typeface="Courier"/>
+              </a:rPr>
+              <a:t>(</a:t>
+            </a:r>
+            <a:r>
+              <a:rPr>
+                <a:solidFill>
+                  <a:srgbClr val="AD0000"/>
+                </a:solidFill>
+                <a:latin typeface="Courier"/>
+              </a:rPr>
+              <a:t>2</a:t>
+            </a:r>
+            <a:r>
+              <a:rPr>
+                <a:solidFill>
+                  <a:srgbClr val="003B4F"/>
+                </a:solidFill>
+                <a:latin typeface="Courier"/>
+              </a:rPr>
+              <a:t>, </a:t>
+            </a:r>
+            <a:r>
+              <a:rPr>
+                <a:solidFill>
+                  <a:srgbClr val="AD0000"/>
+                </a:solidFill>
+                <a:latin typeface="Courier"/>
+              </a:rPr>
+              <a:t>2</a:t>
+            </a:r>
+            <a:r>
+              <a:rPr>
+                <a:solidFill>
+                  <a:srgbClr val="003B4F"/>
+                </a:solidFill>
+                <a:latin typeface="Courier"/>
+              </a:rPr>
+              <a:t>))</a:t>
+            </a:r>
+            <a:br/>
+            <a:r>
+              <a:rPr>
+                <a:solidFill>
+                  <a:srgbClr val="4758AB"/>
+                </a:solidFill>
+                <a:latin typeface="Courier"/>
+              </a:rPr>
+              <a:t>plot</a:t>
+            </a:r>
+            <a:r>
+              <a:rPr>
+                <a:solidFill>
+                  <a:srgbClr val="003B4F"/>
+                </a:solidFill>
+                <a:latin typeface="Courier"/>
+              </a:rPr>
+              <a:t>(mass_model)</a:t>
+            </a:r>
+          </a:p>
+        </p:txBody>
+      </p:sp>
+      <p:pic>
+        <p:nvPicPr>
+          <p:cNvPr descr="one_way_anova_lecture_files/figure-pptx/diagnostic-plots-10-1.png" id="0" name="Picture 1"/>
+          <p:cNvPicPr>
+            <a:picLocks noGrp="1" noChangeAspect="1"/>
+          </p:cNvPicPr>
+          <p:nvPr/>
+        </p:nvPicPr>
+        <p:blipFill>
+          <a:blip r:embed="rId2"/>
+          <a:stretch>
+            <a:fillRect/>
+          </a:stretch>
+        </p:blipFill>
+        <p:spPr bwMode="auto">
           <a:xfrm>
-            <a:off x="0" y="0"/>
-            <a:ext cx="9144000" cy="582780"/>
+            <a:off x="685800" y="1270000"/>
+            <a:ext cx="3302000" cy="3302000"/>
           </a:xfrm>
+          <a:prstGeom prst="rect">
+            <a:avLst/>
+          </a:prstGeom>
+          <a:noFill/>
+          <a:ln w="9525">
+            <a:noFill/>
+            <a:headEnd/>
+            <a:tailEnd/>
+          </a:ln>
         </p:spPr>
-        <p:txBody>
-          <a:bodyPr/>
-          <a:lstStyle/>
-          <a:p>
-            <a:pPr lvl="0" indent="0" marL="0">
-              <a:buNone/>
-            </a:pPr>
-            <a:r>
-              <a:rPr/>
-              <a:t>Assumption 2 — Equal Variance (Levene’s Test)</a:t>
-            </a:r>
-          </a:p>
-        </p:txBody>
-      </p:sp>
-      <p:sp>
-        <p:nvSpPr>
-          <p:cNvPr id="3" name="Content Placeholder 2"/>
-          <p:cNvSpPr>
-            <a:spLocks noGrp="1"/>
-          </p:cNvSpPr>
-          <p:nvPr>
-            <p:ph idx="1"/>
+      </p:pic>
+      <p:sp>
+        <p:nvSpPr>
+          <p:cNvPr id="4" name="Content Placeholder 3"/>
+          <p:cNvSpPr>
+            <a:spLocks noGrp="1"/>
+          </p:cNvSpPr>
+          <p:nvPr>
+            <p:ph idx="2" sz="half"/>
           </p:nvPr>
         </p:nvSpPr>
         <p:spPr/>
@@ -5551,12 +5059,112 @@
           <a:bodyPr/>
           <a:lstStyle/>
           <a:p>
+            <a:pPr lvl="0" indent="0">
+              <a:buNone/>
+            </a:pPr>
+            <a:r>
+              <a:rPr>
+                <a:solidFill>
+                  <a:srgbClr val="4758AB"/>
+                </a:solidFill>
+                <a:latin typeface="Courier"/>
+              </a:rPr>
+              <a:t>shapiro.test</a:t>
+            </a:r>
+            <a:r>
+              <a:rPr>
+                <a:solidFill>
+                  <a:srgbClr val="003B4F"/>
+                </a:solidFill>
+                <a:latin typeface="Courier"/>
+              </a:rPr>
+              <a:t>(</a:t>
+            </a:r>
+            <a:r>
+              <a:rPr>
+                <a:solidFill>
+                  <a:srgbClr val="4758AB"/>
+                </a:solidFill>
+                <a:latin typeface="Courier"/>
+              </a:rPr>
+              <a:t>residuals</a:t>
+            </a:r>
+            <a:r>
+              <a:rPr>
+                <a:solidFill>
+                  <a:srgbClr val="003B4F"/>
+                </a:solidFill>
+                <a:latin typeface="Courier"/>
+              </a:rPr>
+              <a:t>(mass_model))</a:t>
+            </a:r>
+          </a:p>
+          <a:p>
+            <a:pPr lvl="0" indent="0">
+              <a:buNone/>
+            </a:pPr>
+            <a:r>
+              <a:rPr>
+                <a:latin typeface="Courier"/>
+              </a:rPr>
+              <a:t>
+    Shapiro-Wilk normality test
+data:  residuals(mass_model)
+W = 0.99166, p-value = 0.05118</a:t>
+            </a:r>
+          </a:p>
+        </p:txBody>
+      </p:sp>
+      <p:sp>
+        <p:nvSpPr>
+          <p:cNvPr id="5" name="Text Placeholder 4"/>
+          <p:cNvSpPr>
+            <a:spLocks noGrp="1"/>
+          </p:cNvSpPr>
+          <p:nvPr>
+            <p:ph idx="3" sz="quarter" type="body"/>
+          </p:nvPr>
+        </p:nvSpPr>
+        <p:spPr/>
+        <p:txBody>
+          <a:bodyPr/>
+          <a:lstStyle/>
+          <a:p>
+            <a:pPr lvl="0"/>
+            <a:r>
+              <a:rPr/>
+              <a:t>Check normality of the </a:t>
+            </a:r>
+            <a:r>
+              <a:rPr b="1"/>
+              <a:t>residuals</a:t>
+            </a:r>
+            <a:r>
+              <a:rPr/>
+              <a:t>, not the raw masses</a:t>
+            </a:r>
+          </a:p>
+          <a:p>
+            <a:pPr lvl="0"/>
+            <a:r>
+              <a:rPr/>
+              <a:t>Panel 2 (Normal Q-Q) is the main visual tool; Shapiro-Wilk is a formal companion</a:t>
+            </a:r>
+          </a:p>
+          <a:p>
+            <a:pPr lvl="0"/>
+            <a:r>
+              <a:rPr/>
+              <a:t>Panels 1 &amp; 3 double-check equal variance — the same job Levene’s does next, from a different angle</a:t>
+            </a:r>
+          </a:p>
+          <a:p>
             <a:pPr lvl="0" indent="0" marL="1270000">
               <a:buNone/>
             </a:pPr>
             <a:r>
               <a:rPr sz="2000" b="1"/>
-              <a:t>Note</a:t>
+              <a:t>Important</a:t>
             </a:r>
           </a:p>
           <a:p>
@@ -5565,35 +5173,27 @@
             </a:pPr>
             <a:r>
               <a:rPr sz="2000" b="1"/>
-              <a:t>🔮 Predict first:</a:t>
+              <a:t>Large-sample caution:</a:t>
             </a:r>
             <a:r>
               <a:rPr sz="2000"/>
-              <a:t> Look back at the boxplot spreads. Predict — will Levene’s test call the variances </a:t>
+              <a:t> with ~340 birds, Shapiro-Wilk flags </a:t>
+            </a:r>
+            <a:r>
+              <a:rPr sz="2000" i="1"/>
+              <a:t>tiny</a:t>
+            </a:r>
+            <a:r>
+              <a:rPr sz="2000"/>
+              <a:t> departures as “significant.” Trust the </a:t>
             </a:r>
             <a:r>
               <a:rPr sz="2000" b="1"/>
-              <a:t>equal</a:t>
+              <a:t>Q-Q panel</a:t>
             </a:r>
             <a:r>
               <a:rPr sz="2000"/>
-              <a:t> (</a:t>
-            </a:r>
-            <a:r>
-              <a:rPr sz="2000" i="1"/>
-              <a:t>p</a:t>
-            </a:r>
-            <a:r>
-              <a:rPr sz="2000"/>
-              <a:t> &gt; 0.05) or </a:t>
-            </a:r>
-            <a:r>
-              <a:rPr sz="2000" b="1"/>
-              <a:t>unequal</a:t>
-            </a:r>
-            <a:r>
-              <a:rPr sz="2000"/>
-              <a:t>?</a:t>
+              <a:t> — if points track the line, you’re fine.</a:t>
             </a:r>
           </a:p>
         </p:txBody>
@@ -5622,12 +5222,42 @@
       </p:grpSpPr>
       <p:sp>
         <p:nvSpPr>
+          <p:cNvPr id="2" name="Title 1"/>
+          <p:cNvSpPr>
+            <a:spLocks noGrp="1"/>
+          </p:cNvSpPr>
+          <p:nvPr>
+            <p:ph type="title"/>
+          </p:nvPr>
+        </p:nvSpPr>
+        <p:spPr>
+          <a:xfrm>
+            <a:off x="0" y="0"/>
+            <a:ext cx="9144000" cy="582780"/>
+          </a:xfrm>
+        </p:spPr>
+        <p:txBody>
+          <a:bodyPr/>
+          <a:lstStyle/>
+          <a:p>
+            <a:pPr lvl="0" indent="0" marL="0">
+              <a:buNone/>
+            </a:pPr>
+            <a:r>
+              <a:rPr/>
+              <a:t>Assumption 2 — Equal Variance (Levene’s Test)</a:t>
+            </a:r>
+          </a:p>
+        </p:txBody>
+      </p:sp>
+      <p:sp>
+        <p:nvSpPr>
           <p:cNvPr id="3" name="Content Placeholder 2"/>
           <p:cNvSpPr>
             <a:spLocks noGrp="1"/>
           </p:cNvSpPr>
           <p:nvPr>
-            <p:ph idx="1" sz="half"/>
+            <p:ph idx="1"/>
           </p:nvPr>
         </p:nvSpPr>
         <p:spPr/>
@@ -5635,266 +5265,49 @@
           <a:bodyPr/>
           <a:lstStyle/>
           <a:p>
-            <a:pPr lvl="0" indent="0">
-              <a:buNone/>
-            </a:pPr>
-            <a:r>
-              <a:rPr>
-                <a:solidFill>
-                  <a:srgbClr val="5E5E5E"/>
-                </a:solidFill>
-                <a:latin typeface="Courier"/>
-              </a:rPr>
-              <a:t># Levene's test — H0: all groups have equal variance --</a:t>
-            </a:r>
-            <a:br/>
-            <a:r>
-              <a:rPr>
-                <a:solidFill>
-                  <a:srgbClr val="4758AB"/>
-                </a:solidFill>
-                <a:latin typeface="Courier"/>
-              </a:rPr>
-              <a:t>leveneTest</a:t>
-            </a:r>
-            <a:r>
-              <a:rPr>
-                <a:solidFill>
-                  <a:srgbClr val="003B4F"/>
-                </a:solidFill>
-                <a:latin typeface="Courier"/>
-              </a:rPr>
-              <a:t>(body_mass_g </a:t>
-            </a:r>
-            <a:r>
-              <a:rPr>
-                <a:solidFill>
-                  <a:srgbClr val="5E5E5E"/>
-                </a:solidFill>
-                <a:latin typeface="Courier"/>
-              </a:rPr>
-              <a:t>~</a:t>
-            </a:r>
-            <a:r>
-              <a:rPr>
-                <a:solidFill>
-                  <a:srgbClr val="003B4F"/>
-                </a:solidFill>
-                <a:latin typeface="Courier"/>
-              </a:rPr>
-              <a:t> species, </a:t>
-            </a:r>
-            <a:r>
-              <a:rPr>
-                <a:solidFill>
-                  <a:srgbClr val="657422"/>
-                </a:solidFill>
-                <a:latin typeface="Courier"/>
-              </a:rPr>
-              <a:t>data =</a:t>
-            </a:r>
-            <a:r>
-              <a:rPr>
-                <a:solidFill>
-                  <a:srgbClr val="003B4F"/>
-                </a:solidFill>
-                <a:latin typeface="Courier"/>
-              </a:rPr>
-              <a:t> penguins_df)</a:t>
-            </a:r>
-          </a:p>
-          <a:p>
-            <a:pPr lvl="0" indent="0">
-              <a:buNone/>
-            </a:pPr>
-            <a:r>
-              <a:rPr>
-                <a:latin typeface="Courier"/>
-              </a:rPr>
-              <a:t>Levene's Test for Homogeneity of Variance (center = median)
-       Df F value   Pr(&gt;F)   
-group   2  5.1203 0.006445 **
-      339                    
----
-Signif. codes:  0 '***' 0.001 '**' 0.01 '*' 0.05 '.' 0.1 ' ' 1</a:t>
-            </a:r>
-          </a:p>
-        </p:txBody>
-      </p:sp>
-      <p:sp>
-        <p:nvSpPr>
-          <p:cNvPr id="4" name="Content Placeholder 3"/>
-          <p:cNvSpPr>
-            <a:spLocks noGrp="1"/>
-          </p:cNvSpPr>
-          <p:nvPr>
-            <p:ph idx="2" sz="half"/>
-          </p:nvPr>
-        </p:nvSpPr>
-        <p:spPr/>
-        <p:txBody>
-          <a:bodyPr/>
-          <a:lstStyle/>
-          <a:p>
-            <a:pPr lvl="0"/>
-            <a:r>
-              <a:rPr i="1"/>
+            <a:pPr lvl="0" indent="0" marL="1270000">
+              <a:buNone/>
+            </a:pPr>
+            <a:r>
+              <a:rPr sz="2000" b="1"/>
+              <a:t>Note</a:t>
+            </a:r>
+          </a:p>
+          <a:p>
+            <a:pPr lvl="0" indent="0" marL="1270000">
+              <a:buNone/>
+            </a:pPr>
+            <a:r>
+              <a:rPr sz="2000" b="1"/>
+              <a:t>🔮 Predict first:</a:t>
+            </a:r>
+            <a:r>
+              <a:rPr sz="2000"/>
+              <a:t> Look back at the boxplot spreads. Predict — will Levene’s test call the variances </a:t>
+            </a:r>
+            <a:r>
+              <a:rPr sz="2000" b="1"/>
+              <a:t>equal</a:t>
+            </a:r>
+            <a:r>
+              <a:rPr sz="2000"/>
+              <a:t> (</a:t>
+            </a:r>
+            <a:r>
+              <a:rPr sz="2000" i="1"/>
               <a:t>p</a:t>
             </a:r>
             <a:r>
-              <a:rPr/>
-              <a:t> &gt; 0.05 → variances similar → classic ANOVA is fine</a:t>
-            </a:r>
-          </a:p>
-          <a:p>
-            <a:pPr lvl="0"/>
-            <a:r>
-              <a:rPr i="1"/>
-              <a:t>p</a:t>
-            </a:r>
-            <a:r>
-              <a:rPr/>
-              <a:t> &lt; 0.05 → variances differ → use </a:t>
-            </a:r>
-            <a:r>
-              <a:rPr b="1"/>
-              <a:t>Welch’s ANOVA</a:t>
-            </a:r>
-            <a:r>
-              <a:rPr/>
-              <a:t>:</a:t>
-            </a:r>
-          </a:p>
-          <a:p>
-            <a:pPr lvl="0" indent="0">
-              <a:buNone/>
-            </a:pPr>
-            <a:r>
-              <a:rPr>
-                <a:solidFill>
-                  <a:srgbClr val="4758AB"/>
-                </a:solidFill>
-                <a:latin typeface="Courier"/>
-              </a:rPr>
-              <a:t>oneway.test</a:t>
-            </a:r>
-            <a:r>
-              <a:rPr>
-                <a:solidFill>
-                  <a:srgbClr val="003B4F"/>
-                </a:solidFill>
-                <a:latin typeface="Courier"/>
-              </a:rPr>
-              <a:t>(body_mass_g </a:t>
-            </a:r>
-            <a:r>
-              <a:rPr>
-                <a:solidFill>
-                  <a:srgbClr val="5E5E5E"/>
-                </a:solidFill>
-                <a:latin typeface="Courier"/>
-              </a:rPr>
-              <a:t>~</a:t>
-            </a:r>
-            <a:r>
-              <a:rPr>
-                <a:solidFill>
-                  <a:srgbClr val="003B4F"/>
-                </a:solidFill>
-                <a:latin typeface="Courier"/>
-              </a:rPr>
-              <a:t> species,</a:t>
-            </a:r>
-            <a:br/>
-            <a:r>
-              <a:rPr>
-                <a:solidFill>
-                  <a:srgbClr val="003B4F"/>
-                </a:solidFill>
-                <a:latin typeface="Courier"/>
-              </a:rPr>
-              <a:t>            </a:t>
-            </a:r>
-            <a:r>
-              <a:rPr>
-                <a:solidFill>
-                  <a:srgbClr val="657422"/>
-                </a:solidFill>
-                <a:latin typeface="Courier"/>
-              </a:rPr>
-              <a:t>data =</a:t>
-            </a:r>
-            <a:r>
-              <a:rPr>
-                <a:solidFill>
-                  <a:srgbClr val="003B4F"/>
-                </a:solidFill>
-                <a:latin typeface="Courier"/>
-              </a:rPr>
-              <a:t> penguins_df,</a:t>
-            </a:r>
-            <a:br/>
-            <a:r>
-              <a:rPr>
-                <a:solidFill>
-                  <a:srgbClr val="003B4F"/>
-                </a:solidFill>
-                <a:latin typeface="Courier"/>
-              </a:rPr>
-              <a:t>            </a:t>
-            </a:r>
-            <a:r>
-              <a:rPr>
-                <a:solidFill>
-                  <a:srgbClr val="657422"/>
-                </a:solidFill>
-                <a:latin typeface="Courier"/>
-              </a:rPr>
-              <a:t>var.equal =</a:t>
-            </a:r>
-            <a:r>
-              <a:rPr>
-                <a:solidFill>
-                  <a:srgbClr val="003B4F"/>
-                </a:solidFill>
-                <a:latin typeface="Courier"/>
-              </a:rPr>
-              <a:t> </a:t>
-            </a:r>
-            <a:r>
-              <a:rPr>
-                <a:solidFill>
-                  <a:srgbClr val="8F5902"/>
-                </a:solidFill>
-                <a:latin typeface="Courier"/>
-              </a:rPr>
-              <a:t>FALSE</a:t>
-            </a:r>
-            <a:r>
-              <a:rPr>
-                <a:solidFill>
-                  <a:srgbClr val="003B4F"/>
-                </a:solidFill>
-                <a:latin typeface="Courier"/>
-              </a:rPr>
-              <a:t>)</a:t>
-            </a:r>
-          </a:p>
-          <a:p>
-            <a:pPr lvl="0" indent="0" marL="0">
-              <a:buNone/>
-            </a:pPr>
-            <a:r>
-              <a:rPr/>
-              <a:t>Same spirit as Welch’s </a:t>
-            </a:r>
-            <a:r>
-              <a:rPr b="1"/>
-              <a:t>t</a:t>
-            </a:r>
-            <a:r>
-              <a:rPr/>
-              <a:t>-test — robust when spreads differ.</a:t>
+              <a:rPr sz="2000"/>
+              <a:t> &gt; 0.05) or </a:t>
+            </a:r>
+            <a:r>
+              <a:rPr sz="2000" b="1"/>
+              <a:t>unequal</a:t>
+            </a:r>
+            <a:r>
+              <a:rPr sz="2000"/>
+              <a:t>?</a:t>
             </a:r>
           </a:p>
         </p:txBody>
@@ -5923,65 +5336,279 @@
       </p:grpSpPr>
       <p:sp>
         <p:nvSpPr>
-          <p:cNvPr id="2" name="Title 1"/>
-          <p:cNvSpPr>
-            <a:spLocks noGrp="1"/>
-          </p:cNvSpPr>
-          <p:nvPr>
-            <p:ph type="title"/>
-          </p:nvPr>
-        </p:nvSpPr>
-        <p:spPr>
-          <a:xfrm>
-            <a:off x="0" y="0"/>
-            <a:ext cx="9144000" cy="582780"/>
-          </a:xfrm>
-        </p:spPr>
-        <p:txBody>
-          <a:bodyPr/>
-          <a:lstStyle/>
+          <p:cNvPr id="3" name="Content Placeholder 2"/>
+          <p:cNvSpPr>
+            <a:spLocks noGrp="1"/>
+          </p:cNvSpPr>
+          <p:nvPr>
+            <p:ph idx="1" sz="half"/>
+          </p:nvPr>
+        </p:nvSpPr>
+        <p:spPr/>
+        <p:txBody>
+          <a:bodyPr/>
+          <a:lstStyle/>
+          <a:p>
+            <a:pPr lvl="0" indent="0">
+              <a:buNone/>
+            </a:pPr>
+            <a:r>
+              <a:rPr>
+                <a:solidFill>
+                  <a:srgbClr val="5E5E5E"/>
+                </a:solidFill>
+                <a:latin typeface="Courier"/>
+              </a:rPr>
+              <a:t># Levene's test — H0: all groups have equal variance --</a:t>
+            </a:r>
+            <a:br/>
+            <a:r>
+              <a:rPr>
+                <a:solidFill>
+                  <a:srgbClr val="4758AB"/>
+                </a:solidFill>
+                <a:latin typeface="Courier"/>
+              </a:rPr>
+              <a:t>leveneTest</a:t>
+            </a:r>
+            <a:r>
+              <a:rPr>
+                <a:solidFill>
+                  <a:srgbClr val="003B4F"/>
+                </a:solidFill>
+                <a:latin typeface="Courier"/>
+              </a:rPr>
+              <a:t>(body_mass_g </a:t>
+            </a:r>
+            <a:r>
+              <a:rPr>
+                <a:solidFill>
+                  <a:srgbClr val="5E5E5E"/>
+                </a:solidFill>
+                <a:latin typeface="Courier"/>
+              </a:rPr>
+              <a:t>~</a:t>
+            </a:r>
+            <a:r>
+              <a:rPr>
+                <a:solidFill>
+                  <a:srgbClr val="003B4F"/>
+                </a:solidFill>
+                <a:latin typeface="Courier"/>
+              </a:rPr>
+              <a:t> species, </a:t>
+            </a:r>
+            <a:r>
+              <a:rPr>
+                <a:solidFill>
+                  <a:srgbClr val="657422"/>
+                </a:solidFill>
+                <a:latin typeface="Courier"/>
+              </a:rPr>
+              <a:t>data =</a:t>
+            </a:r>
+            <a:r>
+              <a:rPr>
+                <a:solidFill>
+                  <a:srgbClr val="003B4F"/>
+                </a:solidFill>
+                <a:latin typeface="Courier"/>
+              </a:rPr>
+              <a:t> penguins_df)</a:t>
+            </a:r>
+          </a:p>
+          <a:p>
+            <a:pPr lvl="0" indent="0">
+              <a:buNone/>
+            </a:pPr>
+            <a:r>
+              <a:rPr>
+                <a:latin typeface="Courier"/>
+              </a:rPr>
+              <a:t>Levene's Test for Homogeneity of Variance (center = median)
+       Df F value   Pr(&gt;F)   
+group   2  5.1203 0.006445 **
+      339                    
+---
+Signif. codes:  0 '***' 0.001 '**' 0.01 '*' 0.05 '.' 0.1 ' ' 1</a:t>
+            </a:r>
+          </a:p>
+        </p:txBody>
+      </p:sp>
+      <p:sp>
+        <p:nvSpPr>
+          <p:cNvPr id="4" name="Content Placeholder 3"/>
+          <p:cNvSpPr>
+            <a:spLocks noGrp="1"/>
+          </p:cNvSpPr>
+          <p:nvPr>
+            <p:ph idx="2" sz="half"/>
+          </p:nvPr>
+        </p:nvSpPr>
+        <p:spPr/>
+        <p:txBody>
+          <a:bodyPr/>
+          <a:lstStyle/>
+          <a:p>
+            <a:pPr lvl="0"/>
+            <a:r>
+              <a:rPr i="1"/>
+              <a:t>p</a:t>
+            </a:r>
+            <a:r>
+              <a:rPr/>
+              <a:t> &gt; 0.05 → variances similar → classic ANOVA is fine</a:t>
+            </a:r>
+          </a:p>
+          <a:p>
+            <a:pPr lvl="0"/>
+            <a:r>
+              <a:rPr i="1"/>
+              <a:t>p</a:t>
+            </a:r>
+            <a:r>
+              <a:rPr/>
+              <a:t> &lt; 0.05 → variances differ → use </a:t>
+            </a:r>
+            <a:r>
+              <a:rPr b="1"/>
+              <a:t>Welch’s ANOVA</a:t>
+            </a:r>
+            <a:r>
+              <a:rPr/>
+              <a:t>:</a:t>
+            </a:r>
+          </a:p>
+          <a:p>
+            <a:pPr lvl="0" indent="0">
+              <a:buNone/>
+            </a:pPr>
+            <a:r>
+              <a:rPr>
+                <a:solidFill>
+                  <a:srgbClr val="4758AB"/>
+                </a:solidFill>
+                <a:latin typeface="Courier"/>
+              </a:rPr>
+              <a:t>oneway.test</a:t>
+            </a:r>
+            <a:r>
+              <a:rPr>
+                <a:solidFill>
+                  <a:srgbClr val="003B4F"/>
+                </a:solidFill>
+                <a:latin typeface="Courier"/>
+              </a:rPr>
+              <a:t>(body_mass_g </a:t>
+            </a:r>
+            <a:r>
+              <a:rPr>
+                <a:solidFill>
+                  <a:srgbClr val="5E5E5E"/>
+                </a:solidFill>
+                <a:latin typeface="Courier"/>
+              </a:rPr>
+              <a:t>~</a:t>
+            </a:r>
+            <a:r>
+              <a:rPr>
+                <a:solidFill>
+                  <a:srgbClr val="003B4F"/>
+                </a:solidFill>
+                <a:latin typeface="Courier"/>
+              </a:rPr>
+              <a:t> species,</a:t>
+            </a:r>
+            <a:br/>
+            <a:r>
+              <a:rPr>
+                <a:solidFill>
+                  <a:srgbClr val="003B4F"/>
+                </a:solidFill>
+                <a:latin typeface="Courier"/>
+              </a:rPr>
+              <a:t>            </a:t>
+            </a:r>
+            <a:r>
+              <a:rPr>
+                <a:solidFill>
+                  <a:srgbClr val="657422"/>
+                </a:solidFill>
+                <a:latin typeface="Courier"/>
+              </a:rPr>
+              <a:t>data =</a:t>
+            </a:r>
+            <a:r>
+              <a:rPr>
+                <a:solidFill>
+                  <a:srgbClr val="003B4F"/>
+                </a:solidFill>
+                <a:latin typeface="Courier"/>
+              </a:rPr>
+              <a:t> penguins_df,</a:t>
+            </a:r>
+            <a:br/>
+            <a:r>
+              <a:rPr>
+                <a:solidFill>
+                  <a:srgbClr val="003B4F"/>
+                </a:solidFill>
+                <a:latin typeface="Courier"/>
+              </a:rPr>
+              <a:t>            </a:t>
+            </a:r>
+            <a:r>
+              <a:rPr>
+                <a:solidFill>
+                  <a:srgbClr val="657422"/>
+                </a:solidFill>
+                <a:latin typeface="Courier"/>
+              </a:rPr>
+              <a:t>var.equal =</a:t>
+            </a:r>
+            <a:r>
+              <a:rPr>
+                <a:solidFill>
+                  <a:srgbClr val="003B4F"/>
+                </a:solidFill>
+                <a:latin typeface="Courier"/>
+              </a:rPr>
+              <a:t> </a:t>
+            </a:r>
+            <a:r>
+              <a:rPr>
+                <a:solidFill>
+                  <a:srgbClr val="8F5902"/>
+                </a:solidFill>
+                <a:latin typeface="Courier"/>
+              </a:rPr>
+              <a:t>FALSE</a:t>
+            </a:r>
+            <a:r>
+              <a:rPr>
+                <a:solidFill>
+                  <a:srgbClr val="003B4F"/>
+                </a:solidFill>
+                <a:latin typeface="Courier"/>
+              </a:rPr>
+              <a:t>)</a:t>
+            </a:r>
+          </a:p>
           <a:p>
             <a:pPr lvl="0" indent="0" marL="0">
               <a:buNone/>
             </a:pPr>
             <a:r>
               <a:rPr/>
-              <a:t>🛑 Pause — Do Activity Parts 4–6 Now</a:t>
-            </a:r>
-          </a:p>
-        </p:txBody>
-      </p:sp>
-      <p:sp>
-        <p:nvSpPr>
-          <p:cNvPr id="3" name="Content Placeholder 2"/>
-          <p:cNvSpPr>
-            <a:spLocks noGrp="1"/>
-          </p:cNvSpPr>
-          <p:nvPr>
-            <p:ph idx="1"/>
-          </p:nvPr>
-        </p:nvSpPr>
-        <p:spPr/>
-        <p:txBody>
-          <a:bodyPr/>
-          <a:lstStyle/>
-          <a:p>
-            <a:pPr lvl="0" indent="0" marL="0">
-              <a:buNone/>
-            </a:pPr>
-            <a:r>
-              <a:rPr/>
-              <a:t>Fit </a:t>
-            </a:r>
-            <a:r>
-              <a:rPr>
-                <a:latin typeface="Courier"/>
-              </a:rPr>
-              <a:t>lm(body_mass_g ~ species)</a:t>
-            </a:r>
-            <a:r>
-              <a:rPr/>
-              <a:t>, check the residual QQ plot + Shapiro, and run Levene’s test. Predict each result before you run it.</a:t>
+              <a:t>Same spirit as Welch’s </a:t>
+            </a:r>
+            <a:r>
+              <a:rPr b="1"/>
+              <a:t>t</a:t>
+            </a:r>
+            <a:r>
+              <a:rPr/>
+              <a:t>-test — robust when spreads differ.</a:t>
             </a:r>
           </a:p>
         </p:txBody>
@@ -6033,7 +5660,7 @@
             </a:pPr>
             <a:r>
               <a:rPr/>
-              <a:t>🧩 Chunk 3 of 4 · Run the ANOVA &amp; Read the F Table</a:t>
+              <a:t>🛑 Pause — Do Activity Parts 4–6 Now</a:t>
             </a:r>
           </a:p>
         </p:txBody>
@@ -6057,54 +5684,18 @@
               <a:buNone/>
             </a:pPr>
             <a:r>
-              <a:rPr b="1"/>
-              <a:t>We will cover:</a:t>
-            </a:r>
-            <a:r>
-              <a:rPr/>
-              <a:t> the ANOVA table two ways — base </a:t>
-            </a:r>
-            <a:r>
-              <a:rPr>
-                <a:latin typeface="Courier"/>
-              </a:rPr>
-              <a:t>aov()</a:t>
-            </a:r>
-            <a:r>
-              <a:rPr/>
-              <a:t> and </a:t>
-            </a:r>
-            <a:r>
-              <a:rPr>
-                <a:latin typeface="Courier"/>
-              </a:rPr>
-              <a:t>car::Anova()</a:t>
-            </a:r>
-            <a:r>
-              <a:rPr/>
-              <a:t> — and why the difference matters for unbalanced data.</a:t>
-            </a:r>
-          </a:p>
-          <a:p>
-            <a:pPr lvl="0" indent="0" marL="1270000">
-              <a:buNone/>
-            </a:pPr>
-            <a:r>
-              <a:rPr sz="2000" b="1"/>
-              <a:t>Tip</a:t>
-            </a:r>
-          </a:p>
-          <a:p>
-            <a:pPr lvl="0" indent="0" marL="1270000">
-              <a:buNone/>
-            </a:pPr>
-            <a:r>
-              <a:rPr sz="2000" b="1"/>
-              <a:t>🖐 After this chunk: Activity Parts 7–8</a:t>
-            </a:r>
-            <a:r>
-              <a:rPr sz="2000"/>
-              <a:t> (run both, read F / df / p).</a:t>
+              <a:rPr/>
+              <a:t>Fit </a:t>
+            </a:r>
+            <a:r>
+              <a:rPr>
+                <a:latin typeface="Courier"/>
+              </a:rPr>
+              <a:t>lm(body_mass_g ~ species)</a:t>
+            </a:r>
+            <a:r>
+              <a:rPr/>
+              <a:t>, check the residual QQ plot + Shapiro, and run Levene’s test. Predict each result before you run it.</a:t>
             </a:r>
           </a:p>
         </p:txBody>
@@ -6156,7 +5747,7 @@
             </a:pPr>
             <a:r>
               <a:rPr/>
-              <a:t>Where we left off (Lecture 10)</a:t>
+              <a:t>Where we left off (Lectures 09–11)</a:t>
             </a:r>
           </a:p>
         </p:txBody>
@@ -6179,41 +5770,65 @@
             <a:pPr lvl="0"/>
             <a:r>
               <a:rPr b="1"/>
-              <a:t>Factors</a:t>
-            </a:r>
-            <a:r>
-              <a:rPr/>
-              <a:t> — categorical variables with an ordered set of levels</a:t>
+              <a:t>T-Tests I &amp; II</a:t>
+            </a:r>
+            <a:r>
+              <a:rPr/>
+              <a:t> — comparing the means of </a:t>
+            </a:r>
+            <a:r>
+              <a:rPr b="1"/>
+              <a:t>two</a:t>
+            </a:r>
+            <a:r>
+              <a:rPr/>
+              <a:t> groups with Welch’s t-test</a:t>
             </a:r>
           </a:p>
           <a:p>
             <a:pPr lvl="0"/>
             <a:r>
-              <a:rPr b="1">
-                <a:latin typeface="Courier"/>
-              </a:rPr>
-              <a:t>fct_reorder()</a:t>
-            </a:r>
-            <a:r>
               <a:rPr b="1"/>
-              <a:t> / </a:t>
-            </a:r>
-            <a:r>
-              <a:rPr b="1">
-                <a:latin typeface="Courier"/>
-              </a:rPr>
-              <a:t>fct_relevel()</a:t>
-            </a:r>
-            <a:r>
-              <a:rPr/>
-              <a:t> — set the order and the reference group</a:t>
+              <a:t>Regression (Lecture 11)</a:t>
+            </a:r>
+            <a:r>
+              <a:rPr/>
+              <a:t> — </a:t>
+            </a:r>
+            <a:r>
+              <a:rPr>
+                <a:latin typeface="Courier"/>
+              </a:rPr>
+              <a:t>lm(Y ~ X)</a:t>
+            </a:r>
+            <a:r>
+              <a:rPr/>
+              <a:t> with a </a:t>
+            </a:r>
+            <a:r>
+              <a:rPr b="1"/>
+              <a:t>numeric</a:t>
+            </a:r>
+            <a:r>
+              <a:rPr/>
+              <a:t> predictor, checked with </a:t>
+            </a:r>
+            <a:r>
+              <a:rPr>
+                <a:latin typeface="Courier"/>
+              </a:rPr>
+              <a:t>plot(model)</a:t>
             </a:r>
           </a:p>
           <a:p>
             <a:pPr lvl="0"/>
             <a:r>
               <a:rPr/>
-              <a:t>Cleaner, better-ordered plots for grouped data</a:t>
+              <a:t>Both of those are, underneath, the same tool: a </a:t>
+            </a:r>
+            <a:r>
+              <a:rPr b="1"/>
+              <a:t>linear model</a:t>
             </a:r>
           </a:p>
           <a:p>
@@ -6240,7 +5855,7 @@
             </a:pPr>
             <a:r>
               <a:rPr sz="2000"/>
-              <a:t>The t-test (Lecture 04) compared </a:t>
+              <a:t>The t-test compared </a:t>
             </a:r>
             <a:r>
               <a:rPr sz="2000" b="1"/>
@@ -6256,7 +5871,25 @@
             </a:r>
             <a:r>
               <a:rPr sz="2000"/>
-              <a:t> group questions — three species, four sites, five treatments. Now that you can control factor levels, today we learn the test for many groups: </a:t>
+              <a:t> group questions — three species, four sites, five treatments. Today’s twist: it’s still </a:t>
+            </a:r>
+            <a:r>
+              <a:rPr sz="2000">
+                <a:latin typeface="Courier"/>
+              </a:rPr>
+              <a:t>lm(Y ~ X)</a:t>
+            </a:r>
+            <a:r>
+              <a:rPr sz="2000"/>
+              <a:t> — just with a </a:t>
+            </a:r>
+            <a:r>
+              <a:rPr sz="2000" b="1"/>
+              <a:t>categorical</a:t>
+            </a:r>
+            <a:r>
+              <a:rPr sz="2000"/>
+              <a:t> X instead of a numeric one. That’s </a:t>
             </a:r>
             <a:r>
               <a:rPr sz="2000" b="1"/>
@@ -6300,512 +5933,6 @@
         <p:spPr>
           <a:xfrm>
             <a:off x="0" y="0"/>
-            <a:ext cx="9144000" cy="582780"/>
-          </a:xfrm>
-        </p:spPr>
-        <p:txBody>
-          <a:bodyPr/>
-          <a:lstStyle/>
-          <a:p>
-            <a:pPr lvl="0" indent="0" marL="0">
-              <a:buNone/>
-            </a:pPr>
-            <a:r>
-              <a:rPr/>
-              <a:t>Run the ANOVA — </a:t>
-            </a:r>
-            <a:r>
-              <a:rPr>
-                <a:latin typeface="Courier"/>
-              </a:rPr>
-              <a:t>aov()</a:t>
-            </a:r>
-            <a:r>
-              <a:rPr/>
-              <a:t> and </a:t>
-            </a:r>
-            <a:r>
-              <a:rPr>
-                <a:latin typeface="Courier"/>
-              </a:rPr>
-              <a:t>summary()</a:t>
-            </a:r>
-          </a:p>
-        </p:txBody>
-      </p:sp>
-      <p:sp>
-        <p:nvSpPr>
-          <p:cNvPr id="3" name="Content Placeholder 2"/>
-          <p:cNvSpPr>
-            <a:spLocks noGrp="1"/>
-          </p:cNvSpPr>
-          <p:nvPr>
-            <p:ph idx="1"/>
-          </p:nvPr>
-        </p:nvSpPr>
-        <p:spPr/>
-        <p:txBody>
-          <a:bodyPr/>
-          <a:lstStyle/>
-          <a:p>
-            <a:pPr lvl="0" indent="0" marL="1270000">
-              <a:buNone/>
-            </a:pPr>
-            <a:r>
-              <a:rPr sz="2000" b="1"/>
-              <a:t>Note</a:t>
-            </a:r>
-          </a:p>
-          <a:p>
-            <a:pPr lvl="0" indent="0" marL="1270000">
-              <a:buNone/>
-            </a:pPr>
-            <a:r>
-              <a:rPr sz="2000" b="1"/>
-              <a:t>🔮 Predict first:</a:t>
-            </a:r>
-            <a:r>
-              <a:rPr sz="2000"/>
-              <a:t> The boxplot looked very separated. Predict the </a:t>
-            </a:r>
-            <a:r>
-              <a:rPr sz="2000" i="1"/>
-              <a:t>p</a:t>
-            </a:r>
-            <a:r>
-              <a:rPr sz="2000"/>
-              <a:t>-value — closer to 0.5, 0.05, or far below 0.001?</a:t>
-            </a:r>
-          </a:p>
-        </p:txBody>
-      </p:sp>
-    </p:spTree>
-  </p:cSld>
-</p:sld>
-</file>
-
-<file path=ppt/slides/slide21.xml><?xml version="1.0" encoding="utf-8"?>
-<p:sld xmlns:a="http://schemas.openxmlformats.org/drawingml/2006/main" xmlns:r="http://schemas.openxmlformats.org/officeDocument/2006/relationships" xmlns:p="http://schemas.openxmlformats.org/presentationml/2006/main">
-  <p:cSld>
-    <p:spTree>
-      <p:nvGrpSpPr>
-        <p:cNvPr id="1" name=""/>
-        <p:cNvGrpSpPr/>
-        <p:nvPr/>
-      </p:nvGrpSpPr>
-      <p:grpSpPr>
-        <a:xfrm>
-          <a:off x="0" y="0"/>
-          <a:ext cx="0" cy="0"/>
-          <a:chOff x="0" y="0"/>
-          <a:chExt cx="0" cy="0"/>
-        </a:xfrm>
-      </p:grpSpPr>
-      <p:sp>
-        <p:nvSpPr>
-          <p:cNvPr id="3" name="Text Placeholder 2"/>
-          <p:cNvSpPr>
-            <a:spLocks noGrp="1"/>
-          </p:cNvSpPr>
-          <p:nvPr>
-            <p:ph idx="1" type="body"/>
-          </p:nvPr>
-        </p:nvSpPr>
-        <p:spPr/>
-        <p:txBody>
-          <a:bodyPr/>
-          <a:lstStyle/>
-          <a:p>
-            <a:pPr lvl="0" indent="0">
-              <a:buNone/>
-            </a:pPr>
-            <a:r>
-              <a:rPr>
-                <a:solidFill>
-                  <a:srgbClr val="5E5E5E"/>
-                </a:solidFill>
-                <a:latin typeface="Courier"/>
-              </a:rPr>
-              <a:t># Classic ANOVA table (Type I sums of squares) --------</a:t>
-            </a:r>
-            <a:br/>
-            <a:r>
-              <a:rPr>
-                <a:solidFill>
-                  <a:srgbClr val="003B4F"/>
-                </a:solidFill>
-                <a:latin typeface="Courier"/>
-              </a:rPr>
-              <a:t>mass_aov &lt;- </a:t>
-            </a:r>
-            <a:r>
-              <a:rPr>
-                <a:solidFill>
-                  <a:srgbClr val="4758AB"/>
-                </a:solidFill>
-                <a:latin typeface="Courier"/>
-              </a:rPr>
-              <a:t>aov</a:t>
-            </a:r>
-            <a:r>
-              <a:rPr>
-                <a:solidFill>
-                  <a:srgbClr val="003B4F"/>
-                </a:solidFill>
-                <a:latin typeface="Courier"/>
-              </a:rPr>
-              <a:t>(body_mass_g </a:t>
-            </a:r>
-            <a:r>
-              <a:rPr>
-                <a:solidFill>
-                  <a:srgbClr val="5E5E5E"/>
-                </a:solidFill>
-                <a:latin typeface="Courier"/>
-              </a:rPr>
-              <a:t>~</a:t>
-            </a:r>
-            <a:r>
-              <a:rPr>
-                <a:solidFill>
-                  <a:srgbClr val="003B4F"/>
-                </a:solidFill>
-                <a:latin typeface="Courier"/>
-              </a:rPr>
-              <a:t> species, </a:t>
-            </a:r>
-            <a:r>
-              <a:rPr>
-                <a:solidFill>
-                  <a:srgbClr val="657422"/>
-                </a:solidFill>
-                <a:latin typeface="Courier"/>
-              </a:rPr>
-              <a:t>data =</a:t>
-            </a:r>
-            <a:r>
-              <a:rPr>
-                <a:solidFill>
-                  <a:srgbClr val="003B4F"/>
-                </a:solidFill>
-                <a:latin typeface="Courier"/>
-              </a:rPr>
-              <a:t> penguins_df)</a:t>
-            </a:r>
-            <a:br/>
-            <a:r>
-              <a:rPr>
-                <a:solidFill>
-                  <a:srgbClr val="4758AB"/>
-                </a:solidFill>
-                <a:latin typeface="Courier"/>
-              </a:rPr>
-              <a:t>summary</a:t>
-            </a:r>
-            <a:r>
-              <a:rPr>
-                <a:solidFill>
-                  <a:srgbClr val="003B4F"/>
-                </a:solidFill>
-                <a:latin typeface="Courier"/>
-              </a:rPr>
-              <a:t>(mass_aov)</a:t>
-            </a:r>
-          </a:p>
-          <a:p>
-            <a:pPr lvl="0" indent="0">
-              <a:buNone/>
-            </a:pPr>
-            <a:r>
-              <a:rPr>
-                <a:latin typeface="Courier"/>
-              </a:rPr>
-              <a:t>             Df    Sum Sq  Mean Sq F value Pr(&gt;F)    
-species       2 146864214 73432107   343.6 &lt;2e-16 ***
-Residuals   339  72443483   213698                   
----
-Signif. codes:  0 '***' 0.001 '**' 0.01 '*' 0.05 '.' 0.1 ' ' 1</a:t>
-            </a:r>
-          </a:p>
-        </p:txBody>
-      </p:sp>
-      <p:sp>
-        <p:nvSpPr>
-          <p:cNvPr id="5" name="Text Placeholder 4"/>
-          <p:cNvSpPr>
-            <a:spLocks noGrp="1"/>
-          </p:cNvSpPr>
-          <p:nvPr>
-            <p:ph idx="3" sz="quarter" type="body"/>
-          </p:nvPr>
-        </p:nvSpPr>
-        <p:spPr/>
-        <p:txBody>
-          <a:bodyPr/>
-          <a:lstStyle/>
-          <a:p>
-            <a:pPr lvl="0" indent="0" marL="0">
-              <a:buNone/>
-            </a:pPr>
-            <a:r>
-              <a:rPr b="1"/>
-              <a:t>Reading the table:</a:t>
-            </a:r>
-          </a:p>
-        </p:txBody>
-      </p:sp>
-      <p:graphicFrame>
-        <p:nvGraphicFramePr>
-          <p:cNvPr id="6" name="Content Placeholder 5"/>
-          <p:cNvGraphicFramePr>
-            <a:graphicFrameLocks noGrp="1"/>
-          </p:cNvGraphicFramePr>
-          <p:nvPr>
-            <p:ph idx="1"/>
-          </p:nvPr>
-        </p:nvGraphicFramePr>
-        <p:xfrm>
-          <a:off x="4749800" y="1295400"/>
-          <a:ext cx="4038600" cy="3276600"/>
-        </p:xfrm>
-        <a:graphic>
-          <a:graphicData uri="http://schemas.openxmlformats.org/drawingml/2006/table">
-            <a:tbl>
-              <a:tblPr firstRow="1" bandRow="1">
-                <a:tableStyleId>{5C22544A-7EE6-4342-B048-85BDC9FD1C3A}</a:tableStyleId>
-              </a:tblPr>
-              <a:tblGrid>
-                <a:gridCol w="2019300"/>
-                <a:gridCol w="2019300"/>
-              </a:tblGrid>
-              <a:tr h="0">
-                <a:tc>
-                  <a:txBody>
-                    <a:bodyPr/>
-                    <a:lstStyle/>
-                    <a:p>
-                      <a:pPr lvl="0" indent="0" marL="0">
-                        <a:buNone/>
-                      </a:pPr>
-                      <a:r>
-                        <a:rPr/>
-                        <a:t>Column</a:t>
-                      </a:r>
-                    </a:p>
-                  </a:txBody>
-                  <a:tcPr/>
-                </a:tc>
-                <a:tc>
-                  <a:txBody>
-                    <a:bodyPr/>
-                    <a:lstStyle/>
-                    <a:p>
-                      <a:pPr lvl="0" indent="0" marL="0">
-                        <a:buNone/>
-                      </a:pPr>
-                      <a:r>
-                        <a:rPr/>
-                        <a:t>Meaning</a:t>
-                      </a:r>
-                    </a:p>
-                  </a:txBody>
-                  <a:tcPr/>
-                </a:tc>
-              </a:tr>
-              <a:tr h="0">
-                <a:tc>
-                  <a:txBody>
-                    <a:bodyPr/>
-                    <a:lstStyle/>
-                    <a:p>
-                      <a:pPr lvl="0" indent="0" marL="0">
-                        <a:buNone/>
-                      </a:pPr>
-                      <a:r>
-                        <a:rPr>
-                          <a:latin typeface="Courier"/>
-                        </a:rPr>
-                        <a:t>Df</a:t>
-                      </a:r>
-                    </a:p>
-                  </a:txBody>
-                </a:tc>
-                <a:tc>
-                  <a:txBody>
-                    <a:bodyPr/>
-                    <a:lstStyle/>
-                    <a:p>
-                      <a:pPr lvl="0" indent="0" marL="0">
-                        <a:buNone/>
-                      </a:pPr>
-                      <a:r>
-                        <a:rPr/>
-                        <a:t>groups − 1, and residual df</a:t>
-                      </a:r>
-                    </a:p>
-                  </a:txBody>
-                </a:tc>
-              </a:tr>
-              <a:tr h="0">
-                <a:tc>
-                  <a:txBody>
-                    <a:bodyPr/>
-                    <a:lstStyle/>
-                    <a:p>
-                      <a:pPr lvl="0" indent="0" marL="0">
-                        <a:buNone/>
-                      </a:pPr>
-                      <a:r>
-                        <a:rPr>
-                          <a:latin typeface="Courier"/>
-                        </a:rPr>
-                        <a:t>F value</a:t>
-                      </a:r>
-                    </a:p>
-                  </a:txBody>
-                </a:tc>
-                <a:tc>
-                  <a:txBody>
-                    <a:bodyPr/>
-                    <a:lstStyle/>
-                    <a:p>
-                      <a:pPr lvl="0" indent="0" marL="0">
-                        <a:buNone/>
-                      </a:pPr>
-                      <a:r>
-                        <a:rPr/>
-                        <a:t>between ÷ within variance</a:t>
-                      </a:r>
-                    </a:p>
-                  </a:txBody>
-                </a:tc>
-              </a:tr>
-              <a:tr h="0">
-                <a:tc>
-                  <a:txBody>
-                    <a:bodyPr/>
-                    <a:lstStyle/>
-                    <a:p>
-                      <a:pPr lvl="0" indent="0" marL="0">
-                        <a:buNone/>
-                      </a:pPr>
-                      <a:r>
-                        <a:rPr>
-                          <a:latin typeface="Courier"/>
-                        </a:rPr>
-                        <a:t>Pr(&gt;F)</a:t>
-                      </a:r>
-                    </a:p>
-                  </a:txBody>
-                </a:tc>
-                <a:tc>
-                  <a:txBody>
-                    <a:bodyPr/>
-                    <a:lstStyle/>
-                    <a:p>
-                      <a:pPr lvl="0" indent="0" marL="0">
-                        <a:buNone/>
-                      </a:pPr>
-                      <a:r>
-                        <a:rPr/>
-                        <a:t>the </a:t>
-                      </a:r>
-                      <a:r>
-                        <a:rPr i="1"/>
-                        <a:t>p</a:t>
-                      </a:r>
-                      <a:r>
-                        <a:rPr/>
-                        <a:t>-value for H₀</a:t>
-                      </a:r>
-                    </a:p>
-                  </a:txBody>
-                </a:tc>
-              </a:tr>
-            </a:tbl>
-          </a:graphicData>
-        </a:graphic>
-      </p:graphicFrame>
-      <p:sp>
-        <p:nvSpPr>
-          <p:cNvPr id="6" name="Content Placeholder 5"/>
-          <p:cNvSpPr>
-            <a:spLocks noGrp="1"/>
-          </p:cNvSpPr>
-          <p:nvPr>
-            <p:ph idx="4" sz="quarter"/>
-          </p:nvPr>
-        </p:nvSpPr>
-        <p:spPr/>
-        <p:txBody>
-          <a:bodyPr/>
-          <a:lstStyle/>
-          <a:p>
-            <a:pPr lvl="0" indent="0" marL="0">
-              <a:buNone/>
-            </a:pPr>
-            <a:r>
-              <a:rPr i="1"/>
-              <a:t>p</a:t>
-            </a:r>
-            <a:r>
-              <a:rPr/>
-              <a:t> &lt; 0.05 → </a:t>
-            </a:r>
-            <a:r>
-              <a:rPr b="1"/>
-              <a:t>reject H₀</a:t>
-            </a:r>
-            <a:r>
-              <a:rPr/>
-              <a:t> → at least one species differs. But </a:t>
-            </a:r>
-            <a:r>
-              <a:rPr b="1"/>
-              <a:t>which</a:t>
-            </a:r>
-            <a:r>
-              <a:rPr/>
-              <a:t>? Chunk 4.</a:t>
-            </a:r>
-          </a:p>
-        </p:txBody>
-      </p:sp>
-    </p:spTree>
-  </p:cSld>
-</p:sld>
-</file>
-
-<file path=ppt/slides/slide22.xml><?xml version="1.0" encoding="utf-8"?>
-<p:sld xmlns:a="http://schemas.openxmlformats.org/drawingml/2006/main" xmlns:r="http://schemas.openxmlformats.org/officeDocument/2006/relationships" xmlns:p="http://schemas.openxmlformats.org/presentationml/2006/main">
-  <p:cSld>
-    <p:spTree>
-      <p:nvGrpSpPr>
-        <p:cNvPr id="1" name=""/>
-        <p:cNvGrpSpPr/>
-        <p:nvPr/>
-      </p:nvGrpSpPr>
-      <p:grpSpPr>
-        <a:xfrm>
-          <a:off x="0" y="0"/>
-          <a:ext cx="0" cy="0"/>
-          <a:chOff x="0" y="0"/>
-          <a:chExt cx="0" cy="0"/>
-        </a:xfrm>
-      </p:grpSpPr>
-      <p:sp>
-        <p:nvSpPr>
-          <p:cNvPr id="2" name="Title 1"/>
-          <p:cNvSpPr>
-            <a:spLocks noGrp="1"/>
-          </p:cNvSpPr>
-          <p:nvPr>
-            <p:ph type="title"/>
-          </p:nvPr>
-        </p:nvSpPr>
-        <p:spPr>
-          <a:xfrm>
-            <a:off x="0" y="0"/>
             <a:ext cx="9144000" cy="602780"/>
           </a:xfrm>
           <a:solidFill>
@@ -6821,7 +5948,7 @@
             </a:pPr>
             <a:r>
               <a:rPr/>
-              <a:t>Live Demo — Watch It Break (on purpose)</a:t>
+              <a:t>What We Learned Today</a:t>
             </a:r>
           </a:p>
         </p:txBody>
@@ -6845,16 +5972,198 @@
               <a:buNone/>
             </a:pPr>
             <a:r>
-              <a:rPr/>
-              <a:t>For </a:t>
-            </a:r>
-            <a:r>
               <a:rPr b="1"/>
-              <a:t>unbalanced</a:t>
-            </a:r>
-            <a:r>
-              <a:rPr/>
-              <a:t> data we prefer </a:t>
+              <a:t>Concepts:</a:t>
+            </a:r>
+          </a:p>
+          <a:p>
+            <a:pPr lvl="0"/>
+            <a:r>
+              <a:rPr/>
+              <a:t>Many t-tests inflate the false-positive rate — </a:t>
+            </a:r>
+            <a:r>
+              <a:rPr b="1"/>
+              <a:t>ANOVA asks once</a:t>
+            </a:r>
+          </a:p>
+          <a:p>
+            <a:pPr lvl="0"/>
+            <a:r>
+              <a:rPr b="1"/>
+              <a:t>F</a:t>
+            </a:r>
+            <a:r>
+              <a:rPr/>
+              <a:t> = between-group ÷ within-group variance (signal ÷ noise)</a:t>
+            </a:r>
+          </a:p>
+          <a:p>
+            <a:pPr lvl="0"/>
+            <a:r>
+              <a:rPr/>
+              <a:t>ANOVA is a linear model with a categorical predictor — same </a:t>
+            </a:r>
+            <a:r>
+              <a:rPr>
+                <a:latin typeface="Courier"/>
+              </a:rPr>
+              <a:t>lm()</a:t>
+            </a:r>
+            <a:r>
+              <a:rPr/>
+              <a:t> as regression</a:t>
+            </a:r>
+          </a:p>
+          <a:p>
+            <a:pPr lvl="0"/>
+            <a:r>
+              <a:rPr/>
+              <a:t>Assumptions: </a:t>
+            </a:r>
+            <a:r>
+              <a:rPr b="1"/>
+              <a:t>normal residuals</a:t>
+            </a:r>
+            <a:r>
+              <a:rPr/>
+              <a:t>, </a:t>
+            </a:r>
+            <a:r>
+              <a:rPr b="1"/>
+              <a:t>equal variance</a:t>
+            </a:r>
+            <a:r>
+              <a:rPr/>
+              <a:t> (Levene)</a:t>
+            </a:r>
+          </a:p>
+          <a:p>
+            <a:pPr lvl="0" indent="0" marL="0">
+              <a:buNone/>
+            </a:pPr>
+            <a:r>
+              <a:rPr b="1"/>
+              <a:t>R skills:</a:t>
+            </a:r>
+          </a:p>
+          <a:p>
+            <a:pPr lvl="0"/>
+            <a:r>
+              <a:rPr>
+                <a:latin typeface="Courier"/>
+              </a:rPr>
+              <a:t>lm(Y ~ group)</a:t>
+            </a:r>
+          </a:p>
+          <a:p>
+            <a:pPr lvl="0"/>
+            <a:r>
+              <a:rPr>
+                <a:latin typeface="Courier"/>
+              </a:rPr>
+              <a:t>plot(model)</a:t>
+            </a:r>
+            <a:r>
+              <a:rPr/>
+              <a:t> diagnostics, </a:t>
+            </a:r>
+            <a:r>
+              <a:rPr>
+                <a:latin typeface="Courier"/>
+              </a:rPr>
+              <a:t>shapiro.test(residuals())</a:t>
+            </a:r>
+          </a:p>
+          <a:p>
+            <a:pPr lvl="0"/>
+            <a:r>
+              <a:rPr>
+                <a:latin typeface="Courier"/>
+              </a:rPr>
+              <a:t>leveneTest()</a:t>
+            </a:r>
+          </a:p>
+        </p:txBody>
+      </p:sp>
+      <p:sp>
+        <p:nvSpPr>
+          <p:cNvPr id="4" name="Content Placeholder 3"/>
+          <p:cNvSpPr>
+            <a:spLocks noGrp="1"/>
+          </p:cNvSpPr>
+          <p:nvPr>
+            <p:ph idx="2" sz="half"/>
+          </p:nvPr>
+        </p:nvSpPr>
+        <p:spPr/>
+        <p:txBody>
+          <a:bodyPr/>
+          <a:lstStyle/>
+          <a:p>
+            <a:pPr lvl="0" indent="0" marL="0">
+              <a:buNone/>
+            </a:pPr>
+            <a:r>
+              <a:rPr b="1"/>
+              <a:t>References:</a:t>
+            </a:r>
+          </a:p>
+          <a:p>
+            <a:pPr lvl="0"/>
+            <a:r>
+              <a:rPr/>
+              <a:t>📖 W&amp;S Ch. 15 — ANOVA</a:t>
+            </a:r>
+          </a:p>
+          <a:p>
+            <a:pPr lvl="0"/>
+            <a:r>
+              <a:rPr/>
+              <a:t>📖 </a:t>
+            </a:r>
+            <a:r>
+              <a:rPr>
+                <a:hlinkClick r:id="rId2"/>
+              </a:rPr>
+              <a:t>R4DS Ch. 16 — Factors</a:t>
+            </a:r>
+          </a:p>
+          <a:p>
+            <a:pPr lvl="0" indent="0" marL="0">
+              <a:buNone/>
+            </a:pPr>
+            <a:r>
+              <a:rPr b="1"/>
+              <a:t>Up next — Lecture 14:</a:t>
+            </a:r>
+          </a:p>
+          <a:p>
+            <a:pPr lvl="0"/>
+            <a:r>
+              <a:rPr/>
+              <a:t>Assumptions are checked — now we </a:t>
+            </a:r>
+            <a:r>
+              <a:rPr b="1"/>
+              <a:t>run</a:t>
+            </a:r>
+            <a:r>
+              <a:rPr/>
+              <a:t> the test</a:t>
+            </a:r>
+          </a:p>
+          <a:p>
+            <a:pPr lvl="0"/>
+            <a:r>
+              <a:rPr>
+                <a:latin typeface="Courier"/>
+              </a:rPr>
+              <a:t>aov()</a:t>
+            </a:r>
+            <a:r>
+              <a:rPr/>
+              <a:t> and </a:t>
             </a:r>
             <a:r>
               <a:rPr>
@@ -6864,2130 +6173,25 @@
             </a:r>
             <a:r>
               <a:rPr/>
-              <a:t>. I’ll reach for it but type lowercase, and forget the package:</a:t>
-            </a:r>
-          </a:p>
-          <a:p>
-            <a:pPr lvl="0" indent="0">
-              <a:buNone/>
-            </a:pPr>
-            <a:r>
-              <a:rPr>
-                <a:solidFill>
-                  <a:srgbClr val="4758AB"/>
-                </a:solidFill>
-                <a:latin typeface="Courier"/>
-              </a:rPr>
-              <a:t>anova</a:t>
-            </a:r>
-            <a:r>
-              <a:rPr>
-                <a:solidFill>
-                  <a:srgbClr val="003B4F"/>
-                </a:solidFill>
-                <a:latin typeface="Courier"/>
-              </a:rPr>
-              <a:t>(mass_model)        </a:t>
-            </a:r>
-            <a:r>
-              <a:rPr>
-                <a:solidFill>
-                  <a:srgbClr val="5E5E5E"/>
-                </a:solidFill>
-                <a:latin typeface="Courier"/>
-              </a:rPr>
-              <a:t># base R — Type I, one model at a time</a:t>
-            </a:r>
-            <a:br/>
-            <a:r>
-              <a:rPr>
-                <a:solidFill>
-                  <a:srgbClr val="4758AB"/>
-                </a:solidFill>
-                <a:latin typeface="Courier"/>
-              </a:rPr>
-              <a:t>Anova</a:t>
-            </a:r>
-            <a:r>
-              <a:rPr>
-                <a:solidFill>
-                  <a:srgbClr val="003B4F"/>
-                </a:solidFill>
-                <a:latin typeface="Courier"/>
-              </a:rPr>
-              <a:t>(mass_model)        </a:t>
-            </a:r>
-            <a:r>
-              <a:rPr>
-                <a:solidFill>
-                  <a:srgbClr val="5E5E5E"/>
-                </a:solidFill>
-                <a:latin typeface="Courier"/>
-              </a:rPr>
-              <a:t># capital A — but car isn't loaded!</a:t>
-            </a:r>
-          </a:p>
-          <a:p>
-            <a:pPr lvl="0" indent="0" marL="0">
-              <a:buNone/>
-            </a:pPr>
-            <a:r>
-              <a:rPr/>
-              <a:t>R stops:</a:t>
-            </a:r>
-          </a:p>
-          <a:p>
-            <a:pPr lvl="0" indent="0">
-              <a:buNone/>
-            </a:pPr>
-            <a:r>
-              <a:rPr>
-                <a:latin typeface="Courier"/>
-              </a:rPr>
-              <a:t>Error in Anova(mass_model) :
-  could not find function "Anova"</a:t>
-            </a:r>
-          </a:p>
-          <a:p>
-            <a:pPr lvl="0" indent="0" marL="0">
-              <a:buNone/>
-            </a:pPr>
-            <a:r>
-              <a:rPr/>
-              <a:t>The fix — load </a:t>
-            </a:r>
-            <a:r>
-              <a:rPr>
-                <a:latin typeface="Courier"/>
-              </a:rPr>
-              <a:t>car</a:t>
-            </a:r>
-            <a:r>
-              <a:rPr/>
-              <a:t>, and mind the capital </a:t>
+              <a:t>, then </a:t>
+            </a:r>
+            <a:r>
+              <a:rPr>
+                <a:latin typeface="Courier"/>
+              </a:rPr>
+              <a:t>emmeans</a:t>
+            </a:r>
+            <a:r>
+              <a:rPr/>
+              <a:t> post-hoc to find </a:t>
             </a:r>
             <a:r>
               <a:rPr b="1"/>
-              <a:t>A</a:t>
-            </a:r>
-            <a:r>
-              <a:rPr/>
-              <a:t>:</a:t>
-            </a:r>
-          </a:p>
-          <a:p>
-            <a:pPr lvl="0" indent="0">
-              <a:buNone/>
-            </a:pPr>
-            <a:r>
-              <a:rPr>
-                <a:solidFill>
-                  <a:srgbClr val="4758AB"/>
-                </a:solidFill>
-                <a:latin typeface="Courier"/>
-              </a:rPr>
-              <a:t>library</a:t>
-            </a:r>
-            <a:r>
-              <a:rPr>
-                <a:solidFill>
-                  <a:srgbClr val="003B4F"/>
-                </a:solidFill>
-                <a:latin typeface="Courier"/>
-              </a:rPr>
-              <a:t>(car)</a:t>
-            </a:r>
-            <a:br/>
-            <a:r>
-              <a:rPr>
-                <a:solidFill>
-                  <a:srgbClr val="4758AB"/>
-                </a:solidFill>
-                <a:latin typeface="Courier"/>
-              </a:rPr>
-              <a:t>Anova</a:t>
-            </a:r>
-            <a:r>
-              <a:rPr>
-                <a:solidFill>
-                  <a:srgbClr val="003B4F"/>
-                </a:solidFill>
-                <a:latin typeface="Courier"/>
-              </a:rPr>
-              <a:t>(mass_model, </a:t>
-            </a:r>
-            <a:r>
-              <a:rPr>
-                <a:solidFill>
-                  <a:srgbClr val="657422"/>
-                </a:solidFill>
-                <a:latin typeface="Courier"/>
-              </a:rPr>
-              <a:t>type =</a:t>
-            </a:r>
-            <a:r>
-              <a:rPr>
-                <a:solidFill>
-                  <a:srgbClr val="003B4F"/>
-                </a:solidFill>
-                <a:latin typeface="Courier"/>
-              </a:rPr>
-              <a:t> </a:t>
-            </a:r>
-            <a:r>
-              <a:rPr>
-                <a:solidFill>
-                  <a:srgbClr val="20794D"/>
-                </a:solidFill>
-                <a:latin typeface="Courier"/>
-              </a:rPr>
-              <a:t>"II"</a:t>
-            </a:r>
-            <a:r>
-              <a:rPr>
-                <a:solidFill>
-                  <a:srgbClr val="003B4F"/>
-                </a:solidFill>
-                <a:latin typeface="Courier"/>
-              </a:rPr>
-              <a:t>)</a:t>
-            </a:r>
-          </a:p>
-        </p:txBody>
-      </p:sp>
-      <p:sp>
-        <p:nvSpPr>
-          <p:cNvPr id="4" name="Content Placeholder 3"/>
-          <p:cNvSpPr>
-            <a:spLocks noGrp="1"/>
-          </p:cNvSpPr>
-          <p:nvPr>
-            <p:ph idx="2" sz="half"/>
-          </p:nvPr>
-        </p:nvSpPr>
-        <p:spPr/>
-        <p:txBody>
-          <a:bodyPr/>
-          <a:lstStyle/>
-          <a:p>
-            <a:pPr lvl="0" indent="0" marL="1270000">
-              <a:buNone/>
-            </a:pPr>
-            <a:r>
-              <a:rPr sz="2000" b="1"/>
-              <a:t>Tip</a:t>
-            </a:r>
-          </a:p>
-          <a:p>
-            <a:pPr lvl="0" indent="0" marL="1270000">
-              <a:buNone/>
-            </a:pPr>
-            <a:r>
-              <a:rPr sz="2000" b="1"/>
-              <a:t>✅ Why show a broken run?</a:t>
-            </a:r>
-          </a:p>
-          <a:p>
-            <a:pPr lvl="0" indent="0" marL="1270000">
-              <a:buNone/>
-            </a:pPr>
-            <a:r>
-              <a:rPr sz="2000">
-                <a:latin typeface="Courier"/>
-              </a:rPr>
-              <a:t>anova()</a:t>
-            </a:r>
-            <a:r>
-              <a:rPr sz="2000"/>
-              <a:t> (base) and </a:t>
-            </a:r>
-            <a:r>
-              <a:rPr sz="2000">
-                <a:latin typeface="Courier"/>
-              </a:rPr>
-              <a:t>Anova()</a:t>
-            </a:r>
-            <a:r>
-              <a:rPr sz="2000"/>
-              <a:t> (car) are </a:t>
-            </a:r>
-            <a:r>
-              <a:rPr sz="2000" b="1"/>
-              <a:t>different functions</a:t>
-            </a:r>
-            <a:r>
-              <a:rPr sz="2000"/>
-              <a:t> — lowercase compares models with Type I sums of squares; capital-A gives the Type II/III table you want. “could not find function” almost always means a missing </a:t>
-            </a:r>
-            <a:r>
-              <a:rPr sz="2000">
-                <a:latin typeface="Courier"/>
-              </a:rPr>
-              <a:t>library()</a:t>
-            </a:r>
-            <a:r>
-              <a:rPr sz="2000"/>
-              <a:t>.</a:t>
-            </a:r>
-          </a:p>
-        </p:txBody>
-      </p:sp>
-    </p:spTree>
-  </p:cSld>
-</p:sld>
-</file>
-
-<file path=ppt/slides/slide23.xml><?xml version="1.0" encoding="utf-8"?>
-<p:sld xmlns:a="http://schemas.openxmlformats.org/drawingml/2006/main" xmlns:r="http://schemas.openxmlformats.org/officeDocument/2006/relationships" xmlns:p="http://schemas.openxmlformats.org/presentationml/2006/main">
-  <p:cSld>
-    <p:spTree>
-      <p:nvGrpSpPr>
-        <p:cNvPr id="1" name=""/>
-        <p:cNvGrpSpPr/>
-        <p:nvPr/>
-      </p:nvGrpSpPr>
-      <p:grpSpPr>
-        <a:xfrm>
-          <a:off x="0" y="0"/>
-          <a:ext cx="0" cy="0"/>
-          <a:chOff x="0" y="0"/>
-          <a:chExt cx="0" cy="0"/>
-        </a:xfrm>
-      </p:grpSpPr>
-      <p:sp>
-        <p:nvSpPr>
-          <p:cNvPr id="2" name="Title 1"/>
-          <p:cNvSpPr>
-            <a:spLocks noGrp="1"/>
-          </p:cNvSpPr>
-          <p:nvPr>
-            <p:ph type="title"/>
-          </p:nvPr>
-        </p:nvSpPr>
-        <p:spPr>
-          <a:xfrm>
-            <a:off x="0" y="0"/>
-            <a:ext cx="9144000" cy="602780"/>
-          </a:xfrm>
-          <a:solidFill>
-            <a:srgbClr val="1A1A2E"/>
-          </a:solidFill>
-        </p:spPr>
-        <p:txBody>
-          <a:bodyPr/>
-          <a:lstStyle/>
-          <a:p>
-            <a:pPr lvl="0" indent="0" marL="0">
-              <a:buNone/>
-            </a:pPr>
-            <a:r>
-              <a:rPr>
-                <a:latin typeface="Courier"/>
-              </a:rPr>
-              <a:t>car::Anova()</a:t>
-            </a:r>
-            <a:r>
-              <a:rPr/>
-              <a:t> — Type II for Unbalanced Data</a:t>
-            </a:r>
-          </a:p>
-        </p:txBody>
-      </p:sp>
-      <p:sp>
-        <p:nvSpPr>
-          <p:cNvPr id="3" name="Content Placeholder 2"/>
-          <p:cNvSpPr>
-            <a:spLocks noGrp="1"/>
-          </p:cNvSpPr>
-          <p:nvPr>
-            <p:ph idx="1" sz="half"/>
-          </p:nvPr>
-        </p:nvSpPr>
-        <p:spPr/>
-        <p:txBody>
-          <a:bodyPr/>
-          <a:lstStyle/>
-          <a:p>
-            <a:pPr lvl="0" indent="0">
-              <a:buNone/>
-            </a:pPr>
-            <a:r>
-              <a:rPr>
-                <a:solidFill>
-                  <a:srgbClr val="5E5E5E"/>
-                </a:solidFill>
-                <a:latin typeface="Courier"/>
-              </a:rPr>
-              <a:t># Type II sums of squares — the right call here -------</a:t>
-            </a:r>
-            <a:br/>
-            <a:r>
-              <a:rPr>
-                <a:solidFill>
-                  <a:srgbClr val="4758AB"/>
-                </a:solidFill>
-                <a:latin typeface="Courier"/>
-              </a:rPr>
-              <a:t>Anova</a:t>
-            </a:r>
-            <a:r>
-              <a:rPr>
-                <a:solidFill>
-                  <a:srgbClr val="003B4F"/>
-                </a:solidFill>
-                <a:latin typeface="Courier"/>
-              </a:rPr>
-              <a:t>(mass_model, </a:t>
-            </a:r>
-            <a:r>
-              <a:rPr>
-                <a:solidFill>
-                  <a:srgbClr val="657422"/>
-                </a:solidFill>
-                <a:latin typeface="Courier"/>
-              </a:rPr>
-              <a:t>type =</a:t>
-            </a:r>
-            <a:r>
-              <a:rPr>
-                <a:solidFill>
-                  <a:srgbClr val="003B4F"/>
-                </a:solidFill>
-                <a:latin typeface="Courier"/>
-              </a:rPr>
-              <a:t> </a:t>
-            </a:r>
-            <a:r>
-              <a:rPr>
-                <a:solidFill>
-                  <a:srgbClr val="20794D"/>
-                </a:solidFill>
-                <a:latin typeface="Courier"/>
-              </a:rPr>
-              <a:t>"II"</a:t>
-            </a:r>
-            <a:r>
-              <a:rPr>
-                <a:solidFill>
-                  <a:srgbClr val="003B4F"/>
-                </a:solidFill>
-                <a:latin typeface="Courier"/>
-              </a:rPr>
-              <a:t>)</a:t>
-            </a:r>
-          </a:p>
-          <a:p>
-            <a:pPr lvl="0" indent="0">
-              <a:buNone/>
-            </a:pPr>
-            <a:r>
-              <a:rPr>
-                <a:latin typeface="Courier"/>
-              </a:rPr>
-              <a:t>Anova Table (Type II tests)
-Response: body_mass_g
-             Sum Sq  Df F value    Pr(&gt;F)    
-species   146864214   2  343.63 &lt; 2.2e-16 ***
-Residuals  72443483 339                      
----
-Signif. codes:  0 '***' 0.001 '**' 0.01 '*' 0.05 '.' 0.1 ' ' 1</a:t>
-            </a:r>
-          </a:p>
-        </p:txBody>
-      </p:sp>
-      <p:sp>
-        <p:nvSpPr>
-          <p:cNvPr id="4" name="Content Placeholder 3"/>
-          <p:cNvSpPr>
-            <a:spLocks noGrp="1"/>
-          </p:cNvSpPr>
-          <p:nvPr>
-            <p:ph idx="2" sz="half"/>
-          </p:nvPr>
-        </p:nvSpPr>
-        <p:spPr/>
-        <p:txBody>
-          <a:bodyPr/>
-          <a:lstStyle/>
-          <a:p>
-            <a:pPr lvl="0" indent="0" marL="0">
-              <a:buNone/>
-            </a:pPr>
-            <a:r>
-              <a:rPr b="1"/>
-              <a:t>Why Type II?</a:t>
-            </a:r>
-          </a:p>
-          <a:p>
-            <a:pPr lvl="0"/>
-            <a:r>
-              <a:rPr/>
-              <a:t>Our groups have </a:t>
-            </a:r>
-            <a:r>
-              <a:rPr b="1"/>
-              <a:t>different n</a:t>
-            </a:r>
-            <a:r>
-              <a:rPr/>
-              <a:t> (unbalanced)</a:t>
-            </a:r>
-          </a:p>
-          <a:p>
-            <a:pPr lvl="0"/>
-            <a:r>
-              <a:rPr/>
-              <a:t>With one predictor the F is the same, but Type II is the </a:t>
-            </a:r>
-            <a:r>
-              <a:rPr b="1"/>
-              <a:t>habit</a:t>
-            </a:r>
-            <a:r>
-              <a:rPr/>
-              <a:t> you want before you meet two-way ANOVA, where the type genuinely changes the answer</a:t>
-            </a:r>
-          </a:p>
-          <a:p>
-            <a:pPr lvl="0" indent="0" marL="1270000">
-              <a:buNone/>
-            </a:pPr>
-            <a:r>
-              <a:rPr sz="2000" b="1"/>
-              <a:t>Note</a:t>
-            </a:r>
-          </a:p>
-          <a:p>
-            <a:pPr lvl="0" indent="0" marL="1270000">
-              <a:buNone/>
-            </a:pPr>
-            <a:r>
-              <a:rPr sz="2000">
-                <a:latin typeface="Courier"/>
-              </a:rPr>
-              <a:t>anova()</a:t>
-            </a:r>
-            <a:r>
-              <a:rPr sz="2000"/>
-              <a:t> = Type I (order-dependent). </a:t>
-            </a:r>
-            <a:r>
-              <a:rPr sz="2000">
-                <a:latin typeface="Courier"/>
-              </a:rPr>
-              <a:t>Anova(type = "II")</a:t>
-            </a:r>
-            <a:r>
-              <a:rPr sz="2000"/>
-              <a:t> = order-independent.</a:t>
-            </a:r>
-          </a:p>
-        </p:txBody>
-      </p:sp>
-    </p:spTree>
-  </p:cSld>
-</p:sld>
-</file>
-
-<file path=ppt/slides/slide24.xml><?xml version="1.0" encoding="utf-8"?>
-<p:sld xmlns:a="http://schemas.openxmlformats.org/drawingml/2006/main" xmlns:r="http://schemas.openxmlformats.org/officeDocument/2006/relationships" xmlns:p="http://schemas.openxmlformats.org/presentationml/2006/main">
-  <p:cSld>
-    <p:spTree>
-      <p:nvGrpSpPr>
-        <p:cNvPr id="1" name=""/>
-        <p:cNvGrpSpPr/>
-        <p:nvPr/>
-      </p:nvGrpSpPr>
-      <p:grpSpPr>
-        <a:xfrm>
-          <a:off x="0" y="0"/>
-          <a:ext cx="0" cy="0"/>
-          <a:chOff x="0" y="0"/>
-          <a:chExt cx="0" cy="0"/>
-        </a:xfrm>
-      </p:grpSpPr>
-      <p:sp>
-        <p:nvSpPr>
-          <p:cNvPr id="2" name="Title 1"/>
-          <p:cNvSpPr>
-            <a:spLocks noGrp="1"/>
-          </p:cNvSpPr>
-          <p:nvPr>
-            <p:ph type="title"/>
-          </p:nvPr>
-        </p:nvSpPr>
-        <p:spPr>
-          <a:xfrm>
-            <a:off x="0" y="0"/>
-            <a:ext cx="9144000" cy="582780"/>
-          </a:xfrm>
-        </p:spPr>
-        <p:txBody>
-          <a:bodyPr/>
-          <a:lstStyle/>
-          <a:p>
-            <a:pPr lvl="0" indent="0" marL="0">
-              <a:buNone/>
-            </a:pPr>
-            <a:r>
-              <a:rPr/>
-              <a:t>🛑 Pause — Do Activity Parts 7–8 Now</a:t>
-            </a:r>
-          </a:p>
-        </p:txBody>
-      </p:sp>
-      <p:sp>
-        <p:nvSpPr>
-          <p:cNvPr id="3" name="Content Placeholder 2"/>
-          <p:cNvSpPr>
-            <a:spLocks noGrp="1"/>
-          </p:cNvSpPr>
-          <p:nvPr>
-            <p:ph idx="1"/>
-          </p:nvPr>
-        </p:nvSpPr>
-        <p:spPr/>
-        <p:txBody>
-          <a:bodyPr/>
-          <a:lstStyle/>
-          <a:p>
-            <a:pPr lvl="0" indent="0" marL="0">
-              <a:buNone/>
-            </a:pPr>
-            <a:r>
-              <a:rPr/>
-              <a:t>Run </a:t>
-            </a:r>
-            <a:r>
-              <a:rPr>
-                <a:latin typeface="Courier"/>
-              </a:rPr>
-              <a:t>aov()</a:t>
-            </a:r>
-            <a:r>
-              <a:rPr/>
-              <a:t> + </a:t>
-            </a:r>
-            <a:r>
-              <a:rPr>
-                <a:latin typeface="Courier"/>
-              </a:rPr>
-              <a:t>summary()</a:t>
-            </a:r>
-            <a:r>
-              <a:rPr/>
-              <a:t>, then </a:t>
-            </a:r>
-            <a:r>
-              <a:rPr>
-                <a:latin typeface="Courier"/>
-              </a:rPr>
-              <a:t>car::Anova(type = "II")</a:t>
-            </a:r>
-            <a:r>
-              <a:rPr/>
-              <a:t>. Predict the F and </a:t>
-            </a:r>
-            <a:r>
-              <a:rPr i="1"/>
-              <a:t>p</a:t>
-            </a:r>
-            <a:r>
-              <a:rPr/>
-              <a:t> before you read them, and confirm both tables agree.</a:t>
-            </a:r>
-          </a:p>
-        </p:txBody>
-      </p:sp>
-    </p:spTree>
-  </p:cSld>
-</p:sld>
-</file>
-
-<file path=ppt/slides/slide25.xml><?xml version="1.0" encoding="utf-8"?>
-<p:sld xmlns:a="http://schemas.openxmlformats.org/drawingml/2006/main" xmlns:r="http://schemas.openxmlformats.org/officeDocument/2006/relationships" xmlns:p="http://schemas.openxmlformats.org/presentationml/2006/main">
-  <p:cSld>
-    <p:spTree>
-      <p:nvGrpSpPr>
-        <p:cNvPr id="1" name=""/>
-        <p:cNvGrpSpPr/>
-        <p:nvPr/>
-      </p:nvGrpSpPr>
-      <p:grpSpPr>
-        <a:xfrm>
-          <a:off x="0" y="0"/>
-          <a:ext cx="0" cy="0"/>
-          <a:chOff x="0" y="0"/>
-          <a:chExt cx="0" cy="0"/>
-        </a:xfrm>
-      </p:grpSpPr>
-      <p:sp>
-        <p:nvSpPr>
-          <p:cNvPr id="2" name="Title 1"/>
-          <p:cNvSpPr>
-            <a:spLocks noGrp="1"/>
-          </p:cNvSpPr>
-          <p:nvPr>
-            <p:ph type="title"/>
-          </p:nvPr>
-        </p:nvSpPr>
-        <p:spPr>
-          <a:xfrm>
-            <a:off x="0" y="0"/>
-            <a:ext cx="9144000" cy="582780"/>
-          </a:xfrm>
-        </p:spPr>
-        <p:txBody>
-          <a:bodyPr/>
-          <a:lstStyle/>
-          <a:p>
-            <a:pPr lvl="0" indent="0" marL="0">
-              <a:buNone/>
-            </a:pPr>
-            <a:r>
-              <a:rPr/>
-              <a:t>🧩 Chunk 4 of 4 · Which Groups Differ? Post-Hoc with emmeans</a:t>
-            </a:r>
-          </a:p>
-        </p:txBody>
-      </p:sp>
-      <p:sp>
-        <p:nvSpPr>
-          <p:cNvPr id="3" name="Content Placeholder 2"/>
-          <p:cNvSpPr>
-            <a:spLocks noGrp="1"/>
-          </p:cNvSpPr>
-          <p:nvPr>
-            <p:ph idx="1"/>
-          </p:nvPr>
-        </p:nvSpPr>
-        <p:spPr/>
-        <p:txBody>
-          <a:bodyPr/>
-          <a:lstStyle/>
-          <a:p>
-            <a:pPr lvl="0" indent="0" marL="0">
-              <a:buNone/>
-            </a:pPr>
-            <a:r>
-              <a:rPr b="1"/>
-              <a:t>We will cover:</a:t>
-            </a:r>
-            <a:r>
-              <a:rPr/>
-              <a:t> ANOVA says “some differ” — </a:t>
-            </a:r>
-            <a:r>
-              <a:rPr>
-                <a:latin typeface="Courier"/>
-              </a:rPr>
-              <a:t>emmeans</a:t>
-            </a:r>
-            <a:r>
-              <a:rPr/>
-              <a:t> says </a:t>
-            </a:r>
-            <a:r>
-              <a:rPr i="1"/>
               <a:t>which</a:t>
             </a:r>
             <a:r>
               <a:rPr/>
-              <a:t>, with the comparisons properly adjusted.</a:t>
-            </a:r>
-          </a:p>
-          <a:p>
-            <a:pPr lvl="0" indent="0" marL="1270000">
-              <a:buNone/>
-            </a:pPr>
-            <a:r>
-              <a:rPr sz="2000" b="1"/>
-              <a:t>Tip</a:t>
-            </a:r>
-          </a:p>
-          <a:p>
-            <a:pPr lvl="0" indent="0" marL="1270000">
-              <a:buNone/>
-            </a:pPr>
-            <a:r>
-              <a:rPr sz="2000" b="1"/>
-              <a:t>🖐 After this chunk: Activity Parts 9–11</a:t>
-            </a:r>
-            <a:r>
-              <a:rPr sz="2000"/>
-              <a:t> (pairwise tests, letters, plot, report).</a:t>
-            </a:r>
-          </a:p>
-        </p:txBody>
-      </p:sp>
-    </p:spTree>
-  </p:cSld>
-</p:sld>
-</file>
-
-<file path=ppt/slides/slide26.xml><?xml version="1.0" encoding="utf-8"?>
-<p:sld xmlns:a="http://schemas.openxmlformats.org/drawingml/2006/main" xmlns:r="http://schemas.openxmlformats.org/officeDocument/2006/relationships" xmlns:p="http://schemas.openxmlformats.org/presentationml/2006/main">
-  <p:cSld>
-    <p:spTree>
-      <p:nvGrpSpPr>
-        <p:cNvPr id="1" name=""/>
-        <p:cNvGrpSpPr/>
-        <p:nvPr/>
-      </p:nvGrpSpPr>
-      <p:grpSpPr>
-        <a:xfrm>
-          <a:off x="0" y="0"/>
-          <a:ext cx="0" cy="0"/>
-          <a:chOff x="0" y="0"/>
-          <a:chExt cx="0" cy="0"/>
-        </a:xfrm>
-      </p:grpSpPr>
-      <p:sp>
-        <p:nvSpPr>
-          <p:cNvPr id="2" name="Title 1"/>
-          <p:cNvSpPr>
-            <a:spLocks noGrp="1"/>
-          </p:cNvSpPr>
-          <p:nvPr>
-            <p:ph type="title"/>
-          </p:nvPr>
-        </p:nvSpPr>
-        <p:spPr>
-          <a:xfrm>
-            <a:off x="0" y="0"/>
-            <a:ext cx="9144000" cy="582780"/>
-          </a:xfrm>
-        </p:spPr>
-        <p:txBody>
-          <a:bodyPr/>
-          <a:lstStyle/>
-          <a:p>
-            <a:pPr lvl="0" indent="0" marL="0">
-              <a:buNone/>
-            </a:pPr>
-            <a:r>
-              <a:rPr/>
-              <a:t>Post-Hoc — Pairwise Comparisons with emmeans</a:t>
-            </a:r>
-          </a:p>
-        </p:txBody>
-      </p:sp>
-      <p:sp>
-        <p:nvSpPr>
-          <p:cNvPr id="3" name="Content Placeholder 2"/>
-          <p:cNvSpPr>
-            <a:spLocks noGrp="1"/>
-          </p:cNvSpPr>
-          <p:nvPr>
-            <p:ph idx="1"/>
-          </p:nvPr>
-        </p:nvSpPr>
-        <p:spPr/>
-        <p:txBody>
-          <a:bodyPr/>
-          <a:lstStyle/>
-          <a:p>
-            <a:pPr lvl="0" indent="0" marL="1270000">
-              <a:buNone/>
-            </a:pPr>
-            <a:r>
-              <a:rPr sz="2000" b="1"/>
-              <a:t>Note</a:t>
-            </a:r>
-          </a:p>
-          <a:p>
-            <a:pPr lvl="0" indent="0" marL="1270000">
-              <a:buNone/>
-            </a:pPr>
-            <a:r>
-              <a:rPr sz="2000" b="1"/>
-              <a:t>🔮 Predict first:</a:t>
-            </a:r>
-            <a:r>
-              <a:rPr sz="2000"/>
-              <a:t> From the boxplot, predict — will </a:t>
-            </a:r>
-            <a:r>
-              <a:rPr sz="2000" b="1"/>
-              <a:t>all three</a:t>
-            </a:r>
-            <a:r>
-              <a:rPr sz="2000"/>
-              <a:t> species differ from each other, or will two be statistically tied?</a:t>
-            </a:r>
-          </a:p>
-        </p:txBody>
-      </p:sp>
-    </p:spTree>
-  </p:cSld>
-</p:sld>
-</file>
-
-<file path=ppt/slides/slide27.xml><?xml version="1.0" encoding="utf-8"?>
-<p:sld xmlns:a="http://schemas.openxmlformats.org/drawingml/2006/main" xmlns:r="http://schemas.openxmlformats.org/officeDocument/2006/relationships" xmlns:p="http://schemas.openxmlformats.org/presentationml/2006/main">
-  <p:cSld>
-    <p:spTree>
-      <p:nvGrpSpPr>
-        <p:cNvPr id="1" name=""/>
-        <p:cNvGrpSpPr/>
-        <p:nvPr/>
-      </p:nvGrpSpPr>
-      <p:grpSpPr>
-        <a:xfrm>
-          <a:off x="0" y="0"/>
-          <a:ext cx="0" cy="0"/>
-          <a:chOff x="0" y="0"/>
-          <a:chExt cx="0" cy="0"/>
-        </a:xfrm>
-      </p:grpSpPr>
-      <p:sp>
-        <p:nvSpPr>
-          <p:cNvPr id="3" name="Content Placeholder 2"/>
-          <p:cNvSpPr>
-            <a:spLocks noGrp="1"/>
-          </p:cNvSpPr>
-          <p:nvPr>
-            <p:ph idx="1" sz="half"/>
-          </p:nvPr>
-        </p:nvSpPr>
-        <p:spPr/>
-        <p:txBody>
-          <a:bodyPr/>
-          <a:lstStyle/>
-          <a:p>
-            <a:pPr lvl="0" indent="0">
-              <a:buNone/>
-            </a:pPr>
-            <a:r>
-              <a:rPr>
-                <a:solidFill>
-                  <a:srgbClr val="5E5E5E"/>
-                </a:solidFill>
-                <a:latin typeface="Courier"/>
-              </a:rPr>
-              <a:t># Estimated marginal means + Tukey-adjusted pairs -----</a:t>
-            </a:r>
-            <a:br/>
-            <a:r>
-              <a:rPr>
-                <a:solidFill>
-                  <a:srgbClr val="003B4F"/>
-                </a:solidFill>
-                <a:latin typeface="Courier"/>
-              </a:rPr>
-              <a:t>mass_emm &lt;- </a:t>
-            </a:r>
-            <a:r>
-              <a:rPr>
-                <a:solidFill>
-                  <a:srgbClr val="4758AB"/>
-                </a:solidFill>
-                <a:latin typeface="Courier"/>
-              </a:rPr>
-              <a:t>emmeans</a:t>
-            </a:r>
-            <a:r>
-              <a:rPr>
-                <a:solidFill>
-                  <a:srgbClr val="003B4F"/>
-                </a:solidFill>
-                <a:latin typeface="Courier"/>
-              </a:rPr>
-              <a:t>(mass_model, pairwise </a:t>
-            </a:r>
-            <a:r>
-              <a:rPr>
-                <a:solidFill>
-                  <a:srgbClr val="5E5E5E"/>
-                </a:solidFill>
-                <a:latin typeface="Courier"/>
-              </a:rPr>
-              <a:t>~</a:t>
-            </a:r>
-            <a:r>
-              <a:rPr>
-                <a:solidFill>
-                  <a:srgbClr val="003B4F"/>
-                </a:solidFill>
-                <a:latin typeface="Courier"/>
-              </a:rPr>
-              <a:t> species)</a:t>
-            </a:r>
-            <a:br/>
-            <a:br/>
-            <a:r>
-              <a:rPr>
-                <a:solidFill>
-                  <a:srgbClr val="003B4F"/>
-                </a:solidFill>
-                <a:latin typeface="Courier"/>
-              </a:rPr>
-              <a:t>mass_emm</a:t>
-            </a:r>
-            <a:r>
-              <a:rPr>
-                <a:solidFill>
-                  <a:srgbClr val="5E5E5E"/>
-                </a:solidFill>
-                <a:latin typeface="Courier"/>
-              </a:rPr>
-              <a:t>$</a:t>
-            </a:r>
-            <a:r>
-              <a:rPr>
-                <a:solidFill>
-                  <a:srgbClr val="003B4F"/>
-                </a:solidFill>
-                <a:latin typeface="Courier"/>
-              </a:rPr>
-              <a:t>contrasts</a:t>
-            </a:r>
-          </a:p>
-          <a:p>
-            <a:pPr lvl="0" indent="0">
-              <a:buNone/>
-            </a:pPr>
-            <a:r>
-              <a:rPr>
-                <a:latin typeface="Courier"/>
-              </a:rPr>
-              <a:t> contrast           estimate   SE  df t.ratio p.value
- Adelie - Chinstrap    -32.4 67.5 339  -0.480  0.8807
- Adelie - Gentoo     -1375.4 56.1 339 -24.495 &lt;0.0001
- Chinstrap - Gentoo  -1342.9 69.9 339 -19.224 &lt;0.0001
-P value adjustment: tukey method for comparing a family of 3 estimates </a:t>
-            </a:r>
-          </a:p>
-        </p:txBody>
-      </p:sp>
-      <p:sp>
-        <p:nvSpPr>
-          <p:cNvPr id="4" name="Content Placeholder 3"/>
-          <p:cNvSpPr>
-            <a:spLocks noGrp="1"/>
-          </p:cNvSpPr>
-          <p:nvPr>
-            <p:ph idx="2" sz="half"/>
-          </p:nvPr>
-        </p:nvSpPr>
-        <p:spPr/>
-        <p:txBody>
-          <a:bodyPr/>
-          <a:lstStyle/>
-          <a:p>
-            <a:pPr lvl="0" indent="0" marL="0">
-              <a:buNone/>
-            </a:pPr>
-            <a:r>
-              <a:rPr b="1"/>
-              <a:t>Reading it:</a:t>
-            </a:r>
-          </a:p>
-          <a:p>
-            <a:pPr lvl="0"/>
-            <a:r>
-              <a:rPr>
-                <a:latin typeface="Courier"/>
-              </a:rPr>
-              <a:t>emmeans(..., pairwise ~ species)</a:t>
-            </a:r>
-            <a:r>
-              <a:rPr/>
-              <a:t> gives each group’s mean </a:t>
-            </a:r>
-            <a:r>
-              <a:rPr b="1"/>
-              <a:t>and</a:t>
-            </a:r>
-            <a:r>
-              <a:rPr/>
-              <a:t> every pairwise comparison</a:t>
-            </a:r>
-          </a:p>
-          <a:p>
-            <a:pPr lvl="0"/>
-            <a:r>
-              <a:rPr/>
-              <a:t>The </a:t>
-            </a:r>
-            <a:r>
-              <a:rPr i="1"/>
-              <a:t>p</a:t>
-            </a:r>
-            <a:r>
-              <a:rPr/>
-              <a:t>-values are </a:t>
-            </a:r>
-            <a:r>
-              <a:rPr b="1"/>
-              <a:t>Tukey-adjusted</a:t>
-            </a:r>
-            <a:r>
-              <a:rPr/>
-              <a:t> — they already correct for multiple comparisons, so the family-wise error stays at 0.05</a:t>
-            </a:r>
-          </a:p>
-          <a:p>
-            <a:pPr lvl="0" indent="0" marL="0">
-              <a:buNone/>
-            </a:pPr>
-            <a:r>
-              <a:rPr/>
-              <a:t>📖 W&amp;S §15.4 — planned vs. unplanned comparisons</a:t>
-            </a:r>
-          </a:p>
-        </p:txBody>
-      </p:sp>
-    </p:spTree>
-  </p:cSld>
-</p:sld>
-</file>
-
-<file path=ppt/slides/slide28.xml><?xml version="1.0" encoding="utf-8"?>
-<p:sld xmlns:a="http://schemas.openxmlformats.org/drawingml/2006/main" xmlns:r="http://schemas.openxmlformats.org/officeDocument/2006/relationships" xmlns:p="http://schemas.openxmlformats.org/presentationml/2006/main">
-  <p:cSld>
-    <p:spTree>
-      <p:nvGrpSpPr>
-        <p:cNvPr id="1" name=""/>
-        <p:cNvGrpSpPr/>
-        <p:nvPr/>
-      </p:nvGrpSpPr>
-      <p:grpSpPr>
-        <a:xfrm>
-          <a:off x="0" y="0"/>
-          <a:ext cx="0" cy="0"/>
-          <a:chOff x="0" y="0"/>
-          <a:chExt cx="0" cy="0"/>
-        </a:xfrm>
-      </p:grpSpPr>
-      <p:sp>
-        <p:nvSpPr>
-          <p:cNvPr id="2" name="Title 1"/>
-          <p:cNvSpPr>
-            <a:spLocks noGrp="1"/>
-          </p:cNvSpPr>
-          <p:nvPr>
-            <p:ph type="title"/>
-          </p:nvPr>
-        </p:nvSpPr>
-        <p:spPr>
-          <a:xfrm>
-            <a:off x="0" y="0"/>
-            <a:ext cx="9144000" cy="602780"/>
-          </a:xfrm>
-          <a:solidFill>
-            <a:srgbClr val="1A1A2E"/>
-          </a:solidFill>
-        </p:spPr>
-        <p:txBody>
-          <a:bodyPr/>
-          <a:lstStyle/>
-          <a:p>
-            <a:pPr lvl="0" indent="0" marL="0">
-              <a:buNone/>
-            </a:pPr>
-            <a:r>
-              <a:rPr/>
-              <a:t>Compact Letter Display — Who Shares a Letter?</a:t>
-            </a:r>
-          </a:p>
-        </p:txBody>
-      </p:sp>
-      <p:sp>
-        <p:nvSpPr>
-          <p:cNvPr id="3" name="Content Placeholder 2"/>
-          <p:cNvSpPr>
-            <a:spLocks noGrp="1"/>
-          </p:cNvSpPr>
-          <p:nvPr>
-            <p:ph idx="1" sz="half"/>
-          </p:nvPr>
-        </p:nvSpPr>
-        <p:spPr/>
-        <p:txBody>
-          <a:bodyPr/>
-          <a:lstStyle/>
-          <a:p>
-            <a:pPr lvl="0" indent="0">
-              <a:buNone/>
-            </a:pPr>
-            <a:r>
-              <a:rPr>
-                <a:solidFill>
-                  <a:srgbClr val="5E5E5E"/>
-                </a:solidFill>
-                <a:latin typeface="Courier"/>
-              </a:rPr>
-              <a:t># Groups that SHARE a letter are NOT different --------</a:t>
-            </a:r>
-            <a:br/>
-            <a:r>
-              <a:rPr>
-                <a:solidFill>
-                  <a:srgbClr val="003B4F"/>
-                </a:solidFill>
-                <a:latin typeface="Courier"/>
-              </a:rPr>
-              <a:t>multcomp</a:t>
-            </a:r>
-            <a:r>
-              <a:rPr>
-                <a:solidFill>
-                  <a:srgbClr val="5E5E5E"/>
-                </a:solidFill>
-                <a:latin typeface="Courier"/>
-              </a:rPr>
-              <a:t>::</a:t>
-            </a:r>
-            <a:r>
-              <a:rPr>
-                <a:solidFill>
-                  <a:srgbClr val="4758AB"/>
-                </a:solidFill>
-                <a:latin typeface="Courier"/>
-              </a:rPr>
-              <a:t>cld</a:t>
-            </a:r>
-            <a:r>
-              <a:rPr>
-                <a:solidFill>
-                  <a:srgbClr val="003B4F"/>
-                </a:solidFill>
-                <a:latin typeface="Courier"/>
-              </a:rPr>
-              <a:t>(mass_emm</a:t>
-            </a:r>
-            <a:r>
-              <a:rPr>
-                <a:solidFill>
-                  <a:srgbClr val="5E5E5E"/>
-                </a:solidFill>
-                <a:latin typeface="Courier"/>
-              </a:rPr>
-              <a:t>$</a:t>
-            </a:r>
-            <a:r>
-              <a:rPr>
-                <a:solidFill>
-                  <a:srgbClr val="003B4F"/>
-                </a:solidFill>
-                <a:latin typeface="Courier"/>
-              </a:rPr>
-              <a:t>emmeans, </a:t>
-            </a:r>
-            <a:r>
-              <a:rPr>
-                <a:solidFill>
-                  <a:srgbClr val="657422"/>
-                </a:solidFill>
-                <a:latin typeface="Courier"/>
-              </a:rPr>
-              <a:t>Letters =</a:t>
-            </a:r>
-            <a:r>
-              <a:rPr>
-                <a:solidFill>
-                  <a:srgbClr val="003B4F"/>
-                </a:solidFill>
-                <a:latin typeface="Courier"/>
-              </a:rPr>
-              <a:t> letters)</a:t>
-            </a:r>
-          </a:p>
-          <a:p>
-            <a:pPr lvl="0" indent="0">
-              <a:buNone/>
-            </a:pPr>
-            <a:r>
-              <a:rPr>
-                <a:latin typeface="Courier"/>
-              </a:rPr>
-              <a:t> species   emmean   SE  df lower.CL upper.CL .group
- Adelie      3701 37.6 339     3627     3775  a    
- Chinstrap   3733 56.1 339     3623     3843  a    
- Gentoo      5076 41.7 339     4994     5158   b   
-Confidence level used: 0.95 
-P value adjustment: tukey method for comparing a family of 3 estimates 
-significance level used: alpha = 0.05 
-NOTE: If two or more means share the same grouping symbol,
-      then we cannot show them to be different.
-      But we also did not show them to be the same. </a:t>
-            </a:r>
-          </a:p>
-        </p:txBody>
-      </p:sp>
-      <p:sp>
-        <p:nvSpPr>
-          <p:cNvPr id="4" name="Content Placeholder 3"/>
-          <p:cNvSpPr>
-            <a:spLocks noGrp="1"/>
-          </p:cNvSpPr>
-          <p:nvPr>
-            <p:ph idx="2" sz="half"/>
-          </p:nvPr>
-        </p:nvSpPr>
-        <p:spPr/>
-        <p:txBody>
-          <a:bodyPr/>
-          <a:lstStyle/>
-          <a:p>
-            <a:pPr lvl="0" indent="0" marL="0">
-              <a:buNone/>
-            </a:pPr>
-            <a:r>
-              <a:rPr b="1"/>
-              <a:t>How to read letters:</a:t>
-            </a:r>
-          </a:p>
-          <a:p>
-            <a:pPr lvl="0"/>
-            <a:r>
-              <a:rPr/>
-              <a:t>Same letter → </a:t>
-            </a:r>
-            <a:r>
-              <a:rPr b="1"/>
-              <a:t>not</a:t>
-            </a:r>
-            <a:r>
-              <a:rPr/>
-              <a:t> significantly different</a:t>
-            </a:r>
-          </a:p>
-          <a:p>
-            <a:pPr lvl="0"/>
-            <a:r>
-              <a:rPr/>
-              <a:t>Different letters → significantly different</a:t>
-            </a:r>
-          </a:p>
-          <a:p>
-            <a:pPr lvl="0" indent="0" marL="0">
-              <a:buNone/>
-            </a:pPr>
-            <a:r>
-              <a:rPr/>
-              <a:t>This is the compact summary you see in published figures — one letter above each bar.</a:t>
-            </a:r>
-          </a:p>
-          <a:p>
-            <a:pPr lvl="0" indent="0" marL="1270000">
-              <a:buNone/>
-            </a:pPr>
-            <a:r>
-              <a:rPr sz="2000" b="1"/>
-              <a:t>Tip</a:t>
-            </a:r>
-          </a:p>
-          <a:p>
-            <a:pPr lvl="0" indent="0" marL="1270000">
-              <a:buNone/>
-            </a:pPr>
-            <a:r>
-              <a:rPr sz="2000"/>
-              <a:t>Install once: </a:t>
-            </a:r>
-            <a:r>
-              <a:rPr sz="2000">
-                <a:latin typeface="Courier"/>
-              </a:rPr>
-              <a:t>install.packages("multcomp")</a:t>
-            </a:r>
-          </a:p>
-        </p:txBody>
-      </p:sp>
-    </p:spTree>
-  </p:cSld>
-</p:sld>
-</file>
-
-<file path=ppt/slides/slide29.xml><?xml version="1.0" encoding="utf-8"?>
-<p:sld xmlns:a="http://schemas.openxmlformats.org/drawingml/2006/main" xmlns:r="http://schemas.openxmlformats.org/officeDocument/2006/relationships" xmlns:p="http://schemas.openxmlformats.org/presentationml/2006/main">
-  <p:cSld>
-    <p:spTree>
-      <p:nvGrpSpPr>
-        <p:cNvPr id="1" name=""/>
-        <p:cNvGrpSpPr/>
-        <p:nvPr/>
-      </p:nvGrpSpPr>
-      <p:grpSpPr>
-        <a:xfrm>
-          <a:off x="0" y="0"/>
-          <a:ext cx="0" cy="0"/>
-          <a:chOff x="0" y="0"/>
-          <a:chExt cx="0" cy="0"/>
-        </a:xfrm>
-      </p:grpSpPr>
-      <p:sp>
-        <p:nvSpPr>
-          <p:cNvPr id="2" name="Title 1"/>
-          <p:cNvSpPr>
-            <a:spLocks noGrp="1"/>
-          </p:cNvSpPr>
-          <p:nvPr>
-            <p:ph type="title"/>
-          </p:nvPr>
-        </p:nvSpPr>
-        <p:spPr>
-          <a:xfrm>
-            <a:off x="139485" y="78119"/>
-            <a:ext cx="8229600" cy="607682"/>
-          </a:xfrm>
-        </p:spPr>
-        <p:txBody>
-          <a:bodyPr/>
-          <a:lstStyle/>
-          <a:p>
-            <a:pPr lvl="0" indent="0" marL="0">
-              <a:buNone/>
-            </a:pPr>
-            <a:r>
-              <a:rPr/>
-              <a:t>Plot the Result — Means ± CI</a:t>
-            </a:r>
-          </a:p>
-        </p:txBody>
-      </p:sp>
-      <p:sp>
-        <p:nvSpPr>
-          <p:cNvPr id="3" name="Text Placeholder 2"/>
-          <p:cNvSpPr>
-            <a:spLocks noGrp="1"/>
-          </p:cNvSpPr>
-          <p:nvPr>
-            <p:ph idx="1" type="body"/>
-          </p:nvPr>
-        </p:nvSpPr>
-        <p:spPr/>
-        <p:txBody>
-          <a:bodyPr/>
-          <a:lstStyle/>
-          <a:p>
-            <a:pPr lvl="0" indent="0">
-              <a:buNone/>
-            </a:pPr>
-            <a:r>
-              <a:rPr>
-                <a:solidFill>
-                  <a:srgbClr val="003B4F"/>
-                </a:solidFill>
-                <a:latin typeface="Courier"/>
-              </a:rPr>
-              <a:t>mass_emm_plot &lt;- </a:t>
-            </a:r>
-            <a:r>
-              <a:rPr>
-                <a:solidFill>
-                  <a:srgbClr val="4758AB"/>
-                </a:solidFill>
-                <a:latin typeface="Courier"/>
-              </a:rPr>
-              <a:t>as.data.frame</a:t>
-            </a:r>
-            <a:r>
-              <a:rPr>
-                <a:solidFill>
-                  <a:srgbClr val="003B4F"/>
-                </a:solidFill>
-                <a:latin typeface="Courier"/>
-              </a:rPr>
-              <a:t>(mass_emm</a:t>
-            </a:r>
-            <a:r>
-              <a:rPr>
-                <a:solidFill>
-                  <a:srgbClr val="5E5E5E"/>
-                </a:solidFill>
-                <a:latin typeface="Courier"/>
-              </a:rPr>
-              <a:t>$</a:t>
-            </a:r>
-            <a:r>
-              <a:rPr>
-                <a:solidFill>
-                  <a:srgbClr val="003B4F"/>
-                </a:solidFill>
-                <a:latin typeface="Courier"/>
-              </a:rPr>
-              <a:t>emmeans) </a:t>
-            </a:r>
-            <a:r>
-              <a:rPr>
-                <a:solidFill>
-                  <a:srgbClr val="5E5E5E"/>
-                </a:solidFill>
-                <a:latin typeface="Courier"/>
-              </a:rPr>
-              <a:t>%&gt;%</a:t>
-            </a:r>
-            <a:br/>
-            <a:r>
-              <a:rPr>
-                <a:solidFill>
-                  <a:srgbClr val="003B4F"/>
-                </a:solidFill>
-                <a:latin typeface="Courier"/>
-              </a:rPr>
-              <a:t>  </a:t>
-            </a:r>
-            <a:r>
-              <a:rPr>
-                <a:solidFill>
-                  <a:srgbClr val="4758AB"/>
-                </a:solidFill>
-                <a:latin typeface="Courier"/>
-              </a:rPr>
-              <a:t>ggplot</a:t>
-            </a:r>
-            <a:r>
-              <a:rPr>
-                <a:solidFill>
-                  <a:srgbClr val="003B4F"/>
-                </a:solidFill>
-                <a:latin typeface="Courier"/>
-              </a:rPr>
-              <a:t>(</a:t>
-            </a:r>
-            <a:r>
-              <a:rPr>
-                <a:solidFill>
-                  <a:srgbClr val="4758AB"/>
-                </a:solidFill>
-                <a:latin typeface="Courier"/>
-              </a:rPr>
-              <a:t>aes</a:t>
-            </a:r>
-            <a:r>
-              <a:rPr>
-                <a:solidFill>
-                  <a:srgbClr val="003B4F"/>
-                </a:solidFill>
-                <a:latin typeface="Courier"/>
-              </a:rPr>
-              <a:t>(</a:t>
-            </a:r>
-            <a:r>
-              <a:rPr>
-                <a:solidFill>
-                  <a:srgbClr val="657422"/>
-                </a:solidFill>
-                <a:latin typeface="Courier"/>
-              </a:rPr>
-              <a:t>x =</a:t>
-            </a:r>
-            <a:r>
-              <a:rPr>
-                <a:solidFill>
-                  <a:srgbClr val="003B4F"/>
-                </a:solidFill>
-                <a:latin typeface="Courier"/>
-              </a:rPr>
-              <a:t> species, </a:t>
-            </a:r>
-            <a:r>
-              <a:rPr>
-                <a:solidFill>
-                  <a:srgbClr val="657422"/>
-                </a:solidFill>
-                <a:latin typeface="Courier"/>
-              </a:rPr>
-              <a:t>y =</a:t>
-            </a:r>
-            <a:r>
-              <a:rPr>
-                <a:solidFill>
-                  <a:srgbClr val="003B4F"/>
-                </a:solidFill>
-                <a:latin typeface="Courier"/>
-              </a:rPr>
-              <a:t> emmean, </a:t>
-            </a:r>
-            <a:r>
-              <a:rPr>
-                <a:solidFill>
-                  <a:srgbClr val="657422"/>
-                </a:solidFill>
-                <a:latin typeface="Courier"/>
-              </a:rPr>
-              <a:t>color =</a:t>
-            </a:r>
-            <a:r>
-              <a:rPr>
-                <a:solidFill>
-                  <a:srgbClr val="003B4F"/>
-                </a:solidFill>
-                <a:latin typeface="Courier"/>
-              </a:rPr>
-              <a:t> species)) </a:t>
-            </a:r>
-            <a:r>
-              <a:rPr>
-                <a:solidFill>
-                  <a:srgbClr val="5E5E5E"/>
-                </a:solidFill>
-                <a:latin typeface="Courier"/>
-              </a:rPr>
-              <a:t>+</a:t>
-            </a:r>
-            <a:br/>
-            <a:r>
-              <a:rPr>
-                <a:solidFill>
-                  <a:srgbClr val="003B4F"/>
-                </a:solidFill>
-                <a:latin typeface="Courier"/>
-              </a:rPr>
-              <a:t>  </a:t>
-            </a:r>
-            <a:r>
-              <a:rPr>
-                <a:solidFill>
-                  <a:srgbClr val="4758AB"/>
-                </a:solidFill>
-                <a:latin typeface="Courier"/>
-              </a:rPr>
-              <a:t>geom_point</a:t>
-            </a:r>
-            <a:r>
-              <a:rPr>
-                <a:solidFill>
-                  <a:srgbClr val="003B4F"/>
-                </a:solidFill>
-                <a:latin typeface="Courier"/>
-              </a:rPr>
-              <a:t>(</a:t>
-            </a:r>
-            <a:r>
-              <a:rPr>
-                <a:solidFill>
-                  <a:srgbClr val="657422"/>
-                </a:solidFill>
-                <a:latin typeface="Courier"/>
-              </a:rPr>
-              <a:t>size =</a:t>
-            </a:r>
-            <a:r>
-              <a:rPr>
-                <a:solidFill>
-                  <a:srgbClr val="003B4F"/>
-                </a:solidFill>
-                <a:latin typeface="Courier"/>
-              </a:rPr>
-              <a:t> </a:t>
-            </a:r>
-            <a:r>
-              <a:rPr>
-                <a:solidFill>
-                  <a:srgbClr val="AD0000"/>
-                </a:solidFill>
-                <a:latin typeface="Courier"/>
-              </a:rPr>
-              <a:t>3</a:t>
-            </a:r>
-            <a:r>
-              <a:rPr>
-                <a:solidFill>
-                  <a:srgbClr val="003B4F"/>
-                </a:solidFill>
-                <a:latin typeface="Courier"/>
-              </a:rPr>
-              <a:t>) </a:t>
-            </a:r>
-            <a:r>
-              <a:rPr>
-                <a:solidFill>
-                  <a:srgbClr val="5E5E5E"/>
-                </a:solidFill>
-                <a:latin typeface="Courier"/>
-              </a:rPr>
-              <a:t>+</a:t>
-            </a:r>
-            <a:br/>
-            <a:r>
-              <a:rPr>
-                <a:solidFill>
-                  <a:srgbClr val="003B4F"/>
-                </a:solidFill>
-                <a:latin typeface="Courier"/>
-              </a:rPr>
-              <a:t>  </a:t>
-            </a:r>
-            <a:r>
-              <a:rPr>
-                <a:solidFill>
-                  <a:srgbClr val="4758AB"/>
-                </a:solidFill>
-                <a:latin typeface="Courier"/>
-              </a:rPr>
-              <a:t>geom_errorbar</a:t>
-            </a:r>
-            <a:r>
-              <a:rPr>
-                <a:solidFill>
-                  <a:srgbClr val="003B4F"/>
-                </a:solidFill>
-                <a:latin typeface="Courier"/>
-              </a:rPr>
-              <a:t>(</a:t>
-            </a:r>
-            <a:br/>
-            <a:r>
-              <a:rPr>
-                <a:solidFill>
-                  <a:srgbClr val="003B4F"/>
-                </a:solidFill>
-                <a:latin typeface="Courier"/>
-              </a:rPr>
-              <a:t>    </a:t>
-            </a:r>
-            <a:r>
-              <a:rPr>
-                <a:solidFill>
-                  <a:srgbClr val="4758AB"/>
-                </a:solidFill>
-                <a:latin typeface="Courier"/>
-              </a:rPr>
-              <a:t>aes</a:t>
-            </a:r>
-            <a:r>
-              <a:rPr>
-                <a:solidFill>
-                  <a:srgbClr val="003B4F"/>
-                </a:solidFill>
-                <a:latin typeface="Courier"/>
-              </a:rPr>
-              <a:t>(</a:t>
-            </a:r>
-            <a:r>
-              <a:rPr>
-                <a:solidFill>
-                  <a:srgbClr val="657422"/>
-                </a:solidFill>
-                <a:latin typeface="Courier"/>
-              </a:rPr>
-              <a:t>ymin =</a:t>
-            </a:r>
-            <a:r>
-              <a:rPr>
-                <a:solidFill>
-                  <a:srgbClr val="003B4F"/>
-                </a:solidFill>
-                <a:latin typeface="Courier"/>
-              </a:rPr>
-              <a:t> lower.CL, </a:t>
-            </a:r>
-            <a:r>
-              <a:rPr>
-                <a:solidFill>
-                  <a:srgbClr val="657422"/>
-                </a:solidFill>
-                <a:latin typeface="Courier"/>
-              </a:rPr>
-              <a:t>ymax =</a:t>
-            </a:r>
-            <a:r>
-              <a:rPr>
-                <a:solidFill>
-                  <a:srgbClr val="003B4F"/>
-                </a:solidFill>
-                <a:latin typeface="Courier"/>
-              </a:rPr>
-              <a:t> upper.CL),</a:t>
-            </a:r>
-            <a:br/>
-            <a:r>
-              <a:rPr>
-                <a:solidFill>
-                  <a:srgbClr val="003B4F"/>
-                </a:solidFill>
-                <a:latin typeface="Courier"/>
-              </a:rPr>
-              <a:t>    </a:t>
-            </a:r>
-            <a:r>
-              <a:rPr>
-                <a:solidFill>
-                  <a:srgbClr val="657422"/>
-                </a:solidFill>
-                <a:latin typeface="Courier"/>
-              </a:rPr>
-              <a:t>width =</a:t>
-            </a:r>
-            <a:r>
-              <a:rPr>
-                <a:solidFill>
-                  <a:srgbClr val="003B4F"/>
-                </a:solidFill>
-                <a:latin typeface="Courier"/>
-              </a:rPr>
-              <a:t> </a:t>
-            </a:r>
-            <a:r>
-              <a:rPr>
-                <a:solidFill>
-                  <a:srgbClr val="AD0000"/>
-                </a:solidFill>
-                <a:latin typeface="Courier"/>
-              </a:rPr>
-              <a:t>0.15</a:t>
-            </a:r>
-            <a:r>
-              <a:rPr>
-                <a:solidFill>
-                  <a:srgbClr val="003B4F"/>
-                </a:solidFill>
-                <a:latin typeface="Courier"/>
-              </a:rPr>
-              <a:t>, </a:t>
-            </a:r>
-            <a:r>
-              <a:rPr>
-                <a:solidFill>
-                  <a:srgbClr val="657422"/>
-                </a:solidFill>
-                <a:latin typeface="Courier"/>
-              </a:rPr>
-              <a:t>linewidth =</a:t>
-            </a:r>
-            <a:r>
-              <a:rPr>
-                <a:solidFill>
-                  <a:srgbClr val="003B4F"/>
-                </a:solidFill>
-                <a:latin typeface="Courier"/>
-              </a:rPr>
-              <a:t> </a:t>
-            </a:r>
-            <a:r>
-              <a:rPr>
-                <a:solidFill>
-                  <a:srgbClr val="AD0000"/>
-                </a:solidFill>
-                <a:latin typeface="Courier"/>
-              </a:rPr>
-              <a:t>0.9</a:t>
-            </a:r>
-            <a:br/>
-            <a:r>
-              <a:rPr>
-                <a:solidFill>
-                  <a:srgbClr val="003B4F"/>
-                </a:solidFill>
-                <a:latin typeface="Courier"/>
-              </a:rPr>
-              <a:t>  ) </a:t>
-            </a:r>
-            <a:r>
-              <a:rPr>
-                <a:solidFill>
-                  <a:srgbClr val="5E5E5E"/>
-                </a:solidFill>
-                <a:latin typeface="Courier"/>
-              </a:rPr>
-              <a:t>+</a:t>
-            </a:r>
-            <a:br/>
-            <a:r>
-              <a:rPr>
-                <a:solidFill>
-                  <a:srgbClr val="003B4F"/>
-                </a:solidFill>
-                <a:latin typeface="Courier"/>
-              </a:rPr>
-              <a:t>  </a:t>
-            </a:r>
-            <a:r>
-              <a:rPr>
-                <a:solidFill>
-                  <a:srgbClr val="4758AB"/>
-                </a:solidFill>
-                <a:latin typeface="Courier"/>
-              </a:rPr>
-              <a:t>labs</a:t>
-            </a:r>
-            <a:r>
-              <a:rPr>
-                <a:solidFill>
-                  <a:srgbClr val="003B4F"/>
-                </a:solidFill>
-                <a:latin typeface="Courier"/>
-              </a:rPr>
-              <a:t>(</a:t>
-            </a:r>
-            <a:r>
-              <a:rPr>
-                <a:solidFill>
-                  <a:srgbClr val="657422"/>
-                </a:solidFill>
-                <a:latin typeface="Courier"/>
-              </a:rPr>
-              <a:t>x =</a:t>
-            </a:r>
-            <a:r>
-              <a:rPr>
-                <a:solidFill>
-                  <a:srgbClr val="003B4F"/>
-                </a:solidFill>
-                <a:latin typeface="Courier"/>
-              </a:rPr>
-              <a:t> </a:t>
-            </a:r>
-            <a:r>
-              <a:rPr>
-                <a:solidFill>
-                  <a:srgbClr val="20794D"/>
-                </a:solidFill>
-                <a:latin typeface="Courier"/>
-              </a:rPr>
-              <a:t>"Species"</a:t>
-            </a:r>
-            <a:r>
-              <a:rPr>
-                <a:solidFill>
-                  <a:srgbClr val="003B4F"/>
-                </a:solidFill>
-                <a:latin typeface="Courier"/>
-              </a:rPr>
-              <a:t>, </a:t>
-            </a:r>
-            <a:r>
-              <a:rPr>
-                <a:solidFill>
-                  <a:srgbClr val="657422"/>
-                </a:solidFill>
-                <a:latin typeface="Courier"/>
-              </a:rPr>
-              <a:t>y =</a:t>
-            </a:r>
-            <a:r>
-              <a:rPr>
-                <a:solidFill>
-                  <a:srgbClr val="003B4F"/>
-                </a:solidFill>
-                <a:latin typeface="Courier"/>
-              </a:rPr>
-              <a:t> </a:t>
-            </a:r>
-            <a:r>
-              <a:rPr>
-                <a:solidFill>
-                  <a:srgbClr val="20794D"/>
-                </a:solidFill>
-                <a:latin typeface="Courier"/>
-              </a:rPr>
-              <a:t>"Estimated mean mass (g)"</a:t>
-            </a:r>
-            <a:r>
-              <a:rPr>
-                <a:solidFill>
-                  <a:srgbClr val="003B4F"/>
-                </a:solidFill>
-                <a:latin typeface="Courier"/>
-              </a:rPr>
-              <a:t>) </a:t>
-            </a:r>
-            <a:r>
-              <a:rPr>
-                <a:solidFill>
-                  <a:srgbClr val="5E5E5E"/>
-                </a:solidFill>
-                <a:latin typeface="Courier"/>
-              </a:rPr>
-              <a:t>+</a:t>
-            </a:r>
-            <a:br/>
-            <a:r>
-              <a:rPr>
-                <a:solidFill>
-                  <a:srgbClr val="003B4F"/>
-                </a:solidFill>
-                <a:latin typeface="Courier"/>
-              </a:rPr>
-              <a:t>  </a:t>
-            </a:r>
-            <a:r>
-              <a:rPr>
-                <a:solidFill>
-                  <a:srgbClr val="4758AB"/>
-                </a:solidFill>
-                <a:latin typeface="Courier"/>
-              </a:rPr>
-              <a:t>theme_minimal</a:t>
-            </a:r>
-            <a:r>
-              <a:rPr>
-                <a:solidFill>
-                  <a:srgbClr val="003B4F"/>
-                </a:solidFill>
-                <a:latin typeface="Courier"/>
-              </a:rPr>
-              <a:t>() </a:t>
-            </a:r>
-            <a:r>
-              <a:rPr>
-                <a:solidFill>
-                  <a:srgbClr val="5E5E5E"/>
-                </a:solidFill>
-                <a:latin typeface="Courier"/>
-              </a:rPr>
-              <a:t>+</a:t>
-            </a:r>
-            <a:br/>
-            <a:r>
-              <a:rPr>
-                <a:solidFill>
-                  <a:srgbClr val="003B4F"/>
-                </a:solidFill>
-                <a:latin typeface="Courier"/>
-              </a:rPr>
-              <a:t>  </a:t>
-            </a:r>
-            <a:r>
-              <a:rPr>
-                <a:solidFill>
-                  <a:srgbClr val="4758AB"/>
-                </a:solidFill>
-                <a:latin typeface="Courier"/>
-              </a:rPr>
-              <a:t>theme</a:t>
-            </a:r>
-            <a:r>
-              <a:rPr>
-                <a:solidFill>
-                  <a:srgbClr val="003B4F"/>
-                </a:solidFill>
-                <a:latin typeface="Courier"/>
-              </a:rPr>
-              <a:t>(</a:t>
-            </a:r>
-            <a:r>
-              <a:rPr>
-                <a:solidFill>
-                  <a:srgbClr val="657422"/>
-                </a:solidFill>
-                <a:latin typeface="Courier"/>
-              </a:rPr>
-              <a:t>legend.position =</a:t>
-            </a:r>
-            <a:r>
-              <a:rPr>
-                <a:solidFill>
-                  <a:srgbClr val="003B4F"/>
-                </a:solidFill>
-                <a:latin typeface="Courier"/>
-              </a:rPr>
-              <a:t> </a:t>
-            </a:r>
-            <a:r>
-              <a:rPr>
-                <a:solidFill>
-                  <a:srgbClr val="20794D"/>
-                </a:solidFill>
-                <a:latin typeface="Courier"/>
-              </a:rPr>
-              <a:t>"none"</a:t>
-            </a:r>
-            <a:r>
-              <a:rPr>
-                <a:solidFill>
-                  <a:srgbClr val="003B4F"/>
-                </a:solidFill>
-                <a:latin typeface="Courier"/>
-              </a:rPr>
-              <a:t>)</a:t>
-            </a:r>
-            <a:br/>
-            <a:br/>
-            <a:r>
-              <a:rPr>
-                <a:solidFill>
-                  <a:srgbClr val="003B4F"/>
-                </a:solidFill>
-                <a:latin typeface="Courier"/>
-              </a:rPr>
-              <a:t>mass_emm_plot</a:t>
-            </a:r>
-          </a:p>
-        </p:txBody>
-      </p:sp>
-      <p:pic>
-        <p:nvPicPr>
-          <p:cNvPr descr="one_way_anova_lecture_files/figure-pptx/emmeans-plot-10-1.png" id="0" name="Picture 1"/>
-          <p:cNvPicPr>
-            <a:picLocks noGrp="1" noChangeAspect="1"/>
-          </p:cNvPicPr>
-          <p:nvPr/>
-        </p:nvPicPr>
-        <p:blipFill>
-          <a:blip r:embed="rId2"/>
-          <a:stretch>
-            <a:fillRect/>
-          </a:stretch>
-        </p:blipFill>
-        <p:spPr bwMode="auto">
-          <a:xfrm>
-            <a:off x="127000" y="1562100"/>
-            <a:ext cx="4432300" cy="2730500"/>
-          </a:xfrm>
-          <a:prstGeom prst="rect">
-            <a:avLst/>
-          </a:prstGeom>
-          <a:noFill/>
-          <a:ln w="9525">
-            <a:noFill/>
-            <a:headEnd/>
-            <a:tailEnd/>
-          </a:ln>
-        </p:spPr>
-      </p:pic>
-      <p:sp>
-        <p:nvSpPr>
-          <p:cNvPr id="5" name="Text Placeholder 4"/>
-          <p:cNvSpPr>
-            <a:spLocks noGrp="1"/>
-          </p:cNvSpPr>
-          <p:nvPr>
-            <p:ph idx="3" sz="quarter" type="body"/>
-          </p:nvPr>
-        </p:nvSpPr>
-        <p:spPr/>
-        <p:txBody>
-          <a:bodyPr/>
-          <a:lstStyle/>
-          <a:p>
-            <a:pPr lvl="0" indent="0" marL="0">
-              <a:buNone/>
-            </a:pPr>
-            <a:r>
-              <a:rPr b="1"/>
-              <a:t>Estimated marginal means</a:t>
-            </a:r>
-            <a:r>
-              <a:rPr/>
-              <a:t> with 95% confidence intervals.</a:t>
-            </a:r>
-          </a:p>
-          <a:p>
-            <a:pPr lvl="0"/>
-            <a:r>
-              <a:rPr/>
-              <a:t>Non-overlapping intervals hint at real differences</a:t>
-            </a:r>
-          </a:p>
-          <a:p>
-            <a:pPr lvl="0"/>
-            <a:r>
-              <a:rPr/>
-              <a:t>Pair this plot with the letters for a publication-ready figure</a:t>
-            </a:r>
-          </a:p>
-          <a:p>
-            <a:pPr lvl="0" indent="0" marL="0">
-              <a:buNone/>
-            </a:pPr>
-            <a:r>
-              <a:rPr/>
-              <a:t>The emmeans plot is the ANOVA cousin of Lecture 03’s mean ± SE plot.</a:t>
+              <a:t> species differ, and how to report it</a:t>
             </a:r>
           </a:p>
         </p:txBody>
@@ -9125,6 +6329,19 @@
           <a:p>
             <a:pPr lvl="0"/>
             <a:r>
+              <a:rPr/>
+              <a:t>Fit the model with </a:t>
+            </a:r>
+            <a:r>
+              <a:rPr>
+                <a:latin typeface="Courier"/>
+              </a:rPr>
+              <a:t>lm()</a:t>
+            </a:r>
+          </a:p>
+          <a:p>
+            <a:pPr lvl="0"/>
+            <a:r>
               <a:rPr b="1"/>
               <a:t>Check assumptions</a:t>
             </a:r>
@@ -9133,54 +6350,6 @@
               <a:t> — normality of residuals, equal variance</a:t>
             </a:r>
           </a:p>
-          <a:p>
-            <a:pPr lvl="0"/>
-            <a:r>
-              <a:rPr/>
-              <a:t>Run it two ways: </a:t>
-            </a:r>
-            <a:r>
-              <a:rPr>
-                <a:latin typeface="Courier"/>
-              </a:rPr>
-              <a:t>aov()</a:t>
-            </a:r>
-            <a:r>
-              <a:rPr/>
-              <a:t> and </a:t>
-            </a:r>
-            <a:r>
-              <a:rPr b="1">
-                <a:latin typeface="Courier"/>
-              </a:rPr>
-              <a:t>car::Anova()</a:t>
-            </a:r>
-          </a:p>
-          <a:p>
-            <a:pPr lvl="0"/>
-            <a:r>
-              <a:rPr/>
-              <a:t>Find </a:t>
-            </a:r>
-            <a:r>
-              <a:rPr b="1"/>
-              <a:t>which</a:t>
-            </a:r>
-            <a:r>
-              <a:rPr/>
-              <a:t> groups differ with </a:t>
-            </a:r>
-            <a:r>
-              <a:rPr b="1">
-                <a:latin typeface="Courier"/>
-              </a:rPr>
-              <a:t>emmeans</a:t>
-            </a:r>
-            <a:r>
-              <a:rPr/>
-              <a:t> post-hoc tests</a:t>
-            </a:r>
-          </a:p>
         </p:txBody>
       </p:sp>
       <p:sp>
@@ -9235,36 +6404,7 @@
             </a:r>
             <a:r>
               <a:rPr/>
-              <a:t> — Levene’s test, </a:t>
-            </a:r>
-            <a:r>
-              <a:rPr>
-                <a:latin typeface="Courier"/>
-              </a:rPr>
-              <a:t>Anova()</a:t>
-            </a:r>
-          </a:p>
-          <a:p>
-            <a:pPr lvl="0"/>
-            <a:r>
-              <a:rPr>
-                <a:latin typeface="Courier"/>
-              </a:rPr>
-              <a:t>emmeans</a:t>
-            </a:r>
-            <a:r>
-              <a:rPr/>
-              <a:t>, </a:t>
-            </a:r>
-            <a:r>
-              <a:rPr>
-                <a:latin typeface="Courier"/>
-              </a:rPr>
-              <a:t>multcomp</a:t>
-            </a:r>
-            <a:r>
-              <a:rPr/>
-              <a:t> — post-hoc</a:t>
+              <a:t> — Levene’s test</a:t>
             </a:r>
           </a:p>
           <a:p>
@@ -9340,687 +6480,6 @@
                 <a:latin typeface="Courier"/>
               </a:rPr>
               <a:t>_plot</a:t>
-            </a:r>
-          </a:p>
-        </p:txBody>
-      </p:sp>
-    </p:spTree>
-  </p:cSld>
-</p:sld>
-</file>
-
-<file path=ppt/slides/slide30.xml><?xml version="1.0" encoding="utf-8"?>
-<p:sld xmlns:a="http://schemas.openxmlformats.org/drawingml/2006/main" xmlns:r="http://schemas.openxmlformats.org/officeDocument/2006/relationships" xmlns:p="http://schemas.openxmlformats.org/presentationml/2006/main">
-  <p:cSld>
-    <p:spTree>
-      <p:nvGrpSpPr>
-        <p:cNvPr id="1" name=""/>
-        <p:cNvGrpSpPr/>
-        <p:nvPr/>
-      </p:nvGrpSpPr>
-      <p:grpSpPr>
-        <a:xfrm>
-          <a:off x="0" y="0"/>
-          <a:ext cx="0" cy="0"/>
-          <a:chOff x="0" y="0"/>
-          <a:chExt cx="0" cy="0"/>
-        </a:xfrm>
-      </p:grpSpPr>
-      <p:sp>
-        <p:nvSpPr>
-          <p:cNvPr id="2" name="Title 1"/>
-          <p:cNvSpPr>
-            <a:spLocks noGrp="1"/>
-          </p:cNvSpPr>
-          <p:nvPr>
-            <p:ph type="title"/>
-          </p:nvPr>
-        </p:nvSpPr>
-        <p:spPr>
-          <a:xfrm>
-            <a:off x="0" y="0"/>
-            <a:ext cx="9144000" cy="602780"/>
-          </a:xfrm>
-          <a:solidFill>
-            <a:srgbClr val="1A1A2E"/>
-          </a:solidFill>
-        </p:spPr>
-        <p:txBody>
-          <a:bodyPr/>
-          <a:lstStyle/>
-          <a:p>
-            <a:pPr lvl="0" indent="0" marL="0">
-              <a:buNone/>
-            </a:pPr>
-            <a:r>
-              <a:rPr/>
-              <a:t>How to Report an ANOVA</a:t>
-            </a:r>
-          </a:p>
-        </p:txBody>
-      </p:sp>
-      <p:sp>
-        <p:nvSpPr>
-          <p:cNvPr id="3" name="Content Placeholder 2"/>
-          <p:cNvSpPr>
-            <a:spLocks noGrp="1"/>
-          </p:cNvSpPr>
-          <p:nvPr>
-            <p:ph idx="1" sz="half"/>
-          </p:nvPr>
-        </p:nvSpPr>
-        <p:spPr/>
-        <p:txBody>
-          <a:bodyPr/>
-          <a:lstStyle/>
-          <a:p>
-            <a:pPr lvl="0" indent="0">
-              <a:buNone/>
-            </a:pPr>
-            <a:r>
-              <a:rPr>
-                <a:solidFill>
-                  <a:srgbClr val="5E5E5E"/>
-                </a:solidFill>
-                <a:latin typeface="Courier"/>
-              </a:rPr>
-              <a:t># Pull the F table values for reporting ---------------</a:t>
-            </a:r>
-            <a:br/>
-            <a:r>
-              <a:rPr>
-                <a:solidFill>
-                  <a:srgbClr val="003B4F"/>
-                </a:solidFill>
-                <a:latin typeface="Courier"/>
-              </a:rPr>
-              <a:t>mass_tab &lt;- </a:t>
-            </a:r>
-            <a:r>
-              <a:rPr>
-                <a:solidFill>
-                  <a:srgbClr val="4758AB"/>
-                </a:solidFill>
-                <a:latin typeface="Courier"/>
-              </a:rPr>
-              <a:t>Anova</a:t>
-            </a:r>
-            <a:r>
-              <a:rPr>
-                <a:solidFill>
-                  <a:srgbClr val="003B4F"/>
-                </a:solidFill>
-                <a:latin typeface="Courier"/>
-              </a:rPr>
-              <a:t>(mass_model, </a:t>
-            </a:r>
-            <a:r>
-              <a:rPr>
-                <a:solidFill>
-                  <a:srgbClr val="657422"/>
-                </a:solidFill>
-                <a:latin typeface="Courier"/>
-              </a:rPr>
-              <a:t>type =</a:t>
-            </a:r>
-            <a:r>
-              <a:rPr>
-                <a:solidFill>
-                  <a:srgbClr val="003B4F"/>
-                </a:solidFill>
-                <a:latin typeface="Courier"/>
-              </a:rPr>
-              <a:t> </a:t>
-            </a:r>
-            <a:r>
-              <a:rPr>
-                <a:solidFill>
-                  <a:srgbClr val="20794D"/>
-                </a:solidFill>
-                <a:latin typeface="Courier"/>
-              </a:rPr>
-              <a:t>"II"</a:t>
-            </a:r>
-            <a:r>
-              <a:rPr>
-                <a:solidFill>
-                  <a:srgbClr val="003B4F"/>
-                </a:solidFill>
-                <a:latin typeface="Courier"/>
-              </a:rPr>
-              <a:t>)</a:t>
-            </a:r>
-            <a:br/>
-            <a:r>
-              <a:rPr>
-                <a:solidFill>
-                  <a:srgbClr val="003B4F"/>
-                </a:solidFill>
-                <a:latin typeface="Courier"/>
-              </a:rPr>
-              <a:t>mass_tab</a:t>
-            </a:r>
-          </a:p>
-          <a:p>
-            <a:pPr lvl="0" indent="0">
-              <a:buNone/>
-            </a:pPr>
-            <a:r>
-              <a:rPr>
-                <a:latin typeface="Courier"/>
-              </a:rPr>
-              <a:t>Anova Table (Type II tests)
-Response: body_mass_g
-             Sum Sq  Df F value    Pr(&gt;F)    
-species   146864214   2  343.63 &lt; 2.2e-16 ***
-Residuals  72443483 339                      
----
-Signif. codes:  0 '***' 0.001 '**' 0.01 '*' 0.05 '.' 0.1 ' ' 1</a:t>
-            </a:r>
-          </a:p>
-          <a:p>
-            <a:pPr lvl="0" indent="0" marL="1270000">
-              <a:buNone/>
-            </a:pPr>
-            <a:r>
-              <a:rPr sz="2000" i="1"/>
-              <a:t>“Body mass differed significantly among the three penguin species (one-way ANOVA: F(2, 339) = 343.6, p &lt; 0.001). Tukey-adjusted comparisons showed all three species differed, with Gentoo heaviest and Adelie lightest.”</a:t>
-            </a:r>
-          </a:p>
-        </p:txBody>
-      </p:sp>
-      <p:sp>
-        <p:nvSpPr>
-          <p:cNvPr id="4" name="Content Placeholder 3"/>
-          <p:cNvSpPr>
-            <a:spLocks noGrp="1"/>
-          </p:cNvSpPr>
-          <p:nvPr>
-            <p:ph idx="2" sz="half"/>
-          </p:nvPr>
-        </p:nvSpPr>
-        <p:spPr/>
-        <p:txBody>
-          <a:bodyPr/>
-          <a:lstStyle/>
-          <a:p>
-            <a:pPr lvl="0" indent="0" marL="0">
-              <a:buNone/>
-            </a:pPr>
-            <a:r>
-              <a:rPr b="1"/>
-              <a:t>Always include:</a:t>
-            </a:r>
-          </a:p>
-          <a:p>
-            <a:pPr lvl="0"/>
-            <a:r>
-              <a:rPr/>
-              <a:t>Test type (one-way ANOVA)</a:t>
-            </a:r>
-          </a:p>
-          <a:p>
-            <a:pPr lvl="0"/>
-            <a:r>
-              <a:rPr b="1"/>
-              <a:t>F</a:t>
-            </a:r>
-            <a:r>
-              <a:rPr/>
-              <a:t>, both </a:t>
-            </a:r>
-            <a:r>
-              <a:rPr b="1"/>
-              <a:t>df</a:t>
-            </a:r>
-            <a:r>
-              <a:rPr/>
-              <a:t>, and the </a:t>
-            </a:r>
-            <a:r>
-              <a:rPr b="1"/>
-              <a:t>p-value</a:t>
-            </a:r>
-          </a:p>
-          <a:p>
-            <a:pPr lvl="0"/>
-            <a:r>
-              <a:rPr/>
-              <a:t>The post-hoc result (which groups differ)</a:t>
-            </a:r>
-          </a:p>
-          <a:p>
-            <a:pPr lvl="0"/>
-            <a:r>
-              <a:rPr/>
-              <a:t>Group means ± SE or CI</a:t>
-            </a:r>
-          </a:p>
-          <a:p>
-            <a:pPr lvl="0" indent="0" marL="0">
-              <a:buNone/>
-            </a:pPr>
-            <a:r>
-              <a:rPr b="1"/>
-              <a:t>Never</a:t>
-            </a:r>
-            <a:r>
-              <a:rPr/>
-              <a:t> write “p = 0.000” — use “p &lt; 0.001”.</a:t>
-            </a:r>
-          </a:p>
-        </p:txBody>
-      </p:sp>
-    </p:spTree>
-  </p:cSld>
-</p:sld>
-</file>
-
-<file path=ppt/slides/slide31.xml><?xml version="1.0" encoding="utf-8"?>
-<p:sld xmlns:a="http://schemas.openxmlformats.org/drawingml/2006/main" xmlns:r="http://schemas.openxmlformats.org/officeDocument/2006/relationships" xmlns:p="http://schemas.openxmlformats.org/presentationml/2006/main">
-  <p:cSld>
-    <p:spTree>
-      <p:nvGrpSpPr>
-        <p:cNvPr id="1" name=""/>
-        <p:cNvGrpSpPr/>
-        <p:nvPr/>
-      </p:nvGrpSpPr>
-      <p:grpSpPr>
-        <a:xfrm>
-          <a:off x="0" y="0"/>
-          <a:ext cx="0" cy="0"/>
-          <a:chOff x="0" y="0"/>
-          <a:chExt cx="0" cy="0"/>
-        </a:xfrm>
-      </p:grpSpPr>
-      <p:sp>
-        <p:nvSpPr>
-          <p:cNvPr id="2" name="Title 1"/>
-          <p:cNvSpPr>
-            <a:spLocks noGrp="1"/>
-          </p:cNvSpPr>
-          <p:nvPr>
-            <p:ph type="title"/>
-          </p:nvPr>
-        </p:nvSpPr>
-        <p:spPr>
-          <a:xfrm>
-            <a:off x="0" y="0"/>
-            <a:ext cx="9144000" cy="582780"/>
-          </a:xfrm>
-        </p:spPr>
-        <p:txBody>
-          <a:bodyPr/>
-          <a:lstStyle/>
-          <a:p>
-            <a:pPr lvl="0" indent="0" marL="0">
-              <a:buNone/>
-            </a:pPr>
-            <a:r>
-              <a:rPr/>
-              <a:t>🛑 Pause — Do Activity Parts 9–11 Now</a:t>
-            </a:r>
-          </a:p>
-        </p:txBody>
-      </p:sp>
-      <p:sp>
-        <p:nvSpPr>
-          <p:cNvPr id="3" name="Content Placeholder 2"/>
-          <p:cNvSpPr>
-            <a:spLocks noGrp="1"/>
-          </p:cNvSpPr>
-          <p:nvPr>
-            <p:ph idx="1"/>
-          </p:nvPr>
-        </p:nvSpPr>
-        <p:spPr/>
-        <p:txBody>
-          <a:bodyPr/>
-          <a:lstStyle/>
-          <a:p>
-            <a:pPr lvl="0" indent="0" marL="0">
-              <a:buNone/>
-            </a:pPr>
-            <a:r>
-              <a:rPr/>
-              <a:t>Run the emmeans pairwise test, get the letters, plot the means ± CI, and write your results sentence. Predict which species differ before you run the comparisons.</a:t>
-            </a:r>
-          </a:p>
-        </p:txBody>
-      </p:sp>
-    </p:spTree>
-  </p:cSld>
-</p:sld>
-</file>
-
-<file path=ppt/slides/slide32.xml><?xml version="1.0" encoding="utf-8"?>
-<p:sld xmlns:a="http://schemas.openxmlformats.org/drawingml/2006/main" xmlns:r="http://schemas.openxmlformats.org/officeDocument/2006/relationships" xmlns:p="http://schemas.openxmlformats.org/presentationml/2006/main">
-  <p:cSld>
-    <p:spTree>
-      <p:nvGrpSpPr>
-        <p:cNvPr id="1" name=""/>
-        <p:cNvGrpSpPr/>
-        <p:nvPr/>
-      </p:nvGrpSpPr>
-      <p:grpSpPr>
-        <a:xfrm>
-          <a:off x="0" y="0"/>
-          <a:ext cx="0" cy="0"/>
-          <a:chOff x="0" y="0"/>
-          <a:chExt cx="0" cy="0"/>
-        </a:xfrm>
-      </p:grpSpPr>
-      <p:sp>
-        <p:nvSpPr>
-          <p:cNvPr id="2" name="Title 1"/>
-          <p:cNvSpPr>
-            <a:spLocks noGrp="1"/>
-          </p:cNvSpPr>
-          <p:nvPr>
-            <p:ph type="title"/>
-          </p:nvPr>
-        </p:nvSpPr>
-        <p:spPr>
-          <a:xfrm>
-            <a:off x="0" y="0"/>
-            <a:ext cx="9144000" cy="602780"/>
-          </a:xfrm>
-          <a:solidFill>
-            <a:srgbClr val="1A1A2E"/>
-          </a:solidFill>
-        </p:spPr>
-        <p:txBody>
-          <a:bodyPr/>
-          <a:lstStyle/>
-          <a:p>
-            <a:pPr lvl="0" indent="0" marL="0">
-              <a:buNone/>
-            </a:pPr>
-            <a:r>
-              <a:rPr/>
-              <a:t>What We Learned Today</a:t>
-            </a:r>
-          </a:p>
-        </p:txBody>
-      </p:sp>
-      <p:sp>
-        <p:nvSpPr>
-          <p:cNvPr id="3" name="Content Placeholder 2"/>
-          <p:cNvSpPr>
-            <a:spLocks noGrp="1"/>
-          </p:cNvSpPr>
-          <p:nvPr>
-            <p:ph idx="1" sz="half"/>
-          </p:nvPr>
-        </p:nvSpPr>
-        <p:spPr/>
-        <p:txBody>
-          <a:bodyPr/>
-          <a:lstStyle/>
-          <a:p>
-            <a:pPr lvl="0" indent="0" marL="0">
-              <a:buNone/>
-            </a:pPr>
-            <a:r>
-              <a:rPr b="1"/>
-              <a:t>Concepts:</a:t>
-            </a:r>
-          </a:p>
-          <a:p>
-            <a:pPr lvl="0"/>
-            <a:r>
-              <a:rPr/>
-              <a:t>Many t-tests inflate the false-positive rate — </a:t>
-            </a:r>
-            <a:r>
-              <a:rPr b="1"/>
-              <a:t>ANOVA asks once</a:t>
-            </a:r>
-          </a:p>
-          <a:p>
-            <a:pPr lvl="0"/>
-            <a:r>
-              <a:rPr b="1"/>
-              <a:t>F</a:t>
-            </a:r>
-            <a:r>
-              <a:rPr/>
-              <a:t> = between-group ÷ within-group variance (signal ÷ noise)</a:t>
-            </a:r>
-          </a:p>
-          <a:p>
-            <a:pPr lvl="0"/>
-            <a:r>
-              <a:rPr/>
-              <a:t>Assumptions: </a:t>
-            </a:r>
-            <a:r>
-              <a:rPr b="1"/>
-              <a:t>normal residuals</a:t>
-            </a:r>
-            <a:r>
-              <a:rPr/>
-              <a:t>, </a:t>
-            </a:r>
-            <a:r>
-              <a:rPr b="1"/>
-              <a:t>equal variance</a:t>
-            </a:r>
-            <a:r>
-              <a:rPr/>
-              <a:t> (Levene)</a:t>
-            </a:r>
-          </a:p>
-          <a:p>
-            <a:pPr lvl="0"/>
-            <a:r>
-              <a:rPr/>
-              <a:t>ANOVA rejects H₀ for the </a:t>
-            </a:r>
-            <a:r>
-              <a:rPr i="1"/>
-              <a:t>group</a:t>
-            </a:r>
-            <a:r>
-              <a:rPr/>
-              <a:t>, but </a:t>
-            </a:r>
-            <a:r>
-              <a:rPr b="1"/>
-              <a:t>post-hoc</a:t>
-            </a:r>
-            <a:r>
-              <a:rPr/>
-              <a:t> finds </a:t>
-            </a:r>
-            <a:r>
-              <a:rPr i="1"/>
-              <a:t>which</a:t>
-            </a:r>
-            <a:r>
-              <a:rPr/>
-              <a:t> pairs differ</a:t>
-            </a:r>
-          </a:p>
-          <a:p>
-            <a:pPr lvl="0"/>
-            <a:r>
-              <a:rPr b="1"/>
-              <a:t>Tukey adjustment</a:t>
-            </a:r>
-            <a:r>
-              <a:rPr/>
-              <a:t> keeps the family-wise error at 0.05</a:t>
-            </a:r>
-          </a:p>
-          <a:p>
-            <a:pPr lvl="0" indent="0" marL="0">
-              <a:buNone/>
-            </a:pPr>
-            <a:r>
-              <a:rPr b="1"/>
-              <a:t>R skills:</a:t>
-            </a:r>
-          </a:p>
-          <a:p>
-            <a:pPr lvl="0"/>
-            <a:r>
-              <a:rPr>
-                <a:latin typeface="Courier"/>
-              </a:rPr>
-              <a:t>lm(Y ~ group)</a:t>
-            </a:r>
-            <a:r>
-              <a:rPr/>
-              <a:t> and </a:t>
-            </a:r>
-            <a:r>
-              <a:rPr>
-                <a:latin typeface="Courier"/>
-              </a:rPr>
-              <a:t>aov()</a:t>
-            </a:r>
-            <a:r>
-              <a:rPr/>
-              <a:t> + </a:t>
-            </a:r>
-            <a:r>
-              <a:rPr>
-                <a:latin typeface="Courier"/>
-              </a:rPr>
-              <a:t>summary()</a:t>
-            </a:r>
-          </a:p>
-          <a:p>
-            <a:pPr lvl="0"/>
-            <a:r>
-              <a:rPr>
-                <a:latin typeface="Courier"/>
-              </a:rPr>
-              <a:t>car::Anova(model, type = "II")</a:t>
-            </a:r>
-          </a:p>
-          <a:p>
-            <a:pPr lvl="0"/>
-            <a:r>
-              <a:rPr>
-                <a:latin typeface="Courier"/>
-              </a:rPr>
-              <a:t>leveneTest()</a:t>
-            </a:r>
-            <a:r>
-              <a:rPr/>
-              <a:t>, </a:t>
-            </a:r>
-            <a:r>
-              <a:rPr>
-                <a:latin typeface="Courier"/>
-              </a:rPr>
-              <a:t>shapiro.test(residuals())</a:t>
-            </a:r>
-          </a:p>
-          <a:p>
-            <a:pPr lvl="0"/>
-            <a:r>
-              <a:rPr>
-                <a:latin typeface="Courier"/>
-              </a:rPr>
-              <a:t>emmeans(model, pairwise ~ group)</a:t>
-            </a:r>
-            <a:r>
-              <a:rPr/>
-              <a:t> + </a:t>
-            </a:r>
-            <a:r>
-              <a:rPr>
-                <a:latin typeface="Courier"/>
-              </a:rPr>
-              <a:t>multcomp::cld()</a:t>
-            </a:r>
-          </a:p>
-        </p:txBody>
-      </p:sp>
-      <p:sp>
-        <p:nvSpPr>
-          <p:cNvPr id="4" name="Content Placeholder 3"/>
-          <p:cNvSpPr>
-            <a:spLocks noGrp="1"/>
-          </p:cNvSpPr>
-          <p:nvPr>
-            <p:ph idx="2" sz="half"/>
-          </p:nvPr>
-        </p:nvSpPr>
-        <p:spPr/>
-        <p:txBody>
-          <a:bodyPr/>
-          <a:lstStyle/>
-          <a:p>
-            <a:pPr lvl="0" indent="0" marL="0">
-              <a:buNone/>
-            </a:pPr>
-            <a:r>
-              <a:rPr b="1"/>
-              <a:t>References:</a:t>
-            </a:r>
-          </a:p>
-          <a:p>
-            <a:pPr lvl="0"/>
-            <a:r>
-              <a:rPr/>
-              <a:t>📖 W&amp;S Ch. 15 — ANOVA</a:t>
-            </a:r>
-          </a:p>
-          <a:p>
-            <a:pPr lvl="0"/>
-            <a:r>
-              <a:rPr/>
-              <a:t>📖 </a:t>
-            </a:r>
-            <a:r>
-              <a:rPr>
-                <a:hlinkClick r:id="rId2"/>
-              </a:rPr>
-              <a:t>R4DS Ch. 16 — Factors</a:t>
-            </a:r>
-          </a:p>
-          <a:p>
-            <a:pPr lvl="0"/>
-            <a:r>
-              <a:rPr/>
-              <a:t>📖 </a:t>
-            </a:r>
-            <a:r>
-              <a:rPr>
-                <a:hlinkClick r:id="rId3"/>
-              </a:rPr>
-              <a:t>emmeans vignettes</a:t>
-            </a:r>
-          </a:p>
-          <a:p>
-            <a:pPr lvl="0" indent="0" marL="0">
-              <a:buNone/>
-            </a:pPr>
-            <a:r>
-              <a:rPr b="1"/>
-              <a:t>Up next — Lecture 12:</a:t>
-            </a:r>
-          </a:p>
-          <a:p>
-            <a:pPr lvl="0"/>
-            <a:r>
-              <a:rPr b="1"/>
-              <a:t>Joins</a:t>
-            </a:r>
-            <a:r>
-              <a:rPr/>
-              <a:t> — combine two tables on a shared key</a:t>
-            </a:r>
-          </a:p>
-          <a:p>
-            <a:pPr lvl="0"/>
-            <a:r>
-              <a:rPr/>
-              <a:t>The prerequisite for bigger datasets — and for maps</a:t>
             </a:r>
           </a:p>
         </p:txBody>
@@ -10104,7 +6563,7 @@
             </a:r>
             <a:r>
               <a:rPr b="1"/>
-              <a:t>four short chunks</a:t>
+              <a:t>two short chunks</a:t>
             </a:r>
             <a:r>
               <a:rPr/>
@@ -10204,42 +6663,58 @@
           <a:p>
             <a:pPr lvl="0"/>
             <a:r>
-              <a:rPr sz="2000" b="1"/>
-              <a:t>Predicting first</a:t>
-            </a:r>
-            <a:r>
               <a:rPr sz="2000"/>
-              <a:t> forces you to </a:t>
+              <a:t>With three groups instead of two, it is tempting to just read off which box in the plot looks tallest. Committing to a prediction about the F-statistic </a:t>
             </a:r>
             <a:r>
               <a:rPr sz="2000" i="1"/>
-              <a:t>retrieve</a:t>
+              <a:t>before</a:t>
             </a:r>
             <a:r>
               <a:rPr sz="2000"/>
-              <a:t> what you know — the gap between guess and answer is what makes it stick.</a:t>
+              <a:t> you see it forces you to reason about between- vs. within-group variance instead of eyeballing a boxplot.</a:t>
             </a:r>
           </a:p>
           <a:p>
             <a:pPr lvl="0"/>
             <a:r>
-              <a:rPr sz="2000" b="1"/>
-              <a:t>Typing by hand</a:t>
-            </a:r>
-            <a:r>
               <a:rPr sz="2000"/>
-              <a:t> builds the finger-memory and error-spotting that copy-paste skips.</a:t>
+              <a:t>Typing </a:t>
+            </a:r>
+            <a:r>
+              <a:rPr sz="2000">
+                <a:latin typeface="Courier"/>
+              </a:rPr>
+              <a:t>type = "II"</a:t>
+            </a:r>
+            <a:r>
+              <a:rPr sz="2000"/>
+              <a:t> yourself in </a:t>
+            </a:r>
+            <a:r>
+              <a:rPr sz="2000">
+                <a:latin typeface="Courier"/>
+              </a:rPr>
+              <a:t>Anova()</a:t>
+            </a:r>
+            <a:r>
+              <a:rPr sz="2000"/>
+              <a:t> is what makes you notice it’s there — paste the line and you’ll never ask why it matters for unbalanced groups.</a:t>
             </a:r>
           </a:p>
           <a:p>
             <a:pPr lvl="0"/>
             <a:r>
-              <a:rPr sz="2000" b="1"/>
-              <a:t>Chunk → immediate practice</a:t>
-            </a:r>
-            <a:r>
               <a:rPr sz="2000"/>
-              <a:t> keeps each idea in working memory long enough to form a lasting schema.</a:t>
+              <a:t>Practicing each assumption check right after it’s introduced keeps normality-of-residuals and Levene’s test tied to </a:t>
+            </a:r>
+            <a:r>
+              <a:rPr sz="2000" i="1"/>
+              <a:t>this</a:t>
+            </a:r>
+            <a:r>
+              <a:rPr sz="2000"/>
+              <a:t> penguin model instead of turning into two more disconnected rules to memorize.</a:t>
             </a:r>
           </a:p>
         </p:txBody>
@@ -10291,7 +6766,7 @@
             </a:pPr>
             <a:r>
               <a:rPr/>
-              <a:t>🧩 Chunk 1 of 4 · Why ANOVA &amp; the F-Statistic</a:t>
+              <a:t>🧩 Chunk 1 of 2 · Why ANOVA &amp; the F-Statistic</a:t>
             </a:r>
           </a:p>
         </p:txBody>

--- a/docs/content/one_way_anova/one_way_anova_lecture.pptx
+++ b/docs/content/one_way_anova/one_way_anova_lecture.pptx
@@ -25,6 +25,9 @@
     <p:sldId id="273" r:id="rId19"/>
     <p:sldId id="274" r:id="rId20"/>
     <p:sldId id="275" r:id="rId21"/>
+    <p:sldId id="276" r:id="rId22"/>
+    <p:sldId id="277" r:id="rId23"/>
+    <p:sldId id="278" r:id="rId24"/>
   </p:sldIdLst>
   <p:sldSz cx="9144000" cy="5143500" type="screen16x9"/>
   <p:notesSz cx="6858000" cy="9144000"/>
@@ -3298,7 +3301,7 @@
             </a:pPr>
             <a:r>
               <a:rPr/>
-              <a:t>Lecture 13 — One-Way ANOVA I: Setting Up the Test</a:t>
+              <a:t>Lecture — One-Way ANOVA I: Setting Up the Test</a:t>
             </a:r>
           </a:p>
         </p:txBody>
@@ -3328,7 +3331,7 @@
             </a:pPr>
             <a:r>
               <a:rPr/>
-              <a:t>Why not many t-tests, the F-statistic, fitting the model, and checking assumptions</a:t>
+              <a:t>Why not many t-tests, the F-statistic, ordering groups with factors, fitting the model, and checking assumptions</a:t>
             </a:r>
             <a:br/>
             <a:br/>
@@ -4268,6 +4271,21 @@
             </a:r>
           </a:p>
           <a:p>
+            <a:pPr lvl="0"/>
+            <a:r>
+              <a:rPr/>
+              <a:t>But notice the </a:t>
+            </a:r>
+            <a:r>
+              <a:rPr b="1"/>
+              <a:t>order</a:t>
+            </a:r>
+            <a:r>
+              <a:rPr/>
+              <a:t>: Adelie, Chinstrap, Gentoo — that’s alphabetical, not by mass</a:t>
+            </a:r>
+          </a:p>
+          <a:p>
             <a:pPr lvl="0" indent="0" marL="0">
               <a:buNone/>
             </a:pPr>
@@ -4313,8 +4331,11 @@
         <p:spPr>
           <a:xfrm>
             <a:off x="0" y="0"/>
-            <a:ext cx="9144000" cy="582780"/>
+            <a:ext cx="9144000" cy="602780"/>
           </a:xfrm>
+          <a:solidFill>
+            <a:srgbClr val="1A1A2E"/>
+          </a:solidFill>
         </p:spPr>
         <p:txBody>
           <a:bodyPr/>
@@ -4324,8 +4345,14 @@
               <a:buNone/>
             </a:pPr>
             <a:r>
-              <a:rPr/>
-              <a:t>🛑 Pause — Do Activity Parts 1–3 Now</a:t>
+              <a:rPr>
+                <a:latin typeface="Courier"/>
+              </a:rPr>
+              <a:t>species</a:t>
+            </a:r>
+            <a:r>
+              <a:rPr/>
+              <a:t> Is a Factor — and Factors Have an Order</a:t>
             </a:r>
           </a:p>
         </p:txBody>
@@ -4337,7 +4364,7 @@
             <a:spLocks noGrp="1"/>
           </p:cNvSpPr>
           <p:nvPr>
-            <p:ph idx="1"/>
+            <p:ph idx="1" sz="half"/>
           </p:nvPr>
         </p:nvSpPr>
         <p:spPr/>
@@ -4345,12 +4372,272 @@
           <a:bodyPr/>
           <a:lstStyle/>
           <a:p>
+            <a:pPr lvl="0" indent="0">
+              <a:buNone/>
+            </a:pPr>
+            <a:r>
+              <a:rPr>
+                <a:solidFill>
+                  <a:srgbClr val="4758AB"/>
+                </a:solidFill>
+                <a:latin typeface="Courier"/>
+              </a:rPr>
+              <a:t>class</a:t>
+            </a:r>
+            <a:r>
+              <a:rPr>
+                <a:solidFill>
+                  <a:srgbClr val="003B4F"/>
+                </a:solidFill>
+                <a:latin typeface="Courier"/>
+              </a:rPr>
+              <a:t>(penguins_df</a:t>
+            </a:r>
+            <a:r>
+              <a:rPr>
+                <a:solidFill>
+                  <a:srgbClr val="5E5E5E"/>
+                </a:solidFill>
+                <a:latin typeface="Courier"/>
+              </a:rPr>
+              <a:t>$</a:t>
+            </a:r>
+            <a:r>
+              <a:rPr>
+                <a:solidFill>
+                  <a:srgbClr val="003B4F"/>
+                </a:solidFill>
+                <a:latin typeface="Courier"/>
+              </a:rPr>
+              <a:t>species)   </a:t>
+            </a:r>
+            <a:r>
+              <a:rPr>
+                <a:solidFill>
+                  <a:srgbClr val="5E5E5E"/>
+                </a:solidFill>
+                <a:latin typeface="Courier"/>
+              </a:rPr>
+              <a:t># "factor"</a:t>
+            </a:r>
+          </a:p>
+          <a:p>
+            <a:pPr lvl="0" indent="0">
+              <a:buNone/>
+            </a:pPr>
+            <a:r>
+              <a:rPr>
+                <a:latin typeface="Courier"/>
+              </a:rPr>
+              <a:t>[1] "factor"</a:t>
+            </a:r>
+          </a:p>
+          <a:p>
+            <a:pPr lvl="0" indent="0">
+              <a:buNone/>
+            </a:pPr>
+            <a:r>
+              <a:rPr>
+                <a:solidFill>
+                  <a:srgbClr val="4758AB"/>
+                </a:solidFill>
+                <a:latin typeface="Courier"/>
+              </a:rPr>
+              <a:t>levels</a:t>
+            </a:r>
+            <a:r>
+              <a:rPr>
+                <a:solidFill>
+                  <a:srgbClr val="003B4F"/>
+                </a:solidFill>
+                <a:latin typeface="Courier"/>
+              </a:rPr>
+              <a:t>(penguins_df</a:t>
+            </a:r>
+            <a:r>
+              <a:rPr>
+                <a:solidFill>
+                  <a:srgbClr val="5E5E5E"/>
+                </a:solidFill>
+                <a:latin typeface="Courier"/>
+              </a:rPr>
+              <a:t>$</a:t>
+            </a:r>
+            <a:r>
+              <a:rPr>
+                <a:solidFill>
+                  <a:srgbClr val="003B4F"/>
+                </a:solidFill>
+                <a:latin typeface="Courier"/>
+              </a:rPr>
+              <a:t>species)  </a:t>
+            </a:r>
+            <a:r>
+              <a:rPr>
+                <a:solidFill>
+                  <a:srgbClr val="5E5E5E"/>
+                </a:solidFill>
+                <a:latin typeface="Courier"/>
+              </a:rPr>
+              <a:t># the stored order</a:t>
+            </a:r>
+          </a:p>
+          <a:p>
+            <a:pPr lvl="0" indent="0">
+              <a:buNone/>
+            </a:pPr>
+            <a:r>
+              <a:rPr>
+                <a:latin typeface="Courier"/>
+              </a:rPr>
+              <a:t>[1] "Adelie"    "Chinstrap" "Gentoo"   </a:t>
+            </a:r>
+          </a:p>
+          <a:p>
+            <a:pPr lvl="0"/>
+            <a:r>
+              <a:rPr/>
+              <a:t>A </a:t>
+            </a:r>
+            <a:r>
+              <a:rPr b="1"/>
+              <a:t>factor</a:t>
+            </a:r>
+            <a:r>
+              <a:rPr/>
+              <a:t> is a categorical column with a fixed, </a:t>
+            </a:r>
+            <a:r>
+              <a:rPr i="1"/>
+              <a:t>ordered</a:t>
+            </a:r>
+            <a:r>
+              <a:rPr/>
+              <a:t> set of </a:t>
+            </a:r>
+            <a:r>
+              <a:rPr b="1"/>
+              <a:t>levels</a:t>
+            </a:r>
+          </a:p>
+          <a:p>
+            <a:pPr lvl="0"/>
+            <a:r>
+              <a:rPr>
+                <a:latin typeface="Courier"/>
+              </a:rPr>
+              <a:t>ggplot</a:t>
+            </a:r>
+            <a:r>
+              <a:rPr/>
+              <a:t> (and </a:t>
+            </a:r>
+            <a:r>
+              <a:rPr>
+                <a:latin typeface="Courier"/>
+              </a:rPr>
+              <a:t>lm</a:t>
+            </a:r>
+            <a:r>
+              <a:rPr/>
+              <a:t>) draw groups in </a:t>
+            </a:r>
+            <a:r>
+              <a:rPr b="1"/>
+              <a:t>level order</a:t>
+            </a:r>
+          </a:p>
+          <a:p>
+            <a:pPr lvl="0"/>
+            <a:r>
+              <a:rPr/>
+              <a:t>The default level order is </a:t>
+            </a:r>
+            <a:r>
+              <a:rPr b="1"/>
+              <a:t>alphabetical</a:t>
+            </a:r>
+            <a:r>
+              <a:rPr/>
+              <a:t> — almost never the order you want</a:t>
+            </a:r>
+          </a:p>
+        </p:txBody>
+      </p:sp>
+      <p:sp>
+        <p:nvSpPr>
+          <p:cNvPr id="4" name="Content Placeholder 3"/>
+          <p:cNvSpPr>
+            <a:spLocks noGrp="1"/>
+          </p:cNvSpPr>
+          <p:nvPr>
+            <p:ph idx="2" sz="half"/>
+          </p:nvPr>
+        </p:nvSpPr>
+        <p:spPr/>
+        <p:txBody>
+          <a:bodyPr/>
+          <a:lstStyle/>
+          <a:p>
+            <a:pPr lvl="0" indent="0" marL="1270000">
+              <a:buNone/>
+            </a:pPr>
+            <a:r>
+              <a:rPr sz="2000" b="1"/>
+              <a:t>Note</a:t>
+            </a:r>
+          </a:p>
+          <a:p>
+            <a:pPr lvl="0" indent="0" marL="1270000">
+              <a:buNone/>
+            </a:pPr>
+            <a:r>
+              <a:rPr sz="2000" b="1"/>
+              <a:t>✅ Key idea</a:t>
+            </a:r>
+          </a:p>
+          <a:p>
+            <a:pPr lvl="0" indent="0" marL="1270000">
+              <a:buNone/>
+            </a:pPr>
+            <a:r>
+              <a:rPr sz="2000"/>
+              <a:t>Alphabetical order hides the pattern. Ordering the groups by the thing you are testing — here, body mass — makes the boxplot tell the story at a glance.</a:t>
+            </a:r>
+          </a:p>
+          <a:p>
             <a:pPr lvl="0" indent="0" marL="0">
               <a:buNone/>
             </a:pPr>
             <a:r>
-              <a:rPr/>
-              <a:t>Load the penguins, plot body mass by species, and write your hypotheses. Predict which species differ before you run anything.</a:t>
+              <a:rPr>
+                <a:latin typeface="Courier"/>
+              </a:rPr>
+              <a:t>forcats</a:t>
+            </a:r>
+            <a:r>
+              <a:rPr/>
+              <a:t> (the </a:t>
+            </a:r>
+            <a:r>
+              <a:rPr>
+                <a:latin typeface="Courier"/>
+              </a:rPr>
+              <a:t>fct_*</a:t>
+            </a:r>
+            <a:r>
+              <a:rPr/>
+              <a:t> family) ships with </a:t>
+            </a:r>
+            <a:r>
+              <a:rPr>
+                <a:latin typeface="Courier"/>
+              </a:rPr>
+              <a:t>library(tidyverse)</a:t>
+            </a:r>
+            <a:r>
+              <a:rPr/>
+              <a:t>.</a:t>
             </a:r>
           </a:p>
         </p:txBody>
@@ -4389,8 +4676,8 @@
         </p:nvSpPr>
         <p:spPr>
           <a:xfrm>
-            <a:off x="0" y="0"/>
-            <a:ext cx="9144000" cy="582780"/>
+            <a:off x="139485" y="78119"/>
+            <a:ext cx="8229600" cy="607682"/>
           </a:xfrm>
         </p:spPr>
         <p:txBody>
@@ -4402,19 +4689,25 @@
             </a:pPr>
             <a:r>
               <a:rPr/>
-              <a:t>🧩 Chunk 2 of 2 · Fit the Model &amp; Check Assumptions</a:t>
-            </a:r>
-          </a:p>
-        </p:txBody>
-      </p:sp>
-      <p:sp>
-        <p:nvSpPr>
-          <p:cNvPr id="3" name="Content Placeholder 2"/>
-          <p:cNvSpPr>
-            <a:spLocks noGrp="1"/>
-          </p:cNvSpPr>
-          <p:nvPr>
-            <p:ph idx="1"/>
+              <a:t>Order the Boxplot by Body Mass — </a:t>
+            </a:r>
+            <a:r>
+              <a:rPr>
+                <a:latin typeface="Courier"/>
+              </a:rPr>
+              <a:t>fct_reorder()</a:t>
+            </a:r>
+          </a:p>
+        </p:txBody>
+      </p:sp>
+      <p:sp>
+        <p:nvSpPr>
+          <p:cNvPr id="3" name="Text Placeholder 2"/>
+          <p:cNvSpPr>
+            <a:spLocks noGrp="1"/>
+          </p:cNvSpPr>
+          <p:nvPr>
+            <p:ph idx="1" type="body"/>
           </p:nvPr>
         </p:nvSpPr>
         <p:spPr/>
@@ -4422,16 +4715,648 @@
           <a:bodyPr/>
           <a:lstStyle/>
           <a:p>
-            <a:pPr lvl="0" indent="0" marL="0">
-              <a:buNone/>
-            </a:pPr>
+            <a:pPr lvl="0" indent="0">
+              <a:buNone/>
+            </a:pPr>
+            <a:r>
+              <a:rPr>
+                <a:solidFill>
+                  <a:srgbClr val="003B4F"/>
+                </a:solidFill>
+                <a:latin typeface="Courier"/>
+              </a:rPr>
+              <a:t>penguins_df </a:t>
+            </a:r>
+            <a:r>
+              <a:rPr>
+                <a:solidFill>
+                  <a:srgbClr val="5E5E5E"/>
+                </a:solidFill>
+                <a:latin typeface="Courier"/>
+              </a:rPr>
+              <a:t>%&gt;%</a:t>
+            </a:r>
+            <a:br/>
+            <a:r>
+              <a:rPr>
+                <a:solidFill>
+                  <a:srgbClr val="003B4F"/>
+                </a:solidFill>
+                <a:latin typeface="Courier"/>
+              </a:rPr>
+              <a:t>  </a:t>
+            </a:r>
+            <a:r>
+              <a:rPr>
+                <a:solidFill>
+                  <a:srgbClr val="4758AB"/>
+                </a:solidFill>
+                <a:latin typeface="Courier"/>
+              </a:rPr>
+              <a:t>mutate</a:t>
+            </a:r>
+            <a:r>
+              <a:rPr>
+                <a:solidFill>
+                  <a:srgbClr val="003B4F"/>
+                </a:solidFill>
+                <a:latin typeface="Courier"/>
+              </a:rPr>
+              <a:t>(</a:t>
+            </a:r>
+            <a:r>
+              <a:rPr>
+                <a:solidFill>
+                  <a:srgbClr val="657422"/>
+                </a:solidFill>
+                <a:latin typeface="Courier"/>
+              </a:rPr>
+              <a:t>species =</a:t>
+            </a:r>
+            <a:r>
+              <a:rPr>
+                <a:solidFill>
+                  <a:srgbClr val="003B4F"/>
+                </a:solidFill>
+                <a:latin typeface="Courier"/>
+              </a:rPr>
+              <a:t> </a:t>
+            </a:r>
+            <a:r>
+              <a:rPr>
+                <a:solidFill>
+                  <a:srgbClr val="4758AB"/>
+                </a:solidFill>
+                <a:latin typeface="Courier"/>
+              </a:rPr>
+              <a:t>fct_reorder</a:t>
+            </a:r>
+            <a:r>
+              <a:rPr>
+                <a:solidFill>
+                  <a:srgbClr val="003B4F"/>
+                </a:solidFill>
+                <a:latin typeface="Courier"/>
+              </a:rPr>
+              <a:t>(species, body_mass_g, </a:t>
+            </a:r>
+            <a:r>
+              <a:rPr>
+                <a:solidFill>
+                  <a:srgbClr val="657422"/>
+                </a:solidFill>
+                <a:latin typeface="Courier"/>
+              </a:rPr>
+              <a:t>.fun =</a:t>
+            </a:r>
+            <a:r>
+              <a:rPr>
+                <a:solidFill>
+                  <a:srgbClr val="003B4F"/>
+                </a:solidFill>
+                <a:latin typeface="Courier"/>
+              </a:rPr>
+              <a:t> median)) </a:t>
+            </a:r>
+            <a:r>
+              <a:rPr>
+                <a:solidFill>
+                  <a:srgbClr val="5E5E5E"/>
+                </a:solidFill>
+                <a:latin typeface="Courier"/>
+              </a:rPr>
+              <a:t>%&gt;%</a:t>
+            </a:r>
+            <a:br/>
+            <a:r>
+              <a:rPr>
+                <a:solidFill>
+                  <a:srgbClr val="003B4F"/>
+                </a:solidFill>
+                <a:latin typeface="Courier"/>
+              </a:rPr>
+              <a:t>  </a:t>
+            </a:r>
+            <a:r>
+              <a:rPr>
+                <a:solidFill>
+                  <a:srgbClr val="4758AB"/>
+                </a:solidFill>
+                <a:latin typeface="Courier"/>
+              </a:rPr>
+              <a:t>ggplot</a:t>
+            </a:r>
+            <a:r>
+              <a:rPr>
+                <a:solidFill>
+                  <a:srgbClr val="003B4F"/>
+                </a:solidFill>
+                <a:latin typeface="Courier"/>
+              </a:rPr>
+              <a:t>(</a:t>
+            </a:r>
+            <a:r>
+              <a:rPr>
+                <a:solidFill>
+                  <a:srgbClr val="4758AB"/>
+                </a:solidFill>
+                <a:latin typeface="Courier"/>
+              </a:rPr>
+              <a:t>aes</a:t>
+            </a:r>
+            <a:r>
+              <a:rPr>
+                <a:solidFill>
+                  <a:srgbClr val="003B4F"/>
+                </a:solidFill>
+                <a:latin typeface="Courier"/>
+              </a:rPr>
+              <a:t>(</a:t>
+            </a:r>
+            <a:r>
+              <a:rPr>
+                <a:solidFill>
+                  <a:srgbClr val="657422"/>
+                </a:solidFill>
+                <a:latin typeface="Courier"/>
+              </a:rPr>
+              <a:t>x =</a:t>
+            </a:r>
+            <a:r>
+              <a:rPr>
+                <a:solidFill>
+                  <a:srgbClr val="003B4F"/>
+                </a:solidFill>
+                <a:latin typeface="Courier"/>
+              </a:rPr>
+              <a:t> species, </a:t>
+            </a:r>
+            <a:r>
+              <a:rPr>
+                <a:solidFill>
+                  <a:srgbClr val="657422"/>
+                </a:solidFill>
+                <a:latin typeface="Courier"/>
+              </a:rPr>
+              <a:t>y =</a:t>
+            </a:r>
+            <a:r>
+              <a:rPr>
+                <a:solidFill>
+                  <a:srgbClr val="003B4F"/>
+                </a:solidFill>
+                <a:latin typeface="Courier"/>
+              </a:rPr>
+              <a:t> body_mass_g, </a:t>
+            </a:r>
+            <a:r>
+              <a:rPr>
+                <a:solidFill>
+                  <a:srgbClr val="657422"/>
+                </a:solidFill>
+                <a:latin typeface="Courier"/>
+              </a:rPr>
+              <a:t>fill =</a:t>
+            </a:r>
+            <a:r>
+              <a:rPr>
+                <a:solidFill>
+                  <a:srgbClr val="003B4F"/>
+                </a:solidFill>
+                <a:latin typeface="Courier"/>
+              </a:rPr>
+              <a:t> species)) </a:t>
+            </a:r>
+            <a:r>
+              <a:rPr>
+                <a:solidFill>
+                  <a:srgbClr val="5E5E5E"/>
+                </a:solidFill>
+                <a:latin typeface="Courier"/>
+              </a:rPr>
+              <a:t>+</a:t>
+            </a:r>
+            <a:br/>
+            <a:r>
+              <a:rPr>
+                <a:solidFill>
+                  <a:srgbClr val="003B4F"/>
+                </a:solidFill>
+                <a:latin typeface="Courier"/>
+              </a:rPr>
+              <a:t>  </a:t>
+            </a:r>
+            <a:r>
+              <a:rPr>
+                <a:solidFill>
+                  <a:srgbClr val="4758AB"/>
+                </a:solidFill>
+                <a:latin typeface="Courier"/>
+              </a:rPr>
+              <a:t>geom_boxplot</a:t>
+            </a:r>
+            <a:r>
+              <a:rPr>
+                <a:solidFill>
+                  <a:srgbClr val="003B4F"/>
+                </a:solidFill>
+                <a:latin typeface="Courier"/>
+              </a:rPr>
+              <a:t>(</a:t>
+            </a:r>
+            <a:r>
+              <a:rPr>
+                <a:solidFill>
+                  <a:srgbClr val="657422"/>
+                </a:solidFill>
+                <a:latin typeface="Courier"/>
+              </a:rPr>
+              <a:t>alpha =</a:t>
+            </a:r>
+            <a:r>
+              <a:rPr>
+                <a:solidFill>
+                  <a:srgbClr val="003B4F"/>
+                </a:solidFill>
+                <a:latin typeface="Courier"/>
+              </a:rPr>
+              <a:t> </a:t>
+            </a:r>
+            <a:r>
+              <a:rPr>
+                <a:solidFill>
+                  <a:srgbClr val="AD0000"/>
+                </a:solidFill>
+                <a:latin typeface="Courier"/>
+              </a:rPr>
+              <a:t>0.5</a:t>
+            </a:r>
+            <a:r>
+              <a:rPr>
+                <a:solidFill>
+                  <a:srgbClr val="003B4F"/>
+                </a:solidFill>
+                <a:latin typeface="Courier"/>
+              </a:rPr>
+              <a:t>, </a:t>
+            </a:r>
+            <a:r>
+              <a:rPr>
+                <a:solidFill>
+                  <a:srgbClr val="657422"/>
+                </a:solidFill>
+                <a:latin typeface="Courier"/>
+              </a:rPr>
+              <a:t>outlier.shape =</a:t>
+            </a:r>
+            <a:r>
+              <a:rPr>
+                <a:solidFill>
+                  <a:srgbClr val="003B4F"/>
+                </a:solidFill>
+                <a:latin typeface="Courier"/>
+              </a:rPr>
+              <a:t> </a:t>
+            </a:r>
+            <a:r>
+              <a:rPr>
+                <a:solidFill>
+                  <a:srgbClr val="8F5902"/>
+                </a:solidFill>
+                <a:latin typeface="Courier"/>
+              </a:rPr>
+              <a:t>NA</a:t>
+            </a:r>
+            <a:r>
+              <a:rPr>
+                <a:solidFill>
+                  <a:srgbClr val="003B4F"/>
+                </a:solidFill>
+                <a:latin typeface="Courier"/>
+              </a:rPr>
+              <a:t>) </a:t>
+            </a:r>
+            <a:r>
+              <a:rPr>
+                <a:solidFill>
+                  <a:srgbClr val="5E5E5E"/>
+                </a:solidFill>
+                <a:latin typeface="Courier"/>
+              </a:rPr>
+              <a:t>+</a:t>
+            </a:r>
+            <a:br/>
+            <a:r>
+              <a:rPr>
+                <a:solidFill>
+                  <a:srgbClr val="003B4F"/>
+                </a:solidFill>
+                <a:latin typeface="Courier"/>
+              </a:rPr>
+              <a:t>  </a:t>
+            </a:r>
+            <a:r>
+              <a:rPr>
+                <a:solidFill>
+                  <a:srgbClr val="4758AB"/>
+                </a:solidFill>
+                <a:latin typeface="Courier"/>
+              </a:rPr>
+              <a:t>labs</a:t>
+            </a:r>
+            <a:r>
+              <a:rPr>
+                <a:solidFill>
+                  <a:srgbClr val="003B4F"/>
+                </a:solidFill>
+                <a:latin typeface="Courier"/>
+              </a:rPr>
+              <a:t>(</a:t>
+            </a:r>
+            <a:r>
+              <a:rPr>
+                <a:solidFill>
+                  <a:srgbClr val="657422"/>
+                </a:solidFill>
+                <a:latin typeface="Courier"/>
+              </a:rPr>
+              <a:t>x =</a:t>
+            </a:r>
+            <a:r>
+              <a:rPr>
+                <a:solidFill>
+                  <a:srgbClr val="003B4F"/>
+                </a:solidFill>
+                <a:latin typeface="Courier"/>
+              </a:rPr>
+              <a:t> </a:t>
+            </a:r>
+            <a:r>
+              <a:rPr>
+                <a:solidFill>
+                  <a:srgbClr val="20794D"/>
+                </a:solidFill>
+                <a:latin typeface="Courier"/>
+              </a:rPr>
+              <a:t>"Species (ordered by median mass)"</a:t>
+            </a:r>
+            <a:r>
+              <a:rPr>
+                <a:solidFill>
+                  <a:srgbClr val="003B4F"/>
+                </a:solidFill>
+                <a:latin typeface="Courier"/>
+              </a:rPr>
+              <a:t>, </a:t>
+            </a:r>
+            <a:r>
+              <a:rPr>
+                <a:solidFill>
+                  <a:srgbClr val="657422"/>
+                </a:solidFill>
+                <a:latin typeface="Courier"/>
+              </a:rPr>
+              <a:t>y =</a:t>
+            </a:r>
+            <a:r>
+              <a:rPr>
+                <a:solidFill>
+                  <a:srgbClr val="003B4F"/>
+                </a:solidFill>
+                <a:latin typeface="Courier"/>
+              </a:rPr>
+              <a:t> </a:t>
+            </a:r>
+            <a:r>
+              <a:rPr>
+                <a:solidFill>
+                  <a:srgbClr val="20794D"/>
+                </a:solidFill>
+                <a:latin typeface="Courier"/>
+              </a:rPr>
+              <a:t>"Body Mass (g)"</a:t>
+            </a:r>
+            <a:r>
+              <a:rPr>
+                <a:solidFill>
+                  <a:srgbClr val="003B4F"/>
+                </a:solidFill>
+                <a:latin typeface="Courier"/>
+              </a:rPr>
+              <a:t>) </a:t>
+            </a:r>
+            <a:r>
+              <a:rPr>
+                <a:solidFill>
+                  <a:srgbClr val="5E5E5E"/>
+                </a:solidFill>
+                <a:latin typeface="Courier"/>
+              </a:rPr>
+              <a:t>+</a:t>
+            </a:r>
+            <a:br/>
+            <a:r>
+              <a:rPr>
+                <a:solidFill>
+                  <a:srgbClr val="003B4F"/>
+                </a:solidFill>
+                <a:latin typeface="Courier"/>
+              </a:rPr>
+              <a:t>  </a:t>
+            </a:r>
+            <a:r>
+              <a:rPr>
+                <a:solidFill>
+                  <a:srgbClr val="4758AB"/>
+                </a:solidFill>
+                <a:latin typeface="Courier"/>
+              </a:rPr>
+              <a:t>theme_minimal</a:t>
+            </a:r>
+            <a:r>
+              <a:rPr>
+                <a:solidFill>
+                  <a:srgbClr val="003B4F"/>
+                </a:solidFill>
+                <a:latin typeface="Courier"/>
+              </a:rPr>
+              <a:t>() </a:t>
+            </a:r>
+            <a:r>
+              <a:rPr>
+                <a:solidFill>
+                  <a:srgbClr val="5E5E5E"/>
+                </a:solidFill>
+                <a:latin typeface="Courier"/>
+              </a:rPr>
+              <a:t>+</a:t>
+            </a:r>
+            <a:br/>
+            <a:r>
+              <a:rPr>
+                <a:solidFill>
+                  <a:srgbClr val="003B4F"/>
+                </a:solidFill>
+                <a:latin typeface="Courier"/>
+              </a:rPr>
+              <a:t>  </a:t>
+            </a:r>
+            <a:r>
+              <a:rPr>
+                <a:solidFill>
+                  <a:srgbClr val="4758AB"/>
+                </a:solidFill>
+                <a:latin typeface="Courier"/>
+              </a:rPr>
+              <a:t>theme</a:t>
+            </a:r>
+            <a:r>
+              <a:rPr>
+                <a:solidFill>
+                  <a:srgbClr val="003B4F"/>
+                </a:solidFill>
+                <a:latin typeface="Courier"/>
+              </a:rPr>
+              <a:t>(</a:t>
+            </a:r>
+            <a:r>
+              <a:rPr>
+                <a:solidFill>
+                  <a:srgbClr val="657422"/>
+                </a:solidFill>
+                <a:latin typeface="Courier"/>
+              </a:rPr>
+              <a:t>legend.position =</a:t>
+            </a:r>
+            <a:r>
+              <a:rPr>
+                <a:solidFill>
+                  <a:srgbClr val="003B4F"/>
+                </a:solidFill>
+                <a:latin typeface="Courier"/>
+              </a:rPr>
+              <a:t> </a:t>
+            </a:r>
+            <a:r>
+              <a:rPr>
+                <a:solidFill>
+                  <a:srgbClr val="20794D"/>
+                </a:solidFill>
+                <a:latin typeface="Courier"/>
+              </a:rPr>
+              <a:t>"none"</a:t>
+            </a:r>
+            <a:r>
+              <a:rPr>
+                <a:solidFill>
+                  <a:srgbClr val="003B4F"/>
+                </a:solidFill>
+                <a:latin typeface="Courier"/>
+              </a:rPr>
+              <a:t>)</a:t>
+            </a:r>
+          </a:p>
+        </p:txBody>
+      </p:sp>
+      <p:pic>
+        <p:nvPicPr>
+          <p:cNvPr descr="one_way_anova_lecture_files/figure-pptx/fct-reorder-10-1.png" id="0" name="Picture 1"/>
+          <p:cNvPicPr>
+            <a:picLocks noGrp="1" noChangeAspect="1"/>
+          </p:cNvPicPr>
+          <p:nvPr/>
+        </p:nvPicPr>
+        <p:blipFill>
+          <a:blip r:embed="rId2"/>
+          <a:stretch>
+            <a:fillRect/>
+          </a:stretch>
+        </p:blipFill>
+        <p:spPr bwMode="auto">
+          <a:xfrm>
+            <a:off x="127000" y="1562100"/>
+            <a:ext cx="4432300" cy="2730500"/>
+          </a:xfrm>
+          <a:prstGeom prst="rect">
+            <a:avLst/>
+          </a:prstGeom>
+          <a:noFill/>
+          <a:ln w="9525">
+            <a:noFill/>
+            <a:headEnd/>
+            <a:tailEnd/>
+          </a:ln>
+        </p:spPr>
+      </p:pic>
+      <p:sp>
+        <p:nvSpPr>
+          <p:cNvPr id="5" name="Text Placeholder 4"/>
+          <p:cNvSpPr>
+            <a:spLocks noGrp="1"/>
+          </p:cNvSpPr>
+          <p:nvPr>
+            <p:ph idx="3" sz="quarter" type="body"/>
+          </p:nvPr>
+        </p:nvSpPr>
+        <p:spPr/>
+        <p:txBody>
+          <a:bodyPr/>
+          <a:lstStyle/>
+          <a:p>
+            <a:pPr lvl="0"/>
+            <a:r>
+              <a:rPr>
+                <a:latin typeface="Courier"/>
+              </a:rPr>
+              <a:t>fct_reorder(f, x, .fun = median)</a:t>
+            </a:r>
+            <a:r>
+              <a:rPr/>
+              <a:t> — reorder factor </a:t>
+            </a:r>
+            <a:r>
+              <a:rPr>
+                <a:latin typeface="Courier"/>
+              </a:rPr>
+              <a:t>f</a:t>
+            </a:r>
+            <a:r>
+              <a:rPr/>
+              <a:t> by a summary of </a:t>
+            </a:r>
+            <a:r>
+              <a:rPr>
+                <a:latin typeface="Courier"/>
+              </a:rPr>
+              <a:t>x</a:t>
+            </a:r>
+          </a:p>
+          <a:p>
+            <a:pPr lvl="0"/>
+            <a:r>
+              <a:rPr/>
+              <a:t>Do it </a:t>
+            </a:r>
             <a:r>
               <a:rPr b="1"/>
-              <a:t>We will cover:</a:t>
-            </a:r>
-            <a:r>
-              <a:rPr/>
-              <a:t> fitting the model, then checking normality of the residuals and equal variance across groups.</a:t>
+              <a:t>inside </a:t>
+            </a:r>
+            <a:r>
+              <a:rPr b="1">
+                <a:latin typeface="Courier"/>
+              </a:rPr>
+              <a:t>mutate()</a:t>
+            </a:r>
+            <a:r>
+              <a:rPr/>
+              <a:t>, then plot the result</a:t>
+            </a:r>
+          </a:p>
+          <a:p>
+            <a:pPr lvl="0"/>
+            <a:r>
+              <a:rPr/>
+              <a:t>One line; the plot now reads lightest → heaviest</a:t>
             </a:r>
           </a:p>
           <a:p>
@@ -4448,12 +5373,42 @@
               <a:buNone/>
             </a:pPr>
             <a:r>
+              <a:rPr sz="2000"/>
+              <a:t>The full </a:t>
+            </a:r>
+            <a:r>
+              <a:rPr sz="2000">
+                <a:latin typeface="Courier"/>
+              </a:rPr>
+              <a:t>forcats</a:t>
+            </a:r>
+            <a:r>
+              <a:rPr sz="2000"/>
+              <a:t> family — rename levels, merge them, lump rare ones — is in </a:t>
+            </a:r>
+            <a:r>
               <a:rPr sz="2000" b="1"/>
-              <a:t>🖐 After this chunk: Activity Parts 4–6</a:t>
+              <a:t>Common Code 15 · Factors</a:t>
             </a:r>
             <a:r>
               <a:rPr sz="2000"/>
-              <a:t> (fit, QQ + Shapiro on residuals, Levene’s test).</a:t>
+              <a:t>. Today we only need </a:t>
+            </a:r>
+            <a:r>
+              <a:rPr sz="2000" i="1"/>
+              <a:t>ordering</a:t>
+            </a:r>
+            <a:r>
+              <a:rPr sz="2000"/>
+              <a:t> and, next, the </a:t>
+            </a:r>
+            <a:r>
+              <a:rPr sz="2000" i="1"/>
+              <a:t>reference level</a:t>
+            </a:r>
+            <a:r>
+              <a:rPr sz="2000"/>
+              <a:t>.</a:t>
             </a:r>
           </a:p>
         </p:txBody>
@@ -4493,11 +5448,8 @@
         <p:spPr>
           <a:xfrm>
             <a:off x="0" y="0"/>
-            <a:ext cx="9144000" cy="602780"/>
+            <a:ext cx="9144000" cy="582780"/>
           </a:xfrm>
-          <a:solidFill>
-            <a:srgbClr val="1A1A2E"/>
-          </a:solidFill>
         </p:spPr>
         <p:txBody>
           <a:bodyPr/>
@@ -4508,7 +5460,7 @@
             </a:pPr>
             <a:r>
               <a:rPr/>
-              <a:t>Fit the Model</a:t>
+              <a:t>🛑 Pause — Do Activity Parts 1–4 Now</a:t>
             </a:r>
           </a:p>
         </p:txBody>
@@ -4520,7 +5472,7 @@
             <a:spLocks noGrp="1"/>
           </p:cNvSpPr>
           <p:nvPr>
-            <p:ph idx="1" sz="half"/>
+            <p:ph idx="1"/>
           </p:nvPr>
         </p:nvSpPr>
         <p:spPr/>
@@ -4528,226 +5480,22 @@
           <a:bodyPr/>
           <a:lstStyle/>
           <a:p>
-            <a:pPr lvl="0" indent="0">
-              <a:buNone/>
-            </a:pPr>
-            <a:r>
-              <a:rPr>
-                <a:solidFill>
-                  <a:srgbClr val="5E5E5E"/>
-                </a:solidFill>
-                <a:latin typeface="Courier"/>
-              </a:rPr>
-              <a:t># ANOVA is a linear model with a categorical X ---------</a:t>
-            </a:r>
-            <a:br/>
-            <a:r>
-              <a:rPr>
-                <a:solidFill>
-                  <a:srgbClr val="003B4F"/>
-                </a:solidFill>
-                <a:latin typeface="Courier"/>
-              </a:rPr>
-              <a:t>mass_model &lt;- </a:t>
-            </a:r>
-            <a:r>
-              <a:rPr>
-                <a:solidFill>
-                  <a:srgbClr val="4758AB"/>
-                </a:solidFill>
-                <a:latin typeface="Courier"/>
-              </a:rPr>
-              <a:t>lm</a:t>
-            </a:r>
-            <a:r>
-              <a:rPr>
-                <a:solidFill>
-                  <a:srgbClr val="003B4F"/>
-                </a:solidFill>
-                <a:latin typeface="Courier"/>
-              </a:rPr>
-              <a:t>(body_mass_g </a:t>
-            </a:r>
-            <a:r>
-              <a:rPr>
-                <a:solidFill>
-                  <a:srgbClr val="5E5E5E"/>
-                </a:solidFill>
-                <a:latin typeface="Courier"/>
-              </a:rPr>
-              <a:t>~</a:t>
-            </a:r>
-            <a:r>
-              <a:rPr>
-                <a:solidFill>
-                  <a:srgbClr val="003B4F"/>
-                </a:solidFill>
-                <a:latin typeface="Courier"/>
-              </a:rPr>
-              <a:t> species, </a:t>
-            </a:r>
-            <a:r>
-              <a:rPr>
-                <a:solidFill>
-                  <a:srgbClr val="657422"/>
-                </a:solidFill>
-                <a:latin typeface="Courier"/>
-              </a:rPr>
-              <a:t>data =</a:t>
-            </a:r>
-            <a:r>
-              <a:rPr>
-                <a:solidFill>
-                  <a:srgbClr val="003B4F"/>
-                </a:solidFill>
-                <a:latin typeface="Courier"/>
-              </a:rPr>
-              <a:t> penguins_df)</a:t>
-            </a:r>
-          </a:p>
-          <a:p>
-            <a:pPr lvl="0"/>
-            <a:r>
-              <a:rPr>
-                <a:latin typeface="Courier"/>
-              </a:rPr>
-              <a:t>lm(Y ~ X)</a:t>
-            </a:r>
-            <a:r>
-              <a:rPr/>
-              <a:t> — the </a:t>
-            </a:r>
-            <a:r>
-              <a:rPr i="1"/>
-              <a:t>same</a:t>
-            </a:r>
-            <a:r>
-              <a:rPr/>
-              <a:t> syntax as regression (Lecture 11)</a:t>
-            </a:r>
-          </a:p>
-          <a:p>
-            <a:pPr lvl="0"/>
-            <a:r>
-              <a:rPr/>
-              <a:t>When </a:t>
-            </a:r>
-            <a:r>
-              <a:rPr>
-                <a:latin typeface="Courier"/>
-              </a:rPr>
-              <a:t>X</a:t>
-            </a:r>
-            <a:r>
-              <a:rPr/>
-              <a:t> is </a:t>
-            </a:r>
-            <a:r>
-              <a:rPr b="1"/>
-              <a:t>categorical</a:t>
-            </a:r>
-            <a:r>
-              <a:rPr/>
-              <a:t>, that linear model </a:t>
-            </a:r>
-            <a:r>
-              <a:rPr i="1"/>
-              <a:t>is</a:t>
-            </a:r>
-            <a:r>
-              <a:rPr/>
-              <a:t> a one-way ANOVA</a:t>
-            </a:r>
-          </a:p>
-          <a:p>
-            <a:pPr lvl="0"/>
-            <a:r>
-              <a:rPr/>
-              <a:t>We check assumptions on this model </a:t>
-            </a:r>
-            <a:r>
-              <a:rPr b="1"/>
-              <a:t>before</a:t>
-            </a:r>
-            <a:r>
-              <a:rPr/>
-              <a:t> reading any </a:t>
-            </a:r>
-            <a:r>
-              <a:rPr i="1"/>
-              <a:t>p</a:t>
-            </a:r>
-            <a:r>
-              <a:rPr/>
-              <a:t>-value</a:t>
-            </a:r>
-          </a:p>
-        </p:txBody>
-      </p:sp>
-      <p:sp>
-        <p:nvSpPr>
-          <p:cNvPr id="4" name="Content Placeholder 3"/>
-          <p:cNvSpPr>
-            <a:spLocks noGrp="1"/>
-          </p:cNvSpPr>
-          <p:nvPr>
-            <p:ph idx="2" sz="half"/>
-          </p:nvPr>
-        </p:nvSpPr>
-        <p:spPr/>
-        <p:txBody>
-          <a:bodyPr/>
-          <a:lstStyle/>
-          <a:p>
-            <a:pPr lvl="0" indent="0" marL="1270000">
-              <a:buNone/>
-            </a:pPr>
-            <a:r>
-              <a:rPr sz="2000" b="1"/>
-              <a:t>Note</a:t>
-            </a:r>
-          </a:p>
-          <a:p>
-            <a:pPr lvl="0" indent="0" marL="1270000">
-              <a:buNone/>
-            </a:pPr>
-            <a:r>
-              <a:rPr sz="2000" b="1"/>
-              <a:t>✅ Key idea</a:t>
-            </a:r>
-          </a:p>
-          <a:p>
-            <a:pPr lvl="0" indent="0" marL="1270000">
-              <a:buNone/>
-            </a:pPr>
-            <a:r>
-              <a:rPr sz="2000">
-                <a:latin typeface="Courier"/>
-              </a:rPr>
-              <a:t>lm(body_mass_g ~ species)</a:t>
-            </a:r>
-            <a:r>
-              <a:rPr sz="2000"/>
-              <a:t> is the exact same function call you used for a numeric predictor in Lecture 11 — only </a:t>
-            </a:r>
-            <a:r>
-              <a:rPr sz="2000">
-                <a:latin typeface="Courier"/>
-              </a:rPr>
-              <a:t>species</a:t>
-            </a:r>
-            <a:r>
-              <a:rPr sz="2000"/>
-              <a:t> is categorical this time. R handles the encoding automatically; you don’t write anything differently to get an ANOVA instead of a regression.</a:t>
-            </a:r>
-          </a:p>
-          <a:p>
             <a:pPr lvl="0" indent="0" marL="0">
               <a:buNone/>
             </a:pPr>
             <a:r>
               <a:rPr/>
-              <a:t>📖 W&amp;S §15.2</a:t>
+              <a:t>Load the penguins, plot body mass by species, reorder the boxplot with </a:t>
+            </a:r>
+            <a:r>
+              <a:rPr>
+                <a:latin typeface="Courier"/>
+              </a:rPr>
+              <a:t>fct_reorder()</a:t>
+            </a:r>
+            <a:r>
+              <a:rPr/>
+              <a:t>, and write your hypotheses. Predict which species differ before you run anything.</a:t>
             </a:r>
           </a:p>
         </p:txBody>
@@ -4799,7 +5547,7 @@
             </a:pPr>
             <a:r>
               <a:rPr/>
-              <a:t>Assumption 1 — Normality of the Residuals</a:t>
+              <a:t>🧩 Chunk 2 of 2 · Fit the Model &amp; Check Assumptions</a:t>
             </a:r>
           </a:p>
         </p:txBody>
@@ -4819,12 +5567,25 @@
           <a:bodyPr/>
           <a:lstStyle/>
           <a:p>
+            <a:pPr lvl="0" indent="0" marL="0">
+              <a:buNone/>
+            </a:pPr>
+            <a:r>
+              <a:rPr b="1"/>
+              <a:t>We will cover:</a:t>
+            </a:r>
+            <a:r>
+              <a:rPr/>
+              <a:t> fitting the model, then checking normality of the residuals and equal variance across groups.</a:t>
+            </a:r>
+          </a:p>
+          <a:p>
             <a:pPr lvl="0" indent="0" marL="1270000">
               <a:buNone/>
             </a:pPr>
             <a:r>
               <a:rPr sz="2000" b="1"/>
-              <a:t>Note</a:t>
+              <a:t>Tip</a:t>
             </a:r>
           </a:p>
           <a:p>
@@ -4833,21 +5594,11 @@
             </a:pPr>
             <a:r>
               <a:rPr sz="2000" b="1"/>
-              <a:t>🔮 Predict first:</a:t>
+              <a:t>🖐 After this chunk: Activity Parts 5–8</a:t>
             </a:r>
             <a:r>
               <a:rPr sz="2000"/>
-              <a:t> </a:t>
-            </a:r>
-            <a:r>
-              <a:rPr sz="2000">
-                <a:latin typeface="Courier"/>
-              </a:rPr>
-              <a:t>plot(mass_model)</a:t>
-            </a:r>
-            <a:r>
-              <a:rPr sz="2000"/>
-              <a:t> gives the same four panels you saw in the regression lecture. With ~340 penguins instead of 118 near-perfect paper squares, do you expect the Normal Q-Q panel to track the line as tightly?</a:t>
+              <a:t> (fit, set the reference level, QQ + Shapiro on residuals, Levene’s test).</a:t>
             </a:r>
           </a:p>
         </p:txBody>
@@ -4858,6 +5609,827 @@
 </file>
 
 <file path=ppt/slides/slide16.xml><?xml version="1.0" encoding="utf-8"?>
+<p:sld xmlns:a="http://schemas.openxmlformats.org/drawingml/2006/main" xmlns:r="http://schemas.openxmlformats.org/officeDocument/2006/relationships" xmlns:p="http://schemas.openxmlformats.org/presentationml/2006/main">
+  <p:cSld>
+    <p:spTree>
+      <p:nvGrpSpPr>
+        <p:cNvPr id="1" name=""/>
+        <p:cNvGrpSpPr/>
+        <p:nvPr/>
+      </p:nvGrpSpPr>
+      <p:grpSpPr>
+        <a:xfrm>
+          <a:off x="0" y="0"/>
+          <a:ext cx="0" cy="0"/>
+          <a:chOff x="0" y="0"/>
+          <a:chExt cx="0" cy="0"/>
+        </a:xfrm>
+      </p:grpSpPr>
+      <p:sp>
+        <p:nvSpPr>
+          <p:cNvPr id="2" name="Title 1"/>
+          <p:cNvSpPr>
+            <a:spLocks noGrp="1"/>
+          </p:cNvSpPr>
+          <p:nvPr>
+            <p:ph type="title"/>
+          </p:nvPr>
+        </p:nvSpPr>
+        <p:spPr>
+          <a:xfrm>
+            <a:off x="0" y="0"/>
+            <a:ext cx="9144000" cy="602780"/>
+          </a:xfrm>
+          <a:solidFill>
+            <a:srgbClr val="1A1A2E"/>
+          </a:solidFill>
+        </p:spPr>
+        <p:txBody>
+          <a:bodyPr/>
+          <a:lstStyle/>
+          <a:p>
+            <a:pPr lvl="0" indent="0" marL="0">
+              <a:buNone/>
+            </a:pPr>
+            <a:r>
+              <a:rPr/>
+              <a:t>Fit the Model</a:t>
+            </a:r>
+          </a:p>
+        </p:txBody>
+      </p:sp>
+      <p:sp>
+        <p:nvSpPr>
+          <p:cNvPr id="3" name="Content Placeholder 2"/>
+          <p:cNvSpPr>
+            <a:spLocks noGrp="1"/>
+          </p:cNvSpPr>
+          <p:nvPr>
+            <p:ph idx="1" sz="half"/>
+          </p:nvPr>
+        </p:nvSpPr>
+        <p:spPr/>
+        <p:txBody>
+          <a:bodyPr/>
+          <a:lstStyle/>
+          <a:p>
+            <a:pPr lvl="0" indent="0">
+              <a:buNone/>
+            </a:pPr>
+            <a:r>
+              <a:rPr>
+                <a:solidFill>
+                  <a:srgbClr val="5E5E5E"/>
+                </a:solidFill>
+                <a:latin typeface="Courier"/>
+              </a:rPr>
+              <a:t># ANOVA is a linear model with a categorical X ---------</a:t>
+            </a:r>
+            <a:br/>
+            <a:r>
+              <a:rPr>
+                <a:solidFill>
+                  <a:srgbClr val="003B4F"/>
+                </a:solidFill>
+                <a:latin typeface="Courier"/>
+              </a:rPr>
+              <a:t>mass_model &lt;- </a:t>
+            </a:r>
+            <a:r>
+              <a:rPr>
+                <a:solidFill>
+                  <a:srgbClr val="4758AB"/>
+                </a:solidFill>
+                <a:latin typeface="Courier"/>
+              </a:rPr>
+              <a:t>lm</a:t>
+            </a:r>
+            <a:r>
+              <a:rPr>
+                <a:solidFill>
+                  <a:srgbClr val="003B4F"/>
+                </a:solidFill>
+                <a:latin typeface="Courier"/>
+              </a:rPr>
+              <a:t>(body_mass_g </a:t>
+            </a:r>
+            <a:r>
+              <a:rPr>
+                <a:solidFill>
+                  <a:srgbClr val="5E5E5E"/>
+                </a:solidFill>
+                <a:latin typeface="Courier"/>
+              </a:rPr>
+              <a:t>~</a:t>
+            </a:r>
+            <a:r>
+              <a:rPr>
+                <a:solidFill>
+                  <a:srgbClr val="003B4F"/>
+                </a:solidFill>
+                <a:latin typeface="Courier"/>
+              </a:rPr>
+              <a:t> species, </a:t>
+            </a:r>
+            <a:r>
+              <a:rPr>
+                <a:solidFill>
+                  <a:srgbClr val="657422"/>
+                </a:solidFill>
+                <a:latin typeface="Courier"/>
+              </a:rPr>
+              <a:t>data =</a:t>
+            </a:r>
+            <a:r>
+              <a:rPr>
+                <a:solidFill>
+                  <a:srgbClr val="003B4F"/>
+                </a:solidFill>
+                <a:latin typeface="Courier"/>
+              </a:rPr>
+              <a:t> penguins_df)</a:t>
+            </a:r>
+          </a:p>
+          <a:p>
+            <a:pPr lvl="0"/>
+            <a:r>
+              <a:rPr>
+                <a:latin typeface="Courier"/>
+              </a:rPr>
+              <a:t>lm(Y ~ X)</a:t>
+            </a:r>
+            <a:r>
+              <a:rPr/>
+              <a:t> — the </a:t>
+            </a:r>
+            <a:r>
+              <a:rPr i="1"/>
+              <a:t>same</a:t>
+            </a:r>
+            <a:r>
+              <a:rPr/>
+              <a:t> syntax as regression (Lecture 11)</a:t>
+            </a:r>
+          </a:p>
+          <a:p>
+            <a:pPr lvl="0"/>
+            <a:r>
+              <a:rPr/>
+              <a:t>When </a:t>
+            </a:r>
+            <a:r>
+              <a:rPr>
+                <a:latin typeface="Courier"/>
+              </a:rPr>
+              <a:t>X</a:t>
+            </a:r>
+            <a:r>
+              <a:rPr/>
+              <a:t> is </a:t>
+            </a:r>
+            <a:r>
+              <a:rPr b="1"/>
+              <a:t>categorical</a:t>
+            </a:r>
+            <a:r>
+              <a:rPr/>
+              <a:t>, that linear model </a:t>
+            </a:r>
+            <a:r>
+              <a:rPr i="1"/>
+              <a:t>is</a:t>
+            </a:r>
+            <a:r>
+              <a:rPr/>
+              <a:t> a one-way ANOVA</a:t>
+            </a:r>
+          </a:p>
+          <a:p>
+            <a:pPr lvl="0"/>
+            <a:r>
+              <a:rPr/>
+              <a:t>We check assumptions on this model </a:t>
+            </a:r>
+            <a:r>
+              <a:rPr b="1"/>
+              <a:t>before</a:t>
+            </a:r>
+            <a:r>
+              <a:rPr/>
+              <a:t> reading any </a:t>
+            </a:r>
+            <a:r>
+              <a:rPr i="1"/>
+              <a:t>p</a:t>
+            </a:r>
+            <a:r>
+              <a:rPr/>
+              <a:t>-value</a:t>
+            </a:r>
+          </a:p>
+        </p:txBody>
+      </p:sp>
+      <p:sp>
+        <p:nvSpPr>
+          <p:cNvPr id="4" name="Content Placeholder 3"/>
+          <p:cNvSpPr>
+            <a:spLocks noGrp="1"/>
+          </p:cNvSpPr>
+          <p:nvPr>
+            <p:ph idx="2" sz="half"/>
+          </p:nvPr>
+        </p:nvSpPr>
+        <p:spPr/>
+        <p:txBody>
+          <a:bodyPr/>
+          <a:lstStyle/>
+          <a:p>
+            <a:pPr lvl="0" indent="0" marL="1270000">
+              <a:buNone/>
+            </a:pPr>
+            <a:r>
+              <a:rPr sz="2000" b="1"/>
+              <a:t>Note</a:t>
+            </a:r>
+          </a:p>
+          <a:p>
+            <a:pPr lvl="0" indent="0" marL="1270000">
+              <a:buNone/>
+            </a:pPr>
+            <a:r>
+              <a:rPr sz="2000" b="1"/>
+              <a:t>✅ Key idea</a:t>
+            </a:r>
+          </a:p>
+          <a:p>
+            <a:pPr lvl="0" indent="0" marL="1270000">
+              <a:buNone/>
+            </a:pPr>
+            <a:r>
+              <a:rPr sz="2000">
+                <a:latin typeface="Courier"/>
+              </a:rPr>
+              <a:t>lm(body_mass_g ~ species)</a:t>
+            </a:r>
+            <a:r>
+              <a:rPr sz="2000"/>
+              <a:t> is the exact same function call you used for a numeric predictor in Lecture 11 — only </a:t>
+            </a:r>
+            <a:r>
+              <a:rPr sz="2000">
+                <a:latin typeface="Courier"/>
+              </a:rPr>
+              <a:t>species</a:t>
+            </a:r>
+            <a:r>
+              <a:rPr sz="2000"/>
+              <a:t> is categorical this time. R handles the encoding automatically; you don’t write anything differently to get an ANOVA instead of a regression.</a:t>
+            </a:r>
+          </a:p>
+          <a:p>
+            <a:pPr lvl="0" indent="0" marL="0">
+              <a:buNone/>
+            </a:pPr>
+            <a:r>
+              <a:rPr/>
+              <a:t>📖 W&amp;S §15.2</a:t>
+            </a:r>
+          </a:p>
+        </p:txBody>
+      </p:sp>
+    </p:spTree>
+  </p:cSld>
+</p:sld>
+</file>
+
+<file path=ppt/slides/slide17.xml><?xml version="1.0" encoding="utf-8"?>
+<p:sld xmlns:a="http://schemas.openxmlformats.org/drawingml/2006/main" xmlns:r="http://schemas.openxmlformats.org/officeDocument/2006/relationships" xmlns:p="http://schemas.openxmlformats.org/presentationml/2006/main">
+  <p:cSld>
+    <p:spTree>
+      <p:nvGrpSpPr>
+        <p:cNvPr id="1" name=""/>
+        <p:cNvGrpSpPr/>
+        <p:nvPr/>
+      </p:nvGrpSpPr>
+      <p:grpSpPr>
+        <a:xfrm>
+          <a:off x="0" y="0"/>
+          <a:ext cx="0" cy="0"/>
+          <a:chOff x="0" y="0"/>
+          <a:chExt cx="0" cy="0"/>
+        </a:xfrm>
+      </p:grpSpPr>
+      <p:sp>
+        <p:nvSpPr>
+          <p:cNvPr id="2" name="Title 1"/>
+          <p:cNvSpPr>
+            <a:spLocks noGrp="1"/>
+          </p:cNvSpPr>
+          <p:nvPr>
+            <p:ph type="title"/>
+          </p:nvPr>
+        </p:nvSpPr>
+        <p:spPr>
+          <a:xfrm>
+            <a:off x="0" y="0"/>
+            <a:ext cx="9144000" cy="602780"/>
+          </a:xfrm>
+          <a:solidFill>
+            <a:srgbClr val="1A1A2E"/>
+          </a:solidFill>
+        </p:spPr>
+        <p:txBody>
+          <a:bodyPr/>
+          <a:lstStyle/>
+          <a:p>
+            <a:pPr lvl="0" indent="0" marL="0">
+              <a:buNone/>
+            </a:pPr>
+            <a:r>
+              <a:rPr/>
+              <a:t>Which Group Is the Baseline? — </a:t>
+            </a:r>
+            <a:r>
+              <a:rPr>
+                <a:latin typeface="Courier"/>
+              </a:rPr>
+              <a:t>fct_relevel()</a:t>
+            </a:r>
+          </a:p>
+        </p:txBody>
+      </p:sp>
+      <p:sp>
+        <p:nvSpPr>
+          <p:cNvPr id="3" name="Content Placeholder 2"/>
+          <p:cNvSpPr>
+            <a:spLocks noGrp="1"/>
+          </p:cNvSpPr>
+          <p:nvPr>
+            <p:ph idx="1" sz="half"/>
+          </p:nvPr>
+        </p:nvSpPr>
+        <p:spPr/>
+        <p:txBody>
+          <a:bodyPr/>
+          <a:lstStyle/>
+          <a:p>
+            <a:pPr lvl="0" indent="0">
+              <a:buNone/>
+            </a:pPr>
+            <a:r>
+              <a:rPr>
+                <a:solidFill>
+                  <a:srgbClr val="5E5E5E"/>
+                </a:solidFill>
+                <a:latin typeface="Courier"/>
+              </a:rPr>
+              <a:t># The (Intercept) is the FIRST level = Adelie ---------</a:t>
+            </a:r>
+            <a:br/>
+            <a:r>
+              <a:rPr>
+                <a:solidFill>
+                  <a:srgbClr val="4758AB"/>
+                </a:solidFill>
+                <a:latin typeface="Courier"/>
+              </a:rPr>
+              <a:t>coef</a:t>
+            </a:r>
+            <a:r>
+              <a:rPr>
+                <a:solidFill>
+                  <a:srgbClr val="003B4F"/>
+                </a:solidFill>
+                <a:latin typeface="Courier"/>
+              </a:rPr>
+              <a:t>(mass_model)</a:t>
+            </a:r>
+          </a:p>
+          <a:p>
+            <a:pPr lvl="0" indent="0">
+              <a:buNone/>
+            </a:pPr>
+            <a:r>
+              <a:rPr>
+                <a:latin typeface="Courier"/>
+              </a:rPr>
+              <a:t>     (Intercept) speciesChinstrap    speciesGentoo 
+      3700.66225         32.42598       1375.35401 </a:t>
+            </a:r>
+          </a:p>
+          <a:p>
+            <a:pPr lvl="0" indent="0">
+              <a:buNone/>
+            </a:pPr>
+            <a:r>
+              <a:rPr>
+                <a:solidFill>
+                  <a:srgbClr val="5E5E5E"/>
+                </a:solidFill>
+                <a:latin typeface="Courier"/>
+              </a:rPr>
+              <a:t># Make Gentoo the reference instead --------------------</a:t>
+            </a:r>
+            <a:br/>
+            <a:r>
+              <a:rPr>
+                <a:solidFill>
+                  <a:srgbClr val="003B4F"/>
+                </a:solidFill>
+                <a:latin typeface="Courier"/>
+              </a:rPr>
+              <a:t>penguins_relevel &lt;- penguins_df </a:t>
+            </a:r>
+            <a:r>
+              <a:rPr>
+                <a:solidFill>
+                  <a:srgbClr val="5E5E5E"/>
+                </a:solidFill>
+                <a:latin typeface="Courier"/>
+              </a:rPr>
+              <a:t>%&gt;%</a:t>
+            </a:r>
+            <a:br/>
+            <a:r>
+              <a:rPr>
+                <a:solidFill>
+                  <a:srgbClr val="003B4F"/>
+                </a:solidFill>
+                <a:latin typeface="Courier"/>
+              </a:rPr>
+              <a:t>  </a:t>
+            </a:r>
+            <a:r>
+              <a:rPr>
+                <a:solidFill>
+                  <a:srgbClr val="4758AB"/>
+                </a:solidFill>
+                <a:latin typeface="Courier"/>
+              </a:rPr>
+              <a:t>mutate</a:t>
+            </a:r>
+            <a:r>
+              <a:rPr>
+                <a:solidFill>
+                  <a:srgbClr val="003B4F"/>
+                </a:solidFill>
+                <a:latin typeface="Courier"/>
+              </a:rPr>
+              <a:t>(</a:t>
+            </a:r>
+            <a:r>
+              <a:rPr>
+                <a:solidFill>
+                  <a:srgbClr val="657422"/>
+                </a:solidFill>
+                <a:latin typeface="Courier"/>
+              </a:rPr>
+              <a:t>species =</a:t>
+            </a:r>
+            <a:r>
+              <a:rPr>
+                <a:solidFill>
+                  <a:srgbClr val="003B4F"/>
+                </a:solidFill>
+                <a:latin typeface="Courier"/>
+              </a:rPr>
+              <a:t> </a:t>
+            </a:r>
+            <a:r>
+              <a:rPr>
+                <a:solidFill>
+                  <a:srgbClr val="4758AB"/>
+                </a:solidFill>
+                <a:latin typeface="Courier"/>
+              </a:rPr>
+              <a:t>fct_relevel</a:t>
+            </a:r>
+            <a:r>
+              <a:rPr>
+                <a:solidFill>
+                  <a:srgbClr val="003B4F"/>
+                </a:solidFill>
+                <a:latin typeface="Courier"/>
+              </a:rPr>
+              <a:t>(species, </a:t>
+            </a:r>
+            <a:r>
+              <a:rPr>
+                <a:solidFill>
+                  <a:srgbClr val="20794D"/>
+                </a:solidFill>
+                <a:latin typeface="Courier"/>
+              </a:rPr>
+              <a:t>"Gentoo"</a:t>
+            </a:r>
+            <a:r>
+              <a:rPr>
+                <a:solidFill>
+                  <a:srgbClr val="003B4F"/>
+                </a:solidFill>
+                <a:latin typeface="Courier"/>
+              </a:rPr>
+              <a:t>))</a:t>
+            </a:r>
+            <a:br/>
+            <a:br/>
+            <a:r>
+              <a:rPr>
+                <a:solidFill>
+                  <a:srgbClr val="4758AB"/>
+                </a:solidFill>
+                <a:latin typeface="Courier"/>
+              </a:rPr>
+              <a:t>coef</a:t>
+            </a:r>
+            <a:r>
+              <a:rPr>
+                <a:solidFill>
+                  <a:srgbClr val="003B4F"/>
+                </a:solidFill>
+                <a:latin typeface="Courier"/>
+              </a:rPr>
+              <a:t>(</a:t>
+            </a:r>
+            <a:r>
+              <a:rPr>
+                <a:solidFill>
+                  <a:srgbClr val="4758AB"/>
+                </a:solidFill>
+                <a:latin typeface="Courier"/>
+              </a:rPr>
+              <a:t>lm</a:t>
+            </a:r>
+            <a:r>
+              <a:rPr>
+                <a:solidFill>
+                  <a:srgbClr val="003B4F"/>
+                </a:solidFill>
+                <a:latin typeface="Courier"/>
+              </a:rPr>
+              <a:t>(body_mass_g </a:t>
+            </a:r>
+            <a:r>
+              <a:rPr>
+                <a:solidFill>
+                  <a:srgbClr val="5E5E5E"/>
+                </a:solidFill>
+                <a:latin typeface="Courier"/>
+              </a:rPr>
+              <a:t>~</a:t>
+            </a:r>
+            <a:r>
+              <a:rPr>
+                <a:solidFill>
+                  <a:srgbClr val="003B4F"/>
+                </a:solidFill>
+                <a:latin typeface="Courier"/>
+              </a:rPr>
+              <a:t> species, </a:t>
+            </a:r>
+            <a:r>
+              <a:rPr>
+                <a:solidFill>
+                  <a:srgbClr val="657422"/>
+                </a:solidFill>
+                <a:latin typeface="Courier"/>
+              </a:rPr>
+              <a:t>data =</a:t>
+            </a:r>
+            <a:r>
+              <a:rPr>
+                <a:solidFill>
+                  <a:srgbClr val="003B4F"/>
+                </a:solidFill>
+                <a:latin typeface="Courier"/>
+              </a:rPr>
+              <a:t> penguins_relevel))</a:t>
+            </a:r>
+          </a:p>
+          <a:p>
+            <a:pPr lvl="0" indent="0">
+              <a:buNone/>
+            </a:pPr>
+            <a:r>
+              <a:rPr>
+                <a:latin typeface="Courier"/>
+              </a:rPr>
+              <a:t>     (Intercept)    speciesAdelie speciesChinstrap 
+        5076.016        -1375.354        -1342.928 </a:t>
+            </a:r>
+          </a:p>
+        </p:txBody>
+      </p:sp>
+      <p:sp>
+        <p:nvSpPr>
+          <p:cNvPr id="4" name="Content Placeholder 3"/>
+          <p:cNvSpPr>
+            <a:spLocks noGrp="1"/>
+          </p:cNvSpPr>
+          <p:nvPr>
+            <p:ph idx="2" sz="half"/>
+          </p:nvPr>
+        </p:nvSpPr>
+        <p:spPr/>
+        <p:txBody>
+          <a:bodyPr/>
+          <a:lstStyle/>
+          <a:p>
+            <a:pPr lvl="0"/>
+            <a:r>
+              <a:rPr>
+                <a:latin typeface="Courier"/>
+              </a:rPr>
+              <a:t>lm</a:t>
+            </a:r>
+            <a:r>
+              <a:rPr/>
+              <a:t> picks the </a:t>
+            </a:r>
+            <a:r>
+              <a:rPr b="1"/>
+              <a:t>first factor level</a:t>
+            </a:r>
+            <a:r>
+              <a:rPr/>
+              <a:t> as the baseline; every coefficient is a difference </a:t>
+            </a:r>
+            <a:r>
+              <a:rPr i="1"/>
+              <a:t>from that group</a:t>
+            </a:r>
+          </a:p>
+          <a:p>
+            <a:pPr lvl="0"/>
+            <a:r>
+              <a:rPr>
+                <a:latin typeface="Courier"/>
+              </a:rPr>
+              <a:t>fct_relevel(species, "Gentoo")</a:t>
+            </a:r>
+            <a:r>
+              <a:rPr/>
+              <a:t> moves Gentoo to the front → coefficients are now differences from Gentoo</a:t>
+            </a:r>
+          </a:p>
+          <a:p>
+            <a:pPr lvl="0" indent="0" marL="1270000">
+              <a:buNone/>
+            </a:pPr>
+            <a:r>
+              <a:rPr sz="2000" b="1"/>
+              <a:t>Important</a:t>
+            </a:r>
+          </a:p>
+          <a:p>
+            <a:pPr lvl="0" indent="0" marL="1270000">
+              <a:buNone/>
+            </a:pPr>
+            <a:r>
+              <a:rPr sz="2000"/>
+              <a:t>Releveling changes </a:t>
+            </a:r>
+            <a:r>
+              <a:rPr sz="2000" b="1"/>
+              <a:t>which comparisons the coefficients show</a:t>
+            </a:r>
+            <a:r>
+              <a:rPr sz="2000"/>
+              <a:t>. It does </a:t>
+            </a:r>
+            <a:r>
+              <a:rPr sz="2000" b="1"/>
+              <a:t>not</a:t>
+            </a:r>
+            <a:r>
+              <a:rPr sz="2000"/>
+              <a:t> change the overall </a:t>
+            </a:r>
+            <a:r>
+              <a:rPr sz="2000" b="1"/>
+              <a:t>F</a:t>
+            </a:r>
+            <a:r>
+              <a:rPr sz="2000"/>
+              <a:t> or </a:t>
+            </a:r>
+            <a:r>
+              <a:rPr sz="2000" i="1"/>
+              <a:t>p</a:t>
+            </a:r>
+            <a:r>
+              <a:rPr sz="2000"/>
+              <a:t>-value — the ANOVA question (“do any means differ?”) is the same no matter which group you call the baseline.</a:t>
+            </a:r>
+          </a:p>
+        </p:txBody>
+      </p:sp>
+    </p:spTree>
+  </p:cSld>
+</p:sld>
+</file>
+
+<file path=ppt/slides/slide18.xml><?xml version="1.0" encoding="utf-8"?>
+<p:sld xmlns:a="http://schemas.openxmlformats.org/drawingml/2006/main" xmlns:r="http://schemas.openxmlformats.org/officeDocument/2006/relationships" xmlns:p="http://schemas.openxmlformats.org/presentationml/2006/main">
+  <p:cSld>
+    <p:spTree>
+      <p:nvGrpSpPr>
+        <p:cNvPr id="1" name=""/>
+        <p:cNvGrpSpPr/>
+        <p:nvPr/>
+      </p:nvGrpSpPr>
+      <p:grpSpPr>
+        <a:xfrm>
+          <a:off x="0" y="0"/>
+          <a:ext cx="0" cy="0"/>
+          <a:chOff x="0" y="0"/>
+          <a:chExt cx="0" cy="0"/>
+        </a:xfrm>
+      </p:grpSpPr>
+      <p:sp>
+        <p:nvSpPr>
+          <p:cNvPr id="2" name="Title 1"/>
+          <p:cNvSpPr>
+            <a:spLocks noGrp="1"/>
+          </p:cNvSpPr>
+          <p:nvPr>
+            <p:ph type="title"/>
+          </p:nvPr>
+        </p:nvSpPr>
+        <p:spPr>
+          <a:xfrm>
+            <a:off x="0" y="0"/>
+            <a:ext cx="9144000" cy="582780"/>
+          </a:xfrm>
+        </p:spPr>
+        <p:txBody>
+          <a:bodyPr/>
+          <a:lstStyle/>
+          <a:p>
+            <a:pPr lvl="0" indent="0" marL="0">
+              <a:buNone/>
+            </a:pPr>
+            <a:r>
+              <a:rPr/>
+              <a:t>Assumption 1 — Normality of the Residuals</a:t>
+            </a:r>
+          </a:p>
+        </p:txBody>
+      </p:sp>
+      <p:sp>
+        <p:nvSpPr>
+          <p:cNvPr id="3" name="Content Placeholder 2"/>
+          <p:cNvSpPr>
+            <a:spLocks noGrp="1"/>
+          </p:cNvSpPr>
+          <p:nvPr>
+            <p:ph idx="1"/>
+          </p:nvPr>
+        </p:nvSpPr>
+        <p:spPr/>
+        <p:txBody>
+          <a:bodyPr/>
+          <a:lstStyle/>
+          <a:p>
+            <a:pPr lvl="0" indent="0" marL="1270000">
+              <a:buNone/>
+            </a:pPr>
+            <a:r>
+              <a:rPr sz="2000" b="1"/>
+              <a:t>Note</a:t>
+            </a:r>
+          </a:p>
+          <a:p>
+            <a:pPr lvl="0" indent="0" marL="1270000">
+              <a:buNone/>
+            </a:pPr>
+            <a:r>
+              <a:rPr sz="2000" b="1"/>
+              <a:t>🔮 Predict first:</a:t>
+            </a:r>
+            <a:r>
+              <a:rPr sz="2000"/>
+              <a:t> </a:t>
+            </a:r>
+            <a:r>
+              <a:rPr sz="2000">
+                <a:latin typeface="Courier"/>
+              </a:rPr>
+              <a:t>plot(mass_model)</a:t>
+            </a:r>
+            <a:r>
+              <a:rPr sz="2000"/>
+              <a:t> gives the same four panels you saw in the regression lecture. With ~340 penguins instead of 118 near-perfect paper squares, do you expect the Normal Q-Q panel to track the line as tightly?</a:t>
+            </a:r>
+          </a:p>
+        </p:txBody>
+      </p:sp>
+    </p:spTree>
+  </p:cSld>
+</p:sld>
+</file>
+
+<file path=ppt/slides/slide19.xml><?xml version="1.0" encoding="utf-8"?>
 <p:sld xmlns:a="http://schemas.openxmlformats.org/drawingml/2006/main" xmlns:r="http://schemas.openxmlformats.org/officeDocument/2006/relationships" xmlns:p="http://schemas.openxmlformats.org/presentationml/2006/main">
   <p:cSld>
     <p:spTree>
@@ -5203,508 +6775,6 @@
 </p:sld>
 </file>
 
-<file path=ppt/slides/slide17.xml><?xml version="1.0" encoding="utf-8"?>
-<p:sld xmlns:a="http://schemas.openxmlformats.org/drawingml/2006/main" xmlns:r="http://schemas.openxmlformats.org/officeDocument/2006/relationships" xmlns:p="http://schemas.openxmlformats.org/presentationml/2006/main">
-  <p:cSld>
-    <p:spTree>
-      <p:nvGrpSpPr>
-        <p:cNvPr id="1" name=""/>
-        <p:cNvGrpSpPr/>
-        <p:nvPr/>
-      </p:nvGrpSpPr>
-      <p:grpSpPr>
-        <a:xfrm>
-          <a:off x="0" y="0"/>
-          <a:ext cx="0" cy="0"/>
-          <a:chOff x="0" y="0"/>
-          <a:chExt cx="0" cy="0"/>
-        </a:xfrm>
-      </p:grpSpPr>
-      <p:sp>
-        <p:nvSpPr>
-          <p:cNvPr id="2" name="Title 1"/>
-          <p:cNvSpPr>
-            <a:spLocks noGrp="1"/>
-          </p:cNvSpPr>
-          <p:nvPr>
-            <p:ph type="title"/>
-          </p:nvPr>
-        </p:nvSpPr>
-        <p:spPr>
-          <a:xfrm>
-            <a:off x="0" y="0"/>
-            <a:ext cx="9144000" cy="582780"/>
-          </a:xfrm>
-        </p:spPr>
-        <p:txBody>
-          <a:bodyPr/>
-          <a:lstStyle/>
-          <a:p>
-            <a:pPr lvl="0" indent="0" marL="0">
-              <a:buNone/>
-            </a:pPr>
-            <a:r>
-              <a:rPr/>
-              <a:t>Assumption 2 — Equal Variance (Levene’s Test)</a:t>
-            </a:r>
-          </a:p>
-        </p:txBody>
-      </p:sp>
-      <p:sp>
-        <p:nvSpPr>
-          <p:cNvPr id="3" name="Content Placeholder 2"/>
-          <p:cNvSpPr>
-            <a:spLocks noGrp="1"/>
-          </p:cNvSpPr>
-          <p:nvPr>
-            <p:ph idx="1"/>
-          </p:nvPr>
-        </p:nvSpPr>
-        <p:spPr/>
-        <p:txBody>
-          <a:bodyPr/>
-          <a:lstStyle/>
-          <a:p>
-            <a:pPr lvl="0" indent="0" marL="1270000">
-              <a:buNone/>
-            </a:pPr>
-            <a:r>
-              <a:rPr sz="2000" b="1"/>
-              <a:t>Note</a:t>
-            </a:r>
-          </a:p>
-          <a:p>
-            <a:pPr lvl="0" indent="0" marL="1270000">
-              <a:buNone/>
-            </a:pPr>
-            <a:r>
-              <a:rPr sz="2000" b="1"/>
-              <a:t>🔮 Predict first:</a:t>
-            </a:r>
-            <a:r>
-              <a:rPr sz="2000"/>
-              <a:t> Look back at the boxplot spreads. Predict — will Levene’s test call the variances </a:t>
-            </a:r>
-            <a:r>
-              <a:rPr sz="2000" b="1"/>
-              <a:t>equal</a:t>
-            </a:r>
-            <a:r>
-              <a:rPr sz="2000"/>
-              <a:t> (</a:t>
-            </a:r>
-            <a:r>
-              <a:rPr sz="2000" i="1"/>
-              <a:t>p</a:t>
-            </a:r>
-            <a:r>
-              <a:rPr sz="2000"/>
-              <a:t> &gt; 0.05) or </a:t>
-            </a:r>
-            <a:r>
-              <a:rPr sz="2000" b="1"/>
-              <a:t>unequal</a:t>
-            </a:r>
-            <a:r>
-              <a:rPr sz="2000"/>
-              <a:t>?</a:t>
-            </a:r>
-          </a:p>
-        </p:txBody>
-      </p:sp>
-    </p:spTree>
-  </p:cSld>
-</p:sld>
-</file>
-
-<file path=ppt/slides/slide18.xml><?xml version="1.0" encoding="utf-8"?>
-<p:sld xmlns:a="http://schemas.openxmlformats.org/drawingml/2006/main" xmlns:r="http://schemas.openxmlformats.org/officeDocument/2006/relationships" xmlns:p="http://schemas.openxmlformats.org/presentationml/2006/main">
-  <p:cSld>
-    <p:spTree>
-      <p:nvGrpSpPr>
-        <p:cNvPr id="1" name=""/>
-        <p:cNvGrpSpPr/>
-        <p:nvPr/>
-      </p:nvGrpSpPr>
-      <p:grpSpPr>
-        <a:xfrm>
-          <a:off x="0" y="0"/>
-          <a:ext cx="0" cy="0"/>
-          <a:chOff x="0" y="0"/>
-          <a:chExt cx="0" cy="0"/>
-        </a:xfrm>
-      </p:grpSpPr>
-      <p:sp>
-        <p:nvSpPr>
-          <p:cNvPr id="3" name="Content Placeholder 2"/>
-          <p:cNvSpPr>
-            <a:spLocks noGrp="1"/>
-          </p:cNvSpPr>
-          <p:nvPr>
-            <p:ph idx="1" sz="half"/>
-          </p:nvPr>
-        </p:nvSpPr>
-        <p:spPr/>
-        <p:txBody>
-          <a:bodyPr/>
-          <a:lstStyle/>
-          <a:p>
-            <a:pPr lvl="0" indent="0">
-              <a:buNone/>
-            </a:pPr>
-            <a:r>
-              <a:rPr>
-                <a:solidFill>
-                  <a:srgbClr val="5E5E5E"/>
-                </a:solidFill>
-                <a:latin typeface="Courier"/>
-              </a:rPr>
-              <a:t># Levene's test — H0: all groups have equal variance --</a:t>
-            </a:r>
-            <a:br/>
-            <a:r>
-              <a:rPr>
-                <a:solidFill>
-                  <a:srgbClr val="4758AB"/>
-                </a:solidFill>
-                <a:latin typeface="Courier"/>
-              </a:rPr>
-              <a:t>leveneTest</a:t>
-            </a:r>
-            <a:r>
-              <a:rPr>
-                <a:solidFill>
-                  <a:srgbClr val="003B4F"/>
-                </a:solidFill>
-                <a:latin typeface="Courier"/>
-              </a:rPr>
-              <a:t>(body_mass_g </a:t>
-            </a:r>
-            <a:r>
-              <a:rPr>
-                <a:solidFill>
-                  <a:srgbClr val="5E5E5E"/>
-                </a:solidFill>
-                <a:latin typeface="Courier"/>
-              </a:rPr>
-              <a:t>~</a:t>
-            </a:r>
-            <a:r>
-              <a:rPr>
-                <a:solidFill>
-                  <a:srgbClr val="003B4F"/>
-                </a:solidFill>
-                <a:latin typeface="Courier"/>
-              </a:rPr>
-              <a:t> species, </a:t>
-            </a:r>
-            <a:r>
-              <a:rPr>
-                <a:solidFill>
-                  <a:srgbClr val="657422"/>
-                </a:solidFill>
-                <a:latin typeface="Courier"/>
-              </a:rPr>
-              <a:t>data =</a:t>
-            </a:r>
-            <a:r>
-              <a:rPr>
-                <a:solidFill>
-                  <a:srgbClr val="003B4F"/>
-                </a:solidFill>
-                <a:latin typeface="Courier"/>
-              </a:rPr>
-              <a:t> penguins_df)</a:t>
-            </a:r>
-          </a:p>
-          <a:p>
-            <a:pPr lvl="0" indent="0">
-              <a:buNone/>
-            </a:pPr>
-            <a:r>
-              <a:rPr>
-                <a:latin typeface="Courier"/>
-              </a:rPr>
-              <a:t>Levene's Test for Homogeneity of Variance (center = median)
-       Df F value   Pr(&gt;F)   
-group   2  5.1203 0.006445 **
-      339                    
----
-Signif. codes:  0 '***' 0.001 '**' 0.01 '*' 0.05 '.' 0.1 ' ' 1</a:t>
-            </a:r>
-          </a:p>
-        </p:txBody>
-      </p:sp>
-      <p:sp>
-        <p:nvSpPr>
-          <p:cNvPr id="4" name="Content Placeholder 3"/>
-          <p:cNvSpPr>
-            <a:spLocks noGrp="1"/>
-          </p:cNvSpPr>
-          <p:nvPr>
-            <p:ph idx="2" sz="half"/>
-          </p:nvPr>
-        </p:nvSpPr>
-        <p:spPr/>
-        <p:txBody>
-          <a:bodyPr/>
-          <a:lstStyle/>
-          <a:p>
-            <a:pPr lvl="0"/>
-            <a:r>
-              <a:rPr i="1"/>
-              <a:t>p</a:t>
-            </a:r>
-            <a:r>
-              <a:rPr/>
-              <a:t> &gt; 0.05 → variances similar → classic ANOVA is fine</a:t>
-            </a:r>
-          </a:p>
-          <a:p>
-            <a:pPr lvl="0"/>
-            <a:r>
-              <a:rPr i="1"/>
-              <a:t>p</a:t>
-            </a:r>
-            <a:r>
-              <a:rPr/>
-              <a:t> &lt; 0.05 → variances differ → use </a:t>
-            </a:r>
-            <a:r>
-              <a:rPr b="1"/>
-              <a:t>Welch’s ANOVA</a:t>
-            </a:r>
-            <a:r>
-              <a:rPr/>
-              <a:t>:</a:t>
-            </a:r>
-          </a:p>
-          <a:p>
-            <a:pPr lvl="0" indent="0">
-              <a:buNone/>
-            </a:pPr>
-            <a:r>
-              <a:rPr>
-                <a:solidFill>
-                  <a:srgbClr val="4758AB"/>
-                </a:solidFill>
-                <a:latin typeface="Courier"/>
-              </a:rPr>
-              <a:t>oneway.test</a:t>
-            </a:r>
-            <a:r>
-              <a:rPr>
-                <a:solidFill>
-                  <a:srgbClr val="003B4F"/>
-                </a:solidFill>
-                <a:latin typeface="Courier"/>
-              </a:rPr>
-              <a:t>(body_mass_g </a:t>
-            </a:r>
-            <a:r>
-              <a:rPr>
-                <a:solidFill>
-                  <a:srgbClr val="5E5E5E"/>
-                </a:solidFill>
-                <a:latin typeface="Courier"/>
-              </a:rPr>
-              <a:t>~</a:t>
-            </a:r>
-            <a:r>
-              <a:rPr>
-                <a:solidFill>
-                  <a:srgbClr val="003B4F"/>
-                </a:solidFill>
-                <a:latin typeface="Courier"/>
-              </a:rPr>
-              <a:t> species,</a:t>
-            </a:r>
-            <a:br/>
-            <a:r>
-              <a:rPr>
-                <a:solidFill>
-                  <a:srgbClr val="003B4F"/>
-                </a:solidFill>
-                <a:latin typeface="Courier"/>
-              </a:rPr>
-              <a:t>            </a:t>
-            </a:r>
-            <a:r>
-              <a:rPr>
-                <a:solidFill>
-                  <a:srgbClr val="657422"/>
-                </a:solidFill>
-                <a:latin typeface="Courier"/>
-              </a:rPr>
-              <a:t>data =</a:t>
-            </a:r>
-            <a:r>
-              <a:rPr>
-                <a:solidFill>
-                  <a:srgbClr val="003B4F"/>
-                </a:solidFill>
-                <a:latin typeface="Courier"/>
-              </a:rPr>
-              <a:t> penguins_df,</a:t>
-            </a:r>
-            <a:br/>
-            <a:r>
-              <a:rPr>
-                <a:solidFill>
-                  <a:srgbClr val="003B4F"/>
-                </a:solidFill>
-                <a:latin typeface="Courier"/>
-              </a:rPr>
-              <a:t>            </a:t>
-            </a:r>
-            <a:r>
-              <a:rPr>
-                <a:solidFill>
-                  <a:srgbClr val="657422"/>
-                </a:solidFill>
-                <a:latin typeface="Courier"/>
-              </a:rPr>
-              <a:t>var.equal =</a:t>
-            </a:r>
-            <a:r>
-              <a:rPr>
-                <a:solidFill>
-                  <a:srgbClr val="003B4F"/>
-                </a:solidFill>
-                <a:latin typeface="Courier"/>
-              </a:rPr>
-              <a:t> </a:t>
-            </a:r>
-            <a:r>
-              <a:rPr>
-                <a:solidFill>
-                  <a:srgbClr val="8F5902"/>
-                </a:solidFill>
-                <a:latin typeface="Courier"/>
-              </a:rPr>
-              <a:t>FALSE</a:t>
-            </a:r>
-            <a:r>
-              <a:rPr>
-                <a:solidFill>
-                  <a:srgbClr val="003B4F"/>
-                </a:solidFill>
-                <a:latin typeface="Courier"/>
-              </a:rPr>
-              <a:t>)</a:t>
-            </a:r>
-          </a:p>
-          <a:p>
-            <a:pPr lvl="0" indent="0" marL="0">
-              <a:buNone/>
-            </a:pPr>
-            <a:r>
-              <a:rPr/>
-              <a:t>Same spirit as Welch’s </a:t>
-            </a:r>
-            <a:r>
-              <a:rPr b="1"/>
-              <a:t>t</a:t>
-            </a:r>
-            <a:r>
-              <a:rPr/>
-              <a:t>-test — robust when spreads differ.</a:t>
-            </a:r>
-          </a:p>
-        </p:txBody>
-      </p:sp>
-    </p:spTree>
-  </p:cSld>
-</p:sld>
-</file>
-
-<file path=ppt/slides/slide19.xml><?xml version="1.0" encoding="utf-8"?>
-<p:sld xmlns:a="http://schemas.openxmlformats.org/drawingml/2006/main" xmlns:r="http://schemas.openxmlformats.org/officeDocument/2006/relationships" xmlns:p="http://schemas.openxmlformats.org/presentationml/2006/main">
-  <p:cSld>
-    <p:spTree>
-      <p:nvGrpSpPr>
-        <p:cNvPr id="1" name=""/>
-        <p:cNvGrpSpPr/>
-        <p:nvPr/>
-      </p:nvGrpSpPr>
-      <p:grpSpPr>
-        <a:xfrm>
-          <a:off x="0" y="0"/>
-          <a:ext cx="0" cy="0"/>
-          <a:chOff x="0" y="0"/>
-          <a:chExt cx="0" cy="0"/>
-        </a:xfrm>
-      </p:grpSpPr>
-      <p:sp>
-        <p:nvSpPr>
-          <p:cNvPr id="2" name="Title 1"/>
-          <p:cNvSpPr>
-            <a:spLocks noGrp="1"/>
-          </p:cNvSpPr>
-          <p:nvPr>
-            <p:ph type="title"/>
-          </p:nvPr>
-        </p:nvSpPr>
-        <p:spPr>
-          <a:xfrm>
-            <a:off x="0" y="0"/>
-            <a:ext cx="9144000" cy="582780"/>
-          </a:xfrm>
-        </p:spPr>
-        <p:txBody>
-          <a:bodyPr/>
-          <a:lstStyle/>
-          <a:p>
-            <a:pPr lvl="0" indent="0" marL="0">
-              <a:buNone/>
-            </a:pPr>
-            <a:r>
-              <a:rPr/>
-              <a:t>🛑 Pause — Do Activity Parts 4–6 Now</a:t>
-            </a:r>
-          </a:p>
-        </p:txBody>
-      </p:sp>
-      <p:sp>
-        <p:nvSpPr>
-          <p:cNvPr id="3" name="Content Placeholder 2"/>
-          <p:cNvSpPr>
-            <a:spLocks noGrp="1"/>
-          </p:cNvSpPr>
-          <p:nvPr>
-            <p:ph idx="1"/>
-          </p:nvPr>
-        </p:nvSpPr>
-        <p:spPr/>
-        <p:txBody>
-          <a:bodyPr/>
-          <a:lstStyle/>
-          <a:p>
-            <a:pPr lvl="0" indent="0" marL="0">
-              <a:buNone/>
-            </a:pPr>
-            <a:r>
-              <a:rPr/>
-              <a:t>Fit </a:t>
-            </a:r>
-            <a:r>
-              <a:rPr>
-                <a:latin typeface="Courier"/>
-              </a:rPr>
-              <a:t>lm(body_mass_g ~ species)</a:t>
-            </a:r>
-            <a:r>
-              <a:rPr/>
-              <a:t>, check the residual QQ plot + Shapiro, and run Levene’s test. Predict each result before you run it.</a:t>
-            </a:r>
-          </a:p>
-        </p:txBody>
-      </p:sp>
-    </p:spTree>
-  </p:cSld>
-</p:sld>
-</file>
-
 <file path=ppt/slides/slide2.xml><?xml version="1.0" encoding="utf-8"?>
 <p:sld xmlns:a="http://schemas.openxmlformats.org/drawingml/2006/main" xmlns:r="http://schemas.openxmlformats.org/officeDocument/2006/relationships" xmlns:p="http://schemas.openxmlformats.org/presentationml/2006/main">
   <p:cSld>
@@ -5933,6 +7003,518 @@
         <p:spPr>
           <a:xfrm>
             <a:off x="0" y="0"/>
+            <a:ext cx="9144000" cy="582780"/>
+          </a:xfrm>
+        </p:spPr>
+        <p:txBody>
+          <a:bodyPr/>
+          <a:lstStyle/>
+          <a:p>
+            <a:pPr lvl="0" indent="0" marL="0">
+              <a:buNone/>
+            </a:pPr>
+            <a:r>
+              <a:rPr/>
+              <a:t>Assumption 2 — Equal Variance (Levene’s Test)</a:t>
+            </a:r>
+          </a:p>
+        </p:txBody>
+      </p:sp>
+      <p:sp>
+        <p:nvSpPr>
+          <p:cNvPr id="3" name="Content Placeholder 2"/>
+          <p:cNvSpPr>
+            <a:spLocks noGrp="1"/>
+          </p:cNvSpPr>
+          <p:nvPr>
+            <p:ph idx="1"/>
+          </p:nvPr>
+        </p:nvSpPr>
+        <p:spPr/>
+        <p:txBody>
+          <a:bodyPr/>
+          <a:lstStyle/>
+          <a:p>
+            <a:pPr lvl="0" indent="0" marL="1270000">
+              <a:buNone/>
+            </a:pPr>
+            <a:r>
+              <a:rPr sz="2000" b="1"/>
+              <a:t>Note</a:t>
+            </a:r>
+          </a:p>
+          <a:p>
+            <a:pPr lvl="0" indent="0" marL="1270000">
+              <a:buNone/>
+            </a:pPr>
+            <a:r>
+              <a:rPr sz="2000" b="1"/>
+              <a:t>🔮 Predict first:</a:t>
+            </a:r>
+            <a:r>
+              <a:rPr sz="2000"/>
+              <a:t> Look back at the boxplot spreads. Predict — will Levene’s test call the variances </a:t>
+            </a:r>
+            <a:r>
+              <a:rPr sz="2000" b="1"/>
+              <a:t>equal</a:t>
+            </a:r>
+            <a:r>
+              <a:rPr sz="2000"/>
+              <a:t> (</a:t>
+            </a:r>
+            <a:r>
+              <a:rPr sz="2000" i="1"/>
+              <a:t>p</a:t>
+            </a:r>
+            <a:r>
+              <a:rPr sz="2000"/>
+              <a:t> &gt; 0.05) or </a:t>
+            </a:r>
+            <a:r>
+              <a:rPr sz="2000" b="1"/>
+              <a:t>unequal</a:t>
+            </a:r>
+            <a:r>
+              <a:rPr sz="2000"/>
+              <a:t>?</a:t>
+            </a:r>
+          </a:p>
+        </p:txBody>
+      </p:sp>
+    </p:spTree>
+  </p:cSld>
+</p:sld>
+</file>
+
+<file path=ppt/slides/slide21.xml><?xml version="1.0" encoding="utf-8"?>
+<p:sld xmlns:a="http://schemas.openxmlformats.org/drawingml/2006/main" xmlns:r="http://schemas.openxmlformats.org/officeDocument/2006/relationships" xmlns:p="http://schemas.openxmlformats.org/presentationml/2006/main">
+  <p:cSld>
+    <p:spTree>
+      <p:nvGrpSpPr>
+        <p:cNvPr id="1" name=""/>
+        <p:cNvGrpSpPr/>
+        <p:nvPr/>
+      </p:nvGrpSpPr>
+      <p:grpSpPr>
+        <a:xfrm>
+          <a:off x="0" y="0"/>
+          <a:ext cx="0" cy="0"/>
+          <a:chOff x="0" y="0"/>
+          <a:chExt cx="0" cy="0"/>
+        </a:xfrm>
+      </p:grpSpPr>
+      <p:sp>
+        <p:nvSpPr>
+          <p:cNvPr id="3" name="Content Placeholder 2"/>
+          <p:cNvSpPr>
+            <a:spLocks noGrp="1"/>
+          </p:cNvSpPr>
+          <p:nvPr>
+            <p:ph idx="1" sz="half"/>
+          </p:nvPr>
+        </p:nvSpPr>
+        <p:spPr/>
+        <p:txBody>
+          <a:bodyPr/>
+          <a:lstStyle/>
+          <a:p>
+            <a:pPr lvl="0" indent="0">
+              <a:buNone/>
+            </a:pPr>
+            <a:r>
+              <a:rPr>
+                <a:solidFill>
+                  <a:srgbClr val="5E5E5E"/>
+                </a:solidFill>
+                <a:latin typeface="Courier"/>
+              </a:rPr>
+              <a:t># Levene's test — H0: all groups have equal variance --</a:t>
+            </a:r>
+            <a:br/>
+            <a:r>
+              <a:rPr>
+                <a:solidFill>
+                  <a:srgbClr val="4758AB"/>
+                </a:solidFill>
+                <a:latin typeface="Courier"/>
+              </a:rPr>
+              <a:t>leveneTest</a:t>
+            </a:r>
+            <a:r>
+              <a:rPr>
+                <a:solidFill>
+                  <a:srgbClr val="003B4F"/>
+                </a:solidFill>
+                <a:latin typeface="Courier"/>
+              </a:rPr>
+              <a:t>(body_mass_g </a:t>
+            </a:r>
+            <a:r>
+              <a:rPr>
+                <a:solidFill>
+                  <a:srgbClr val="5E5E5E"/>
+                </a:solidFill>
+                <a:latin typeface="Courier"/>
+              </a:rPr>
+              <a:t>~</a:t>
+            </a:r>
+            <a:r>
+              <a:rPr>
+                <a:solidFill>
+                  <a:srgbClr val="003B4F"/>
+                </a:solidFill>
+                <a:latin typeface="Courier"/>
+              </a:rPr>
+              <a:t> species, </a:t>
+            </a:r>
+            <a:r>
+              <a:rPr>
+                <a:solidFill>
+                  <a:srgbClr val="657422"/>
+                </a:solidFill>
+                <a:latin typeface="Courier"/>
+              </a:rPr>
+              <a:t>data =</a:t>
+            </a:r>
+            <a:r>
+              <a:rPr>
+                <a:solidFill>
+                  <a:srgbClr val="003B4F"/>
+                </a:solidFill>
+                <a:latin typeface="Courier"/>
+              </a:rPr>
+              <a:t> penguins_df)</a:t>
+            </a:r>
+          </a:p>
+          <a:p>
+            <a:pPr lvl="0" indent="0">
+              <a:buNone/>
+            </a:pPr>
+            <a:r>
+              <a:rPr>
+                <a:latin typeface="Courier"/>
+              </a:rPr>
+              <a:t>Levene's Test for Homogeneity of Variance (center = median)
+       Df F value   Pr(&gt;F)   
+group   2  5.1203 0.006445 **
+      339                    
+---
+Signif. codes:  0 '***' 0.001 '**' 0.01 '*' 0.05 '.' 0.1 ' ' 1</a:t>
+            </a:r>
+          </a:p>
+        </p:txBody>
+      </p:sp>
+      <p:sp>
+        <p:nvSpPr>
+          <p:cNvPr id="4" name="Content Placeholder 3"/>
+          <p:cNvSpPr>
+            <a:spLocks noGrp="1"/>
+          </p:cNvSpPr>
+          <p:nvPr>
+            <p:ph idx="2" sz="half"/>
+          </p:nvPr>
+        </p:nvSpPr>
+        <p:spPr/>
+        <p:txBody>
+          <a:bodyPr/>
+          <a:lstStyle/>
+          <a:p>
+            <a:pPr lvl="0"/>
+            <a:r>
+              <a:rPr i="1"/>
+              <a:t>p</a:t>
+            </a:r>
+            <a:r>
+              <a:rPr/>
+              <a:t> &gt; 0.05 → variances similar → classic ANOVA is fine</a:t>
+            </a:r>
+          </a:p>
+          <a:p>
+            <a:pPr lvl="0"/>
+            <a:r>
+              <a:rPr i="1"/>
+              <a:t>p</a:t>
+            </a:r>
+            <a:r>
+              <a:rPr/>
+              <a:t> &lt; 0.05 → variances differ → use </a:t>
+            </a:r>
+            <a:r>
+              <a:rPr b="1"/>
+              <a:t>Welch’s ANOVA</a:t>
+            </a:r>
+            <a:r>
+              <a:rPr/>
+              <a:t>:</a:t>
+            </a:r>
+          </a:p>
+          <a:p>
+            <a:pPr lvl="0" indent="0">
+              <a:buNone/>
+            </a:pPr>
+            <a:r>
+              <a:rPr>
+                <a:solidFill>
+                  <a:srgbClr val="4758AB"/>
+                </a:solidFill>
+                <a:latin typeface="Courier"/>
+              </a:rPr>
+              <a:t>oneway.test</a:t>
+            </a:r>
+            <a:r>
+              <a:rPr>
+                <a:solidFill>
+                  <a:srgbClr val="003B4F"/>
+                </a:solidFill>
+                <a:latin typeface="Courier"/>
+              </a:rPr>
+              <a:t>(body_mass_g </a:t>
+            </a:r>
+            <a:r>
+              <a:rPr>
+                <a:solidFill>
+                  <a:srgbClr val="5E5E5E"/>
+                </a:solidFill>
+                <a:latin typeface="Courier"/>
+              </a:rPr>
+              <a:t>~</a:t>
+            </a:r>
+            <a:r>
+              <a:rPr>
+                <a:solidFill>
+                  <a:srgbClr val="003B4F"/>
+                </a:solidFill>
+                <a:latin typeface="Courier"/>
+              </a:rPr>
+              <a:t> species,</a:t>
+            </a:r>
+            <a:br/>
+            <a:r>
+              <a:rPr>
+                <a:solidFill>
+                  <a:srgbClr val="003B4F"/>
+                </a:solidFill>
+                <a:latin typeface="Courier"/>
+              </a:rPr>
+              <a:t>            </a:t>
+            </a:r>
+            <a:r>
+              <a:rPr>
+                <a:solidFill>
+                  <a:srgbClr val="657422"/>
+                </a:solidFill>
+                <a:latin typeface="Courier"/>
+              </a:rPr>
+              <a:t>data =</a:t>
+            </a:r>
+            <a:r>
+              <a:rPr>
+                <a:solidFill>
+                  <a:srgbClr val="003B4F"/>
+                </a:solidFill>
+                <a:latin typeface="Courier"/>
+              </a:rPr>
+              <a:t> penguins_df,</a:t>
+            </a:r>
+            <a:br/>
+            <a:r>
+              <a:rPr>
+                <a:solidFill>
+                  <a:srgbClr val="003B4F"/>
+                </a:solidFill>
+                <a:latin typeface="Courier"/>
+              </a:rPr>
+              <a:t>            </a:t>
+            </a:r>
+            <a:r>
+              <a:rPr>
+                <a:solidFill>
+                  <a:srgbClr val="657422"/>
+                </a:solidFill>
+                <a:latin typeface="Courier"/>
+              </a:rPr>
+              <a:t>var.equal =</a:t>
+            </a:r>
+            <a:r>
+              <a:rPr>
+                <a:solidFill>
+                  <a:srgbClr val="003B4F"/>
+                </a:solidFill>
+                <a:latin typeface="Courier"/>
+              </a:rPr>
+              <a:t> </a:t>
+            </a:r>
+            <a:r>
+              <a:rPr>
+                <a:solidFill>
+                  <a:srgbClr val="8F5902"/>
+                </a:solidFill>
+                <a:latin typeface="Courier"/>
+              </a:rPr>
+              <a:t>FALSE</a:t>
+            </a:r>
+            <a:r>
+              <a:rPr>
+                <a:solidFill>
+                  <a:srgbClr val="003B4F"/>
+                </a:solidFill>
+                <a:latin typeface="Courier"/>
+              </a:rPr>
+              <a:t>)</a:t>
+            </a:r>
+          </a:p>
+          <a:p>
+            <a:pPr lvl="0" indent="0" marL="0">
+              <a:buNone/>
+            </a:pPr>
+            <a:r>
+              <a:rPr/>
+              <a:t>Same spirit as Welch’s </a:t>
+            </a:r>
+            <a:r>
+              <a:rPr b="1"/>
+              <a:t>t</a:t>
+            </a:r>
+            <a:r>
+              <a:rPr/>
+              <a:t>-test — robust when spreads differ.</a:t>
+            </a:r>
+          </a:p>
+        </p:txBody>
+      </p:sp>
+    </p:spTree>
+  </p:cSld>
+</p:sld>
+</file>
+
+<file path=ppt/slides/slide22.xml><?xml version="1.0" encoding="utf-8"?>
+<p:sld xmlns:a="http://schemas.openxmlformats.org/drawingml/2006/main" xmlns:r="http://schemas.openxmlformats.org/officeDocument/2006/relationships" xmlns:p="http://schemas.openxmlformats.org/presentationml/2006/main">
+  <p:cSld>
+    <p:spTree>
+      <p:nvGrpSpPr>
+        <p:cNvPr id="1" name=""/>
+        <p:cNvGrpSpPr/>
+        <p:nvPr/>
+      </p:nvGrpSpPr>
+      <p:grpSpPr>
+        <a:xfrm>
+          <a:off x="0" y="0"/>
+          <a:ext cx="0" cy="0"/>
+          <a:chOff x="0" y="0"/>
+          <a:chExt cx="0" cy="0"/>
+        </a:xfrm>
+      </p:grpSpPr>
+      <p:sp>
+        <p:nvSpPr>
+          <p:cNvPr id="2" name="Title 1"/>
+          <p:cNvSpPr>
+            <a:spLocks noGrp="1"/>
+          </p:cNvSpPr>
+          <p:nvPr>
+            <p:ph type="title"/>
+          </p:nvPr>
+        </p:nvSpPr>
+        <p:spPr>
+          <a:xfrm>
+            <a:off x="0" y="0"/>
+            <a:ext cx="9144000" cy="582780"/>
+          </a:xfrm>
+        </p:spPr>
+        <p:txBody>
+          <a:bodyPr/>
+          <a:lstStyle/>
+          <a:p>
+            <a:pPr lvl="0" indent="0" marL="0">
+              <a:buNone/>
+            </a:pPr>
+            <a:r>
+              <a:rPr/>
+              <a:t>🛑 Pause — Do Activity Parts 5–8 Now</a:t>
+            </a:r>
+          </a:p>
+        </p:txBody>
+      </p:sp>
+      <p:sp>
+        <p:nvSpPr>
+          <p:cNvPr id="3" name="Content Placeholder 2"/>
+          <p:cNvSpPr>
+            <a:spLocks noGrp="1"/>
+          </p:cNvSpPr>
+          <p:nvPr>
+            <p:ph idx="1"/>
+          </p:nvPr>
+        </p:nvSpPr>
+        <p:spPr/>
+        <p:txBody>
+          <a:bodyPr/>
+          <a:lstStyle/>
+          <a:p>
+            <a:pPr lvl="0" indent="0" marL="0">
+              <a:buNone/>
+            </a:pPr>
+            <a:r>
+              <a:rPr/>
+              <a:t>Fit </a:t>
+            </a:r>
+            <a:r>
+              <a:rPr>
+                <a:latin typeface="Courier"/>
+              </a:rPr>
+              <a:t>lm(body_mass_g ~ species)</a:t>
+            </a:r>
+            <a:r>
+              <a:rPr/>
+              <a:t>, set the reference level with </a:t>
+            </a:r>
+            <a:r>
+              <a:rPr>
+                <a:latin typeface="Courier"/>
+              </a:rPr>
+              <a:t>fct_relevel()</a:t>
+            </a:r>
+            <a:r>
+              <a:rPr/>
+              <a:t>, check the residual QQ plot + Shapiro, and run Levene’s test. Predict each result before you run it.</a:t>
+            </a:r>
+          </a:p>
+        </p:txBody>
+      </p:sp>
+    </p:spTree>
+  </p:cSld>
+</p:sld>
+</file>
+
+<file path=ppt/slides/slide23.xml><?xml version="1.0" encoding="utf-8"?>
+<p:sld xmlns:a="http://schemas.openxmlformats.org/drawingml/2006/main" xmlns:r="http://schemas.openxmlformats.org/officeDocument/2006/relationships" xmlns:p="http://schemas.openxmlformats.org/presentationml/2006/main">
+  <p:cSld>
+    <p:spTree>
+      <p:nvGrpSpPr>
+        <p:cNvPr id="1" name=""/>
+        <p:cNvGrpSpPr/>
+        <p:nvPr/>
+      </p:nvGrpSpPr>
+      <p:grpSpPr>
+        <a:xfrm>
+          <a:off x="0" y="0"/>
+          <a:ext cx="0" cy="0"/>
+          <a:chOff x="0" y="0"/>
+          <a:chExt cx="0" cy="0"/>
+        </a:xfrm>
+      </p:grpSpPr>
+      <p:sp>
+        <p:nvSpPr>
+          <p:cNvPr id="2" name="Title 1"/>
+          <p:cNvSpPr>
+            <a:spLocks noGrp="1"/>
+          </p:cNvSpPr>
+          <p:nvPr>
+            <p:ph type="title"/>
+          </p:nvPr>
+        </p:nvSpPr>
+        <p:spPr>
+          <a:xfrm>
+            <a:off x="0" y="0"/>
             <a:ext cx="9144000" cy="602780"/>
           </a:xfrm>
           <a:solidFill>
@@ -6002,6 +7584,21 @@
             <a:pPr lvl="0"/>
             <a:r>
               <a:rPr/>
+              <a:t>A </a:t>
+            </a:r>
+            <a:r>
+              <a:rPr b="1"/>
+              <a:t>factor</a:t>
+            </a:r>
+            <a:r>
+              <a:rPr/>
+              <a:t>’s level order sets the plot order and the model baseline</a:t>
+            </a:r>
+          </a:p>
+          <a:p>
+            <a:pPr lvl="0"/>
+            <a:r>
+              <a:rPr/>
               <a:t>ANOVA is a linear model with a categorical predictor — same </a:t>
             </a:r>
             <a:r>
@@ -6053,6 +7650,29 @@
               <a:rPr>
                 <a:latin typeface="Courier"/>
               </a:rPr>
+              <a:t>fct_reorder()</a:t>
+            </a:r>
+            <a:r>
+              <a:rPr/>
+              <a:t> to order groups by the response; </a:t>
+            </a:r>
+            <a:r>
+              <a:rPr>
+                <a:latin typeface="Courier"/>
+              </a:rPr>
+              <a:t>fct_relevel()</a:t>
+            </a:r>
+            <a:r>
+              <a:rPr/>
+              <a:t> to set the baseline</a:t>
+            </a:r>
+          </a:p>
+          <a:p>
+            <a:pPr lvl="0"/>
+            <a:r>
+              <a:rPr>
+                <a:latin typeface="Courier"/>
+              </a:rPr>
               <a:t>lm(Y ~ group)</a:t>
             </a:r>
           </a:p>
@@ -6082,6 +7702,27 @@
                 <a:latin typeface="Courier"/>
               </a:rPr>
               <a:t>leveneTest()</a:t>
+            </a:r>
+          </a:p>
+          <a:p>
+            <a:pPr lvl="0"/>
+            <a:r>
+              <a:rPr/>
+              <a:t>rest of the </a:t>
+            </a:r>
+            <a:r>
+              <a:rPr>
+                <a:latin typeface="Courier"/>
+              </a:rPr>
+              <a:t>fct_*</a:t>
+            </a:r>
+            <a:r>
+              <a:rPr/>
+              <a:t> family → </a:t>
+            </a:r>
+            <a:r>
+              <a:rPr b="1"/>
+              <a:t>Common Code 15 · Factors</a:t>
             </a:r>
           </a:p>
         </p:txBody>
@@ -6330,6 +7971,21 @@
             <a:pPr lvl="0"/>
             <a:r>
               <a:rPr/>
+              <a:t>Use </a:t>
+            </a:r>
+            <a:r>
+              <a:rPr b="1"/>
+              <a:t>factors</a:t>
+            </a:r>
+            <a:r>
+              <a:rPr/>
+              <a:t> to order groups for a readable plot and set the reference level</a:t>
+            </a:r>
+          </a:p>
+          <a:p>
+            <a:pPr lvl="0"/>
+            <a:r>
+              <a:rPr/>
               <a:t>Fit the model with </a:t>
             </a:r>
             <a:r>
@@ -6392,6 +8048,20 @@
                 <a:latin typeface="Courier"/>
               </a:rPr>
               <a:t>tidyverse</a:t>
+            </a:r>
+            <a:r>
+              <a:rPr/>
+              <a:t> (includes </a:t>
+            </a:r>
+            <a:r>
+              <a:rPr>
+                <a:latin typeface="Courier"/>
+              </a:rPr>
+              <a:t>forcats</a:t>
+            </a:r>
+            <a:r>
+              <a:rPr/>
+              <a:t>)</a:t>
             </a:r>
           </a:p>
           <a:p>

--- a/docs/content/one_way_anova/one_way_anova_lecture.pptx
+++ b/docs/content/one_way_anova/one_way_anova_lecture.pptx
@@ -3362,7 +3362,7 @@
             </a:pPr>
             <a:r>
               <a:rPr/>
-              <a:t>2026-08-27</a:t>
+              <a:t>2026-09-01</a:t>
             </a:r>
           </a:p>
         </p:txBody>

--- a/docs/content/one_way_anova/one_way_anova_lecture.pptx
+++ b/docs/content/one_way_anova/one_way_anova_lecture.pptx
@@ -3362,7 +3362,7 @@
             </a:pPr>
             <a:r>
               <a:rPr/>
-              <a:t>2026-09-01</a:t>
+              <a:t>2026-09-03</a:t>
             </a:r>
           </a:p>
         </p:txBody>

--- a/docs/content/one_way_anova/one_way_anova_lecture.pptx
+++ b/docs/content/one_way_anova/one_way_anova_lecture.pptx
@@ -3362,7 +3362,7 @@
             </a:pPr>
             <a:r>
               <a:rPr/>
-              <a:t>2026-09-03</a:t>
+              <a:t>2026-09-04</a:t>
             </a:r>
           </a:p>
         </p:txBody>
